--- a/2. ANALYSIS/Analysis_Module_Overview.pptx
+++ b/2. ANALYSIS/Analysis_Module_Overview.pptx
@@ -7364,7 +7364,7 @@
                 </a:solidFill>
                 <a:latin typeface="Calibri"/>
               </a:rPr>
-              <a:t>     –  requirements.txt for this whole module is one line: openpyxl</a:t>
+              <a:t>     –  Only new package this module needs is openpyxl -- one line in the repo's shared requirements.txt</a:t>
             </a:r>
           </a:p>
           <a:p>

--- a/2. ANALYSIS/Analysis_Module_Overview.pptx
+++ b/2. ANALYSIS/Analysis_Module_Overview.pptx
@@ -19,10 +19,6 @@
     <p:sldId id="267" r:id="rId18"/>
     <p:sldId id="268" r:id="rId19"/>
     <p:sldId id="269" r:id="rId20"/>
-    <p:sldId id="270" r:id="rId21"/>
-    <p:sldId id="271" r:id="rId22"/>
-    <p:sldId id="272" r:id="rId23"/>
-    <p:sldId id="273" r:id="rId24"/>
   </p:sldIdLst>
   <p:sldSz cx="12191695" cy="6858000" type="screen4x3"/>
   <p:notesSz cx="6858000" cy="9144000"/>
@@ -3291,7 +3287,7 @@
                 </a:solidFill>
                 <a:latin typeface="Calibri"/>
               </a:rPr>
-              <a:t>analyze.py  ·  Qwen/Qwen3.5-0.8B tokenizer  ·  openpyxl</a:t>
+              <a:t>Identification  ·  Validation  ·  Root Cause Analysis</a:t>
             </a:r>
           </a:p>
         </p:txBody>
@@ -3305,6 +3301,2614 @@
 </file>
 
 <file path=ppt/slides/slide10.xml><?xml version="1.0" encoding="utf-8"?>
+<p:sld xmlns:a="http://schemas.openxmlformats.org/drawingml/2006/main" xmlns:p="http://schemas.openxmlformats.org/presentationml/2006/main" xmlns:r="http://schemas.openxmlformats.org/officeDocument/2006/relationships">
+  <p:cSld>
+    <p:bg>
+      <p:bgPr>
+        <a:solidFill>
+          <a:srgbClr val="FFFFFF"/>
+        </a:solidFill>
+        <a:effectLst/>
+      </p:bgPr>
+    </p:bg>
+    <p:spTree>
+      <p:nvGrpSpPr>
+        <p:cNvPr id="1" name=""/>
+        <p:cNvGrpSpPr/>
+        <p:nvPr/>
+      </p:nvGrpSpPr>
+      <p:grpSpPr/>
+      <p:sp>
+        <p:nvSpPr>
+          <p:cNvPr id="2" name="Rectangle 1"/>
+          <p:cNvSpPr/>
+          <p:nvPr/>
+        </p:nvSpPr>
+        <p:spPr>
+          <a:xfrm>
+            <a:off x="0" y="0"/>
+            <a:ext cx="12191695" cy="109728"/>
+          </a:xfrm>
+          <a:prstGeom prst="rect">
+            <a:avLst/>
+          </a:prstGeom>
+          <a:solidFill>
+            <a:srgbClr val="E06C5C"/>
+          </a:solidFill>
+          <a:ln>
+            <a:noFill/>
+          </a:ln>
+        </p:spPr>
+        <p:style>
+          <a:lnRef idx="1">
+            <a:schemeClr val="accent1"/>
+          </a:lnRef>
+          <a:fillRef idx="3">
+            <a:schemeClr val="accent1"/>
+          </a:fillRef>
+          <a:effectRef idx="2">
+            <a:schemeClr val="accent1"/>
+          </a:effectRef>
+          <a:fontRef idx="minor">
+            <a:schemeClr val="lt1"/>
+          </a:fontRef>
+        </p:style>
+        <p:txBody>
+          <a:bodyPr rtlCol="0" anchor="ctr"/>
+          <a:lstStyle/>
+          <a:p>
+            <a:pPr algn="ctr"/>
+          </a:p>
+        </p:txBody>
+      </p:sp>
+      <p:sp>
+        <p:nvSpPr>
+          <p:cNvPr id="3" name="TextBox 2"/>
+          <p:cNvSpPr txBox="1"/>
+          <p:nvPr/>
+        </p:nvSpPr>
+        <p:spPr>
+          <a:xfrm>
+            <a:off x="640080" y="411480"/>
+            <a:ext cx="10881360" cy="457200"/>
+          </a:xfrm>
+          <a:prstGeom prst="rect">
+            <a:avLst/>
+          </a:prstGeom>
+          <a:noFill/>
+        </p:spPr>
+        <p:txBody>
+          <a:bodyPr wrap="square">
+            <a:spAutoFit/>
+          </a:bodyPr>
+          <a:lstStyle/>
+          <a:p>
+            <a:pPr algn="l"/>
+            <a:r>
+              <a:rPr sz="1500" b="1" i="0">
+                <a:solidFill>
+                  <a:srgbClr val="E06C5C"/>
+                </a:solidFill>
+                <a:latin typeface="Calibri"/>
+              </a:rPr>
+              <a:t>ROOT CAUSE ANALYSIS</a:t>
+            </a:r>
+          </a:p>
+        </p:txBody>
+      </p:sp>
+      <p:sp>
+        <p:nvSpPr>
+          <p:cNvPr id="4" name="TextBox 3"/>
+          <p:cNvSpPr txBox="1"/>
+          <p:nvPr/>
+        </p:nvSpPr>
+        <p:spPr>
+          <a:xfrm>
+            <a:off x="640080" y="777240"/>
+            <a:ext cx="10881360" cy="822960"/>
+          </a:xfrm>
+          <a:prstGeom prst="rect">
+            <a:avLst/>
+          </a:prstGeom>
+          <a:noFill/>
+        </p:spPr>
+        <p:txBody>
+          <a:bodyPr wrap="square">
+            <a:spAutoFit/>
+          </a:bodyPr>
+          <a:lstStyle/>
+          <a:p>
+            <a:pPr algn="l"/>
+            <a:r>
+              <a:rPr sz="3000" b="1" i="0">
+                <a:solidFill>
+                  <a:srgbClr val="1A1D27"/>
+                </a:solidFill>
+                <a:latin typeface="Calibri"/>
+              </a:rPr>
+              <a:t>Tracing a Dropped Region Back to a Real Bug</a:t>
+            </a:r>
+          </a:p>
+        </p:txBody>
+      </p:sp>
+      <p:sp>
+        <p:nvSpPr>
+          <p:cNvPr id="5" name="TextBox 4"/>
+          <p:cNvSpPr txBox="1"/>
+          <p:nvPr/>
+        </p:nvSpPr>
+        <p:spPr>
+          <a:xfrm>
+            <a:off x="731520" y="1691640"/>
+            <a:ext cx="10698480" cy="4480560"/>
+          </a:xfrm>
+          <a:prstGeom prst="rect">
+            <a:avLst/>
+          </a:prstGeom>
+          <a:noFill/>
+        </p:spPr>
+        <p:txBody>
+          <a:bodyPr wrap="square">
+            <a:spAutoFit/>
+          </a:bodyPr>
+          <a:lstStyle/>
+          <a:p>
+            <a:pPr>
+              <a:spcAft>
+                <a:spcPts val="1200"/>
+              </a:spcAft>
+            </a:pPr>
+            <a:r>
+              <a:rPr sz="2000" b="1">
+                <a:solidFill>
+                  <a:srgbClr val="1A1D27"/>
+                </a:solidFill>
+                <a:latin typeface="Calibri"/>
+              </a:rPr>
+              <a:t>▸  One document's Dropped Regions sheet flagged a region: low confidence, a specific location on the page</a:t>
+            </a:r>
+          </a:p>
+          <a:p>
+            <a:pPr>
+              <a:spcAft>
+                <a:spcPts val="1200"/>
+              </a:spcAft>
+            </a:pPr>
+            <a:r>
+              <a:rPr sz="2000" b="1">
+                <a:solidFill>
+                  <a:srgbClr val="1A1D27"/>
+                </a:solidFill>
+                <a:latin typeface="Calibri"/>
+              </a:rPr>
+              <a:t>▸  That location turned out to be the document's logo -- a real image the layout detector misclassified as page furniture and dropped before extraction ever saw it</a:t>
+            </a:r>
+          </a:p>
+          <a:p>
+            <a:pPr>
+              <a:spcAft>
+                <a:spcPts val="1200"/>
+              </a:spcAft>
+            </a:pPr>
+            <a:r>
+              <a:rPr sz="2000" b="1">
+                <a:solidFill>
+                  <a:srgbClr val="1A1D27"/>
+                </a:solidFill>
+                <a:latin typeface="Calibri"/>
+              </a:rPr>
+              <a:t>▸  Looking at that exact location on the original page image confirmed it immediately -- a visible box drawn right over the logo</a:t>
+            </a:r>
+          </a:p>
+          <a:p>
+            <a:pPr>
+              <a:spcAft>
+                <a:spcPts val="600"/>
+              </a:spcAft>
+            </a:pPr>
+            <a:r>
+              <a:rPr sz="1600" b="0">
+                <a:solidFill>
+                  <a:srgbClr val="5B6374"/>
+                </a:solidFill>
+                <a:latin typeface="Calibri"/>
+              </a:rPr>
+              <a:t>     –  This is the whole point of keeping every dropped region instead of silently discarding them -- it turns a hidden bug into something traceable, and something fixable</a:t>
+            </a:r>
+          </a:p>
+        </p:txBody>
+      </p:sp>
+      <p:sp>
+        <p:nvSpPr>
+          <p:cNvPr id="6" name="TextBox 5"/>
+          <p:cNvSpPr txBox="1"/>
+          <p:nvPr/>
+        </p:nvSpPr>
+        <p:spPr>
+          <a:xfrm>
+            <a:off x="11521440" y="6446520"/>
+            <a:ext cx="548640" cy="320040"/>
+          </a:xfrm>
+          <a:prstGeom prst="rect">
+            <a:avLst/>
+          </a:prstGeom>
+          <a:noFill/>
+        </p:spPr>
+        <p:txBody>
+          <a:bodyPr wrap="square">
+            <a:spAutoFit/>
+          </a:bodyPr>
+          <a:lstStyle/>
+          <a:p>
+            <a:pPr algn="r"/>
+            <a:r>
+              <a:rPr sz="1100" b="0" i="0">
+                <a:solidFill>
+                  <a:srgbClr val="5B6374"/>
+                </a:solidFill>
+                <a:latin typeface="Calibri"/>
+              </a:rPr>
+              <a:t>10</a:t>
+            </a:r>
+          </a:p>
+        </p:txBody>
+      </p:sp>
+    </p:spTree>
+  </p:cSld>
+  <p:clrMapOvr>
+    <a:masterClrMapping/>
+  </p:clrMapOvr>
+</p:sld>
+</file>
+
+<file path=ppt/slides/slide11.xml><?xml version="1.0" encoding="utf-8"?>
+<p:sld xmlns:a="http://schemas.openxmlformats.org/drawingml/2006/main" xmlns:p="http://schemas.openxmlformats.org/presentationml/2006/main" xmlns:r="http://schemas.openxmlformats.org/officeDocument/2006/relationships">
+  <p:cSld>
+    <p:bg>
+      <p:bgPr>
+        <a:solidFill>
+          <a:srgbClr val="FFFFFF"/>
+        </a:solidFill>
+        <a:effectLst/>
+      </p:bgPr>
+    </p:bg>
+    <p:spTree>
+      <p:nvGrpSpPr>
+        <p:cNvPr id="1" name=""/>
+        <p:cNvGrpSpPr/>
+        <p:nvPr/>
+      </p:nvGrpSpPr>
+      <p:grpSpPr/>
+      <p:sp>
+        <p:nvSpPr>
+          <p:cNvPr id="2" name="Rectangle 1"/>
+          <p:cNvSpPr/>
+          <p:nvPr/>
+        </p:nvSpPr>
+        <p:spPr>
+          <a:xfrm>
+            <a:off x="0" y="0"/>
+            <a:ext cx="12191695" cy="109728"/>
+          </a:xfrm>
+          <a:prstGeom prst="rect">
+            <a:avLst/>
+          </a:prstGeom>
+          <a:solidFill>
+            <a:srgbClr val="3E8EDE"/>
+          </a:solidFill>
+          <a:ln>
+            <a:noFill/>
+          </a:ln>
+        </p:spPr>
+        <p:style>
+          <a:lnRef idx="1">
+            <a:schemeClr val="accent1"/>
+          </a:lnRef>
+          <a:fillRef idx="3">
+            <a:schemeClr val="accent1"/>
+          </a:fillRef>
+          <a:effectRef idx="2">
+            <a:schemeClr val="accent1"/>
+          </a:effectRef>
+          <a:fontRef idx="minor">
+            <a:schemeClr val="lt1"/>
+          </a:fontRef>
+        </p:style>
+        <p:txBody>
+          <a:bodyPr rtlCol="0" anchor="ctr"/>
+          <a:lstStyle/>
+          <a:p>
+            <a:pPr algn="ctr"/>
+          </a:p>
+        </p:txBody>
+      </p:sp>
+      <p:sp>
+        <p:nvSpPr>
+          <p:cNvPr id="3" name="TextBox 2"/>
+          <p:cNvSpPr txBox="1"/>
+          <p:nvPr/>
+        </p:nvSpPr>
+        <p:spPr>
+          <a:xfrm>
+            <a:off x="640080" y="411480"/>
+            <a:ext cx="10881360" cy="457200"/>
+          </a:xfrm>
+          <a:prstGeom prst="rect">
+            <a:avLst/>
+          </a:prstGeom>
+          <a:noFill/>
+        </p:spPr>
+        <p:txBody>
+          <a:bodyPr wrap="square">
+            <a:spAutoFit/>
+          </a:bodyPr>
+          <a:lstStyle/>
+          <a:p>
+            <a:pPr algn="l"/>
+            <a:r>
+              <a:rPr sz="1500" b="1" i="0">
+                <a:solidFill>
+                  <a:srgbClr val="3E8EDE"/>
+                </a:solidFill>
+                <a:latin typeface="Calibri"/>
+              </a:rPr>
+              <a:t>A VALIDATION HABIT</a:t>
+            </a:r>
+          </a:p>
+        </p:txBody>
+      </p:sp>
+      <p:sp>
+        <p:nvSpPr>
+          <p:cNvPr id="4" name="TextBox 3"/>
+          <p:cNvSpPr txBox="1"/>
+          <p:nvPr/>
+        </p:nvSpPr>
+        <p:spPr>
+          <a:xfrm>
+            <a:off x="640080" y="777240"/>
+            <a:ext cx="10881360" cy="822960"/>
+          </a:xfrm>
+          <a:prstGeom prst="rect">
+            <a:avLst/>
+          </a:prstGeom>
+          <a:noFill/>
+        </p:spPr>
+        <p:txBody>
+          <a:bodyPr wrap="square">
+            <a:spAutoFit/>
+          </a:bodyPr>
+          <a:lstStyle/>
+          <a:p>
+            <a:pPr algn="l"/>
+            <a:r>
+              <a:rPr sz="3000" b="1" i="0">
+                <a:solidFill>
+                  <a:srgbClr val="1A1D27"/>
+                </a:solidFill>
+                <a:latin typeface="Calibri"/>
+              </a:rPr>
+              <a:t>Tokens/Page as an Anomaly Signal</a:t>
+            </a:r>
+          </a:p>
+        </p:txBody>
+      </p:sp>
+      <p:sp>
+        <p:nvSpPr>
+          <p:cNvPr id="5" name="TextBox 4"/>
+          <p:cNvSpPr txBox="1"/>
+          <p:nvPr/>
+        </p:nvSpPr>
+        <p:spPr>
+          <a:xfrm>
+            <a:off x="731520" y="1691640"/>
+            <a:ext cx="10698480" cy="4480560"/>
+          </a:xfrm>
+          <a:prstGeom prst="rect">
+            <a:avLst/>
+          </a:prstGeom>
+          <a:noFill/>
+        </p:spPr>
+        <p:txBody>
+          <a:bodyPr wrap="square">
+            <a:spAutoFit/>
+          </a:bodyPr>
+          <a:lstStyle/>
+          <a:p>
+            <a:pPr>
+              <a:spcAft>
+                <a:spcPts val="1200"/>
+              </a:spcAft>
+            </a:pPr>
+            <a:r>
+              <a:rPr sz="2000" b="1">
+                <a:solidFill>
+                  <a:srgbClr val="1A1D27"/>
+                </a:solidFill>
+                <a:latin typeface="Calibri"/>
+              </a:rPr>
+              <a:t>▸  There's no universal “correct” tokens-per-page number -- it depends entirely on the document type</a:t>
+            </a:r>
+          </a:p>
+          <a:p>
+            <a:pPr>
+              <a:spcAft>
+                <a:spcPts val="1200"/>
+              </a:spcAft>
+            </a:pPr>
+            <a:r>
+              <a:rPr sz="2000" b="1">
+                <a:solidFill>
+                  <a:srgbClr val="1A1D27"/>
+                </a:solidFill>
+                <a:latin typeface="Calibri"/>
+              </a:rPr>
+              <a:t>▸  But once you have it for a batch of similar documents, an outlier is worth a look:</a:t>
+            </a:r>
+          </a:p>
+          <a:p>
+            <a:pPr>
+              <a:spcAft>
+                <a:spcPts val="600"/>
+              </a:spcAft>
+            </a:pPr>
+            <a:r>
+              <a:rPr sz="1600" b="0">
+                <a:solidFill>
+                  <a:srgbClr val="5B6374"/>
+                </a:solidFill>
+                <a:latin typeface="Calibri"/>
+              </a:rPr>
+              <a:t>     –  Much LOWER than its peers -- possible sign of missed or truncated content</a:t>
+            </a:r>
+          </a:p>
+          <a:p>
+            <a:pPr>
+              <a:spcAft>
+                <a:spcPts val="600"/>
+              </a:spcAft>
+            </a:pPr>
+            <a:r>
+              <a:rPr sz="1600" b="0">
+                <a:solidFill>
+                  <a:srgbClr val="5B6374"/>
+                </a:solidFill>
+                <a:latin typeface="Calibri"/>
+              </a:rPr>
+              <a:t>     –  Much HIGHER than its peers -- possible sign of garbled or repeated extraction output</a:t>
+            </a:r>
+          </a:p>
+          <a:p>
+            <a:pPr>
+              <a:spcAft>
+                <a:spcPts val="1200"/>
+              </a:spcAft>
+            </a:pPr>
+            <a:r>
+              <a:rPr sz="2000" b="1">
+                <a:solidFill>
+                  <a:srgbClr val="1A1D27"/>
+                </a:solidFill>
+                <a:latin typeface="Calibri"/>
+              </a:rPr>
+              <a:t>▸  The value isn't any single number -- it's being able to scan 50 rows and immediately see which ones don't look like the rest</a:t>
+            </a:r>
+          </a:p>
+        </p:txBody>
+      </p:sp>
+      <p:sp>
+        <p:nvSpPr>
+          <p:cNvPr id="6" name="TextBox 5"/>
+          <p:cNvSpPr txBox="1"/>
+          <p:nvPr/>
+        </p:nvSpPr>
+        <p:spPr>
+          <a:xfrm>
+            <a:off x="11521440" y="6446520"/>
+            <a:ext cx="548640" cy="320040"/>
+          </a:xfrm>
+          <a:prstGeom prst="rect">
+            <a:avLst/>
+          </a:prstGeom>
+          <a:noFill/>
+        </p:spPr>
+        <p:txBody>
+          <a:bodyPr wrap="square">
+            <a:spAutoFit/>
+          </a:bodyPr>
+          <a:lstStyle/>
+          <a:p>
+            <a:pPr algn="r"/>
+            <a:r>
+              <a:rPr sz="1100" b="0" i="0">
+                <a:solidFill>
+                  <a:srgbClr val="5B6374"/>
+                </a:solidFill>
+                <a:latin typeface="Calibri"/>
+              </a:rPr>
+              <a:t>11</a:t>
+            </a:r>
+          </a:p>
+        </p:txBody>
+      </p:sp>
+    </p:spTree>
+  </p:cSld>
+  <p:clrMapOvr>
+    <a:masterClrMapping/>
+  </p:clrMapOvr>
+</p:sld>
+</file>
+
+<file path=ppt/slides/slide12.xml><?xml version="1.0" encoding="utf-8"?>
+<p:sld xmlns:a="http://schemas.openxmlformats.org/drawingml/2006/main" xmlns:p="http://schemas.openxmlformats.org/presentationml/2006/main" xmlns:r="http://schemas.openxmlformats.org/officeDocument/2006/relationships">
+  <p:cSld>
+    <p:bg>
+      <p:bgPr>
+        <a:solidFill>
+          <a:srgbClr val="FFFFFF"/>
+        </a:solidFill>
+        <a:effectLst/>
+      </p:bgPr>
+    </p:bg>
+    <p:spTree>
+      <p:nvGrpSpPr>
+        <p:cNvPr id="1" name=""/>
+        <p:cNvGrpSpPr/>
+        <p:nvPr/>
+      </p:nvGrpSpPr>
+      <p:grpSpPr/>
+      <p:sp>
+        <p:nvSpPr>
+          <p:cNvPr id="2" name="Rectangle 1"/>
+          <p:cNvSpPr/>
+          <p:nvPr/>
+        </p:nvSpPr>
+        <p:spPr>
+          <a:xfrm>
+            <a:off x="0" y="0"/>
+            <a:ext cx="12191695" cy="109728"/>
+          </a:xfrm>
+          <a:prstGeom prst="rect">
+            <a:avLst/>
+          </a:prstGeom>
+          <a:solidFill>
+            <a:srgbClr val="3E8EDE"/>
+          </a:solidFill>
+          <a:ln>
+            <a:noFill/>
+          </a:ln>
+        </p:spPr>
+        <p:style>
+          <a:lnRef idx="1">
+            <a:schemeClr val="accent1"/>
+          </a:lnRef>
+          <a:fillRef idx="3">
+            <a:schemeClr val="accent1"/>
+          </a:fillRef>
+          <a:effectRef idx="2">
+            <a:schemeClr val="accent1"/>
+          </a:effectRef>
+          <a:fontRef idx="minor">
+            <a:schemeClr val="lt1"/>
+          </a:fontRef>
+        </p:style>
+        <p:txBody>
+          <a:bodyPr rtlCol="0" anchor="ctr"/>
+          <a:lstStyle/>
+          <a:p>
+            <a:pPr algn="ctr"/>
+          </a:p>
+        </p:txBody>
+      </p:sp>
+      <p:sp>
+        <p:nvSpPr>
+          <p:cNvPr id="3" name="TextBox 2"/>
+          <p:cNvSpPr txBox="1"/>
+          <p:nvPr/>
+        </p:nvSpPr>
+        <p:spPr>
+          <a:xfrm>
+            <a:off x="640080" y="411480"/>
+            <a:ext cx="10881360" cy="457200"/>
+          </a:xfrm>
+          <a:prstGeom prst="rect">
+            <a:avLst/>
+          </a:prstGeom>
+          <a:noFill/>
+        </p:spPr>
+        <p:txBody>
+          <a:bodyPr wrap="square">
+            <a:spAutoFit/>
+          </a:bodyPr>
+          <a:lstStyle/>
+          <a:p>
+            <a:pPr algn="l"/>
+            <a:r>
+              <a:rPr sz="1500" b="1" i="0">
+                <a:solidFill>
+                  <a:srgbClr val="3E8EDE"/>
+                </a:solidFill>
+                <a:latin typeface="Calibri"/>
+              </a:rPr>
+              <a:t>A QUIET DETAIL</a:t>
+            </a:r>
+          </a:p>
+        </p:txBody>
+      </p:sp>
+      <p:sp>
+        <p:nvSpPr>
+          <p:cNvPr id="4" name="TextBox 3"/>
+          <p:cNvSpPr txBox="1"/>
+          <p:nvPr/>
+        </p:nvSpPr>
+        <p:spPr>
+          <a:xfrm>
+            <a:off x="640080" y="777240"/>
+            <a:ext cx="10881360" cy="822960"/>
+          </a:xfrm>
+          <a:prstGeom prst="rect">
+            <a:avLst/>
+          </a:prstGeom>
+          <a:noFill/>
+        </p:spPr>
+        <p:txBody>
+          <a:bodyPr wrap="square">
+            <a:spAutoFit/>
+          </a:bodyPr>
+          <a:lstStyle/>
+          <a:p>
+            <a:pPr algn="l"/>
+            <a:r>
+              <a:rPr sz="3000" b="1" i="0">
+                <a:solidFill>
+                  <a:srgbClr val="1A1D27"/>
+                </a:solidFill>
+                <a:latin typeface="Calibri"/>
+              </a:rPr>
+              <a:t>Partial Runs Get Skipped, Not Guessed At</a:t>
+            </a:r>
+          </a:p>
+        </p:txBody>
+      </p:sp>
+      <p:sp>
+        <p:nvSpPr>
+          <p:cNvPr id="5" name="TextBox 4"/>
+          <p:cNvSpPr txBox="1"/>
+          <p:nvPr/>
+        </p:nvSpPr>
+        <p:spPr>
+          <a:xfrm>
+            <a:off x="731520" y="1691640"/>
+            <a:ext cx="10698480" cy="4480560"/>
+          </a:xfrm>
+          <a:prstGeom prst="rect">
+            <a:avLst/>
+          </a:prstGeom>
+          <a:noFill/>
+        </p:spPr>
+        <p:txBody>
+          <a:bodyPr wrap="square">
+            <a:spAutoFit/>
+          </a:bodyPr>
+          <a:lstStyle/>
+          <a:p>
+            <a:pPr>
+              <a:spcAft>
+                <a:spcPts val="1200"/>
+              </a:spcAft>
+            </a:pPr>
+            <a:r>
+              <a:rPr sz="2000" b="1">
+                <a:solidFill>
+                  <a:srgbClr val="1A1D27"/>
+                </a:solidFill>
+                <a:latin typeface="Calibri"/>
+              </a:rPr>
+              <a:t>▸  A document only gets analyzed once its extraction has actually finished, not while it's still in progress</a:t>
+            </a:r>
+          </a:p>
+          <a:p>
+            <a:pPr>
+              <a:spcAft>
+                <a:spcPts val="1200"/>
+              </a:spcAft>
+            </a:pPr>
+            <a:r>
+              <a:rPr sz="2000" b="1">
+                <a:solidFill>
+                  <a:srgbClr val="1A1D27"/>
+                </a:solidFill>
+                <a:latin typeface="Calibri"/>
+              </a:rPr>
+              <a:t>▸  An interrupted or still-running extraction leaves incomplete output</a:t>
+            </a:r>
+          </a:p>
+          <a:p>
+            <a:pPr>
+              <a:spcAft>
+                <a:spcPts val="1200"/>
+              </a:spcAft>
+            </a:pPr>
+            <a:r>
+              <a:rPr sz="2000" b="1">
+                <a:solidFill>
+                  <a:srgbClr val="1A1D27"/>
+                </a:solidFill>
+                <a:latin typeface="Calibri"/>
+              </a:rPr>
+              <a:t>▸  That incomplete output gets skipped rather than guessed at -- a document either finished cleanly, or it isn't validated at all</a:t>
+            </a:r>
+          </a:p>
+        </p:txBody>
+      </p:sp>
+      <p:sp>
+        <p:nvSpPr>
+          <p:cNvPr id="6" name="TextBox 5"/>
+          <p:cNvSpPr txBox="1"/>
+          <p:nvPr/>
+        </p:nvSpPr>
+        <p:spPr>
+          <a:xfrm>
+            <a:off x="11521440" y="6446520"/>
+            <a:ext cx="548640" cy="320040"/>
+          </a:xfrm>
+          <a:prstGeom prst="rect">
+            <a:avLst/>
+          </a:prstGeom>
+          <a:noFill/>
+        </p:spPr>
+        <p:txBody>
+          <a:bodyPr wrap="square">
+            <a:spAutoFit/>
+          </a:bodyPr>
+          <a:lstStyle/>
+          <a:p>
+            <a:pPr algn="r"/>
+            <a:r>
+              <a:rPr sz="1100" b="0" i="0">
+                <a:solidFill>
+                  <a:srgbClr val="5B6374"/>
+                </a:solidFill>
+                <a:latin typeface="Calibri"/>
+              </a:rPr>
+              <a:t>12</a:t>
+            </a:r>
+          </a:p>
+        </p:txBody>
+      </p:sp>
+    </p:spTree>
+  </p:cSld>
+  <p:clrMapOvr>
+    <a:masterClrMapping/>
+  </p:clrMapOvr>
+</p:sld>
+</file>
+
+<file path=ppt/slides/slide13.xml><?xml version="1.0" encoding="utf-8"?>
+<p:sld xmlns:a="http://schemas.openxmlformats.org/drawingml/2006/main" xmlns:p="http://schemas.openxmlformats.org/presentationml/2006/main" xmlns:r="http://schemas.openxmlformats.org/officeDocument/2006/relationships">
+  <p:cSld>
+    <p:bg>
+      <p:bgPr>
+        <a:solidFill>
+          <a:srgbClr val="FFFFFF"/>
+        </a:solidFill>
+        <a:effectLst/>
+      </p:bgPr>
+    </p:bg>
+    <p:spTree>
+      <p:nvGrpSpPr>
+        <p:cNvPr id="1" name=""/>
+        <p:cNvGrpSpPr/>
+        <p:nvPr/>
+      </p:nvGrpSpPr>
+      <p:grpSpPr/>
+      <p:sp>
+        <p:nvSpPr>
+          <p:cNvPr id="2" name="Rectangle 1"/>
+          <p:cNvSpPr/>
+          <p:nvPr/>
+        </p:nvSpPr>
+        <p:spPr>
+          <a:xfrm>
+            <a:off x="0" y="0"/>
+            <a:ext cx="12191695" cy="109728"/>
+          </a:xfrm>
+          <a:prstGeom prst="rect">
+            <a:avLst/>
+          </a:prstGeom>
+          <a:solidFill>
+            <a:srgbClr val="3E8EDE"/>
+          </a:solidFill>
+          <a:ln>
+            <a:noFill/>
+          </a:ln>
+        </p:spPr>
+        <p:style>
+          <a:lnRef idx="1">
+            <a:schemeClr val="accent1"/>
+          </a:lnRef>
+          <a:fillRef idx="3">
+            <a:schemeClr val="accent1"/>
+          </a:fillRef>
+          <a:effectRef idx="2">
+            <a:schemeClr val="accent1"/>
+          </a:effectRef>
+          <a:fontRef idx="minor">
+            <a:schemeClr val="lt1"/>
+          </a:fontRef>
+        </p:style>
+        <p:txBody>
+          <a:bodyPr rtlCol="0" anchor="ctr"/>
+          <a:lstStyle/>
+          <a:p>
+            <a:pPr algn="ctr"/>
+          </a:p>
+        </p:txBody>
+      </p:sp>
+      <p:sp>
+        <p:nvSpPr>
+          <p:cNvPr id="3" name="TextBox 2"/>
+          <p:cNvSpPr txBox="1"/>
+          <p:nvPr/>
+        </p:nvSpPr>
+        <p:spPr>
+          <a:xfrm>
+            <a:off x="640080" y="411480"/>
+            <a:ext cx="10881360" cy="457200"/>
+          </a:xfrm>
+          <a:prstGeom prst="rect">
+            <a:avLst/>
+          </a:prstGeom>
+          <a:noFill/>
+        </p:spPr>
+        <p:txBody>
+          <a:bodyPr wrap="square">
+            <a:spAutoFit/>
+          </a:bodyPr>
+          <a:lstStyle/>
+          <a:p>
+            <a:pPr algn="l"/>
+            <a:r>
+              <a:rPr sz="1500" b="1" i="0">
+                <a:solidFill>
+                  <a:srgbClr val="3E8EDE"/>
+                </a:solidFill>
+                <a:latin typeface="Calibri"/>
+              </a:rPr>
+              <a:t>WRAP-UP</a:t>
+            </a:r>
+          </a:p>
+        </p:txBody>
+      </p:sp>
+      <p:sp>
+        <p:nvSpPr>
+          <p:cNvPr id="4" name="TextBox 3"/>
+          <p:cNvSpPr txBox="1"/>
+          <p:nvPr/>
+        </p:nvSpPr>
+        <p:spPr>
+          <a:xfrm>
+            <a:off x="640080" y="777240"/>
+            <a:ext cx="10881360" cy="822960"/>
+          </a:xfrm>
+          <a:prstGeom prst="rect">
+            <a:avLst/>
+          </a:prstGeom>
+          <a:noFill/>
+        </p:spPr>
+        <p:txBody>
+          <a:bodyPr wrap="square">
+            <a:spAutoFit/>
+          </a:bodyPr>
+          <a:lstStyle/>
+          <a:p>
+            <a:pPr algn="l"/>
+            <a:r>
+              <a:rPr sz="3000" b="1" i="0">
+                <a:solidFill>
+                  <a:srgbClr val="1A1D27"/>
+                </a:solidFill>
+                <a:latin typeface="Calibri"/>
+              </a:rPr>
+              <a:t>Why This Module Matters</a:t>
+            </a:r>
+          </a:p>
+        </p:txBody>
+      </p:sp>
+      <p:sp>
+        <p:nvSpPr>
+          <p:cNvPr id="5" name="TextBox 4"/>
+          <p:cNvSpPr txBox="1"/>
+          <p:nvPr/>
+        </p:nvSpPr>
+        <p:spPr>
+          <a:xfrm>
+            <a:off x="731520" y="1691640"/>
+            <a:ext cx="10698480" cy="4480560"/>
+          </a:xfrm>
+          <a:prstGeom prst="rect">
+            <a:avLst/>
+          </a:prstGeom>
+          <a:noFill/>
+        </p:spPr>
+        <p:txBody>
+          <a:bodyPr wrap="square">
+            <a:spAutoFit/>
+          </a:bodyPr>
+          <a:lstStyle/>
+          <a:p>
+            <a:pPr>
+              <a:spcAft>
+                <a:spcPts val="1200"/>
+              </a:spcAft>
+            </a:pPr>
+            <a:r>
+              <a:rPr sz="2000" b="1">
+                <a:solidFill>
+                  <a:srgbClr val="1A1D27"/>
+                </a:solidFill>
+                <a:latin typeface="Calibri"/>
+              </a:rPr>
+              <a:t>▸  It turns “the pipeline didn't crash” into “here's proof this document is actually usable”</a:t>
+            </a:r>
+          </a:p>
+          <a:p>
+            <a:pPr>
+              <a:spcAft>
+                <a:spcPts val="1200"/>
+              </a:spcAft>
+            </a:pPr>
+            <a:r>
+              <a:rPr sz="2000" b="1">
+                <a:solidFill>
+                  <a:srgbClr val="1A1D27"/>
+                </a:solidFill>
+                <a:latin typeface="Calibri"/>
+              </a:rPr>
+              <a:t>▸  It lets one person identify which of many documents need a closer look, without opening every single one</a:t>
+            </a:r>
+          </a:p>
+          <a:p>
+            <a:pPr>
+              <a:spcAft>
+                <a:spcPts val="1200"/>
+              </a:spcAft>
+            </a:pPr>
+            <a:r>
+              <a:rPr sz="2000" b="1">
+                <a:solidFill>
+                  <a:srgbClr val="1A1D27"/>
+                </a:solidFill>
+                <a:latin typeface="Calibri"/>
+              </a:rPr>
+              <a:t>▸  It turns a hidden extraction bug into a traceable, fixable finding, instead of a silent quality problem downstream</a:t>
+            </a:r>
+          </a:p>
+          <a:p>
+            <a:pPr>
+              <a:spcAft>
+                <a:spcPts val="1200"/>
+              </a:spcAft>
+            </a:pPr>
+            <a:r>
+              <a:rPr sz="2000" b="1">
+                <a:solidFill>
+                  <a:srgbClr val="1A1D27"/>
+                </a:solidFill>
+                <a:latin typeface="Calibri"/>
+              </a:rPr>
+              <a:t>▸  Next: Module 3 takes this same validated output and turns it into retrieval-ready chunks -- recursive, semantic, and hierarchical strategies, compared on the same real documents</a:t>
+            </a:r>
+          </a:p>
+        </p:txBody>
+      </p:sp>
+      <p:sp>
+        <p:nvSpPr>
+          <p:cNvPr id="6" name="TextBox 5"/>
+          <p:cNvSpPr txBox="1"/>
+          <p:nvPr/>
+        </p:nvSpPr>
+        <p:spPr>
+          <a:xfrm>
+            <a:off x="11521440" y="6446520"/>
+            <a:ext cx="548640" cy="320040"/>
+          </a:xfrm>
+          <a:prstGeom prst="rect">
+            <a:avLst/>
+          </a:prstGeom>
+          <a:noFill/>
+        </p:spPr>
+        <p:txBody>
+          <a:bodyPr wrap="square">
+            <a:spAutoFit/>
+          </a:bodyPr>
+          <a:lstStyle/>
+          <a:p>
+            <a:pPr algn="r"/>
+            <a:r>
+              <a:rPr sz="1100" b="0" i="0">
+                <a:solidFill>
+                  <a:srgbClr val="5B6374"/>
+                </a:solidFill>
+                <a:latin typeface="Calibri"/>
+              </a:rPr>
+              <a:t>13</a:t>
+            </a:r>
+          </a:p>
+        </p:txBody>
+      </p:sp>
+    </p:spTree>
+  </p:cSld>
+  <p:clrMapOvr>
+    <a:masterClrMapping/>
+  </p:clrMapOvr>
+</p:sld>
+</file>
+
+<file path=ppt/slides/slide14.xml><?xml version="1.0" encoding="utf-8"?>
+<p:sld xmlns:a="http://schemas.openxmlformats.org/drawingml/2006/main" xmlns:p="http://schemas.openxmlformats.org/presentationml/2006/main" xmlns:r="http://schemas.openxmlformats.org/officeDocument/2006/relationships">
+  <p:cSld>
+    <p:bg>
+      <p:bgPr>
+        <a:solidFill>
+          <a:srgbClr val="0F172A"/>
+        </a:solidFill>
+        <a:effectLst/>
+      </p:bgPr>
+    </p:bg>
+    <p:spTree>
+      <p:nvGrpSpPr>
+        <p:cNvPr id="1" name=""/>
+        <p:cNvGrpSpPr/>
+        <p:nvPr/>
+      </p:nvGrpSpPr>
+      <p:grpSpPr/>
+      <p:sp>
+        <p:nvSpPr>
+          <p:cNvPr id="2" name="Rectangle 1"/>
+          <p:cNvSpPr/>
+          <p:nvPr/>
+        </p:nvSpPr>
+        <p:spPr>
+          <a:xfrm>
+            <a:off x="0" y="0"/>
+            <a:ext cx="12191695" cy="109728"/>
+          </a:xfrm>
+          <a:prstGeom prst="rect">
+            <a:avLst/>
+          </a:prstGeom>
+          <a:solidFill>
+            <a:srgbClr val="3E8EDE"/>
+          </a:solidFill>
+          <a:ln>
+            <a:noFill/>
+          </a:ln>
+        </p:spPr>
+        <p:style>
+          <a:lnRef idx="1">
+            <a:schemeClr val="accent1"/>
+          </a:lnRef>
+          <a:fillRef idx="3">
+            <a:schemeClr val="accent1"/>
+          </a:fillRef>
+          <a:effectRef idx="2">
+            <a:schemeClr val="accent1"/>
+          </a:effectRef>
+          <a:fontRef idx="minor">
+            <a:schemeClr val="lt1"/>
+          </a:fontRef>
+        </p:style>
+        <p:txBody>
+          <a:bodyPr rtlCol="0" anchor="ctr"/>
+          <a:lstStyle/>
+          <a:p>
+            <a:pPr algn="ctr"/>
+          </a:p>
+        </p:txBody>
+      </p:sp>
+      <p:sp>
+        <p:nvSpPr>
+          <p:cNvPr id="3" name="TextBox 2"/>
+          <p:cNvSpPr txBox="1"/>
+          <p:nvPr/>
+        </p:nvSpPr>
+        <p:spPr>
+          <a:xfrm>
+            <a:off x="914400" y="2743200"/>
+            <a:ext cx="10332720" cy="1097280"/>
+          </a:xfrm>
+          <a:prstGeom prst="rect">
+            <a:avLst/>
+          </a:prstGeom>
+          <a:noFill/>
+        </p:spPr>
+        <p:txBody>
+          <a:bodyPr wrap="square">
+            <a:spAutoFit/>
+          </a:bodyPr>
+          <a:lstStyle/>
+          <a:p>
+            <a:pPr algn="l"/>
+            <a:r>
+              <a:rPr sz="4000" b="1" i="0">
+                <a:solidFill>
+                  <a:srgbClr val="FFFFFF"/>
+                </a:solidFill>
+                <a:latin typeface="Calibri"/>
+              </a:rPr>
+              <a:t>Questions?</a:t>
+            </a:r>
+          </a:p>
+        </p:txBody>
+      </p:sp>
+      <p:sp>
+        <p:nvSpPr>
+          <p:cNvPr id="4" name="TextBox 3"/>
+          <p:cNvSpPr txBox="1"/>
+          <p:nvPr/>
+        </p:nvSpPr>
+        <p:spPr>
+          <a:xfrm>
+            <a:off x="914400" y="3749039"/>
+            <a:ext cx="10332720" cy="1280160"/>
+          </a:xfrm>
+          <a:prstGeom prst="rect">
+            <a:avLst/>
+          </a:prstGeom>
+          <a:noFill/>
+        </p:spPr>
+        <p:txBody>
+          <a:bodyPr wrap="square">
+            <a:spAutoFit/>
+          </a:bodyPr>
+          <a:lstStyle/>
+          <a:p>
+            <a:pPr algn="l"/>
+            <a:r>
+              <a:rPr sz="1800" b="0" i="0">
+                <a:solidFill>
+                  <a:srgbClr val="8A93A6"/>
+                </a:solidFill>
+                <a:latin typeface="Calibri"/>
+              </a:rPr>
+              <a:t>2. ANALYSIS/  --  README.md has the full column-by-column report reference and every real number in this deck.</a:t>
+            </a:r>
+          </a:p>
+        </p:txBody>
+      </p:sp>
+      <p:sp>
+        <p:nvSpPr>
+          <p:cNvPr id="5" name="TextBox 4"/>
+          <p:cNvSpPr txBox="1"/>
+          <p:nvPr/>
+        </p:nvSpPr>
+        <p:spPr>
+          <a:xfrm>
+            <a:off x="914400" y="6126480"/>
+            <a:ext cx="10332720" cy="457200"/>
+          </a:xfrm>
+          <a:prstGeom prst="rect">
+            <a:avLst/>
+          </a:prstGeom>
+          <a:noFill/>
+        </p:spPr>
+        <p:txBody>
+          <a:bodyPr wrap="square">
+            <a:spAutoFit/>
+          </a:bodyPr>
+          <a:lstStyle/>
+          <a:p>
+            <a:pPr algn="l"/>
+            <a:r>
+              <a:rPr sz="1300" b="0" i="0">
+                <a:solidFill>
+                  <a:srgbClr val="5B6374"/>
+                </a:solidFill>
+                <a:latin typeface="Calibri"/>
+              </a:rPr>
+              <a:t>Module 2 of 3  ·  Data Processing → Analysis → Chunking</a:t>
+            </a:r>
+          </a:p>
+        </p:txBody>
+      </p:sp>
+    </p:spTree>
+  </p:cSld>
+  <p:clrMapOvr>
+    <a:masterClrMapping/>
+  </p:clrMapOvr>
+</p:sld>
+</file>
+
+<file path=ppt/slides/slide2.xml><?xml version="1.0" encoding="utf-8"?>
+<p:sld xmlns:a="http://schemas.openxmlformats.org/drawingml/2006/main" xmlns:p="http://schemas.openxmlformats.org/presentationml/2006/main" xmlns:r="http://schemas.openxmlformats.org/officeDocument/2006/relationships">
+  <p:cSld>
+    <p:bg>
+      <p:bgPr>
+        <a:solidFill>
+          <a:srgbClr val="FFFFFF"/>
+        </a:solidFill>
+        <a:effectLst/>
+      </p:bgPr>
+    </p:bg>
+    <p:spTree>
+      <p:nvGrpSpPr>
+        <p:cNvPr id="1" name=""/>
+        <p:cNvGrpSpPr/>
+        <p:nvPr/>
+      </p:nvGrpSpPr>
+      <p:grpSpPr/>
+      <p:sp>
+        <p:nvSpPr>
+          <p:cNvPr id="2" name="Rectangle 1"/>
+          <p:cNvSpPr/>
+          <p:nvPr/>
+        </p:nvSpPr>
+        <p:spPr>
+          <a:xfrm>
+            <a:off x="0" y="0"/>
+            <a:ext cx="12191695" cy="109728"/>
+          </a:xfrm>
+          <a:prstGeom prst="rect">
+            <a:avLst/>
+          </a:prstGeom>
+          <a:solidFill>
+            <a:srgbClr val="3E8EDE"/>
+          </a:solidFill>
+          <a:ln>
+            <a:noFill/>
+          </a:ln>
+        </p:spPr>
+        <p:style>
+          <a:lnRef idx="1">
+            <a:schemeClr val="accent1"/>
+          </a:lnRef>
+          <a:fillRef idx="3">
+            <a:schemeClr val="accent1"/>
+          </a:fillRef>
+          <a:effectRef idx="2">
+            <a:schemeClr val="accent1"/>
+          </a:effectRef>
+          <a:fontRef idx="minor">
+            <a:schemeClr val="lt1"/>
+          </a:fontRef>
+        </p:style>
+        <p:txBody>
+          <a:bodyPr rtlCol="0" anchor="ctr"/>
+          <a:lstStyle/>
+          <a:p>
+            <a:pPr algn="ctr"/>
+          </a:p>
+        </p:txBody>
+      </p:sp>
+      <p:sp>
+        <p:nvSpPr>
+          <p:cNvPr id="3" name="TextBox 2"/>
+          <p:cNvSpPr txBox="1"/>
+          <p:nvPr/>
+        </p:nvSpPr>
+        <p:spPr>
+          <a:xfrm>
+            <a:off x="640080" y="411480"/>
+            <a:ext cx="10881360" cy="457200"/>
+          </a:xfrm>
+          <a:prstGeom prst="rect">
+            <a:avLst/>
+          </a:prstGeom>
+          <a:noFill/>
+        </p:spPr>
+        <p:txBody>
+          <a:bodyPr wrap="square">
+            <a:spAutoFit/>
+          </a:bodyPr>
+          <a:lstStyle/>
+          <a:p>
+            <a:pPr algn="l"/>
+            <a:r>
+              <a:rPr sz="1500" b="1" i="0">
+                <a:solidFill>
+                  <a:srgbClr val="3E8EDE"/>
+                </a:solidFill>
+                <a:latin typeface="Calibri"/>
+              </a:rPr>
+              <a:t>VIDEO SERIES</a:t>
+            </a:r>
+          </a:p>
+        </p:txBody>
+      </p:sp>
+      <p:sp>
+        <p:nvSpPr>
+          <p:cNvPr id="4" name="TextBox 3"/>
+          <p:cNvSpPr txBox="1"/>
+          <p:nvPr/>
+        </p:nvSpPr>
+        <p:spPr>
+          <a:xfrm>
+            <a:off x="640080" y="777240"/>
+            <a:ext cx="10881360" cy="1005840"/>
+          </a:xfrm>
+          <a:prstGeom prst="rect">
+            <a:avLst/>
+          </a:prstGeom>
+          <a:noFill/>
+        </p:spPr>
+        <p:txBody>
+          <a:bodyPr wrap="square">
+            <a:spAutoFit/>
+          </a:bodyPr>
+          <a:lstStyle/>
+          <a:p>
+            <a:pPr algn="l"/>
+            <a:r>
+              <a:rPr sz="2800" b="1" i="0">
+                <a:solidFill>
+                  <a:srgbClr val="1A1D27"/>
+                </a:solidFill>
+                <a:latin typeface="Calibri"/>
+              </a:rPr>
+              <a:t>Part of a Series: How to Build Your First Chatbot</a:t>
+            </a:r>
+          </a:p>
+        </p:txBody>
+      </p:sp>
+      <p:sp>
+        <p:nvSpPr>
+          <p:cNvPr id="5" name="TextBox 4"/>
+          <p:cNvSpPr txBox="1"/>
+          <p:nvPr/>
+        </p:nvSpPr>
+        <p:spPr>
+          <a:xfrm>
+            <a:off x="731520" y="1828800"/>
+            <a:ext cx="10698480" cy="822960"/>
+          </a:xfrm>
+          <a:prstGeom prst="rect">
+            <a:avLst/>
+          </a:prstGeom>
+          <a:noFill/>
+        </p:spPr>
+        <p:txBody>
+          <a:bodyPr wrap="square">
+            <a:spAutoFit/>
+          </a:bodyPr>
+          <a:lstStyle/>
+          <a:p>
+            <a:r>
+              <a:rPr sz="1600" i="1">
+                <a:solidFill>
+                  <a:srgbClr val="5B6374"/>
+                </a:solidFill>
+                <a:latin typeface="Calibri"/>
+              </a:rPr>
+              <a:t>This module is one step in a planned video series that builds a real, working chatbot end to end -- real documents, real models, real measured results, not toy examples.</a:t>
+            </a:r>
+          </a:p>
+        </p:txBody>
+      </p:sp>
+      <p:sp>
+        <p:nvSpPr>
+          <p:cNvPr id="6" name="TextBox 5"/>
+          <p:cNvSpPr txBox="1"/>
+          <p:nvPr/>
+        </p:nvSpPr>
+        <p:spPr>
+          <a:xfrm>
+            <a:off x="731520" y="2788920"/>
+            <a:ext cx="10698480" cy="2743200"/>
+          </a:xfrm>
+          <a:prstGeom prst="rect">
+            <a:avLst/>
+          </a:prstGeom>
+          <a:noFill/>
+        </p:spPr>
+        <p:txBody>
+          <a:bodyPr wrap="square">
+            <a:spAutoFit/>
+          </a:bodyPr>
+          <a:lstStyle/>
+          <a:p>
+            <a:pPr>
+              <a:spcAft>
+                <a:spcPts val="1000"/>
+              </a:spcAft>
+            </a:pPr>
+            <a:r>
+              <a:rPr sz="1600" b="0">
+                <a:solidFill>
+                  <a:srgbClr val="5B6374"/>
+                </a:solidFill>
+                <a:latin typeface="Calibri"/>
+              </a:rPr>
+              <a:t>    Module 1: OCR &amp; Document Understanding -- PDF to structured markdown</a:t>
+            </a:r>
+          </a:p>
+          <a:p>
+            <a:pPr>
+              <a:spcAft>
+                <a:spcPts val="1000"/>
+              </a:spcAft>
+            </a:pPr>
+            <a:r>
+              <a:rPr sz="1800" b="1">
+                <a:solidFill>
+                  <a:srgbClr val="3E8EDE"/>
+                </a:solidFill>
+                <a:latin typeface="Calibri"/>
+              </a:rPr>
+              <a:t>►  Module 2: Analysis &amp; Validation -- Is the extraction actually right?   ◂ you are here</a:t>
+            </a:r>
+          </a:p>
+          <a:p>
+            <a:pPr>
+              <a:spcAft>
+                <a:spcPts val="1000"/>
+              </a:spcAft>
+            </a:pPr>
+            <a:r>
+              <a:rPr sz="1600" b="0">
+                <a:solidFill>
+                  <a:srgbClr val="5B6374"/>
+                </a:solidFill>
+                <a:latin typeface="Calibri"/>
+              </a:rPr>
+              <a:t>    Module 3: Chunking -- Splitting documents for retrieval</a:t>
+            </a:r>
+          </a:p>
+          <a:p>
+            <a:pPr>
+              <a:spcAft>
+                <a:spcPts val="1000"/>
+              </a:spcAft>
+            </a:pPr>
+            <a:r>
+              <a:rPr sz="1600" b="0">
+                <a:solidFill>
+                  <a:srgbClr val="5B6374"/>
+                </a:solidFill>
+                <a:latin typeface="Calibri"/>
+              </a:rPr>
+              <a:t>    Module 4: Embedding &amp; Database -- Vectors, Postgres, pgvector</a:t>
+            </a:r>
+          </a:p>
+          <a:p>
+            <a:pPr>
+              <a:spcAft>
+                <a:spcPts val="1000"/>
+              </a:spcAft>
+            </a:pPr>
+            <a:r>
+              <a:rPr sz="1600" b="0">
+                <a:solidFill>
+                  <a:srgbClr val="5B6374"/>
+                </a:solidFill>
+                <a:latin typeface="Calibri"/>
+              </a:rPr>
+              <a:t>    Module 5: Database Deep Dive -- Search, indexes, and what Postgres actually does</a:t>
+            </a:r>
+          </a:p>
+          <a:p>
+            <a:pPr>
+              <a:spcAft>
+                <a:spcPts val="1000"/>
+              </a:spcAft>
+            </a:pPr>
+            <a:r>
+              <a:rPr sz="1600" b="0">
+                <a:solidFill>
+                  <a:srgbClr val="5B6374"/>
+                </a:solidFill>
+                <a:latin typeface="Calibri"/>
+              </a:rPr>
+              <a:t>    Module 6: Summarization -- Retrieval + a real LLM + a UI</a:t>
+            </a:r>
+          </a:p>
+        </p:txBody>
+      </p:sp>
+      <p:sp>
+        <p:nvSpPr>
+          <p:cNvPr id="7" name="TextBox 6"/>
+          <p:cNvSpPr txBox="1"/>
+          <p:nvPr/>
+        </p:nvSpPr>
+        <p:spPr>
+          <a:xfrm>
+            <a:off x="731520" y="5760720"/>
+            <a:ext cx="10698480" cy="731520"/>
+          </a:xfrm>
+          <a:prstGeom prst="rect">
+            <a:avLst/>
+          </a:prstGeom>
+          <a:noFill/>
+        </p:spPr>
+        <p:txBody>
+          <a:bodyPr wrap="square">
+            <a:spAutoFit/>
+          </a:bodyPr>
+          <a:lstStyle/>
+          <a:p>
+            <a:pPr algn="l"/>
+            <a:r>
+              <a:rPr sz="1300" b="0" i="1">
+                <a:solidFill>
+                  <a:srgbClr val="5B6374"/>
+                </a:solidFill>
+                <a:latin typeface="Calibri"/>
+              </a:rPr>
+              <a:t>More modules are planned as the series continues toward a complete chatbot -- retrieval and response generation are next.</a:t>
+            </a:r>
+          </a:p>
+        </p:txBody>
+      </p:sp>
+      <p:sp>
+        <p:nvSpPr>
+          <p:cNvPr id="8" name="TextBox 7"/>
+          <p:cNvSpPr txBox="1"/>
+          <p:nvPr/>
+        </p:nvSpPr>
+        <p:spPr>
+          <a:xfrm>
+            <a:off x="11521440" y="6446520"/>
+            <a:ext cx="548640" cy="320040"/>
+          </a:xfrm>
+          <a:prstGeom prst="rect">
+            <a:avLst/>
+          </a:prstGeom>
+          <a:noFill/>
+        </p:spPr>
+        <p:txBody>
+          <a:bodyPr wrap="square">
+            <a:spAutoFit/>
+          </a:bodyPr>
+          <a:lstStyle/>
+          <a:p>
+            <a:pPr algn="r"/>
+            <a:r>
+              <a:rPr sz="1100" b="0" i="0">
+                <a:solidFill>
+                  <a:srgbClr val="5B6374"/>
+                </a:solidFill>
+                <a:latin typeface="Calibri"/>
+              </a:rPr>
+              <a:t>2</a:t>
+            </a:r>
+          </a:p>
+        </p:txBody>
+      </p:sp>
+    </p:spTree>
+  </p:cSld>
+  <p:clrMapOvr>
+    <a:masterClrMapping/>
+  </p:clrMapOvr>
+</p:sld>
+</file>
+
+<file path=ppt/slides/slide3.xml><?xml version="1.0" encoding="utf-8"?>
+<p:sld xmlns:a="http://schemas.openxmlformats.org/drawingml/2006/main" xmlns:p="http://schemas.openxmlformats.org/presentationml/2006/main" xmlns:r="http://schemas.openxmlformats.org/officeDocument/2006/relationships">
+  <p:cSld>
+    <p:bg>
+      <p:bgPr>
+        <a:solidFill>
+          <a:srgbClr val="FFFFFF"/>
+        </a:solidFill>
+        <a:effectLst/>
+      </p:bgPr>
+    </p:bg>
+    <p:spTree>
+      <p:nvGrpSpPr>
+        <p:cNvPr id="1" name=""/>
+        <p:cNvGrpSpPr/>
+        <p:nvPr/>
+      </p:nvGrpSpPr>
+      <p:grpSpPr/>
+      <p:sp>
+        <p:nvSpPr>
+          <p:cNvPr id="2" name="Rectangle 1"/>
+          <p:cNvSpPr/>
+          <p:nvPr/>
+        </p:nvSpPr>
+        <p:spPr>
+          <a:xfrm>
+            <a:off x="0" y="0"/>
+            <a:ext cx="12191695" cy="109728"/>
+          </a:xfrm>
+          <a:prstGeom prst="rect">
+            <a:avLst/>
+          </a:prstGeom>
+          <a:solidFill>
+            <a:srgbClr val="3E8EDE"/>
+          </a:solidFill>
+          <a:ln>
+            <a:noFill/>
+          </a:ln>
+        </p:spPr>
+        <p:style>
+          <a:lnRef idx="1">
+            <a:schemeClr val="accent1"/>
+          </a:lnRef>
+          <a:fillRef idx="3">
+            <a:schemeClr val="accent1"/>
+          </a:fillRef>
+          <a:effectRef idx="2">
+            <a:schemeClr val="accent1"/>
+          </a:effectRef>
+          <a:fontRef idx="minor">
+            <a:schemeClr val="lt1"/>
+          </a:fontRef>
+        </p:style>
+        <p:txBody>
+          <a:bodyPr rtlCol="0" anchor="ctr"/>
+          <a:lstStyle/>
+          <a:p>
+            <a:pPr algn="ctr"/>
+          </a:p>
+        </p:txBody>
+      </p:sp>
+      <p:sp>
+        <p:nvSpPr>
+          <p:cNvPr id="3" name="TextBox 2"/>
+          <p:cNvSpPr txBox="1"/>
+          <p:nvPr/>
+        </p:nvSpPr>
+        <p:spPr>
+          <a:xfrm>
+            <a:off x="640080" y="411480"/>
+            <a:ext cx="10881360" cy="457200"/>
+          </a:xfrm>
+          <a:prstGeom prst="rect">
+            <a:avLst/>
+          </a:prstGeom>
+          <a:noFill/>
+        </p:spPr>
+        <p:txBody>
+          <a:bodyPr wrap="square">
+            <a:spAutoFit/>
+          </a:bodyPr>
+          <a:lstStyle/>
+          <a:p>
+            <a:pPr algn="l"/>
+            <a:r>
+              <a:rPr sz="1500" b="1" i="0">
+                <a:solidFill>
+                  <a:srgbClr val="3E8EDE"/>
+                </a:solidFill>
+                <a:latin typeface="Calibri"/>
+              </a:rPr>
+              <a:t>WHY THIS EXISTS</a:t>
+            </a:r>
+          </a:p>
+        </p:txBody>
+      </p:sp>
+      <p:sp>
+        <p:nvSpPr>
+          <p:cNvPr id="4" name="TextBox 3"/>
+          <p:cNvSpPr txBox="1"/>
+          <p:nvPr/>
+        </p:nvSpPr>
+        <p:spPr>
+          <a:xfrm>
+            <a:off x="640080" y="777240"/>
+            <a:ext cx="10881360" cy="822960"/>
+          </a:xfrm>
+          <a:prstGeom prst="rect">
+            <a:avLst/>
+          </a:prstGeom>
+          <a:noFill/>
+        </p:spPr>
+        <p:txBody>
+          <a:bodyPr wrap="square">
+            <a:spAutoFit/>
+          </a:bodyPr>
+          <a:lstStyle/>
+          <a:p>
+            <a:pPr algn="l"/>
+            <a:r>
+              <a:rPr sz="3000" b="1" i="0">
+                <a:solidFill>
+                  <a:srgbClr val="1A1D27"/>
+                </a:solidFill>
+                <a:latin typeface="Calibri"/>
+              </a:rPr>
+              <a:t>“Done” Is Not the Same as “Correct”</a:t>
+            </a:r>
+          </a:p>
+        </p:txBody>
+      </p:sp>
+      <p:sp>
+        <p:nvSpPr>
+          <p:cNvPr id="5" name="TextBox 4"/>
+          <p:cNvSpPr txBox="1"/>
+          <p:nvPr/>
+        </p:nvSpPr>
+        <p:spPr>
+          <a:xfrm>
+            <a:off x="731520" y="1691640"/>
+            <a:ext cx="10698480" cy="4480560"/>
+          </a:xfrm>
+          <a:prstGeom prst="rect">
+            <a:avLst/>
+          </a:prstGeom>
+          <a:noFill/>
+        </p:spPr>
+        <p:txBody>
+          <a:bodyPr wrap="square">
+            <a:spAutoFit/>
+          </a:bodyPr>
+          <a:lstStyle/>
+          <a:p>
+            <a:pPr>
+              <a:spcAft>
+                <a:spcPts val="1200"/>
+              </a:spcAft>
+            </a:pPr>
+            <a:r>
+              <a:rPr sz="2000" b="1">
+                <a:solidFill>
+                  <a:srgbClr val="1A1D27"/>
+                </a:solidFill>
+                <a:latin typeface="Calibri"/>
+              </a:rPr>
+              <a:t>▸  Module 1 finishes every run the same way: a .md file and a metadata.json get written, no error, no warning</a:t>
+            </a:r>
+          </a:p>
+          <a:p>
+            <a:pPr>
+              <a:spcAft>
+                <a:spcPts val="1200"/>
+              </a:spcAft>
+            </a:pPr>
+            <a:r>
+              <a:rPr sz="2000" b="1">
+                <a:solidFill>
+                  <a:srgbClr val="1A1D27"/>
+                </a:solidFill>
+                <a:latin typeface="Calibri"/>
+              </a:rPr>
+              <a:t>▸  That tells you the pipeline didn't crash. It tells you nothing about whether the output is trustworthy</a:t>
+            </a:r>
+          </a:p>
+          <a:p>
+            <a:pPr>
+              <a:spcAft>
+                <a:spcPts val="1200"/>
+              </a:spcAft>
+            </a:pPr>
+            <a:r>
+              <a:rPr sz="2000" b="1">
+                <a:solidFill>
+                  <a:srgbClr val="1A1D27"/>
+                </a:solidFill>
+                <a:latin typeface="Calibri"/>
+              </a:rPr>
+              <a:t>▸  Module 2's job: turn the raw output of many documents into numbers you can actually look at and question</a:t>
+            </a:r>
+          </a:p>
+          <a:p>
+            <a:pPr>
+              <a:spcAft>
+                <a:spcPts val="600"/>
+              </a:spcAft>
+            </a:pPr>
+            <a:r>
+              <a:rPr sz="1600" b="0">
+                <a:solidFill>
+                  <a:srgbClr val="5B6374"/>
+                </a:solidFill>
+                <a:latin typeface="Calibri"/>
+              </a:rPr>
+              <a:t>     –  page counts, token density, artifacts found, regions the model wasn't sure about, regions it dropped</a:t>
+            </a:r>
+          </a:p>
+          <a:p>
+            <a:pPr>
+              <a:spcAft>
+                <a:spcPts val="1200"/>
+              </a:spcAft>
+            </a:pPr>
+            <a:r>
+              <a:rPr sz="2000" b="1">
+                <a:solidFill>
+                  <a:srgbClr val="1A1D27"/>
+                </a:solidFill>
+                <a:latin typeface="Calibri"/>
+              </a:rPr>
+              <a:t>▸  The deliverable is one Excel workbook -- because the person who needs to sanity-check 50 documents is rarely the person who wrote the pipeline</a:t>
+            </a:r>
+          </a:p>
+        </p:txBody>
+      </p:sp>
+      <p:sp>
+        <p:nvSpPr>
+          <p:cNvPr id="6" name="TextBox 5"/>
+          <p:cNvSpPr txBox="1"/>
+          <p:nvPr/>
+        </p:nvSpPr>
+        <p:spPr>
+          <a:xfrm>
+            <a:off x="11521440" y="6446520"/>
+            <a:ext cx="548640" cy="320040"/>
+          </a:xfrm>
+          <a:prstGeom prst="rect">
+            <a:avLst/>
+          </a:prstGeom>
+          <a:noFill/>
+        </p:spPr>
+        <p:txBody>
+          <a:bodyPr wrap="square">
+            <a:spAutoFit/>
+          </a:bodyPr>
+          <a:lstStyle/>
+          <a:p>
+            <a:pPr algn="r"/>
+            <a:r>
+              <a:rPr sz="1100" b="0" i="0">
+                <a:solidFill>
+                  <a:srgbClr val="5B6374"/>
+                </a:solidFill>
+                <a:latin typeface="Calibri"/>
+              </a:rPr>
+              <a:t>3</a:t>
+            </a:r>
+          </a:p>
+        </p:txBody>
+      </p:sp>
+    </p:spTree>
+  </p:cSld>
+  <p:clrMapOvr>
+    <a:masterClrMapping/>
+  </p:clrMapOvr>
+</p:sld>
+</file>
+
+<file path=ppt/slides/slide4.xml><?xml version="1.0" encoding="utf-8"?>
+<p:sld xmlns:a="http://schemas.openxmlformats.org/drawingml/2006/main" xmlns:p="http://schemas.openxmlformats.org/presentationml/2006/main" xmlns:r="http://schemas.openxmlformats.org/officeDocument/2006/relationships">
+  <p:cSld>
+    <p:bg>
+      <p:bgPr>
+        <a:solidFill>
+          <a:srgbClr val="FFFFFF"/>
+        </a:solidFill>
+        <a:effectLst/>
+      </p:bgPr>
+    </p:bg>
+    <p:spTree>
+      <p:nvGrpSpPr>
+        <p:cNvPr id="1" name=""/>
+        <p:cNvGrpSpPr/>
+        <p:nvPr/>
+      </p:nvGrpSpPr>
+      <p:grpSpPr/>
+      <p:sp>
+        <p:nvSpPr>
+          <p:cNvPr id="2" name="Rectangle 1"/>
+          <p:cNvSpPr/>
+          <p:nvPr/>
+        </p:nvSpPr>
+        <p:spPr>
+          <a:xfrm>
+            <a:off x="0" y="0"/>
+            <a:ext cx="12191695" cy="109728"/>
+          </a:xfrm>
+          <a:prstGeom prst="rect">
+            <a:avLst/>
+          </a:prstGeom>
+          <a:solidFill>
+            <a:srgbClr val="3E8EDE"/>
+          </a:solidFill>
+          <a:ln>
+            <a:noFill/>
+          </a:ln>
+        </p:spPr>
+        <p:style>
+          <a:lnRef idx="1">
+            <a:schemeClr val="accent1"/>
+          </a:lnRef>
+          <a:fillRef idx="3">
+            <a:schemeClr val="accent1"/>
+          </a:fillRef>
+          <a:effectRef idx="2">
+            <a:schemeClr val="accent1"/>
+          </a:effectRef>
+          <a:fontRef idx="minor">
+            <a:schemeClr val="lt1"/>
+          </a:fontRef>
+        </p:style>
+        <p:txBody>
+          <a:bodyPr rtlCol="0" anchor="ctr"/>
+          <a:lstStyle/>
+          <a:p>
+            <a:pPr algn="ctr"/>
+          </a:p>
+        </p:txBody>
+      </p:sp>
+      <p:sp>
+        <p:nvSpPr>
+          <p:cNvPr id="3" name="TextBox 2"/>
+          <p:cNvSpPr txBox="1"/>
+          <p:nvPr/>
+        </p:nvSpPr>
+        <p:spPr>
+          <a:xfrm>
+            <a:off x="640080" y="411480"/>
+            <a:ext cx="10881360" cy="457200"/>
+          </a:xfrm>
+          <a:prstGeom prst="rect">
+            <a:avLst/>
+          </a:prstGeom>
+          <a:noFill/>
+        </p:spPr>
+        <p:txBody>
+          <a:bodyPr wrap="square">
+            <a:spAutoFit/>
+          </a:bodyPr>
+          <a:lstStyle/>
+          <a:p>
+            <a:pPr algn="l"/>
+            <a:r>
+              <a:rPr sz="1500" b="1" i="0">
+                <a:solidFill>
+                  <a:srgbClr val="3E8EDE"/>
+                </a:solidFill>
+                <a:latin typeface="Calibri"/>
+              </a:rPr>
+              <a:t>HOW THIS HELPS</a:t>
+            </a:r>
+          </a:p>
+        </p:txBody>
+      </p:sp>
+      <p:sp>
+        <p:nvSpPr>
+          <p:cNvPr id="4" name="TextBox 3"/>
+          <p:cNvSpPr txBox="1"/>
+          <p:nvPr/>
+        </p:nvSpPr>
+        <p:spPr>
+          <a:xfrm>
+            <a:off x="640080" y="777240"/>
+            <a:ext cx="10881360" cy="822960"/>
+          </a:xfrm>
+          <a:prstGeom prst="rect">
+            <a:avLst/>
+          </a:prstGeom>
+          <a:noFill/>
+        </p:spPr>
+        <p:txBody>
+          <a:bodyPr wrap="square">
+            <a:spAutoFit/>
+          </a:bodyPr>
+          <a:lstStyle/>
+          <a:p>
+            <a:pPr algn="l"/>
+            <a:r>
+              <a:rPr sz="3000" b="1" i="0">
+                <a:solidFill>
+                  <a:srgbClr val="1A1D27"/>
+                </a:solidFill>
+                <a:latin typeface="Calibri"/>
+              </a:rPr>
+              <a:t>Three Things This Module Actually Buys You</a:t>
+            </a:r>
+          </a:p>
+        </p:txBody>
+      </p:sp>
+      <p:sp>
+        <p:nvSpPr>
+          <p:cNvPr id="5" name="TextBox 4"/>
+          <p:cNvSpPr txBox="1"/>
+          <p:nvPr/>
+        </p:nvSpPr>
+        <p:spPr>
+          <a:xfrm>
+            <a:off x="731520" y="1691640"/>
+            <a:ext cx="10698480" cy="4480560"/>
+          </a:xfrm>
+          <a:prstGeom prst="rect">
+            <a:avLst/>
+          </a:prstGeom>
+          <a:noFill/>
+        </p:spPr>
+        <p:txBody>
+          <a:bodyPr wrap="square">
+            <a:spAutoFit/>
+          </a:bodyPr>
+          <a:lstStyle/>
+          <a:p>
+            <a:pPr>
+              <a:spcAft>
+                <a:spcPts val="1200"/>
+              </a:spcAft>
+            </a:pPr>
+            <a:r>
+              <a:rPr sz="2000" b="1">
+                <a:solidFill>
+                  <a:srgbClr val="1A1D27"/>
+                </a:solidFill>
+                <a:latin typeface="Calibri"/>
+              </a:rPr>
+              <a:t>▸  Identification -- given 50 processed documents, which ones likely have an extraction problem, from the numbers alone, before opening a single file</a:t>
+            </a:r>
+          </a:p>
+          <a:p>
+            <a:pPr>
+              <a:spcAft>
+                <a:spcPts val="1200"/>
+              </a:spcAft>
+            </a:pPr>
+            <a:r>
+              <a:rPr sz="2000" b="1">
+                <a:solidFill>
+                  <a:srgbClr val="1A1D27"/>
+                </a:solidFill>
+                <a:latin typeface="Calibri"/>
+              </a:rPr>
+              <a:t>▸  Validation -- confirm a document that finished without errors is actually trustworthy enough to move downstream into chunking and embedding</a:t>
+            </a:r>
+          </a:p>
+          <a:p>
+            <a:pPr>
+              <a:spcAft>
+                <a:spcPts val="1200"/>
+              </a:spcAft>
+            </a:pPr>
+            <a:r>
+              <a:rPr sz="2000" b="1">
+                <a:solidFill>
+                  <a:srgbClr val="1A1D27"/>
+                </a:solidFill>
+                <a:latin typeface="Calibri"/>
+              </a:rPr>
+              <a:t>▸  Root cause analysis -- when a document does look wrong, trace it back to the exact page and region that caused it, not just know something's off</a:t>
+            </a:r>
+          </a:p>
+          <a:p>
+            <a:pPr>
+              <a:spcAft>
+                <a:spcPts val="1200"/>
+              </a:spcAft>
+            </a:pPr>
+            <a:r>
+              <a:rPr sz="2000" b="1">
+                <a:solidFill>
+                  <a:srgbClr val="1A1D27"/>
+                </a:solidFill>
+                <a:latin typeface="Calibri"/>
+              </a:rPr>
+              <a:t>▸  All three come from the same source: real per-document metrics, computed once, put in front of a human who can actually question them</a:t>
+            </a:r>
+          </a:p>
+        </p:txBody>
+      </p:sp>
+      <p:sp>
+        <p:nvSpPr>
+          <p:cNvPr id="6" name="TextBox 5"/>
+          <p:cNvSpPr txBox="1"/>
+          <p:nvPr/>
+        </p:nvSpPr>
+        <p:spPr>
+          <a:xfrm>
+            <a:off x="11521440" y="6446520"/>
+            <a:ext cx="548640" cy="320040"/>
+          </a:xfrm>
+          <a:prstGeom prst="rect">
+            <a:avLst/>
+          </a:prstGeom>
+          <a:noFill/>
+        </p:spPr>
+        <p:txBody>
+          <a:bodyPr wrap="square">
+            <a:spAutoFit/>
+          </a:bodyPr>
+          <a:lstStyle/>
+          <a:p>
+            <a:pPr algn="r"/>
+            <a:r>
+              <a:rPr sz="1100" b="0" i="0">
+                <a:solidFill>
+                  <a:srgbClr val="5B6374"/>
+                </a:solidFill>
+                <a:latin typeface="Calibri"/>
+              </a:rPr>
+              <a:t>4</a:t>
+            </a:r>
+          </a:p>
+        </p:txBody>
+      </p:sp>
+    </p:spTree>
+  </p:cSld>
+  <p:clrMapOvr>
+    <a:masterClrMapping/>
+  </p:clrMapOvr>
+</p:sld>
+</file>
+
+<file path=ppt/slides/slide5.xml><?xml version="1.0" encoding="utf-8"?>
+<p:sld xmlns:a="http://schemas.openxmlformats.org/drawingml/2006/main" xmlns:p="http://schemas.openxmlformats.org/presentationml/2006/main" xmlns:r="http://schemas.openxmlformats.org/officeDocument/2006/relationships">
+  <p:cSld>
+    <p:bg>
+      <p:bgPr>
+        <a:solidFill>
+          <a:srgbClr val="FFFFFF"/>
+        </a:solidFill>
+        <a:effectLst/>
+      </p:bgPr>
+    </p:bg>
+    <p:spTree>
+      <p:nvGrpSpPr>
+        <p:cNvPr id="1" name=""/>
+        <p:cNvGrpSpPr/>
+        <p:nvPr/>
+      </p:nvGrpSpPr>
+      <p:grpSpPr/>
+      <p:sp>
+        <p:nvSpPr>
+          <p:cNvPr id="2" name="Rectangle 1"/>
+          <p:cNvSpPr/>
+          <p:nvPr/>
+        </p:nvSpPr>
+        <p:spPr>
+          <a:xfrm>
+            <a:off x="0" y="0"/>
+            <a:ext cx="12191695" cy="109728"/>
+          </a:xfrm>
+          <a:prstGeom prst="rect">
+            <a:avLst/>
+          </a:prstGeom>
+          <a:solidFill>
+            <a:srgbClr val="3E8EDE"/>
+          </a:solidFill>
+          <a:ln>
+            <a:noFill/>
+          </a:ln>
+        </p:spPr>
+        <p:style>
+          <a:lnRef idx="1">
+            <a:schemeClr val="accent1"/>
+          </a:lnRef>
+          <a:fillRef idx="3">
+            <a:schemeClr val="accent1"/>
+          </a:fillRef>
+          <a:effectRef idx="2">
+            <a:schemeClr val="accent1"/>
+          </a:effectRef>
+          <a:fontRef idx="minor">
+            <a:schemeClr val="lt1"/>
+          </a:fontRef>
+        </p:style>
+        <p:txBody>
+          <a:bodyPr rtlCol="0" anchor="ctr"/>
+          <a:lstStyle/>
+          <a:p>
+            <a:pPr algn="ctr"/>
+          </a:p>
+        </p:txBody>
+      </p:sp>
+      <p:sp>
+        <p:nvSpPr>
+          <p:cNvPr id="3" name="TextBox 2"/>
+          <p:cNvSpPr txBox="1"/>
+          <p:nvPr/>
+        </p:nvSpPr>
+        <p:spPr>
+          <a:xfrm>
+            <a:off x="640080" y="411480"/>
+            <a:ext cx="10881360" cy="457200"/>
+          </a:xfrm>
+          <a:prstGeom prst="rect">
+            <a:avLst/>
+          </a:prstGeom>
+          <a:noFill/>
+        </p:spPr>
+        <p:txBody>
+          <a:bodyPr wrap="square">
+            <a:spAutoFit/>
+          </a:bodyPr>
+          <a:lstStyle/>
+          <a:p>
+            <a:pPr algn="l"/>
+            <a:r>
+              <a:rPr sz="1500" b="1" i="0">
+                <a:solidFill>
+                  <a:srgbClr val="3E8EDE"/>
+                </a:solidFill>
+                <a:latin typeface="Calibri"/>
+              </a:rPr>
+              <a:t>OVERVIEW</a:t>
+            </a:r>
+          </a:p>
+        </p:txBody>
+      </p:sp>
+      <p:sp>
+        <p:nvSpPr>
+          <p:cNvPr id="4" name="TextBox 3"/>
+          <p:cNvSpPr txBox="1"/>
+          <p:nvPr/>
+        </p:nvSpPr>
+        <p:spPr>
+          <a:xfrm>
+            <a:off x="640080" y="777240"/>
+            <a:ext cx="10881360" cy="822960"/>
+          </a:xfrm>
+          <a:prstGeom prst="rect">
+            <a:avLst/>
+          </a:prstGeom>
+          <a:noFill/>
+        </p:spPr>
+        <p:txBody>
+          <a:bodyPr wrap="square">
+            <a:spAutoFit/>
+          </a:bodyPr>
+          <a:lstStyle/>
+          <a:p>
+            <a:pPr algn="l"/>
+            <a:r>
+              <a:rPr sz="3000" b="1" i="0">
+                <a:solidFill>
+                  <a:srgbClr val="1A1D27"/>
+                </a:solidFill>
+                <a:latin typeface="Calibri"/>
+              </a:rPr>
+              <a:t>What This Module Does</a:t>
+            </a:r>
+          </a:p>
+        </p:txBody>
+      </p:sp>
+      <p:sp>
+        <p:nvSpPr>
+          <p:cNvPr id="5" name="TextBox 4"/>
+          <p:cNvSpPr txBox="1"/>
+          <p:nvPr/>
+        </p:nvSpPr>
+        <p:spPr>
+          <a:xfrm>
+            <a:off x="731520" y="1691640"/>
+            <a:ext cx="10698480" cy="4480560"/>
+          </a:xfrm>
+          <a:prstGeom prst="rect">
+            <a:avLst/>
+          </a:prstGeom>
+          <a:noFill/>
+        </p:spPr>
+        <p:txBody>
+          <a:bodyPr wrap="square">
+            <a:spAutoFit/>
+          </a:bodyPr>
+          <a:lstStyle/>
+          <a:p>
+            <a:pPr>
+              <a:spcAft>
+                <a:spcPts val="1200"/>
+              </a:spcAft>
+            </a:pPr>
+            <a:r>
+              <a:rPr sz="2000" b="1">
+                <a:solidFill>
+                  <a:srgbClr val="1A1D27"/>
+                </a:solidFill>
+                <a:latin typeface="Calibri"/>
+              </a:rPr>
+              <a:t>▸  Reads every completed document Module 1 produced -- the extracted text plus its layout metadata</a:t>
+            </a:r>
+          </a:p>
+          <a:p>
+            <a:pPr>
+              <a:spcAft>
+                <a:spcPts val="1200"/>
+              </a:spcAft>
+            </a:pPr>
+            <a:r>
+              <a:rPr sz="2000" b="1">
+                <a:solidFill>
+                  <a:srgbClr val="1A1D27"/>
+                </a:solidFill>
+                <a:latin typeface="Calibri"/>
+              </a:rPr>
+              <a:t>▸  Computes, per document: page count, real token count, tokens/page, images and tables found, artifact counts, low-confidence region count, dropped region count</a:t>
+            </a:r>
+          </a:p>
+          <a:p>
+            <a:pPr>
+              <a:spcAft>
+                <a:spcPts val="1200"/>
+              </a:spcAft>
+            </a:pPr>
+            <a:r>
+              <a:rPr sz="2000" b="1">
+                <a:solidFill>
+                  <a:srgbClr val="1A1D27"/>
+                </a:solidFill>
+                <a:latin typeface="Calibri"/>
+              </a:rPr>
+              <a:t>▸  Writes one Excel workbook: a Summary sheet (one row per document) plus detail sheets for anything worth a second look</a:t>
+            </a:r>
+          </a:p>
+        </p:txBody>
+      </p:sp>
+      <p:sp>
+        <p:nvSpPr>
+          <p:cNvPr id="6" name="TextBox 5"/>
+          <p:cNvSpPr txBox="1"/>
+          <p:nvPr/>
+        </p:nvSpPr>
+        <p:spPr>
+          <a:xfrm>
+            <a:off x="11521440" y="6446520"/>
+            <a:ext cx="548640" cy="320040"/>
+          </a:xfrm>
+          <a:prstGeom prst="rect">
+            <a:avLst/>
+          </a:prstGeom>
+          <a:noFill/>
+        </p:spPr>
+        <p:txBody>
+          <a:bodyPr wrap="square">
+            <a:spAutoFit/>
+          </a:bodyPr>
+          <a:lstStyle/>
+          <a:p>
+            <a:pPr algn="r"/>
+            <a:r>
+              <a:rPr sz="1100" b="0" i="0">
+                <a:solidFill>
+                  <a:srgbClr val="5B6374"/>
+                </a:solidFill>
+                <a:latin typeface="Calibri"/>
+              </a:rPr>
+              <a:t>5</a:t>
+            </a:r>
+          </a:p>
+        </p:txBody>
+      </p:sp>
+    </p:spTree>
+  </p:cSld>
+  <p:clrMapOvr>
+    <a:masterClrMapping/>
+  </p:clrMapOvr>
+</p:sld>
+</file>
+
+<file path=ppt/slides/slide6.xml><?xml version="1.0" encoding="utf-8"?>
+<p:sld xmlns:a="http://schemas.openxmlformats.org/drawingml/2006/main" xmlns:p="http://schemas.openxmlformats.org/presentationml/2006/main" xmlns:r="http://schemas.openxmlformats.org/officeDocument/2006/relationships">
+  <p:cSld>
+    <p:bg>
+      <p:bgPr>
+        <a:solidFill>
+          <a:srgbClr val="FFFFFF"/>
+        </a:solidFill>
+        <a:effectLst/>
+      </p:bgPr>
+    </p:bg>
+    <p:spTree>
+      <p:nvGrpSpPr>
+        <p:cNvPr id="1" name=""/>
+        <p:cNvGrpSpPr/>
+        <p:nvPr/>
+      </p:nvGrpSpPr>
+      <p:grpSpPr/>
+      <p:sp>
+        <p:nvSpPr>
+          <p:cNvPr id="2" name="Rectangle 1"/>
+          <p:cNvSpPr/>
+          <p:nvPr/>
+        </p:nvSpPr>
+        <p:spPr>
+          <a:xfrm>
+            <a:off x="0" y="0"/>
+            <a:ext cx="12191695" cy="109728"/>
+          </a:xfrm>
+          <a:prstGeom prst="rect">
+            <a:avLst/>
+          </a:prstGeom>
+          <a:solidFill>
+            <a:srgbClr val="3E8EDE"/>
+          </a:solidFill>
+          <a:ln>
+            <a:noFill/>
+          </a:ln>
+        </p:spPr>
+        <p:style>
+          <a:lnRef idx="1">
+            <a:schemeClr val="accent1"/>
+          </a:lnRef>
+          <a:fillRef idx="3">
+            <a:schemeClr val="accent1"/>
+          </a:fillRef>
+          <a:effectRef idx="2">
+            <a:schemeClr val="accent1"/>
+          </a:effectRef>
+          <a:fontRef idx="minor">
+            <a:schemeClr val="lt1"/>
+          </a:fontRef>
+        </p:style>
+        <p:txBody>
+          <a:bodyPr rtlCol="0" anchor="ctr"/>
+          <a:lstStyle/>
+          <a:p>
+            <a:pPr algn="ctr"/>
+          </a:p>
+        </p:txBody>
+      </p:sp>
+      <p:sp>
+        <p:nvSpPr>
+          <p:cNvPr id="3" name="TextBox 2"/>
+          <p:cNvSpPr txBox="1"/>
+          <p:nvPr/>
+        </p:nvSpPr>
+        <p:spPr>
+          <a:xfrm>
+            <a:off x="640080" y="411480"/>
+            <a:ext cx="10881360" cy="457200"/>
+          </a:xfrm>
+          <a:prstGeom prst="rect">
+            <a:avLst/>
+          </a:prstGeom>
+          <a:noFill/>
+        </p:spPr>
+        <p:txBody>
+          <a:bodyPr wrap="square">
+            <a:spAutoFit/>
+          </a:bodyPr>
+          <a:lstStyle/>
+          <a:p>
+            <a:pPr algn="l"/>
+            <a:r>
+              <a:rPr sz="1500" b="1" i="0">
+                <a:solidFill>
+                  <a:srgbClr val="3E8EDE"/>
+                </a:solidFill>
+                <a:latin typeface="Calibri"/>
+              </a:rPr>
+              <a:t>THE CORE QUESTION</a:t>
+            </a:r>
+          </a:p>
+        </p:txBody>
+      </p:sp>
+      <p:sp>
+        <p:nvSpPr>
+          <p:cNvPr id="4" name="TextBox 3"/>
+          <p:cNvSpPr txBox="1"/>
+          <p:nvPr/>
+        </p:nvSpPr>
+        <p:spPr>
+          <a:xfrm>
+            <a:off x="640080" y="777240"/>
+            <a:ext cx="10881360" cy="822960"/>
+          </a:xfrm>
+          <a:prstGeom prst="rect">
+            <a:avLst/>
+          </a:prstGeom>
+          <a:noFill/>
+        </p:spPr>
+        <p:txBody>
+          <a:bodyPr wrap="square">
+            <a:spAutoFit/>
+          </a:bodyPr>
+          <a:lstStyle/>
+          <a:p>
+            <a:pPr algn="l"/>
+            <a:r>
+              <a:rPr sz="3000" b="1" i="0">
+                <a:solidFill>
+                  <a:srgbClr val="1A1D27"/>
+                </a:solidFill>
+                <a:latin typeface="Calibri"/>
+              </a:rPr>
+              <a:t>How Many Tokens Per Page, Really?</a:t>
+            </a:r>
+          </a:p>
+        </p:txBody>
+      </p:sp>
+      <p:sp>
+        <p:nvSpPr>
+          <p:cNvPr id="5" name="TextBox 4"/>
+          <p:cNvSpPr txBox="1"/>
+          <p:nvPr/>
+        </p:nvSpPr>
+        <p:spPr>
+          <a:xfrm>
+            <a:off x="731520" y="1691640"/>
+            <a:ext cx="10698480" cy="4480560"/>
+          </a:xfrm>
+          <a:prstGeom prst="rect">
+            <a:avLst/>
+          </a:prstGeom>
+          <a:noFill/>
+        </p:spPr>
+        <p:txBody>
+          <a:bodyPr wrap="square">
+            <a:spAutoFit/>
+          </a:bodyPr>
+          <a:lstStyle/>
+          <a:p>
+            <a:pPr>
+              <a:spcAft>
+                <a:spcPts val="1200"/>
+              </a:spcAft>
+            </a:pPr>
+            <a:r>
+              <a:rPr sz="2000" b="1">
+                <a:solidFill>
+                  <a:srgbClr val="1A1D27"/>
+                </a:solidFill>
+                <a:latin typeface="Calibri"/>
+              </a:rPr>
+              <a:t>▸  “Word count” is not “token count.” A word can be one token, several tokens, or a fraction of a shared token -- it depends on the tokenizer</a:t>
+            </a:r>
+          </a:p>
+          <a:p>
+            <a:pPr>
+              <a:spcAft>
+                <a:spcPts val="1200"/>
+              </a:spcAft>
+            </a:pPr>
+            <a:r>
+              <a:rPr sz="2000" b="1">
+                <a:solidFill>
+                  <a:srgbClr val="1A1D27"/>
+                </a:solidFill>
+                <a:latin typeface="Calibri"/>
+              </a:rPr>
+              <a:t>▸  Why this matters here specifically: every downstream step (chunking, any embedding or LLM call) is budgeted in tokens, not words or characters</a:t>
+            </a:r>
+          </a:p>
+          <a:p>
+            <a:pPr>
+              <a:spcAft>
+                <a:spcPts val="1200"/>
+              </a:spcAft>
+            </a:pPr>
+            <a:r>
+              <a:rPr sz="2000" b="1">
+                <a:solidFill>
+                  <a:srgbClr val="1A1D27"/>
+                </a:solidFill>
+                <a:latin typeface="Calibri"/>
+              </a:rPr>
+              <a:t>▸  So this module counts tokens with the SAME tokenizer the extraction model uses, rather than estimating -- an approximation here would quietly mislead every step after it</a:t>
+            </a:r>
+          </a:p>
+        </p:txBody>
+      </p:sp>
+      <p:sp>
+        <p:nvSpPr>
+          <p:cNvPr id="6" name="TextBox 5"/>
+          <p:cNvSpPr txBox="1"/>
+          <p:nvPr/>
+        </p:nvSpPr>
+        <p:spPr>
+          <a:xfrm>
+            <a:off x="11521440" y="6446520"/>
+            <a:ext cx="548640" cy="320040"/>
+          </a:xfrm>
+          <a:prstGeom prst="rect">
+            <a:avLst/>
+          </a:prstGeom>
+          <a:noFill/>
+        </p:spPr>
+        <p:txBody>
+          <a:bodyPr wrap="square">
+            <a:spAutoFit/>
+          </a:bodyPr>
+          <a:lstStyle/>
+          <a:p>
+            <a:pPr algn="r"/>
+            <a:r>
+              <a:rPr sz="1100" b="0" i="0">
+                <a:solidFill>
+                  <a:srgbClr val="5B6374"/>
+                </a:solidFill>
+                <a:latin typeface="Calibri"/>
+              </a:rPr>
+              <a:t>6</a:t>
+            </a:r>
+          </a:p>
+        </p:txBody>
+      </p:sp>
+    </p:spTree>
+  </p:cSld>
+  <p:clrMapOvr>
+    <a:masterClrMapping/>
+  </p:clrMapOvr>
+</p:sld>
+</file>
+
+<file path=ppt/slides/slide7.xml><?xml version="1.0" encoding="utf-8"?>
 <p:sld xmlns:a="http://schemas.openxmlformats.org/drawingml/2006/main" xmlns:p="http://schemas.openxmlformats.org/presentationml/2006/main" xmlns:r="http://schemas.openxmlformats.org/officeDocument/2006/relationships">
   <p:cSld>
     <p:bg>
@@ -3892,3806 +6496,6 @@
                 </a:solidFill>
                 <a:latin typeface="Calibri"/>
               </a:rPr>
-              <a:t>10</a:t>
-            </a:r>
-          </a:p>
-        </p:txBody>
-      </p:sp>
-    </p:spTree>
-  </p:cSld>
-  <p:clrMapOvr>
-    <a:masterClrMapping/>
-  </p:clrMapOvr>
-</p:sld>
-</file>
-
-<file path=ppt/slides/slide11.xml><?xml version="1.0" encoding="utf-8"?>
-<p:sld xmlns:a="http://schemas.openxmlformats.org/drawingml/2006/main" xmlns:p="http://schemas.openxmlformats.org/presentationml/2006/main" xmlns:r="http://schemas.openxmlformats.org/officeDocument/2006/relationships">
-  <p:cSld>
-    <p:bg>
-      <p:bgPr>
-        <a:solidFill>
-          <a:srgbClr val="FFFFFF"/>
-        </a:solidFill>
-        <a:effectLst/>
-      </p:bgPr>
-    </p:bg>
-    <p:spTree>
-      <p:nvGrpSpPr>
-        <p:cNvPr id="1" name=""/>
-        <p:cNvGrpSpPr/>
-        <p:nvPr/>
-      </p:nvGrpSpPr>
-      <p:grpSpPr/>
-      <p:sp>
-        <p:nvSpPr>
-          <p:cNvPr id="2" name="Rectangle 1"/>
-          <p:cNvSpPr/>
-          <p:nvPr/>
-        </p:nvSpPr>
-        <p:spPr>
-          <a:xfrm>
-            <a:off x="0" y="0"/>
-            <a:ext cx="12191695" cy="109728"/>
-          </a:xfrm>
-          <a:prstGeom prst="rect">
-            <a:avLst/>
-          </a:prstGeom>
-          <a:solidFill>
-            <a:srgbClr val="3E8EDE"/>
-          </a:solidFill>
-          <a:ln>
-            <a:noFill/>
-          </a:ln>
-        </p:spPr>
-        <p:style>
-          <a:lnRef idx="1">
-            <a:schemeClr val="accent1"/>
-          </a:lnRef>
-          <a:fillRef idx="3">
-            <a:schemeClr val="accent1"/>
-          </a:fillRef>
-          <a:effectRef idx="2">
-            <a:schemeClr val="accent1"/>
-          </a:effectRef>
-          <a:fontRef idx="minor">
-            <a:schemeClr val="lt1"/>
-          </a:fontRef>
-        </p:style>
-        <p:txBody>
-          <a:bodyPr rtlCol="0" anchor="ctr"/>
-          <a:lstStyle/>
-          <a:p>
-            <a:pPr algn="ctr"/>
-          </a:p>
-        </p:txBody>
-      </p:sp>
-      <p:sp>
-        <p:nvSpPr>
-          <p:cNvPr id="3" name="TextBox 2"/>
-          <p:cNvSpPr txBox="1"/>
-          <p:nvPr/>
-        </p:nvSpPr>
-        <p:spPr>
-          <a:xfrm>
-            <a:off x="640080" y="411480"/>
-            <a:ext cx="10881360" cy="457200"/>
-          </a:xfrm>
-          <a:prstGeom prst="rect">
-            <a:avLst/>
-          </a:prstGeom>
-          <a:noFill/>
-        </p:spPr>
-        <p:txBody>
-          <a:bodyPr wrap="square">
-            <a:spAutoFit/>
-          </a:bodyPr>
-          <a:lstStyle/>
-          <a:p>
-            <a:pPr algn="l"/>
-            <a:r>
-              <a:rPr sz="1500" b="1" i="0">
-                <a:solidFill>
-                  <a:srgbClr val="3E8EDE"/>
-                </a:solidFill>
-                <a:latin typeface="Calibri"/>
-              </a:rPr>
-              <a:t>WHAT ELSE GETS MEASURED</a:t>
-            </a:r>
-          </a:p>
-        </p:txBody>
-      </p:sp>
-      <p:sp>
-        <p:nvSpPr>
-          <p:cNvPr id="4" name="TextBox 3"/>
-          <p:cNvSpPr txBox="1"/>
-          <p:nvPr/>
-        </p:nvSpPr>
-        <p:spPr>
-          <a:xfrm>
-            <a:off x="640080" y="777240"/>
-            <a:ext cx="10881360" cy="822960"/>
-          </a:xfrm>
-          <a:prstGeom prst="rect">
-            <a:avLst/>
-          </a:prstGeom>
-          <a:noFill/>
-        </p:spPr>
-        <p:txBody>
-          <a:bodyPr wrap="square">
-            <a:spAutoFit/>
-          </a:bodyPr>
-          <a:lstStyle/>
-          <a:p>
-            <a:pPr algn="l"/>
-            <a:r>
-              <a:rPr sz="3000" b="1" i="0">
-                <a:solidFill>
-                  <a:srgbClr val="1A1D27"/>
-                </a:solidFill>
-                <a:latin typeface="Calibri"/>
-              </a:rPr>
-              <a:t>Beyond Just Tokens</a:t>
-            </a:r>
-          </a:p>
-        </p:txBody>
-      </p:sp>
-      <p:sp>
-        <p:nvSpPr>
-          <p:cNvPr id="5" name="TextBox 4"/>
-          <p:cNvSpPr txBox="1"/>
-          <p:nvPr/>
-        </p:nvSpPr>
-        <p:spPr>
-          <a:xfrm>
-            <a:off x="731520" y="1691640"/>
-            <a:ext cx="10698480" cy="4480560"/>
-          </a:xfrm>
-          <a:prstGeom prst="rect">
-            <a:avLst/>
-          </a:prstGeom>
-          <a:noFill/>
-        </p:spPr>
-        <p:txBody>
-          <a:bodyPr wrap="square">
-            <a:spAutoFit/>
-          </a:bodyPr>
-          <a:lstStyle/>
-          <a:p>
-            <a:pPr>
-              <a:spcAft>
-                <a:spcPts val="1000"/>
-              </a:spcAft>
-            </a:pPr>
-            <a:r>
-              <a:rPr sz="1800" b="1">
-                <a:solidFill>
-                  <a:srgbClr val="1A1D27"/>
-                </a:solidFill>
-                <a:latin typeface="Calibri"/>
-              </a:rPr>
-              <a:t>▸  images_in_body / tables_in_body -- counted directly from the markdown (![...] and &lt;table occurrences)</a:t>
-            </a:r>
-          </a:p>
-          <a:p>
-            <a:pPr>
-              <a:spcAft>
-                <a:spcPts val="1000"/>
-              </a:spcAft>
-            </a:pPr>
-            <a:r>
-              <a:rPr sz="1800" b="1">
-                <a:solidFill>
-                  <a:srgbClr val="1A1D27"/>
-                </a:solidFill>
-                <a:latin typeface="Calibri"/>
-              </a:rPr>
-              <a:t>▸  logo_count / signature_count / stamp_seal_count / other_artifact_count -- tallied from metadata.json's artifacts_detected</a:t>
-            </a:r>
-          </a:p>
-          <a:p>
-            <a:pPr>
-              <a:spcAft>
-                <a:spcPts val="1000"/>
-              </a:spcAft>
-            </a:pPr>
-            <a:r>
-              <a:rPr sz="1800" b="1">
-                <a:solidFill>
-                  <a:srgbClr val="1A1D27"/>
-                </a:solidFill>
-                <a:latin typeface="Calibri"/>
-              </a:rPr>
-              <a:t>▸  low_confidence_count -- regions the layout detector itself flagged as uncertain</a:t>
-            </a:r>
-          </a:p>
-          <a:p>
-            <a:pPr>
-              <a:spcAft>
-                <a:spcPts val="1000"/>
-              </a:spcAft>
-            </a:pPr>
-            <a:r>
-              <a:rPr sz="1800" b="1">
-                <a:solidFill>
-                  <a:srgbClr val="1A1D27"/>
-                </a:solidFill>
-                <a:latin typeface="Calibri"/>
-              </a:rPr>
-              <a:t>▸  dropped_region_count -- regions excluded from the document body (headers/footers, or misclassified content -- see Module 1's README)</a:t>
-            </a:r>
-          </a:p>
-          <a:p>
-            <a:pPr>
-              <a:spcAft>
-                <a:spcPts val="1000"/>
-              </a:spcAft>
-            </a:pPr>
-            <a:r>
-              <a:rPr sz="1800" b="1">
-                <a:solidFill>
-                  <a:srgbClr val="1A1D27"/>
-                </a:solidFill>
-                <a:latin typeface="Calibri"/>
-              </a:rPr>
-              <a:t>▸  malformed_table_count -- any &lt;table&gt; that failed a basic HTML tag-balance check</a:t>
-            </a:r>
-          </a:p>
-          <a:p>
-            <a:pPr>
-              <a:spcAft>
-                <a:spcPts val="1000"/>
-              </a:spcAft>
-            </a:pPr>
-            <a:r>
-              <a:rPr sz="1800" b="1">
-                <a:solidFill>
-                  <a:srgbClr val="1A1D27"/>
-                </a:solidFill>
-                <a:latin typeface="Calibri"/>
-              </a:rPr>
-              <a:t>▸  Plus native PDF metadata: title, author, creation date -- blank when the source PDF never set them</a:t>
-            </a:r>
-          </a:p>
-        </p:txBody>
-      </p:sp>
-      <p:sp>
-        <p:nvSpPr>
-          <p:cNvPr id="6" name="TextBox 5"/>
-          <p:cNvSpPr txBox="1"/>
-          <p:nvPr/>
-        </p:nvSpPr>
-        <p:spPr>
-          <a:xfrm>
-            <a:off x="11521440" y="6446520"/>
-            <a:ext cx="548640" cy="320040"/>
-          </a:xfrm>
-          <a:prstGeom prst="rect">
-            <a:avLst/>
-          </a:prstGeom>
-          <a:noFill/>
-        </p:spPr>
-        <p:txBody>
-          <a:bodyPr wrap="square">
-            <a:spAutoFit/>
-          </a:bodyPr>
-          <a:lstStyle/>
-          <a:p>
-            <a:pPr algn="r"/>
-            <a:r>
-              <a:rPr sz="1100" b="0" i="0">
-                <a:solidFill>
-                  <a:srgbClr val="5B6374"/>
-                </a:solidFill>
-                <a:latin typeface="Calibri"/>
-              </a:rPr>
-              <a:t>11</a:t>
-            </a:r>
-          </a:p>
-        </p:txBody>
-      </p:sp>
-    </p:spTree>
-  </p:cSld>
-  <p:clrMapOvr>
-    <a:masterClrMapping/>
-  </p:clrMapOvr>
-</p:sld>
-</file>
-
-<file path=ppt/slides/slide12.xml><?xml version="1.0" encoding="utf-8"?>
-<p:sld xmlns:a="http://schemas.openxmlformats.org/drawingml/2006/main" xmlns:p="http://schemas.openxmlformats.org/presentationml/2006/main" xmlns:r="http://schemas.openxmlformats.org/officeDocument/2006/relationships">
-  <p:cSld>
-    <p:bg>
-      <p:bgPr>
-        <a:solidFill>
-          <a:srgbClr val="FFFFFF"/>
-        </a:solidFill>
-        <a:effectLst/>
-      </p:bgPr>
-    </p:bg>
-    <p:spTree>
-      <p:nvGrpSpPr>
-        <p:cNvPr id="1" name=""/>
-        <p:cNvGrpSpPr/>
-        <p:nvPr/>
-      </p:nvGrpSpPr>
-      <p:grpSpPr/>
-      <p:sp>
-        <p:nvSpPr>
-          <p:cNvPr id="2" name="Rectangle 1"/>
-          <p:cNvSpPr/>
-          <p:nvPr/>
-        </p:nvSpPr>
-        <p:spPr>
-          <a:xfrm>
-            <a:off x="0" y="0"/>
-            <a:ext cx="12191695" cy="109728"/>
-          </a:xfrm>
-          <a:prstGeom prst="rect">
-            <a:avLst/>
-          </a:prstGeom>
-          <a:solidFill>
-            <a:srgbClr val="3E8EDE"/>
-          </a:solidFill>
-          <a:ln>
-            <a:noFill/>
-          </a:ln>
-        </p:spPr>
-        <p:style>
-          <a:lnRef idx="1">
-            <a:schemeClr val="accent1"/>
-          </a:lnRef>
-          <a:fillRef idx="3">
-            <a:schemeClr val="accent1"/>
-          </a:fillRef>
-          <a:effectRef idx="2">
-            <a:schemeClr val="accent1"/>
-          </a:effectRef>
-          <a:fontRef idx="minor">
-            <a:schemeClr val="lt1"/>
-          </a:fontRef>
-        </p:style>
-        <p:txBody>
-          <a:bodyPr rtlCol="0" anchor="ctr"/>
-          <a:lstStyle/>
-          <a:p>
-            <a:pPr algn="ctr"/>
-          </a:p>
-        </p:txBody>
-      </p:sp>
-      <p:sp>
-        <p:nvSpPr>
-          <p:cNvPr id="3" name="TextBox 2"/>
-          <p:cNvSpPr txBox="1"/>
-          <p:nvPr/>
-        </p:nvSpPr>
-        <p:spPr>
-          <a:xfrm>
-            <a:off x="640080" y="411480"/>
-            <a:ext cx="10881360" cy="457200"/>
-          </a:xfrm>
-          <a:prstGeom prst="rect">
-            <a:avLst/>
-          </a:prstGeom>
-          <a:noFill/>
-        </p:spPr>
-        <p:txBody>
-          <a:bodyPr wrap="square">
-            <a:spAutoFit/>
-          </a:bodyPr>
-          <a:lstStyle/>
-          <a:p>
-            <a:pPr algn="l"/>
-            <a:r>
-              <a:rPr sz="1500" b="1" i="0">
-                <a:solidFill>
-                  <a:srgbClr val="3E8EDE"/>
-                </a:solidFill>
-                <a:latin typeface="Calibri"/>
-              </a:rPr>
-              <a:t>THE DELIVERABLE</a:t>
-            </a:r>
-          </a:p>
-        </p:txBody>
-      </p:sp>
-      <p:sp>
-        <p:nvSpPr>
-          <p:cNvPr id="4" name="TextBox 3"/>
-          <p:cNvSpPr txBox="1"/>
-          <p:nvPr/>
-        </p:nvSpPr>
-        <p:spPr>
-          <a:xfrm>
-            <a:off x="640080" y="777240"/>
-            <a:ext cx="10881360" cy="822960"/>
-          </a:xfrm>
-          <a:prstGeom prst="rect">
-            <a:avLst/>
-          </a:prstGeom>
-          <a:noFill/>
-        </p:spPr>
-        <p:txBody>
-          <a:bodyPr wrap="square">
-            <a:spAutoFit/>
-          </a:bodyPr>
-          <a:lstStyle/>
-          <a:p>
-            <a:pPr algn="l"/>
-            <a:r>
-              <a:rPr sz="3000" b="1" i="0">
-                <a:solidFill>
-                  <a:srgbClr val="1A1D27"/>
-                </a:solidFill>
-                <a:latin typeface="Calibri"/>
-              </a:rPr>
-              <a:t>One Workbook, Four Sheets</a:t>
-            </a:r>
-          </a:p>
-        </p:txBody>
-      </p:sp>
-      <p:sp>
-        <p:nvSpPr>
-          <p:cNvPr id="5" name="TextBox 4"/>
-          <p:cNvSpPr txBox="1"/>
-          <p:nvPr/>
-        </p:nvSpPr>
-        <p:spPr>
-          <a:xfrm>
-            <a:off x="731520" y="1691640"/>
-            <a:ext cx="10698480" cy="4480560"/>
-          </a:xfrm>
-          <a:prstGeom prst="rect">
-            <a:avLst/>
-          </a:prstGeom>
-          <a:noFill/>
-        </p:spPr>
-        <p:txBody>
-          <a:bodyPr wrap="square">
-            <a:spAutoFit/>
-          </a:bodyPr>
-          <a:lstStyle/>
-          <a:p>
-            <a:pPr>
-              <a:spcAft>
-                <a:spcPts val="1200"/>
-              </a:spcAft>
-            </a:pPr>
-            <a:r>
-              <a:rPr sz="2000" b="1">
-                <a:solidFill>
-                  <a:srgbClr val="1A1D27"/>
-                </a:solidFill>
-                <a:latin typeface="Calibri"/>
-              </a:rPr>
-              <a:t>▸  Summary -- one row per document, every stat from the last two slides in one place</a:t>
-            </a:r>
-          </a:p>
-          <a:p>
-            <a:pPr>
-              <a:spcAft>
-                <a:spcPts val="1200"/>
-              </a:spcAft>
-            </a:pPr>
-            <a:r>
-              <a:rPr sz="2000" b="1">
-                <a:solidFill>
-                  <a:srgbClr val="1A1D27"/>
-                </a:solidFill>
-                <a:latin typeface="Calibri"/>
-              </a:rPr>
-              <a:t>▸  Artifacts Detail -- one row per detected logo/signature/stamp_seal: page, description, bounding box</a:t>
-            </a:r>
-          </a:p>
-          <a:p>
-            <a:pPr>
-              <a:spcAft>
-                <a:spcPts val="1200"/>
-              </a:spcAft>
-            </a:pPr>
-            <a:r>
-              <a:rPr sz="2000" b="1">
-                <a:solidFill>
-                  <a:srgbClr val="1A1D27"/>
-                </a:solidFill>
-                <a:latin typeface="Calibri"/>
-              </a:rPr>
-              <a:t>▸  Low Confidence Regions -- one row per region the layout detector wasn't sure about</a:t>
-            </a:r>
-          </a:p>
-          <a:p>
-            <a:pPr>
-              <a:spcAft>
-                <a:spcPts val="1200"/>
-              </a:spcAft>
-            </a:pPr>
-            <a:r>
-              <a:rPr sz="2000" b="1">
-                <a:solidFill>
-                  <a:srgbClr val="1A1D27"/>
-                </a:solidFill>
-                <a:latin typeface="Calibri"/>
-              </a:rPr>
-              <a:t>▸  Dropped Regions -- one row per region excluded from the body, including anything misclassified as page furniture</a:t>
-            </a:r>
-          </a:p>
-          <a:p>
-            <a:pPr>
-              <a:spcAft>
-                <a:spcPts val="600"/>
-              </a:spcAft>
-            </a:pPr>
-            <a:r>
-              <a:rPr sz="1600" b="0">
-                <a:solidFill>
-                  <a:srgbClr val="5B6374"/>
-                </a:solidFill>
-                <a:latin typeface="Calibri"/>
-              </a:rPr>
-              <a:t>     –  Cross-reference any bbox here against Module 1's output/&lt;doc&gt;/annotated/ images to see exactly what was found</a:t>
-            </a:r>
-          </a:p>
-        </p:txBody>
-      </p:sp>
-      <p:sp>
-        <p:nvSpPr>
-          <p:cNvPr id="6" name="TextBox 5"/>
-          <p:cNvSpPr txBox="1"/>
-          <p:nvPr/>
-        </p:nvSpPr>
-        <p:spPr>
-          <a:xfrm>
-            <a:off x="11521440" y="6446520"/>
-            <a:ext cx="548640" cy="320040"/>
-          </a:xfrm>
-          <a:prstGeom prst="rect">
-            <a:avLst/>
-          </a:prstGeom>
-          <a:noFill/>
-        </p:spPr>
-        <p:txBody>
-          <a:bodyPr wrap="square">
-            <a:spAutoFit/>
-          </a:bodyPr>
-          <a:lstStyle/>
-          <a:p>
-            <a:pPr algn="r"/>
-            <a:r>
-              <a:rPr sz="1100" b="0" i="0">
-                <a:solidFill>
-                  <a:srgbClr val="5B6374"/>
-                </a:solidFill>
-                <a:latin typeface="Calibri"/>
-              </a:rPr>
-              <a:t>12</a:t>
-            </a:r>
-          </a:p>
-        </p:txBody>
-      </p:sp>
-    </p:spTree>
-  </p:cSld>
-  <p:clrMapOvr>
-    <a:masterClrMapping/>
-  </p:clrMapOvr>
-</p:sld>
-</file>
-
-<file path=ppt/slides/slide13.xml><?xml version="1.0" encoding="utf-8"?>
-<p:sld xmlns:a="http://schemas.openxmlformats.org/drawingml/2006/main" xmlns:p="http://schemas.openxmlformats.org/presentationml/2006/main" xmlns:r="http://schemas.openxmlformats.org/officeDocument/2006/relationships">
-  <p:cSld>
-    <p:bg>
-      <p:bgPr>
-        <a:solidFill>
-          <a:srgbClr val="FFFFFF"/>
-        </a:solidFill>
-        <a:effectLst/>
-      </p:bgPr>
-    </p:bg>
-    <p:spTree>
-      <p:nvGrpSpPr>
-        <p:cNvPr id="1" name=""/>
-        <p:cNvGrpSpPr/>
-        <p:nvPr/>
-      </p:nvGrpSpPr>
-      <p:grpSpPr/>
-      <p:sp>
-        <p:nvSpPr>
-          <p:cNvPr id="2" name="Rectangle 1"/>
-          <p:cNvSpPr/>
-          <p:nvPr/>
-        </p:nvSpPr>
-        <p:spPr>
-          <a:xfrm>
-            <a:off x="0" y="0"/>
-            <a:ext cx="12191695" cy="109728"/>
-          </a:xfrm>
-          <a:prstGeom prst="rect">
-            <a:avLst/>
-          </a:prstGeom>
-          <a:solidFill>
-            <a:srgbClr val="F2A63D"/>
-          </a:solidFill>
-          <a:ln>
-            <a:noFill/>
-          </a:ln>
-        </p:spPr>
-        <p:style>
-          <a:lnRef idx="1">
-            <a:schemeClr val="accent1"/>
-          </a:lnRef>
-          <a:fillRef idx="3">
-            <a:schemeClr val="accent1"/>
-          </a:fillRef>
-          <a:effectRef idx="2">
-            <a:schemeClr val="accent1"/>
-          </a:effectRef>
-          <a:fontRef idx="minor">
-            <a:schemeClr val="lt1"/>
-          </a:fontRef>
-        </p:style>
-        <p:txBody>
-          <a:bodyPr rtlCol="0" anchor="ctr"/>
-          <a:lstStyle/>
-          <a:p>
-            <a:pPr algn="ctr"/>
-          </a:p>
-        </p:txBody>
-      </p:sp>
-      <p:sp>
-        <p:nvSpPr>
-          <p:cNvPr id="3" name="TextBox 2"/>
-          <p:cNvSpPr txBox="1"/>
-          <p:nvPr/>
-        </p:nvSpPr>
-        <p:spPr>
-          <a:xfrm>
-            <a:off x="640080" y="411480"/>
-            <a:ext cx="10881360" cy="457200"/>
-          </a:xfrm>
-          <a:prstGeom prst="rect">
-            <a:avLst/>
-          </a:prstGeom>
-          <a:noFill/>
-        </p:spPr>
-        <p:txBody>
-          <a:bodyPr wrap="square">
-            <a:spAutoFit/>
-          </a:bodyPr>
-          <a:lstStyle/>
-          <a:p>
-            <a:pPr algn="l"/>
-            <a:r>
-              <a:rPr sz="1500" b="1" i="0">
-                <a:solidFill>
-                  <a:srgbClr val="F2A63D"/>
-                </a:solidFill>
-                <a:latin typeface="Calibri"/>
-              </a:rPr>
-              <a:t>DID YOU KNOW</a:t>
-            </a:r>
-          </a:p>
-        </p:txBody>
-      </p:sp>
-      <p:sp>
-        <p:nvSpPr>
-          <p:cNvPr id="4" name="TextBox 3"/>
-          <p:cNvSpPr txBox="1"/>
-          <p:nvPr/>
-        </p:nvSpPr>
-        <p:spPr>
-          <a:xfrm>
-            <a:off x="640080" y="777240"/>
-            <a:ext cx="10881360" cy="822960"/>
-          </a:xfrm>
-          <a:prstGeom prst="rect">
-            <a:avLst/>
-          </a:prstGeom>
-          <a:noFill/>
-        </p:spPr>
-        <p:txBody>
-          <a:bodyPr wrap="square">
-            <a:spAutoFit/>
-          </a:bodyPr>
-          <a:lstStyle/>
-          <a:p>
-            <a:pPr algn="l"/>
-            <a:r>
-              <a:rPr sz="3000" b="1" i="0">
-                <a:solidFill>
-                  <a:srgbClr val="1A1D27"/>
-                </a:solidFill>
-                <a:latin typeface="Calibri"/>
-              </a:rPr>
-              <a:t>The Spreadsheet Predates the Personal Computer Boom</a:t>
-            </a:r>
-          </a:p>
-        </p:txBody>
-      </p:sp>
-      <p:sp>
-        <p:nvSpPr>
-          <p:cNvPr id="5" name="TextBox 4"/>
-          <p:cNvSpPr txBox="1"/>
-          <p:nvPr/>
-        </p:nvSpPr>
-        <p:spPr>
-          <a:xfrm>
-            <a:off x="731520" y="1691640"/>
-            <a:ext cx="10698480" cy="4480560"/>
-          </a:xfrm>
-          <a:prstGeom prst="rect">
-            <a:avLst/>
-          </a:prstGeom>
-          <a:noFill/>
-        </p:spPr>
-        <p:txBody>
-          <a:bodyPr wrap="square">
-            <a:spAutoFit/>
-          </a:bodyPr>
-          <a:lstStyle/>
-          <a:p>
-            <a:pPr>
-              <a:spcAft>
-                <a:spcPts val="1200"/>
-              </a:spcAft>
-            </a:pPr>
-            <a:r>
-              <a:rPr sz="2000" b="1">
-                <a:solidFill>
-                  <a:srgbClr val="1A1D27"/>
-                </a:solidFill>
-                <a:latin typeface="Calibri"/>
-              </a:rPr>
-              <a:t>▸  VisiCalc (1979) is widely credited as the first electronic spreadsheet -- and the first “killer app” that sold people on owning a computer at all</a:t>
-            </a:r>
-          </a:p>
-          <a:p>
-            <a:pPr>
-              <a:spcAft>
-                <a:spcPts val="1200"/>
-              </a:spcAft>
-            </a:pPr>
-            <a:r>
-              <a:rPr sz="2000" b="1">
-                <a:solidFill>
-                  <a:srgbClr val="1A1D27"/>
-                </a:solidFill>
-                <a:latin typeface="Calibri"/>
-              </a:rPr>
-              <a:t>▸  Excel itself shipped in 1985, for the original Apple Macintosh, two years before it ever ran on Windows</a:t>
-            </a:r>
-          </a:p>
-          <a:p>
-            <a:pPr>
-              <a:spcAft>
-                <a:spcPts val="1200"/>
-              </a:spcAft>
-            </a:pPr>
-            <a:r>
-              <a:rPr sz="2000" b="1">
-                <a:solidFill>
-                  <a:srgbClr val="1A1D27"/>
-                </a:solidFill>
-                <a:latin typeface="Calibri"/>
-              </a:rPr>
-              <a:t>▸  Forty-plus years later, it's still the default format for “give me a report I can actually open and check” -- which is exactly why this module writes .xlsx and not just another .json file</a:t>
-            </a:r>
-          </a:p>
-        </p:txBody>
-      </p:sp>
-      <p:sp>
-        <p:nvSpPr>
-          <p:cNvPr id="6" name="TextBox 5"/>
-          <p:cNvSpPr txBox="1"/>
-          <p:nvPr/>
-        </p:nvSpPr>
-        <p:spPr>
-          <a:xfrm>
-            <a:off x="11521440" y="6446520"/>
-            <a:ext cx="548640" cy="320040"/>
-          </a:xfrm>
-          <a:prstGeom prst="rect">
-            <a:avLst/>
-          </a:prstGeom>
-          <a:noFill/>
-        </p:spPr>
-        <p:txBody>
-          <a:bodyPr wrap="square">
-            <a:spAutoFit/>
-          </a:bodyPr>
-          <a:lstStyle/>
-          <a:p>
-            <a:pPr algn="r"/>
-            <a:r>
-              <a:rPr sz="1100" b="0" i="0">
-                <a:solidFill>
-                  <a:srgbClr val="5B6374"/>
-                </a:solidFill>
-                <a:latin typeface="Calibri"/>
-              </a:rPr>
-              <a:t>13</a:t>
-            </a:r>
-          </a:p>
-        </p:txBody>
-      </p:sp>
-      <p:sp>
-        <p:nvSpPr>
-          <p:cNvPr id="7" name="TextBox 6"/>
-          <p:cNvSpPr txBox="1"/>
-          <p:nvPr/>
-        </p:nvSpPr>
-        <p:spPr>
-          <a:xfrm>
-            <a:off x="9692640" y="384048"/>
-            <a:ext cx="1828800" cy="457200"/>
-          </a:xfrm>
-          <a:prstGeom prst="rect">
-            <a:avLst/>
-          </a:prstGeom>
-          <a:noFill/>
-        </p:spPr>
-        <p:txBody>
-          <a:bodyPr wrap="none">
-            <a:spAutoFit/>
-          </a:bodyPr>
-          <a:lstStyle/>
-          <a:p>
-            <a:pPr algn="r"/>
-            <a:r>
-              <a:rPr sz="1200" b="1">
-                <a:solidFill>
-                  <a:srgbClr val="F2A63D"/>
-                </a:solidFill>
-              </a:rPr>
-              <a:t>★ DID YOU KNOW</a:t>
-            </a:r>
-          </a:p>
-        </p:txBody>
-      </p:sp>
-    </p:spTree>
-  </p:cSld>
-  <p:clrMapOvr>
-    <a:masterClrMapping/>
-  </p:clrMapOvr>
-</p:sld>
-</file>
-
-<file path=ppt/slides/slide14.xml><?xml version="1.0" encoding="utf-8"?>
-<p:sld xmlns:a="http://schemas.openxmlformats.org/drawingml/2006/main" xmlns:p="http://schemas.openxmlformats.org/presentationml/2006/main" xmlns:r="http://schemas.openxmlformats.org/officeDocument/2006/relationships">
-  <p:cSld>
-    <p:bg>
-      <p:bgPr>
-        <a:solidFill>
-          <a:srgbClr val="FFFFFF"/>
-        </a:solidFill>
-        <a:effectLst/>
-      </p:bgPr>
-    </p:bg>
-    <p:spTree>
-      <p:nvGrpSpPr>
-        <p:cNvPr id="1" name=""/>
-        <p:cNvGrpSpPr/>
-        <p:nvPr/>
-      </p:nvGrpSpPr>
-      <p:grpSpPr/>
-      <p:sp>
-        <p:nvSpPr>
-          <p:cNvPr id="2" name="Rectangle 1"/>
-          <p:cNvSpPr/>
-          <p:nvPr/>
-        </p:nvSpPr>
-        <p:spPr>
-          <a:xfrm>
-            <a:off x="0" y="0"/>
-            <a:ext cx="12191695" cy="109728"/>
-          </a:xfrm>
-          <a:prstGeom prst="rect">
-            <a:avLst/>
-          </a:prstGeom>
-          <a:solidFill>
-            <a:srgbClr val="E06C5C"/>
-          </a:solidFill>
-          <a:ln>
-            <a:noFill/>
-          </a:ln>
-        </p:spPr>
-        <p:style>
-          <a:lnRef idx="1">
-            <a:schemeClr val="accent1"/>
-          </a:lnRef>
-          <a:fillRef idx="3">
-            <a:schemeClr val="accent1"/>
-          </a:fillRef>
-          <a:effectRef idx="2">
-            <a:schemeClr val="accent1"/>
-          </a:effectRef>
-          <a:fontRef idx="minor">
-            <a:schemeClr val="lt1"/>
-          </a:fontRef>
-        </p:style>
-        <p:txBody>
-          <a:bodyPr rtlCol="0" anchor="ctr"/>
-          <a:lstStyle/>
-          <a:p>
-            <a:pPr algn="ctr"/>
-          </a:p>
-        </p:txBody>
-      </p:sp>
-      <p:sp>
-        <p:nvSpPr>
-          <p:cNvPr id="3" name="TextBox 2"/>
-          <p:cNvSpPr txBox="1"/>
-          <p:nvPr/>
-        </p:nvSpPr>
-        <p:spPr>
-          <a:xfrm>
-            <a:off x="640080" y="411480"/>
-            <a:ext cx="10881360" cy="457200"/>
-          </a:xfrm>
-          <a:prstGeom prst="rect">
-            <a:avLst/>
-          </a:prstGeom>
-          <a:noFill/>
-        </p:spPr>
-        <p:txBody>
-          <a:bodyPr wrap="square">
-            <a:spAutoFit/>
-          </a:bodyPr>
-          <a:lstStyle/>
-          <a:p>
-            <a:pPr algn="l"/>
-            <a:r>
-              <a:rPr sz="1500" b="1" i="0">
-                <a:solidFill>
-                  <a:srgbClr val="E06C5C"/>
-                </a:solidFill>
-                <a:latin typeface="Calibri"/>
-              </a:rPr>
-              <a:t>REAL CASE STUDY</a:t>
-            </a:r>
-          </a:p>
-        </p:txBody>
-      </p:sp>
-      <p:sp>
-        <p:nvSpPr>
-          <p:cNvPr id="4" name="TextBox 3"/>
-          <p:cNvSpPr txBox="1"/>
-          <p:nvPr/>
-        </p:nvSpPr>
-        <p:spPr>
-          <a:xfrm>
-            <a:off x="640080" y="777240"/>
-            <a:ext cx="10881360" cy="822960"/>
-          </a:xfrm>
-          <a:prstGeom prst="rect">
-            <a:avLst/>
-          </a:prstGeom>
-          <a:noFill/>
-        </p:spPr>
-        <p:txBody>
-          <a:bodyPr wrap="square">
-            <a:spAutoFit/>
-          </a:bodyPr>
-          <a:lstStyle/>
-          <a:p>
-            <a:pPr algn="l"/>
-            <a:r>
-              <a:rPr sz="3000" b="1" i="0">
-                <a:solidFill>
-                  <a:srgbClr val="1A1D27"/>
-                </a:solidFill>
-                <a:latin typeface="Calibri"/>
-              </a:rPr>
-              <a:t>Tracing a Dropped Region Back to a Real Bug</a:t>
-            </a:r>
-          </a:p>
-        </p:txBody>
-      </p:sp>
-      <p:sp>
-        <p:nvSpPr>
-          <p:cNvPr id="5" name="TextBox 4"/>
-          <p:cNvSpPr txBox="1"/>
-          <p:nvPr/>
-        </p:nvSpPr>
-        <p:spPr>
-          <a:xfrm>
-            <a:off x="731520" y="1691640"/>
-            <a:ext cx="10698480" cy="4480560"/>
-          </a:xfrm>
-          <a:prstGeom prst="rect">
-            <a:avLst/>
-          </a:prstGeom>
-          <a:noFill/>
-        </p:spPr>
-        <p:txBody>
-          <a:bodyPr wrap="square">
-            <a:spAutoFit/>
-          </a:bodyPr>
-          <a:lstStyle/>
-          <a:p>
-            <a:pPr>
-              <a:spcAft>
-                <a:spcPts val="1200"/>
-              </a:spcAft>
-            </a:pPr>
-            <a:r>
-              <a:rPr sz="2000" b="1">
-                <a:solidFill>
-                  <a:srgbClr val="1A1D27"/>
-                </a:solidFill>
-                <a:latin typeface="Calibri"/>
-              </a:rPr>
-              <a:t>▸  synthetic_sample's Dropped Regions sheet has a row: class “abandon”, confidence 0.46, bbox [1312, 117, 1521, 329]</a:t>
-            </a:r>
-          </a:p>
-          <a:p>
-            <a:pPr>
-              <a:spcAft>
-                <a:spcPts val="1200"/>
-              </a:spcAft>
-            </a:pPr>
-            <a:r>
-              <a:rPr sz="2000" b="1">
-                <a:solidFill>
-                  <a:srgbClr val="1A1D27"/>
-                </a:solidFill>
-                <a:latin typeface="Calibri"/>
-              </a:rPr>
-              <a:t>▸  That bbox is the document's logo -- a real image region the layout detector misclassified as page furniture and dropped before it ever reached the VLM's figure classifier</a:t>
-            </a:r>
-          </a:p>
-          <a:p>
-            <a:pPr>
-              <a:spcAft>
-                <a:spcPts val="1200"/>
-              </a:spcAft>
-            </a:pPr>
-            <a:r>
-              <a:rPr sz="2000" b="1">
-                <a:solidFill>
-                  <a:srgbClr val="1A1D27"/>
-                </a:solidFill>
-                <a:latin typeface="Calibri"/>
-              </a:rPr>
-              <a:t>▸  It's visible directly in Module 1's output/synthetic_sample/annotated/page_001.png: a gray “abandon” box drawn right over the logo</a:t>
-            </a:r>
-          </a:p>
-          <a:p>
-            <a:pPr>
-              <a:spcAft>
-                <a:spcPts val="600"/>
-              </a:spcAft>
-            </a:pPr>
-            <a:r>
-              <a:rPr sz="1600" b="0">
-                <a:solidFill>
-                  <a:srgbClr val="5B6374"/>
-                </a:solidFill>
-                <a:latin typeface="Calibri"/>
-              </a:rPr>
-              <a:t>     –  This is the whole point of keeping Dropped Regions instead of silently discarding them -- a bounding box and a confidence score turn a hidden bug into a traceable, screenshot-able one</a:t>
-            </a:r>
-          </a:p>
-        </p:txBody>
-      </p:sp>
-      <p:sp>
-        <p:nvSpPr>
-          <p:cNvPr id="6" name="TextBox 5"/>
-          <p:cNvSpPr txBox="1"/>
-          <p:nvPr/>
-        </p:nvSpPr>
-        <p:spPr>
-          <a:xfrm>
-            <a:off x="11521440" y="6446520"/>
-            <a:ext cx="548640" cy="320040"/>
-          </a:xfrm>
-          <a:prstGeom prst="rect">
-            <a:avLst/>
-          </a:prstGeom>
-          <a:noFill/>
-        </p:spPr>
-        <p:txBody>
-          <a:bodyPr wrap="square">
-            <a:spAutoFit/>
-          </a:bodyPr>
-          <a:lstStyle/>
-          <a:p>
-            <a:pPr algn="r"/>
-            <a:r>
-              <a:rPr sz="1100" b="0" i="0">
-                <a:solidFill>
-                  <a:srgbClr val="5B6374"/>
-                </a:solidFill>
-                <a:latin typeface="Calibri"/>
-              </a:rPr>
-              <a:t>14</a:t>
-            </a:r>
-          </a:p>
-        </p:txBody>
-      </p:sp>
-    </p:spTree>
-  </p:cSld>
-  <p:clrMapOvr>
-    <a:masterClrMapping/>
-  </p:clrMapOvr>
-</p:sld>
-</file>
-
-<file path=ppt/slides/slide15.xml><?xml version="1.0" encoding="utf-8"?>
-<p:sld xmlns:a="http://schemas.openxmlformats.org/drawingml/2006/main" xmlns:p="http://schemas.openxmlformats.org/presentationml/2006/main" xmlns:r="http://schemas.openxmlformats.org/officeDocument/2006/relationships">
-  <p:cSld>
-    <p:bg>
-      <p:bgPr>
-        <a:solidFill>
-          <a:srgbClr val="FFFFFF"/>
-        </a:solidFill>
-        <a:effectLst/>
-      </p:bgPr>
-    </p:bg>
-    <p:spTree>
-      <p:nvGrpSpPr>
-        <p:cNvPr id="1" name=""/>
-        <p:cNvGrpSpPr/>
-        <p:nvPr/>
-      </p:nvGrpSpPr>
-      <p:grpSpPr/>
-      <p:sp>
-        <p:nvSpPr>
-          <p:cNvPr id="2" name="Rectangle 1"/>
-          <p:cNvSpPr/>
-          <p:nvPr/>
-        </p:nvSpPr>
-        <p:spPr>
-          <a:xfrm>
-            <a:off x="0" y="0"/>
-            <a:ext cx="12191695" cy="109728"/>
-          </a:xfrm>
-          <a:prstGeom prst="rect">
-            <a:avLst/>
-          </a:prstGeom>
-          <a:solidFill>
-            <a:srgbClr val="3E8EDE"/>
-          </a:solidFill>
-          <a:ln>
-            <a:noFill/>
-          </a:ln>
-        </p:spPr>
-        <p:style>
-          <a:lnRef idx="1">
-            <a:schemeClr val="accent1"/>
-          </a:lnRef>
-          <a:fillRef idx="3">
-            <a:schemeClr val="accent1"/>
-          </a:fillRef>
-          <a:effectRef idx="2">
-            <a:schemeClr val="accent1"/>
-          </a:effectRef>
-          <a:fontRef idx="minor">
-            <a:schemeClr val="lt1"/>
-          </a:fontRef>
-        </p:style>
-        <p:txBody>
-          <a:bodyPr rtlCol="0" anchor="ctr"/>
-          <a:lstStyle/>
-          <a:p>
-            <a:pPr algn="ctr"/>
-          </a:p>
-        </p:txBody>
-      </p:sp>
-      <p:sp>
-        <p:nvSpPr>
-          <p:cNvPr id="3" name="TextBox 2"/>
-          <p:cNvSpPr txBox="1"/>
-          <p:nvPr/>
-        </p:nvSpPr>
-        <p:spPr>
-          <a:xfrm>
-            <a:off x="640080" y="411480"/>
-            <a:ext cx="10881360" cy="457200"/>
-          </a:xfrm>
-          <a:prstGeom prst="rect">
-            <a:avLst/>
-          </a:prstGeom>
-          <a:noFill/>
-        </p:spPr>
-        <p:txBody>
-          <a:bodyPr wrap="square">
-            <a:spAutoFit/>
-          </a:bodyPr>
-          <a:lstStyle/>
-          <a:p>
-            <a:pPr algn="l"/>
-            <a:r>
-              <a:rPr sz="1500" b="1" i="0">
-                <a:solidFill>
-                  <a:srgbClr val="3E8EDE"/>
-                </a:solidFill>
-                <a:latin typeface="Calibri"/>
-              </a:rPr>
-              <a:t>A VALIDATION HABIT</a:t>
-            </a:r>
-          </a:p>
-        </p:txBody>
-      </p:sp>
-      <p:sp>
-        <p:nvSpPr>
-          <p:cNvPr id="4" name="TextBox 3"/>
-          <p:cNvSpPr txBox="1"/>
-          <p:nvPr/>
-        </p:nvSpPr>
-        <p:spPr>
-          <a:xfrm>
-            <a:off x="640080" y="777240"/>
-            <a:ext cx="10881360" cy="822960"/>
-          </a:xfrm>
-          <a:prstGeom prst="rect">
-            <a:avLst/>
-          </a:prstGeom>
-          <a:noFill/>
-        </p:spPr>
-        <p:txBody>
-          <a:bodyPr wrap="square">
-            <a:spAutoFit/>
-          </a:bodyPr>
-          <a:lstStyle/>
-          <a:p>
-            <a:pPr algn="l"/>
-            <a:r>
-              <a:rPr sz="3000" b="1" i="0">
-                <a:solidFill>
-                  <a:srgbClr val="1A1D27"/>
-                </a:solidFill>
-                <a:latin typeface="Calibri"/>
-              </a:rPr>
-              <a:t>Tokens/Page as an Anomaly Signal</a:t>
-            </a:r>
-          </a:p>
-        </p:txBody>
-      </p:sp>
-      <p:sp>
-        <p:nvSpPr>
-          <p:cNvPr id="5" name="TextBox 4"/>
-          <p:cNvSpPr txBox="1"/>
-          <p:nvPr/>
-        </p:nvSpPr>
-        <p:spPr>
-          <a:xfrm>
-            <a:off x="731520" y="1691640"/>
-            <a:ext cx="10698480" cy="4480560"/>
-          </a:xfrm>
-          <a:prstGeom prst="rect">
-            <a:avLst/>
-          </a:prstGeom>
-          <a:noFill/>
-        </p:spPr>
-        <p:txBody>
-          <a:bodyPr wrap="square">
-            <a:spAutoFit/>
-          </a:bodyPr>
-          <a:lstStyle/>
-          <a:p>
-            <a:pPr>
-              <a:spcAft>
-                <a:spcPts val="1200"/>
-              </a:spcAft>
-            </a:pPr>
-            <a:r>
-              <a:rPr sz="2000" b="1">
-                <a:solidFill>
-                  <a:srgbClr val="1A1D27"/>
-                </a:solidFill>
-                <a:latin typeface="Calibri"/>
-              </a:rPr>
-              <a:t>▸  There's no universal “correct” tokens-per-page number -- it depends entirely on the document type</a:t>
-            </a:r>
-          </a:p>
-          <a:p>
-            <a:pPr>
-              <a:spcAft>
-                <a:spcPts val="1200"/>
-              </a:spcAft>
-            </a:pPr>
-            <a:r>
-              <a:rPr sz="2000" b="1">
-                <a:solidFill>
-                  <a:srgbClr val="1A1D27"/>
-                </a:solidFill>
-                <a:latin typeface="Calibri"/>
-              </a:rPr>
-              <a:t>▸  But once you have it for a batch of similar documents, an outlier is worth a look:</a:t>
-            </a:r>
-          </a:p>
-          <a:p>
-            <a:pPr>
-              <a:spcAft>
-                <a:spcPts val="600"/>
-              </a:spcAft>
-            </a:pPr>
-            <a:r>
-              <a:rPr sz="1600" b="0">
-                <a:solidFill>
-                  <a:srgbClr val="5B6374"/>
-                </a:solidFill>
-                <a:latin typeface="Calibri"/>
-              </a:rPr>
-              <a:t>     –  Much LOWER than its peers -- possible sign of missed or truncated content</a:t>
-            </a:r>
-          </a:p>
-          <a:p>
-            <a:pPr>
-              <a:spcAft>
-                <a:spcPts val="600"/>
-              </a:spcAft>
-            </a:pPr>
-            <a:r>
-              <a:rPr sz="1600" b="0">
-                <a:solidFill>
-                  <a:srgbClr val="5B6374"/>
-                </a:solidFill>
-                <a:latin typeface="Calibri"/>
-              </a:rPr>
-              <a:t>     –  Much HIGHER than its peers -- possible sign of garbled or repeated OCR output (Module 1's own README documents a duplicate-detection bug that does exactly this)</a:t>
-            </a:r>
-          </a:p>
-          <a:p>
-            <a:pPr>
-              <a:spcAft>
-                <a:spcPts val="1200"/>
-              </a:spcAft>
-            </a:pPr>
-            <a:r>
-              <a:rPr sz="2000" b="1">
-                <a:solidFill>
-                  <a:srgbClr val="1A1D27"/>
-                </a:solidFill>
-                <a:latin typeface="Calibri"/>
-              </a:rPr>
-              <a:t>▸  The value of this sheet isn't any single number -- it's being able to scan 50 rows and immediately see which ones don't look like the rest</a:t>
-            </a:r>
-          </a:p>
-        </p:txBody>
-      </p:sp>
-      <p:sp>
-        <p:nvSpPr>
-          <p:cNvPr id="6" name="TextBox 5"/>
-          <p:cNvSpPr txBox="1"/>
-          <p:nvPr/>
-        </p:nvSpPr>
-        <p:spPr>
-          <a:xfrm>
-            <a:off x="11521440" y="6446520"/>
-            <a:ext cx="548640" cy="320040"/>
-          </a:xfrm>
-          <a:prstGeom prst="rect">
-            <a:avLst/>
-          </a:prstGeom>
-          <a:noFill/>
-        </p:spPr>
-        <p:txBody>
-          <a:bodyPr wrap="square">
-            <a:spAutoFit/>
-          </a:bodyPr>
-          <a:lstStyle/>
-          <a:p>
-            <a:pPr algn="r"/>
-            <a:r>
-              <a:rPr sz="1100" b="0" i="0">
-                <a:solidFill>
-                  <a:srgbClr val="5B6374"/>
-                </a:solidFill>
-                <a:latin typeface="Calibri"/>
-              </a:rPr>
-              <a:t>15</a:t>
-            </a:r>
-          </a:p>
-        </p:txBody>
-      </p:sp>
-    </p:spTree>
-  </p:cSld>
-  <p:clrMapOvr>
-    <a:masterClrMapping/>
-  </p:clrMapOvr>
-</p:sld>
-</file>
-
-<file path=ppt/slides/slide16.xml><?xml version="1.0" encoding="utf-8"?>
-<p:sld xmlns:a="http://schemas.openxmlformats.org/drawingml/2006/main" xmlns:p="http://schemas.openxmlformats.org/presentationml/2006/main" xmlns:r="http://schemas.openxmlformats.org/officeDocument/2006/relationships">
-  <p:cSld>
-    <p:bg>
-      <p:bgPr>
-        <a:solidFill>
-          <a:srgbClr val="FFFFFF"/>
-        </a:solidFill>
-        <a:effectLst/>
-      </p:bgPr>
-    </p:bg>
-    <p:spTree>
-      <p:nvGrpSpPr>
-        <p:cNvPr id="1" name=""/>
-        <p:cNvGrpSpPr/>
-        <p:nvPr/>
-      </p:nvGrpSpPr>
-      <p:grpSpPr/>
-      <p:sp>
-        <p:nvSpPr>
-          <p:cNvPr id="2" name="Rectangle 1"/>
-          <p:cNvSpPr/>
-          <p:nvPr/>
-        </p:nvSpPr>
-        <p:spPr>
-          <a:xfrm>
-            <a:off x="0" y="0"/>
-            <a:ext cx="12191695" cy="109728"/>
-          </a:xfrm>
-          <a:prstGeom prst="rect">
-            <a:avLst/>
-          </a:prstGeom>
-          <a:solidFill>
-            <a:srgbClr val="3E8EDE"/>
-          </a:solidFill>
-          <a:ln>
-            <a:noFill/>
-          </a:ln>
-        </p:spPr>
-        <p:style>
-          <a:lnRef idx="1">
-            <a:schemeClr val="accent1"/>
-          </a:lnRef>
-          <a:fillRef idx="3">
-            <a:schemeClr val="accent1"/>
-          </a:fillRef>
-          <a:effectRef idx="2">
-            <a:schemeClr val="accent1"/>
-          </a:effectRef>
-          <a:fontRef idx="minor">
-            <a:schemeClr val="lt1"/>
-          </a:fontRef>
-        </p:style>
-        <p:txBody>
-          <a:bodyPr rtlCol="0" anchor="ctr"/>
-          <a:lstStyle/>
-          <a:p>
-            <a:pPr algn="ctr"/>
-          </a:p>
-        </p:txBody>
-      </p:sp>
-      <p:sp>
-        <p:nvSpPr>
-          <p:cNvPr id="3" name="TextBox 2"/>
-          <p:cNvSpPr txBox="1"/>
-          <p:nvPr/>
-        </p:nvSpPr>
-        <p:spPr>
-          <a:xfrm>
-            <a:off x="640080" y="411480"/>
-            <a:ext cx="10881360" cy="457200"/>
-          </a:xfrm>
-          <a:prstGeom prst="rect">
-            <a:avLst/>
-          </a:prstGeom>
-          <a:noFill/>
-        </p:spPr>
-        <p:txBody>
-          <a:bodyPr wrap="square">
-            <a:spAutoFit/>
-          </a:bodyPr>
-          <a:lstStyle/>
-          <a:p>
-            <a:pPr algn="l"/>
-            <a:r>
-              <a:rPr sz="1500" b="1" i="0">
-                <a:solidFill>
-                  <a:srgbClr val="3E8EDE"/>
-                </a:solidFill>
-                <a:latin typeface="Calibri"/>
-              </a:rPr>
-              <a:t>A QUIET DETAIL</a:t>
-            </a:r>
-          </a:p>
-        </p:txBody>
-      </p:sp>
-      <p:sp>
-        <p:nvSpPr>
-          <p:cNvPr id="4" name="TextBox 3"/>
-          <p:cNvSpPr txBox="1"/>
-          <p:nvPr/>
-        </p:nvSpPr>
-        <p:spPr>
-          <a:xfrm>
-            <a:off x="640080" y="777240"/>
-            <a:ext cx="10881360" cy="822960"/>
-          </a:xfrm>
-          <a:prstGeom prst="rect">
-            <a:avLst/>
-          </a:prstGeom>
-          <a:noFill/>
-        </p:spPr>
-        <p:txBody>
-          <a:bodyPr wrap="square">
-            <a:spAutoFit/>
-          </a:bodyPr>
-          <a:lstStyle/>
-          <a:p>
-            <a:pPr algn="l"/>
-            <a:r>
-              <a:rPr sz="3000" b="1" i="0">
-                <a:solidFill>
-                  <a:srgbClr val="1A1D27"/>
-                </a:solidFill>
-                <a:latin typeface="Calibri"/>
-              </a:rPr>
-              <a:t>Partial Runs Get Skipped, Not Guessed At</a:t>
-            </a:r>
-          </a:p>
-        </p:txBody>
-      </p:sp>
-      <p:sp>
-        <p:nvSpPr>
-          <p:cNvPr id="5" name="TextBox 4"/>
-          <p:cNvSpPr txBox="1"/>
-          <p:nvPr/>
-        </p:nvSpPr>
-        <p:spPr>
-          <a:xfrm>
-            <a:off x="731520" y="1691640"/>
-            <a:ext cx="10698480" cy="4480560"/>
-          </a:xfrm>
-          <a:prstGeom prst="rect">
-            <a:avLst/>
-          </a:prstGeom>
-          <a:noFill/>
-        </p:spPr>
-        <p:txBody>
-          <a:bodyPr wrap="square">
-            <a:spAutoFit/>
-          </a:bodyPr>
-          <a:lstStyle/>
-          <a:p>
-            <a:pPr>
-              <a:spcAft>
-                <a:spcPts val="1200"/>
-              </a:spcAft>
-            </a:pPr>
-            <a:r>
-              <a:rPr sz="2000" b="1">
-                <a:solidFill>
-                  <a:srgbClr val="1A1D27"/>
-                </a:solidFill>
-                <a:latin typeface="Calibri"/>
-              </a:rPr>
-              <a:t>▸  A folder in Module 1's output/ only counts as “a document” if it has BOTH &lt;name&gt;.md AND metadata.json</a:t>
-            </a:r>
-          </a:p>
-          <a:p>
-            <a:pPr>
-              <a:spcAft>
-                <a:spcPts val="1200"/>
-              </a:spcAft>
-            </a:pPr>
-            <a:r>
-              <a:rPr sz="2000" b="1">
-                <a:solidFill>
-                  <a:srgbClr val="1A1D27"/>
-                </a:solidFill>
-                <a:latin typeface="Calibri"/>
-              </a:rPr>
-              <a:t>▸  An interrupted or still-running Module 1 job leaves a folder with pages/ and maybe some images/, but no .md and no metadata.json yet</a:t>
-            </a:r>
-          </a:p>
-          <a:p>
-            <a:pPr>
-              <a:spcAft>
-                <a:spcPts val="1200"/>
-              </a:spcAft>
-            </a:pPr>
-            <a:r>
-              <a:rPr sz="2000" b="1">
-                <a:solidFill>
-                  <a:srgbClr val="1A1D27"/>
-                </a:solidFill>
-                <a:latin typeface="Calibri"/>
-              </a:rPr>
-              <a:t>▸  analyze.py silently skips those rather than guessing at partial data -- a document either finished, or it isn't analyzed at all</a:t>
-            </a:r>
-          </a:p>
-        </p:txBody>
-      </p:sp>
-      <p:sp>
-        <p:nvSpPr>
-          <p:cNvPr id="6" name="TextBox 5"/>
-          <p:cNvSpPr txBox="1"/>
-          <p:nvPr/>
-        </p:nvSpPr>
-        <p:spPr>
-          <a:xfrm>
-            <a:off x="11521440" y="6446520"/>
-            <a:ext cx="548640" cy="320040"/>
-          </a:xfrm>
-          <a:prstGeom prst="rect">
-            <a:avLst/>
-          </a:prstGeom>
-          <a:noFill/>
-        </p:spPr>
-        <p:txBody>
-          <a:bodyPr wrap="square">
-            <a:spAutoFit/>
-          </a:bodyPr>
-          <a:lstStyle/>
-          <a:p>
-            <a:pPr algn="r"/>
-            <a:r>
-              <a:rPr sz="1100" b="0" i="0">
-                <a:solidFill>
-                  <a:srgbClr val="5B6374"/>
-                </a:solidFill>
-                <a:latin typeface="Calibri"/>
-              </a:rPr>
-              <a:t>16</a:t>
-            </a:r>
-          </a:p>
-        </p:txBody>
-      </p:sp>
-    </p:spTree>
-  </p:cSld>
-  <p:clrMapOvr>
-    <a:masterClrMapping/>
-  </p:clrMapOvr>
-</p:sld>
-</file>
-
-<file path=ppt/slides/slide17.xml><?xml version="1.0" encoding="utf-8"?>
-<p:sld xmlns:a="http://schemas.openxmlformats.org/drawingml/2006/main" xmlns:p="http://schemas.openxmlformats.org/presentationml/2006/main" xmlns:r="http://schemas.openxmlformats.org/officeDocument/2006/relationships">
-  <p:cSld>
-    <p:bg>
-      <p:bgPr>
-        <a:solidFill>
-          <a:srgbClr val="FFFFFF"/>
-        </a:solidFill>
-        <a:effectLst/>
-      </p:bgPr>
-    </p:bg>
-    <p:spTree>
-      <p:nvGrpSpPr>
-        <p:cNvPr id="1" name=""/>
-        <p:cNvGrpSpPr/>
-        <p:nvPr/>
-      </p:nvGrpSpPr>
-      <p:grpSpPr/>
-      <p:sp>
-        <p:nvSpPr>
-          <p:cNvPr id="2" name="Rectangle 1"/>
-          <p:cNvSpPr/>
-          <p:nvPr/>
-        </p:nvSpPr>
-        <p:spPr>
-          <a:xfrm>
-            <a:off x="0" y="0"/>
-            <a:ext cx="12191695" cy="109728"/>
-          </a:xfrm>
-          <a:prstGeom prst="rect">
-            <a:avLst/>
-          </a:prstGeom>
-          <a:solidFill>
-            <a:srgbClr val="3E8EDE"/>
-          </a:solidFill>
-          <a:ln>
-            <a:noFill/>
-          </a:ln>
-        </p:spPr>
-        <p:style>
-          <a:lnRef idx="1">
-            <a:schemeClr val="accent1"/>
-          </a:lnRef>
-          <a:fillRef idx="3">
-            <a:schemeClr val="accent1"/>
-          </a:fillRef>
-          <a:effectRef idx="2">
-            <a:schemeClr val="accent1"/>
-          </a:effectRef>
-          <a:fontRef idx="minor">
-            <a:schemeClr val="lt1"/>
-          </a:fontRef>
-        </p:style>
-        <p:txBody>
-          <a:bodyPr rtlCol="0" anchor="ctr"/>
-          <a:lstStyle/>
-          <a:p>
-            <a:pPr algn="ctr"/>
-          </a:p>
-        </p:txBody>
-      </p:sp>
-      <p:sp>
-        <p:nvSpPr>
-          <p:cNvPr id="3" name="TextBox 2"/>
-          <p:cNvSpPr txBox="1"/>
-          <p:nvPr/>
-        </p:nvSpPr>
-        <p:spPr>
-          <a:xfrm>
-            <a:off x="640080" y="411480"/>
-            <a:ext cx="10881360" cy="457200"/>
-          </a:xfrm>
-          <a:prstGeom prst="rect">
-            <a:avLst/>
-          </a:prstGeom>
-          <a:noFill/>
-        </p:spPr>
-        <p:txBody>
-          <a:bodyPr wrap="square">
-            <a:spAutoFit/>
-          </a:bodyPr>
-          <a:lstStyle/>
-          <a:p>
-            <a:pPr algn="l"/>
-            <a:r>
-              <a:rPr sz="1500" b="1" i="0">
-                <a:solidFill>
-                  <a:srgbClr val="3E8EDE"/>
-                </a:solidFill>
-                <a:latin typeface="Calibri"/>
-              </a:rPr>
-              <a:t>WRAP-UP</a:t>
-            </a:r>
-          </a:p>
-        </p:txBody>
-      </p:sp>
-      <p:sp>
-        <p:nvSpPr>
-          <p:cNvPr id="4" name="TextBox 3"/>
-          <p:cNvSpPr txBox="1"/>
-          <p:nvPr/>
-        </p:nvSpPr>
-        <p:spPr>
-          <a:xfrm>
-            <a:off x="640080" y="777240"/>
-            <a:ext cx="10881360" cy="822960"/>
-          </a:xfrm>
-          <a:prstGeom prst="rect">
-            <a:avLst/>
-          </a:prstGeom>
-          <a:noFill/>
-        </p:spPr>
-        <p:txBody>
-          <a:bodyPr wrap="square">
-            <a:spAutoFit/>
-          </a:bodyPr>
-          <a:lstStyle/>
-          <a:p>
-            <a:pPr algn="l"/>
-            <a:r>
-              <a:rPr sz="3000" b="1" i="0">
-                <a:solidFill>
-                  <a:srgbClr val="1A1D27"/>
-                </a:solidFill>
-                <a:latin typeface="Calibri"/>
-              </a:rPr>
-              <a:t>What Module 2 Actually Produces</a:t>
-            </a:r>
-          </a:p>
-        </p:txBody>
-      </p:sp>
-      <p:sp>
-        <p:nvSpPr>
-          <p:cNvPr id="5" name="TextBox 4"/>
-          <p:cNvSpPr txBox="1"/>
-          <p:nvPr/>
-        </p:nvSpPr>
-        <p:spPr>
-          <a:xfrm>
-            <a:off x="731520" y="1691640"/>
-            <a:ext cx="10698480" cy="4480560"/>
-          </a:xfrm>
-          <a:prstGeom prst="rect">
-            <a:avLst/>
-          </a:prstGeom>
-          <a:noFill/>
-        </p:spPr>
-        <p:txBody>
-          <a:bodyPr wrap="square">
-            <a:spAutoFit/>
-          </a:bodyPr>
-          <a:lstStyle/>
-          <a:p>
-            <a:pPr>
-              <a:spcAft>
-                <a:spcPts val="1200"/>
-              </a:spcAft>
-            </a:pPr>
-            <a:r>
-              <a:rPr sz="2000" b="1">
-                <a:solidFill>
-                  <a:srgbClr val="1A1D27"/>
-                </a:solidFill>
-                <a:latin typeface="Calibri"/>
-              </a:rPr>
-              <a:t>▸  ocr_analysis_report.xlsx -- Summary + 3 detail sheets, one workbook covering every document Module 1 has processed</a:t>
-            </a:r>
-          </a:p>
-          <a:p>
-            <a:pPr>
-              <a:spcAft>
-                <a:spcPts val="1200"/>
-              </a:spcAft>
-            </a:pPr>
-            <a:r>
-              <a:rPr sz="2000" b="1">
-                <a:solidFill>
-                  <a:srgbClr val="1A1D27"/>
-                </a:solidFill>
-                <a:latin typeface="Calibri"/>
-              </a:rPr>
-              <a:t>▸  Real, exact token counts -- from the same tokenizer the extraction model used, not an approximation</a:t>
-            </a:r>
-          </a:p>
-          <a:p>
-            <a:pPr>
-              <a:spcAft>
-                <a:spcPts val="1200"/>
-              </a:spcAft>
-            </a:pPr>
-            <a:r>
-              <a:rPr sz="2000" b="1">
-                <a:solidFill>
-                  <a:srgbClr val="1A1D27"/>
-                </a:solidFill>
-                <a:latin typeface="Calibri"/>
-              </a:rPr>
-              <a:t>▸  A traceable audit trail -- every flagged region carries a bbox back to Module 1's annotated screenshots</a:t>
-            </a:r>
-          </a:p>
-          <a:p>
-            <a:pPr>
-              <a:spcAft>
-                <a:spcPts val="1200"/>
-              </a:spcAft>
-            </a:pPr>
-            <a:r>
-              <a:rPr sz="2000" b="1">
-                <a:solidFill>
-                  <a:srgbClr val="1A1D27"/>
-                </a:solidFill>
-                <a:latin typeface="Calibri"/>
-              </a:rPr>
-              <a:t>▸  Next: Module 3 takes this same output and turns it into retrieval-ready chunks -- recursive, semantic, and hierarchical strategies, compared on the same real documents</a:t>
-            </a:r>
-          </a:p>
-        </p:txBody>
-      </p:sp>
-      <p:sp>
-        <p:nvSpPr>
-          <p:cNvPr id="6" name="TextBox 5"/>
-          <p:cNvSpPr txBox="1"/>
-          <p:nvPr/>
-        </p:nvSpPr>
-        <p:spPr>
-          <a:xfrm>
-            <a:off x="11521440" y="6446520"/>
-            <a:ext cx="548640" cy="320040"/>
-          </a:xfrm>
-          <a:prstGeom prst="rect">
-            <a:avLst/>
-          </a:prstGeom>
-          <a:noFill/>
-        </p:spPr>
-        <p:txBody>
-          <a:bodyPr wrap="square">
-            <a:spAutoFit/>
-          </a:bodyPr>
-          <a:lstStyle/>
-          <a:p>
-            <a:pPr algn="r"/>
-            <a:r>
-              <a:rPr sz="1100" b="0" i="0">
-                <a:solidFill>
-                  <a:srgbClr val="5B6374"/>
-                </a:solidFill>
-                <a:latin typeface="Calibri"/>
-              </a:rPr>
-              <a:t>17</a:t>
-            </a:r>
-          </a:p>
-        </p:txBody>
-      </p:sp>
-    </p:spTree>
-  </p:cSld>
-  <p:clrMapOvr>
-    <a:masterClrMapping/>
-  </p:clrMapOvr>
-</p:sld>
-</file>
-
-<file path=ppt/slides/slide18.xml><?xml version="1.0" encoding="utf-8"?>
-<p:sld xmlns:a="http://schemas.openxmlformats.org/drawingml/2006/main" xmlns:p="http://schemas.openxmlformats.org/presentationml/2006/main" xmlns:r="http://schemas.openxmlformats.org/officeDocument/2006/relationships">
-  <p:cSld>
-    <p:bg>
-      <p:bgPr>
-        <a:solidFill>
-          <a:srgbClr val="0F172A"/>
-        </a:solidFill>
-        <a:effectLst/>
-      </p:bgPr>
-    </p:bg>
-    <p:spTree>
-      <p:nvGrpSpPr>
-        <p:cNvPr id="1" name=""/>
-        <p:cNvGrpSpPr/>
-        <p:nvPr/>
-      </p:nvGrpSpPr>
-      <p:grpSpPr/>
-      <p:sp>
-        <p:nvSpPr>
-          <p:cNvPr id="2" name="Rectangle 1"/>
-          <p:cNvSpPr/>
-          <p:nvPr/>
-        </p:nvSpPr>
-        <p:spPr>
-          <a:xfrm>
-            <a:off x="0" y="0"/>
-            <a:ext cx="12191695" cy="109728"/>
-          </a:xfrm>
-          <a:prstGeom prst="rect">
-            <a:avLst/>
-          </a:prstGeom>
-          <a:solidFill>
-            <a:srgbClr val="3E8EDE"/>
-          </a:solidFill>
-          <a:ln>
-            <a:noFill/>
-          </a:ln>
-        </p:spPr>
-        <p:style>
-          <a:lnRef idx="1">
-            <a:schemeClr val="accent1"/>
-          </a:lnRef>
-          <a:fillRef idx="3">
-            <a:schemeClr val="accent1"/>
-          </a:fillRef>
-          <a:effectRef idx="2">
-            <a:schemeClr val="accent1"/>
-          </a:effectRef>
-          <a:fontRef idx="minor">
-            <a:schemeClr val="lt1"/>
-          </a:fontRef>
-        </p:style>
-        <p:txBody>
-          <a:bodyPr rtlCol="0" anchor="ctr"/>
-          <a:lstStyle/>
-          <a:p>
-            <a:pPr algn="ctr"/>
-          </a:p>
-        </p:txBody>
-      </p:sp>
-      <p:sp>
-        <p:nvSpPr>
-          <p:cNvPr id="3" name="TextBox 2"/>
-          <p:cNvSpPr txBox="1"/>
-          <p:nvPr/>
-        </p:nvSpPr>
-        <p:spPr>
-          <a:xfrm>
-            <a:off x="914400" y="2743200"/>
-            <a:ext cx="10332720" cy="1097280"/>
-          </a:xfrm>
-          <a:prstGeom prst="rect">
-            <a:avLst/>
-          </a:prstGeom>
-          <a:noFill/>
-        </p:spPr>
-        <p:txBody>
-          <a:bodyPr wrap="square">
-            <a:spAutoFit/>
-          </a:bodyPr>
-          <a:lstStyle/>
-          <a:p>
-            <a:pPr algn="l"/>
-            <a:r>
-              <a:rPr sz="4000" b="1" i="0">
-                <a:solidFill>
-                  <a:srgbClr val="FFFFFF"/>
-                </a:solidFill>
-                <a:latin typeface="Calibri"/>
-              </a:rPr>
-              <a:t>Questions?</a:t>
-            </a:r>
-          </a:p>
-        </p:txBody>
-      </p:sp>
-      <p:sp>
-        <p:nvSpPr>
-          <p:cNvPr id="4" name="TextBox 3"/>
-          <p:cNvSpPr txBox="1"/>
-          <p:nvPr/>
-        </p:nvSpPr>
-        <p:spPr>
-          <a:xfrm>
-            <a:off x="914400" y="3749039"/>
-            <a:ext cx="10332720" cy="1280160"/>
-          </a:xfrm>
-          <a:prstGeom prst="rect">
-            <a:avLst/>
-          </a:prstGeom>
-          <a:noFill/>
-        </p:spPr>
-        <p:txBody>
-          <a:bodyPr wrap="square">
-            <a:spAutoFit/>
-          </a:bodyPr>
-          <a:lstStyle/>
-          <a:p>
-            <a:pPr algn="l"/>
-            <a:r>
-              <a:rPr sz="1800" b="0" i="0">
-                <a:solidFill>
-                  <a:srgbClr val="8A93A6"/>
-                </a:solidFill>
-                <a:latin typeface="Calibri"/>
-              </a:rPr>
-              <a:t>2. ANALYSIS/  --  README.md has the full column-by-column report reference and every real number in this deck.</a:t>
-            </a:r>
-          </a:p>
-        </p:txBody>
-      </p:sp>
-      <p:sp>
-        <p:nvSpPr>
-          <p:cNvPr id="5" name="TextBox 4"/>
-          <p:cNvSpPr txBox="1"/>
-          <p:nvPr/>
-        </p:nvSpPr>
-        <p:spPr>
-          <a:xfrm>
-            <a:off x="914400" y="6126480"/>
-            <a:ext cx="10332720" cy="457200"/>
-          </a:xfrm>
-          <a:prstGeom prst="rect">
-            <a:avLst/>
-          </a:prstGeom>
-          <a:noFill/>
-        </p:spPr>
-        <p:txBody>
-          <a:bodyPr wrap="square">
-            <a:spAutoFit/>
-          </a:bodyPr>
-          <a:lstStyle/>
-          <a:p>
-            <a:pPr algn="l"/>
-            <a:r>
-              <a:rPr sz="1300" b="0" i="0">
-                <a:solidFill>
-                  <a:srgbClr val="5B6374"/>
-                </a:solidFill>
-                <a:latin typeface="Calibri"/>
-              </a:rPr>
-              <a:t>Module 2 of 3  ·  Data Processing → Analysis → Chunking</a:t>
-            </a:r>
-          </a:p>
-        </p:txBody>
-      </p:sp>
-    </p:spTree>
-  </p:cSld>
-  <p:clrMapOvr>
-    <a:masterClrMapping/>
-  </p:clrMapOvr>
-</p:sld>
-</file>
-
-<file path=ppt/slides/slide2.xml><?xml version="1.0" encoding="utf-8"?>
-<p:sld xmlns:a="http://schemas.openxmlformats.org/drawingml/2006/main" xmlns:p="http://schemas.openxmlformats.org/presentationml/2006/main" xmlns:r="http://schemas.openxmlformats.org/officeDocument/2006/relationships">
-  <p:cSld>
-    <p:bg>
-      <p:bgPr>
-        <a:solidFill>
-          <a:srgbClr val="FFFFFF"/>
-        </a:solidFill>
-        <a:effectLst/>
-      </p:bgPr>
-    </p:bg>
-    <p:spTree>
-      <p:nvGrpSpPr>
-        <p:cNvPr id="1" name=""/>
-        <p:cNvGrpSpPr/>
-        <p:nvPr/>
-      </p:nvGrpSpPr>
-      <p:grpSpPr/>
-      <p:sp>
-        <p:nvSpPr>
-          <p:cNvPr id="2" name="Rectangle 1"/>
-          <p:cNvSpPr/>
-          <p:nvPr/>
-        </p:nvSpPr>
-        <p:spPr>
-          <a:xfrm>
-            <a:off x="0" y="0"/>
-            <a:ext cx="12191695" cy="109728"/>
-          </a:xfrm>
-          <a:prstGeom prst="rect">
-            <a:avLst/>
-          </a:prstGeom>
-          <a:solidFill>
-            <a:srgbClr val="3E8EDE"/>
-          </a:solidFill>
-          <a:ln>
-            <a:noFill/>
-          </a:ln>
-        </p:spPr>
-        <p:style>
-          <a:lnRef idx="1">
-            <a:schemeClr val="accent1"/>
-          </a:lnRef>
-          <a:fillRef idx="3">
-            <a:schemeClr val="accent1"/>
-          </a:fillRef>
-          <a:effectRef idx="2">
-            <a:schemeClr val="accent1"/>
-          </a:effectRef>
-          <a:fontRef idx="minor">
-            <a:schemeClr val="lt1"/>
-          </a:fontRef>
-        </p:style>
-        <p:txBody>
-          <a:bodyPr rtlCol="0" anchor="ctr"/>
-          <a:lstStyle/>
-          <a:p>
-            <a:pPr algn="ctr"/>
-          </a:p>
-        </p:txBody>
-      </p:sp>
-      <p:sp>
-        <p:nvSpPr>
-          <p:cNvPr id="3" name="TextBox 2"/>
-          <p:cNvSpPr txBox="1"/>
-          <p:nvPr/>
-        </p:nvSpPr>
-        <p:spPr>
-          <a:xfrm>
-            <a:off x="640080" y="411480"/>
-            <a:ext cx="10881360" cy="457200"/>
-          </a:xfrm>
-          <a:prstGeom prst="rect">
-            <a:avLst/>
-          </a:prstGeom>
-          <a:noFill/>
-        </p:spPr>
-        <p:txBody>
-          <a:bodyPr wrap="square">
-            <a:spAutoFit/>
-          </a:bodyPr>
-          <a:lstStyle/>
-          <a:p>
-            <a:pPr algn="l"/>
-            <a:r>
-              <a:rPr sz="1500" b="1" i="0">
-                <a:solidFill>
-                  <a:srgbClr val="3E8EDE"/>
-                </a:solidFill>
-                <a:latin typeface="Calibri"/>
-              </a:rPr>
-              <a:t>VIDEO SERIES</a:t>
-            </a:r>
-          </a:p>
-        </p:txBody>
-      </p:sp>
-      <p:sp>
-        <p:nvSpPr>
-          <p:cNvPr id="4" name="TextBox 3"/>
-          <p:cNvSpPr txBox="1"/>
-          <p:nvPr/>
-        </p:nvSpPr>
-        <p:spPr>
-          <a:xfrm>
-            <a:off x="640080" y="777240"/>
-            <a:ext cx="10881360" cy="1005840"/>
-          </a:xfrm>
-          <a:prstGeom prst="rect">
-            <a:avLst/>
-          </a:prstGeom>
-          <a:noFill/>
-        </p:spPr>
-        <p:txBody>
-          <a:bodyPr wrap="square">
-            <a:spAutoFit/>
-          </a:bodyPr>
-          <a:lstStyle/>
-          <a:p>
-            <a:pPr algn="l"/>
-            <a:r>
-              <a:rPr sz="2800" b="1" i="0">
-                <a:solidFill>
-                  <a:srgbClr val="1A1D27"/>
-                </a:solidFill>
-                <a:latin typeface="Calibri"/>
-              </a:rPr>
-              <a:t>Part of a Series: How to Build Your First Chatbot</a:t>
-            </a:r>
-          </a:p>
-        </p:txBody>
-      </p:sp>
-      <p:sp>
-        <p:nvSpPr>
-          <p:cNvPr id="5" name="TextBox 4"/>
-          <p:cNvSpPr txBox="1"/>
-          <p:nvPr/>
-        </p:nvSpPr>
-        <p:spPr>
-          <a:xfrm>
-            <a:off x="731520" y="1828800"/>
-            <a:ext cx="10698480" cy="822960"/>
-          </a:xfrm>
-          <a:prstGeom prst="rect">
-            <a:avLst/>
-          </a:prstGeom>
-          <a:noFill/>
-        </p:spPr>
-        <p:txBody>
-          <a:bodyPr wrap="square">
-            <a:spAutoFit/>
-          </a:bodyPr>
-          <a:lstStyle/>
-          <a:p>
-            <a:r>
-              <a:rPr sz="1600" i="1">
-                <a:solidFill>
-                  <a:srgbClr val="5B6374"/>
-                </a:solidFill>
-                <a:latin typeface="Calibri"/>
-              </a:rPr>
-              <a:t>This module is one step in a planned video series that builds a real, working chatbot end to end -- real documents, real models, real measured results, not toy examples.</a:t>
-            </a:r>
-          </a:p>
-        </p:txBody>
-      </p:sp>
-      <p:sp>
-        <p:nvSpPr>
-          <p:cNvPr id="6" name="TextBox 5"/>
-          <p:cNvSpPr txBox="1"/>
-          <p:nvPr/>
-        </p:nvSpPr>
-        <p:spPr>
-          <a:xfrm>
-            <a:off x="731520" y="2788920"/>
-            <a:ext cx="10698480" cy="2743200"/>
-          </a:xfrm>
-          <a:prstGeom prst="rect">
-            <a:avLst/>
-          </a:prstGeom>
-          <a:noFill/>
-        </p:spPr>
-        <p:txBody>
-          <a:bodyPr wrap="square">
-            <a:spAutoFit/>
-          </a:bodyPr>
-          <a:lstStyle/>
-          <a:p>
-            <a:pPr>
-              <a:spcAft>
-                <a:spcPts val="1000"/>
-              </a:spcAft>
-            </a:pPr>
-            <a:r>
-              <a:rPr sz="1600" b="0">
-                <a:solidFill>
-                  <a:srgbClr val="5B6374"/>
-                </a:solidFill>
-                <a:latin typeface="Calibri"/>
-              </a:rPr>
-              <a:t>    Module 1: OCR &amp; Document Understanding -- PDF to structured markdown</a:t>
-            </a:r>
-          </a:p>
-          <a:p>
-            <a:pPr>
-              <a:spcAft>
-                <a:spcPts val="1000"/>
-              </a:spcAft>
-            </a:pPr>
-            <a:r>
-              <a:rPr sz="1800" b="1">
-                <a:solidFill>
-                  <a:srgbClr val="3E8EDE"/>
-                </a:solidFill>
-                <a:latin typeface="Calibri"/>
-              </a:rPr>
-              <a:t>►  Module 2: Analysis &amp; Validation -- Is the extraction actually right?   ◂ you are here</a:t>
-            </a:r>
-          </a:p>
-          <a:p>
-            <a:pPr>
-              <a:spcAft>
-                <a:spcPts val="1000"/>
-              </a:spcAft>
-            </a:pPr>
-            <a:r>
-              <a:rPr sz="1600" b="0">
-                <a:solidFill>
-                  <a:srgbClr val="5B6374"/>
-                </a:solidFill>
-                <a:latin typeface="Calibri"/>
-              </a:rPr>
-              <a:t>    Module 3: Chunking -- Splitting documents for retrieval</a:t>
-            </a:r>
-          </a:p>
-          <a:p>
-            <a:pPr>
-              <a:spcAft>
-                <a:spcPts val="1000"/>
-              </a:spcAft>
-            </a:pPr>
-            <a:r>
-              <a:rPr sz="1600" b="0">
-                <a:solidFill>
-                  <a:srgbClr val="5B6374"/>
-                </a:solidFill>
-                <a:latin typeface="Calibri"/>
-              </a:rPr>
-              <a:t>    Module 4: Embedding &amp; Database -- Vectors, Postgres, pgvector</a:t>
-            </a:r>
-          </a:p>
-          <a:p>
-            <a:pPr>
-              <a:spcAft>
-                <a:spcPts val="1000"/>
-              </a:spcAft>
-            </a:pPr>
-            <a:r>
-              <a:rPr sz="1600" b="0">
-                <a:solidFill>
-                  <a:srgbClr val="5B6374"/>
-                </a:solidFill>
-                <a:latin typeface="Calibri"/>
-              </a:rPr>
-              <a:t>    Module 5: Database Deep Dive -- Search, indexes, and what Postgres actually does</a:t>
-            </a:r>
-          </a:p>
-          <a:p>
-            <a:pPr>
-              <a:spcAft>
-                <a:spcPts val="1000"/>
-              </a:spcAft>
-            </a:pPr>
-            <a:r>
-              <a:rPr sz="1600" b="0">
-                <a:solidFill>
-                  <a:srgbClr val="5B6374"/>
-                </a:solidFill>
-                <a:latin typeface="Calibri"/>
-              </a:rPr>
-              <a:t>    Module 6: Summarization -- Retrieval + a real LLM + a UI</a:t>
-            </a:r>
-          </a:p>
-        </p:txBody>
-      </p:sp>
-      <p:sp>
-        <p:nvSpPr>
-          <p:cNvPr id="7" name="TextBox 6"/>
-          <p:cNvSpPr txBox="1"/>
-          <p:nvPr/>
-        </p:nvSpPr>
-        <p:spPr>
-          <a:xfrm>
-            <a:off x="731520" y="5760720"/>
-            <a:ext cx="10698480" cy="731520"/>
-          </a:xfrm>
-          <a:prstGeom prst="rect">
-            <a:avLst/>
-          </a:prstGeom>
-          <a:noFill/>
-        </p:spPr>
-        <p:txBody>
-          <a:bodyPr wrap="square">
-            <a:spAutoFit/>
-          </a:bodyPr>
-          <a:lstStyle/>
-          <a:p>
-            <a:pPr algn="l"/>
-            <a:r>
-              <a:rPr sz="1300" b="0" i="1">
-                <a:solidFill>
-                  <a:srgbClr val="5B6374"/>
-                </a:solidFill>
-                <a:latin typeface="Calibri"/>
-              </a:rPr>
-              <a:t>More modules are planned as the series continues toward a complete chatbot -- retrieval and response generation are next.</a:t>
-            </a:r>
-          </a:p>
-        </p:txBody>
-      </p:sp>
-      <p:sp>
-        <p:nvSpPr>
-          <p:cNvPr id="8" name="TextBox 7"/>
-          <p:cNvSpPr txBox="1"/>
-          <p:nvPr/>
-        </p:nvSpPr>
-        <p:spPr>
-          <a:xfrm>
-            <a:off x="11521440" y="6446520"/>
-            <a:ext cx="548640" cy="320040"/>
-          </a:xfrm>
-          <a:prstGeom prst="rect">
-            <a:avLst/>
-          </a:prstGeom>
-          <a:noFill/>
-        </p:spPr>
-        <p:txBody>
-          <a:bodyPr wrap="square">
-            <a:spAutoFit/>
-          </a:bodyPr>
-          <a:lstStyle/>
-          <a:p>
-            <a:pPr algn="r"/>
-            <a:r>
-              <a:rPr sz="1100" b="0" i="0">
-                <a:solidFill>
-                  <a:srgbClr val="5B6374"/>
-                </a:solidFill>
-                <a:latin typeface="Calibri"/>
-              </a:rPr>
-              <a:t>2</a:t>
-            </a:r>
-          </a:p>
-        </p:txBody>
-      </p:sp>
-    </p:spTree>
-  </p:cSld>
-  <p:clrMapOvr>
-    <a:masterClrMapping/>
-  </p:clrMapOvr>
-</p:sld>
-</file>
-
-<file path=ppt/slides/slide3.xml><?xml version="1.0" encoding="utf-8"?>
-<p:sld xmlns:a="http://schemas.openxmlformats.org/drawingml/2006/main" xmlns:p="http://schemas.openxmlformats.org/presentationml/2006/main" xmlns:r="http://schemas.openxmlformats.org/officeDocument/2006/relationships">
-  <p:cSld>
-    <p:bg>
-      <p:bgPr>
-        <a:solidFill>
-          <a:srgbClr val="FFFFFF"/>
-        </a:solidFill>
-        <a:effectLst/>
-      </p:bgPr>
-    </p:bg>
-    <p:spTree>
-      <p:nvGrpSpPr>
-        <p:cNvPr id="1" name=""/>
-        <p:cNvGrpSpPr/>
-        <p:nvPr/>
-      </p:nvGrpSpPr>
-      <p:grpSpPr/>
-      <p:sp>
-        <p:nvSpPr>
-          <p:cNvPr id="2" name="Rectangle 1"/>
-          <p:cNvSpPr/>
-          <p:nvPr/>
-        </p:nvSpPr>
-        <p:spPr>
-          <a:xfrm>
-            <a:off x="0" y="0"/>
-            <a:ext cx="12191695" cy="109728"/>
-          </a:xfrm>
-          <a:prstGeom prst="rect">
-            <a:avLst/>
-          </a:prstGeom>
-          <a:solidFill>
-            <a:srgbClr val="3E8EDE"/>
-          </a:solidFill>
-          <a:ln>
-            <a:noFill/>
-          </a:ln>
-        </p:spPr>
-        <p:style>
-          <a:lnRef idx="1">
-            <a:schemeClr val="accent1"/>
-          </a:lnRef>
-          <a:fillRef idx="3">
-            <a:schemeClr val="accent1"/>
-          </a:fillRef>
-          <a:effectRef idx="2">
-            <a:schemeClr val="accent1"/>
-          </a:effectRef>
-          <a:fontRef idx="minor">
-            <a:schemeClr val="lt1"/>
-          </a:fontRef>
-        </p:style>
-        <p:txBody>
-          <a:bodyPr rtlCol="0" anchor="ctr"/>
-          <a:lstStyle/>
-          <a:p>
-            <a:pPr algn="ctr"/>
-          </a:p>
-        </p:txBody>
-      </p:sp>
-      <p:sp>
-        <p:nvSpPr>
-          <p:cNvPr id="3" name="TextBox 2"/>
-          <p:cNvSpPr txBox="1"/>
-          <p:nvPr/>
-        </p:nvSpPr>
-        <p:spPr>
-          <a:xfrm>
-            <a:off x="640080" y="411480"/>
-            <a:ext cx="10881360" cy="457200"/>
-          </a:xfrm>
-          <a:prstGeom prst="rect">
-            <a:avLst/>
-          </a:prstGeom>
-          <a:noFill/>
-        </p:spPr>
-        <p:txBody>
-          <a:bodyPr wrap="square">
-            <a:spAutoFit/>
-          </a:bodyPr>
-          <a:lstStyle/>
-          <a:p>
-            <a:pPr algn="l"/>
-            <a:r>
-              <a:rPr sz="1500" b="1" i="0">
-                <a:solidFill>
-                  <a:srgbClr val="3E8EDE"/>
-                </a:solidFill>
-                <a:latin typeface="Calibri"/>
-              </a:rPr>
-              <a:t>WHY THIS EXISTS</a:t>
-            </a:r>
-          </a:p>
-        </p:txBody>
-      </p:sp>
-      <p:sp>
-        <p:nvSpPr>
-          <p:cNvPr id="4" name="TextBox 3"/>
-          <p:cNvSpPr txBox="1"/>
-          <p:nvPr/>
-        </p:nvSpPr>
-        <p:spPr>
-          <a:xfrm>
-            <a:off x="640080" y="777240"/>
-            <a:ext cx="10881360" cy="822960"/>
-          </a:xfrm>
-          <a:prstGeom prst="rect">
-            <a:avLst/>
-          </a:prstGeom>
-          <a:noFill/>
-        </p:spPr>
-        <p:txBody>
-          <a:bodyPr wrap="square">
-            <a:spAutoFit/>
-          </a:bodyPr>
-          <a:lstStyle/>
-          <a:p>
-            <a:pPr algn="l"/>
-            <a:r>
-              <a:rPr sz="3000" b="1" i="0">
-                <a:solidFill>
-                  <a:srgbClr val="1A1D27"/>
-                </a:solidFill>
-                <a:latin typeface="Calibri"/>
-              </a:rPr>
-              <a:t>“Done” Is Not the Same as “Correct”</a:t>
-            </a:r>
-          </a:p>
-        </p:txBody>
-      </p:sp>
-      <p:sp>
-        <p:nvSpPr>
-          <p:cNvPr id="5" name="TextBox 4"/>
-          <p:cNvSpPr txBox="1"/>
-          <p:nvPr/>
-        </p:nvSpPr>
-        <p:spPr>
-          <a:xfrm>
-            <a:off x="731520" y="1691640"/>
-            <a:ext cx="10698480" cy="4480560"/>
-          </a:xfrm>
-          <a:prstGeom prst="rect">
-            <a:avLst/>
-          </a:prstGeom>
-          <a:noFill/>
-        </p:spPr>
-        <p:txBody>
-          <a:bodyPr wrap="square">
-            <a:spAutoFit/>
-          </a:bodyPr>
-          <a:lstStyle/>
-          <a:p>
-            <a:pPr>
-              <a:spcAft>
-                <a:spcPts val="1200"/>
-              </a:spcAft>
-            </a:pPr>
-            <a:r>
-              <a:rPr sz="2000" b="1">
-                <a:solidFill>
-                  <a:srgbClr val="1A1D27"/>
-                </a:solidFill>
-                <a:latin typeface="Calibri"/>
-              </a:rPr>
-              <a:t>▸  Module 1 finishes every run the same way: a .md file and a metadata.json get written, no error, no warning</a:t>
-            </a:r>
-          </a:p>
-          <a:p>
-            <a:pPr>
-              <a:spcAft>
-                <a:spcPts val="1200"/>
-              </a:spcAft>
-            </a:pPr>
-            <a:r>
-              <a:rPr sz="2000" b="1">
-                <a:solidFill>
-                  <a:srgbClr val="1A1D27"/>
-                </a:solidFill>
-                <a:latin typeface="Calibri"/>
-              </a:rPr>
-              <a:t>▸  That tells you the pipeline didn't crash. It tells you nothing about whether the output is trustworthy</a:t>
-            </a:r>
-          </a:p>
-          <a:p>
-            <a:pPr>
-              <a:spcAft>
-                <a:spcPts val="1200"/>
-              </a:spcAft>
-            </a:pPr>
-            <a:r>
-              <a:rPr sz="2000" b="1">
-                <a:solidFill>
-                  <a:srgbClr val="1A1D27"/>
-                </a:solidFill>
-                <a:latin typeface="Calibri"/>
-              </a:rPr>
-              <a:t>▸  Module 2's job: turn the raw output of many documents into numbers you can actually look at and question</a:t>
-            </a:r>
-          </a:p>
-          <a:p>
-            <a:pPr>
-              <a:spcAft>
-                <a:spcPts val="600"/>
-              </a:spcAft>
-            </a:pPr>
-            <a:r>
-              <a:rPr sz="1600" b="0">
-                <a:solidFill>
-                  <a:srgbClr val="5B6374"/>
-                </a:solidFill>
-                <a:latin typeface="Calibri"/>
-              </a:rPr>
-              <a:t>     –  page counts, token density, artifacts found, regions the model wasn't sure about, regions it dropped</a:t>
-            </a:r>
-          </a:p>
-          <a:p>
-            <a:pPr>
-              <a:spcAft>
-                <a:spcPts val="1200"/>
-              </a:spcAft>
-            </a:pPr>
-            <a:r>
-              <a:rPr sz="2000" b="1">
-                <a:solidFill>
-                  <a:srgbClr val="1A1D27"/>
-                </a:solidFill>
-                <a:latin typeface="Calibri"/>
-              </a:rPr>
-              <a:t>▸  The deliverable is one Excel workbook -- because the person who needs to sanity-check 50 documents is rarely the person who wrote the pipeline</a:t>
-            </a:r>
-          </a:p>
-        </p:txBody>
-      </p:sp>
-      <p:sp>
-        <p:nvSpPr>
-          <p:cNvPr id="6" name="TextBox 5"/>
-          <p:cNvSpPr txBox="1"/>
-          <p:nvPr/>
-        </p:nvSpPr>
-        <p:spPr>
-          <a:xfrm>
-            <a:off x="11521440" y="6446520"/>
-            <a:ext cx="548640" cy="320040"/>
-          </a:xfrm>
-          <a:prstGeom prst="rect">
-            <a:avLst/>
-          </a:prstGeom>
-          <a:noFill/>
-        </p:spPr>
-        <p:txBody>
-          <a:bodyPr wrap="square">
-            <a:spAutoFit/>
-          </a:bodyPr>
-          <a:lstStyle/>
-          <a:p>
-            <a:pPr algn="r"/>
-            <a:r>
-              <a:rPr sz="1100" b="0" i="0">
-                <a:solidFill>
-                  <a:srgbClr val="5B6374"/>
-                </a:solidFill>
-                <a:latin typeface="Calibri"/>
-              </a:rPr>
-              <a:t>3</a:t>
-            </a:r>
-          </a:p>
-        </p:txBody>
-      </p:sp>
-    </p:spTree>
-  </p:cSld>
-  <p:clrMapOvr>
-    <a:masterClrMapping/>
-  </p:clrMapOvr>
-</p:sld>
-</file>
-
-<file path=ppt/slides/slide4.xml><?xml version="1.0" encoding="utf-8"?>
-<p:sld xmlns:a="http://schemas.openxmlformats.org/drawingml/2006/main" xmlns:p="http://schemas.openxmlformats.org/presentationml/2006/main" xmlns:r="http://schemas.openxmlformats.org/officeDocument/2006/relationships">
-  <p:cSld>
-    <p:bg>
-      <p:bgPr>
-        <a:solidFill>
-          <a:srgbClr val="FFFFFF"/>
-        </a:solidFill>
-        <a:effectLst/>
-      </p:bgPr>
-    </p:bg>
-    <p:spTree>
-      <p:nvGrpSpPr>
-        <p:cNvPr id="1" name=""/>
-        <p:cNvGrpSpPr/>
-        <p:nvPr/>
-      </p:nvGrpSpPr>
-      <p:grpSpPr/>
-      <p:sp>
-        <p:nvSpPr>
-          <p:cNvPr id="2" name="Rectangle 1"/>
-          <p:cNvSpPr/>
-          <p:nvPr/>
-        </p:nvSpPr>
-        <p:spPr>
-          <a:xfrm>
-            <a:off x="0" y="0"/>
-            <a:ext cx="12191695" cy="109728"/>
-          </a:xfrm>
-          <a:prstGeom prst="rect">
-            <a:avLst/>
-          </a:prstGeom>
-          <a:solidFill>
-            <a:srgbClr val="F2A63D"/>
-          </a:solidFill>
-          <a:ln>
-            <a:noFill/>
-          </a:ln>
-        </p:spPr>
-        <p:style>
-          <a:lnRef idx="1">
-            <a:schemeClr val="accent1"/>
-          </a:lnRef>
-          <a:fillRef idx="3">
-            <a:schemeClr val="accent1"/>
-          </a:fillRef>
-          <a:effectRef idx="2">
-            <a:schemeClr val="accent1"/>
-          </a:effectRef>
-          <a:fontRef idx="minor">
-            <a:schemeClr val="lt1"/>
-          </a:fontRef>
-        </p:style>
-        <p:txBody>
-          <a:bodyPr rtlCol="0" anchor="ctr"/>
-          <a:lstStyle/>
-          <a:p>
-            <a:pPr algn="ctr"/>
-          </a:p>
-        </p:txBody>
-      </p:sp>
-      <p:sp>
-        <p:nvSpPr>
-          <p:cNvPr id="3" name="TextBox 2"/>
-          <p:cNvSpPr txBox="1"/>
-          <p:nvPr/>
-        </p:nvSpPr>
-        <p:spPr>
-          <a:xfrm>
-            <a:off x="640080" y="411480"/>
-            <a:ext cx="10881360" cy="457200"/>
-          </a:xfrm>
-          <a:prstGeom prst="rect">
-            <a:avLst/>
-          </a:prstGeom>
-          <a:noFill/>
-        </p:spPr>
-        <p:txBody>
-          <a:bodyPr wrap="square">
-            <a:spAutoFit/>
-          </a:bodyPr>
-          <a:lstStyle/>
-          <a:p>
-            <a:pPr algn="l"/>
-            <a:r>
-              <a:rPr sz="1500" b="1" i="0">
-                <a:solidFill>
-                  <a:srgbClr val="F2A63D"/>
-                </a:solidFill>
-                <a:latin typeface="Calibri"/>
-              </a:rPr>
-              <a:t>DID YOU KNOW</a:t>
-            </a:r>
-          </a:p>
-        </p:txBody>
-      </p:sp>
-      <p:sp>
-        <p:nvSpPr>
-          <p:cNvPr id="4" name="TextBox 3"/>
-          <p:cNvSpPr txBox="1"/>
-          <p:nvPr/>
-        </p:nvSpPr>
-        <p:spPr>
-          <a:xfrm>
-            <a:off x="640080" y="777240"/>
-            <a:ext cx="10881360" cy="822960"/>
-          </a:xfrm>
-          <a:prstGeom prst="rect">
-            <a:avLst/>
-          </a:prstGeom>
-          <a:noFill/>
-        </p:spPr>
-        <p:txBody>
-          <a:bodyPr wrap="square">
-            <a:spAutoFit/>
-          </a:bodyPr>
-          <a:lstStyle/>
-          <a:p>
-            <a:pPr algn="l"/>
-            <a:r>
-              <a:rPr sz="3000" b="1" i="0">
-                <a:solidFill>
-                  <a:srgbClr val="1A1D27"/>
-                </a:solidFill>
-                <a:latin typeface="Calibri"/>
-              </a:rPr>
-              <a:t>“Tokens” Are Newer Than You'd Think</a:t>
-            </a:r>
-          </a:p>
-        </p:txBody>
-      </p:sp>
-      <p:sp>
-        <p:nvSpPr>
-          <p:cNvPr id="5" name="TextBox 4"/>
-          <p:cNvSpPr txBox="1"/>
-          <p:nvPr/>
-        </p:nvSpPr>
-        <p:spPr>
-          <a:xfrm>
-            <a:off x="731520" y="1691640"/>
-            <a:ext cx="10698480" cy="4480560"/>
-          </a:xfrm>
-          <a:prstGeom prst="rect">
-            <a:avLst/>
-          </a:prstGeom>
-          <a:noFill/>
-        </p:spPr>
-        <p:txBody>
-          <a:bodyPr wrap="square">
-            <a:spAutoFit/>
-          </a:bodyPr>
-          <a:lstStyle/>
-          <a:p>
-            <a:pPr>
-              <a:spcAft>
-                <a:spcPts val="1200"/>
-              </a:spcAft>
-            </a:pPr>
-            <a:r>
-              <a:rPr sz="2000" b="1">
-                <a:solidFill>
-                  <a:srgbClr val="1A1D27"/>
-                </a:solidFill>
-                <a:latin typeface="Calibri"/>
-              </a:rPr>
-              <a:t>▸  Byte-Pair Encoding (BPE) -- the technique behind most modern LLM tokenizers -- was originally a 1994 data-COMPRESSION algorithm, not an AI technique at all</a:t>
-            </a:r>
-          </a:p>
-          <a:p>
-            <a:pPr>
-              <a:spcAft>
-                <a:spcPts val="1200"/>
-              </a:spcAft>
-            </a:pPr>
-            <a:r>
-              <a:rPr sz="2000" b="1">
-                <a:solidFill>
-                  <a:srgbClr val="1A1D27"/>
-                </a:solidFill>
-                <a:latin typeface="Calibri"/>
-              </a:rPr>
-              <a:t>▸  It was repurposed for language models in 2015-2016, first for machine translation, years before GPT existed</a:t>
-            </a:r>
-          </a:p>
-          <a:p>
-            <a:pPr>
-              <a:spcAft>
-                <a:spcPts val="1200"/>
-              </a:spcAft>
-            </a:pPr>
-            <a:r>
-              <a:rPr sz="2000" b="1">
-                <a:solidFill>
-                  <a:srgbClr val="1A1D27"/>
-                </a:solidFill>
-                <a:latin typeface="Calibri"/>
-              </a:rPr>
-              <a:t>▸  There is no universal “token” -- every model family (GPT, Qwen, Llama, Claude...) trains its own tokenizer on its own text, so the same sentence can produce a different token count in each one</a:t>
-            </a:r>
-          </a:p>
-          <a:p>
-            <a:pPr>
-              <a:spcAft>
-                <a:spcPts val="600"/>
-              </a:spcAft>
-            </a:pPr>
-            <a:r>
-              <a:rPr sz="1600" b="0">
-                <a:solidFill>
-                  <a:srgbClr val="5B6374"/>
-                </a:solidFill>
-                <a:latin typeface="Calibri"/>
-              </a:rPr>
-              <a:t>     –  This is exactly why this module loads Qwen3.5-0.8B's own tokenizer instead of guessing -- see the next few slides</a:t>
-            </a:r>
-          </a:p>
-        </p:txBody>
-      </p:sp>
-      <p:sp>
-        <p:nvSpPr>
-          <p:cNvPr id="6" name="TextBox 5"/>
-          <p:cNvSpPr txBox="1"/>
-          <p:nvPr/>
-        </p:nvSpPr>
-        <p:spPr>
-          <a:xfrm>
-            <a:off x="11521440" y="6446520"/>
-            <a:ext cx="548640" cy="320040"/>
-          </a:xfrm>
-          <a:prstGeom prst="rect">
-            <a:avLst/>
-          </a:prstGeom>
-          <a:noFill/>
-        </p:spPr>
-        <p:txBody>
-          <a:bodyPr wrap="square">
-            <a:spAutoFit/>
-          </a:bodyPr>
-          <a:lstStyle/>
-          <a:p>
-            <a:pPr algn="r"/>
-            <a:r>
-              <a:rPr sz="1100" b="0" i="0">
-                <a:solidFill>
-                  <a:srgbClr val="5B6374"/>
-                </a:solidFill>
-                <a:latin typeface="Calibri"/>
-              </a:rPr>
-              <a:t>4</a:t>
-            </a:r>
-          </a:p>
-        </p:txBody>
-      </p:sp>
-      <p:sp>
-        <p:nvSpPr>
-          <p:cNvPr id="7" name="TextBox 6"/>
-          <p:cNvSpPr txBox="1"/>
-          <p:nvPr/>
-        </p:nvSpPr>
-        <p:spPr>
-          <a:xfrm>
-            <a:off x="9692640" y="384048"/>
-            <a:ext cx="1828800" cy="457200"/>
-          </a:xfrm>
-          <a:prstGeom prst="rect">
-            <a:avLst/>
-          </a:prstGeom>
-          <a:noFill/>
-        </p:spPr>
-        <p:txBody>
-          <a:bodyPr wrap="none">
-            <a:spAutoFit/>
-          </a:bodyPr>
-          <a:lstStyle/>
-          <a:p>
-            <a:pPr algn="r"/>
-            <a:r>
-              <a:rPr sz="1200" b="1">
-                <a:solidFill>
-                  <a:srgbClr val="F2A63D"/>
-                </a:solidFill>
-              </a:rPr>
-              <a:t>★ DID YOU KNOW</a:t>
-            </a:r>
-          </a:p>
-        </p:txBody>
-      </p:sp>
-    </p:spTree>
-  </p:cSld>
-  <p:clrMapOvr>
-    <a:masterClrMapping/>
-  </p:clrMapOvr>
-</p:sld>
-</file>
-
-<file path=ppt/slides/slide5.xml><?xml version="1.0" encoding="utf-8"?>
-<p:sld xmlns:a="http://schemas.openxmlformats.org/drawingml/2006/main" xmlns:p="http://schemas.openxmlformats.org/presentationml/2006/main" xmlns:r="http://schemas.openxmlformats.org/officeDocument/2006/relationships">
-  <p:cSld>
-    <p:bg>
-      <p:bgPr>
-        <a:solidFill>
-          <a:srgbClr val="FFFFFF"/>
-        </a:solidFill>
-        <a:effectLst/>
-      </p:bgPr>
-    </p:bg>
-    <p:spTree>
-      <p:nvGrpSpPr>
-        <p:cNvPr id="1" name=""/>
-        <p:cNvGrpSpPr/>
-        <p:nvPr/>
-      </p:nvGrpSpPr>
-      <p:grpSpPr/>
-      <p:sp>
-        <p:nvSpPr>
-          <p:cNvPr id="2" name="Rectangle 1"/>
-          <p:cNvSpPr/>
-          <p:nvPr/>
-        </p:nvSpPr>
-        <p:spPr>
-          <a:xfrm>
-            <a:off x="0" y="0"/>
-            <a:ext cx="12191695" cy="109728"/>
-          </a:xfrm>
-          <a:prstGeom prst="rect">
-            <a:avLst/>
-          </a:prstGeom>
-          <a:solidFill>
-            <a:srgbClr val="3E8EDE"/>
-          </a:solidFill>
-          <a:ln>
-            <a:noFill/>
-          </a:ln>
-        </p:spPr>
-        <p:style>
-          <a:lnRef idx="1">
-            <a:schemeClr val="accent1"/>
-          </a:lnRef>
-          <a:fillRef idx="3">
-            <a:schemeClr val="accent1"/>
-          </a:fillRef>
-          <a:effectRef idx="2">
-            <a:schemeClr val="accent1"/>
-          </a:effectRef>
-          <a:fontRef idx="minor">
-            <a:schemeClr val="lt1"/>
-          </a:fontRef>
-        </p:style>
-        <p:txBody>
-          <a:bodyPr rtlCol="0" anchor="ctr"/>
-          <a:lstStyle/>
-          <a:p>
-            <a:pPr algn="ctr"/>
-          </a:p>
-        </p:txBody>
-      </p:sp>
-      <p:sp>
-        <p:nvSpPr>
-          <p:cNvPr id="3" name="TextBox 2"/>
-          <p:cNvSpPr txBox="1"/>
-          <p:nvPr/>
-        </p:nvSpPr>
-        <p:spPr>
-          <a:xfrm>
-            <a:off x="640080" y="411480"/>
-            <a:ext cx="10881360" cy="457200"/>
-          </a:xfrm>
-          <a:prstGeom prst="rect">
-            <a:avLst/>
-          </a:prstGeom>
-          <a:noFill/>
-        </p:spPr>
-        <p:txBody>
-          <a:bodyPr wrap="square">
-            <a:spAutoFit/>
-          </a:bodyPr>
-          <a:lstStyle/>
-          <a:p>
-            <a:pPr algn="l"/>
-            <a:r>
-              <a:rPr sz="1500" b="1" i="0">
-                <a:solidFill>
-                  <a:srgbClr val="3E8EDE"/>
-                </a:solidFill>
-                <a:latin typeface="Calibri"/>
-              </a:rPr>
-              <a:t>OVERVIEW</a:t>
-            </a:r>
-          </a:p>
-        </p:txBody>
-      </p:sp>
-      <p:sp>
-        <p:nvSpPr>
-          <p:cNvPr id="4" name="TextBox 3"/>
-          <p:cNvSpPr txBox="1"/>
-          <p:nvPr/>
-        </p:nvSpPr>
-        <p:spPr>
-          <a:xfrm>
-            <a:off x="640080" y="777240"/>
-            <a:ext cx="10881360" cy="822960"/>
-          </a:xfrm>
-          <a:prstGeom prst="rect">
-            <a:avLst/>
-          </a:prstGeom>
-          <a:noFill/>
-        </p:spPr>
-        <p:txBody>
-          <a:bodyPr wrap="square">
-            <a:spAutoFit/>
-          </a:bodyPr>
-          <a:lstStyle/>
-          <a:p>
-            <a:pPr algn="l"/>
-            <a:r>
-              <a:rPr sz="3000" b="1" i="0">
-                <a:solidFill>
-                  <a:srgbClr val="1A1D27"/>
-                </a:solidFill>
-                <a:latin typeface="Calibri"/>
-              </a:rPr>
-              <a:t>What analyze.py Actually Does</a:t>
-            </a:r>
-          </a:p>
-        </p:txBody>
-      </p:sp>
-      <p:sp>
-        <p:nvSpPr>
-          <p:cNvPr id="5" name="TextBox 4"/>
-          <p:cNvSpPr txBox="1"/>
-          <p:nvPr/>
-        </p:nvSpPr>
-        <p:spPr>
-          <a:xfrm>
-            <a:off x="731520" y="1691640"/>
-            <a:ext cx="10698480" cy="4480560"/>
-          </a:xfrm>
-          <a:prstGeom prst="rect">
-            <a:avLst/>
-          </a:prstGeom>
-          <a:noFill/>
-        </p:spPr>
-        <p:txBody>
-          <a:bodyPr wrap="square">
-            <a:spAutoFit/>
-          </a:bodyPr>
-          <a:lstStyle/>
-          <a:p>
-            <a:pPr>
-              <a:spcAft>
-                <a:spcPts val="1200"/>
-              </a:spcAft>
-            </a:pPr>
-            <a:r>
-              <a:rPr sz="2000" b="1">
-                <a:solidFill>
-                  <a:srgbClr val="1A1D27"/>
-                </a:solidFill>
-                <a:latin typeface="Calibri"/>
-              </a:rPr>
-              <a:t>▸  Reads every completed run in Module 1's output/ folder -- the .md file plus metadata.json</a:t>
-            </a:r>
-          </a:p>
-          <a:p>
-            <a:pPr>
-              <a:spcAft>
-                <a:spcPts val="1200"/>
-              </a:spcAft>
-            </a:pPr>
-            <a:r>
-              <a:rPr sz="2000" b="1">
-                <a:solidFill>
-                  <a:srgbClr val="1A1D27"/>
-                </a:solidFill>
-                <a:latin typeface="Calibri"/>
-              </a:rPr>
-              <a:t>▸  Computes, per document: page count, word count, real token count, tokens/page, images and tables found in the body, artifact counts, low-confidence region count, dropped region count</a:t>
-            </a:r>
-          </a:p>
-          <a:p>
-            <a:pPr>
-              <a:spcAft>
-                <a:spcPts val="1200"/>
-              </a:spcAft>
-            </a:pPr>
-            <a:r>
-              <a:rPr sz="2000" b="1">
-                <a:solidFill>
-                  <a:srgbClr val="1A1D27"/>
-                </a:solidFill>
-                <a:latin typeface="Calibri"/>
-              </a:rPr>
-              <a:t>▸  Writes one Excel workbook: a Summary sheet (one row per document) plus three detail sheets for anything worth a second look</a:t>
-            </a:r>
-          </a:p>
-          <a:p>
-            <a:pPr>
-              <a:spcAft>
-                <a:spcPts val="1200"/>
-              </a:spcAft>
-            </a:pPr>
-            <a:r>
-              <a:rPr sz="2000" b="1">
-                <a:solidFill>
-                  <a:srgbClr val="1A1D27"/>
-                </a:solidFill>
-                <a:latin typeface="Calibri"/>
-              </a:rPr>
-              <a:t>▸  That's the whole module -- three files: stats.py (compute), tokenizer_util.py (count), report.py (write the workbook)</a:t>
-            </a:r>
-          </a:p>
-        </p:txBody>
-      </p:sp>
-      <p:sp>
-        <p:nvSpPr>
-          <p:cNvPr id="6" name="TextBox 5"/>
-          <p:cNvSpPr txBox="1"/>
-          <p:nvPr/>
-        </p:nvSpPr>
-        <p:spPr>
-          <a:xfrm>
-            <a:off x="11521440" y="6446520"/>
-            <a:ext cx="548640" cy="320040"/>
-          </a:xfrm>
-          <a:prstGeom prst="rect">
-            <a:avLst/>
-          </a:prstGeom>
-          <a:noFill/>
-        </p:spPr>
-        <p:txBody>
-          <a:bodyPr wrap="square">
-            <a:spAutoFit/>
-          </a:bodyPr>
-          <a:lstStyle/>
-          <a:p>
-            <a:pPr algn="r"/>
-            <a:r>
-              <a:rPr sz="1100" b="0" i="0">
-                <a:solidFill>
-                  <a:srgbClr val="5B6374"/>
-                </a:solidFill>
-                <a:latin typeface="Calibri"/>
-              </a:rPr>
-              <a:t>5</a:t>
-            </a:r>
-          </a:p>
-        </p:txBody>
-      </p:sp>
-    </p:spTree>
-  </p:cSld>
-  <p:clrMapOvr>
-    <a:masterClrMapping/>
-  </p:clrMapOvr>
-</p:sld>
-</file>
-
-<file path=ppt/slides/slide6.xml><?xml version="1.0" encoding="utf-8"?>
-<p:sld xmlns:a="http://schemas.openxmlformats.org/drawingml/2006/main" xmlns:p="http://schemas.openxmlformats.org/presentationml/2006/main" xmlns:r="http://schemas.openxmlformats.org/officeDocument/2006/relationships">
-  <p:cSld>
-    <p:bg>
-      <p:bgPr>
-        <a:solidFill>
-          <a:srgbClr val="FFFFFF"/>
-        </a:solidFill>
-        <a:effectLst/>
-      </p:bgPr>
-    </p:bg>
-    <p:spTree>
-      <p:nvGrpSpPr>
-        <p:cNvPr id="1" name=""/>
-        <p:cNvGrpSpPr/>
-        <p:nvPr/>
-      </p:nvGrpSpPr>
-      <p:grpSpPr/>
-      <p:sp>
-        <p:nvSpPr>
-          <p:cNvPr id="2" name="Rectangle 1"/>
-          <p:cNvSpPr/>
-          <p:nvPr/>
-        </p:nvSpPr>
-        <p:spPr>
-          <a:xfrm>
-            <a:off x="0" y="0"/>
-            <a:ext cx="12191695" cy="109728"/>
-          </a:xfrm>
-          <a:prstGeom prst="rect">
-            <a:avLst/>
-          </a:prstGeom>
-          <a:solidFill>
-            <a:srgbClr val="3E8EDE"/>
-          </a:solidFill>
-          <a:ln>
-            <a:noFill/>
-          </a:ln>
-        </p:spPr>
-        <p:style>
-          <a:lnRef idx="1">
-            <a:schemeClr val="accent1"/>
-          </a:lnRef>
-          <a:fillRef idx="3">
-            <a:schemeClr val="accent1"/>
-          </a:fillRef>
-          <a:effectRef idx="2">
-            <a:schemeClr val="accent1"/>
-          </a:effectRef>
-          <a:fontRef idx="minor">
-            <a:schemeClr val="lt1"/>
-          </a:fontRef>
-        </p:style>
-        <p:txBody>
-          <a:bodyPr rtlCol="0" anchor="ctr"/>
-          <a:lstStyle/>
-          <a:p>
-            <a:pPr algn="ctr"/>
-          </a:p>
-        </p:txBody>
-      </p:sp>
-      <p:sp>
-        <p:nvSpPr>
-          <p:cNvPr id="3" name="TextBox 2"/>
-          <p:cNvSpPr txBox="1"/>
-          <p:nvPr/>
-        </p:nvSpPr>
-        <p:spPr>
-          <a:xfrm>
-            <a:off x="640080" y="411480"/>
-            <a:ext cx="10881360" cy="457200"/>
-          </a:xfrm>
-          <a:prstGeom prst="rect">
-            <a:avLst/>
-          </a:prstGeom>
-          <a:noFill/>
-        </p:spPr>
-        <p:txBody>
-          <a:bodyPr wrap="square">
-            <a:spAutoFit/>
-          </a:bodyPr>
-          <a:lstStyle/>
-          <a:p>
-            <a:pPr algn="l"/>
-            <a:r>
-              <a:rPr sz="1500" b="1" i="0">
-                <a:solidFill>
-                  <a:srgbClr val="3E8EDE"/>
-                </a:solidFill>
-                <a:latin typeface="Calibri"/>
-              </a:rPr>
-              <a:t>ENGINEERING DETAIL</a:t>
-            </a:r>
-          </a:p>
-        </p:txBody>
-      </p:sp>
-      <p:sp>
-        <p:nvSpPr>
-          <p:cNvPr id="4" name="TextBox 3"/>
-          <p:cNvSpPr txBox="1"/>
-          <p:nvPr/>
-        </p:nvSpPr>
-        <p:spPr>
-          <a:xfrm>
-            <a:off x="640080" y="777240"/>
-            <a:ext cx="10881360" cy="822960"/>
-          </a:xfrm>
-          <a:prstGeom prst="rect">
-            <a:avLst/>
-          </a:prstGeom>
-          <a:noFill/>
-        </p:spPr>
-        <p:txBody>
-          <a:bodyPr wrap="square">
-            <a:spAutoFit/>
-          </a:bodyPr>
-          <a:lstStyle/>
-          <a:p>
-            <a:pPr algn="l"/>
-            <a:r>
-              <a:rPr sz="3000" b="1" i="0">
-                <a:solidFill>
-                  <a:srgbClr val="1A1D27"/>
-                </a:solidFill>
-                <a:latin typeface="Calibri"/>
-              </a:rPr>
-              <a:t>No New 3GB Install</a:t>
-            </a:r>
-          </a:p>
-        </p:txBody>
-      </p:sp>
-      <p:sp>
-        <p:nvSpPr>
-          <p:cNvPr id="5" name="TextBox 4"/>
-          <p:cNvSpPr txBox="1"/>
-          <p:nvPr/>
-        </p:nvSpPr>
-        <p:spPr>
-          <a:xfrm>
-            <a:off x="731520" y="1691640"/>
-            <a:ext cx="10698480" cy="4480560"/>
-          </a:xfrm>
-          <a:prstGeom prst="rect">
-            <a:avLst/>
-          </a:prstGeom>
-          <a:noFill/>
-        </p:spPr>
-        <p:txBody>
-          <a:bodyPr wrap="square">
-            <a:spAutoFit/>
-          </a:bodyPr>
-          <a:lstStyle/>
-          <a:p>
-            <a:pPr>
-              <a:spcAft>
-                <a:spcPts val="1200"/>
-              </a:spcAft>
-            </a:pPr>
-            <a:r>
-              <a:rPr sz="2000" b="1">
-                <a:solidFill>
-                  <a:srgbClr val="1A1D27"/>
-                </a:solidFill>
-                <a:latin typeface="Calibri"/>
-              </a:rPr>
-              <a:t>▸  Counting tokens the right way means loading a real tokenizer -- which means the transformers library, which Module 1 already installed</a:t>
-            </a:r>
-          </a:p>
-          <a:p>
-            <a:pPr>
-              <a:spcAft>
-                <a:spcPts val="1200"/>
-              </a:spcAft>
-            </a:pPr>
-            <a:r>
-              <a:rPr sz="2000" b="1">
-                <a:solidFill>
-                  <a:srgbClr val="1A1D27"/>
-                </a:solidFill>
-                <a:latin typeface="Calibri"/>
-              </a:rPr>
-              <a:t>▸  Module 2 reuses Module 1's virtual environment directly instead of building its own</a:t>
-            </a:r>
-          </a:p>
-          <a:p>
-            <a:pPr>
-              <a:spcAft>
-                <a:spcPts val="600"/>
-              </a:spcAft>
-            </a:pPr>
-            <a:r>
-              <a:rPr sz="1600" b="0">
-                <a:solidFill>
-                  <a:srgbClr val="5B6374"/>
-                </a:solidFill>
-                <a:latin typeface="Calibri"/>
-              </a:rPr>
-              <a:t>     –  Only new package this module needs is openpyxl -- one line in the repo's shared requirements.txt</a:t>
-            </a:r>
-          </a:p>
-          <a:p>
-            <a:pPr>
-              <a:spcAft>
-                <a:spcPts val="1200"/>
-              </a:spcAft>
-            </a:pPr>
-            <a:r>
-              <a:rPr sz="2000" b="1">
-                <a:solidFill>
-                  <a:srgbClr val="1A1D27"/>
-                </a:solidFill>
-                <a:latin typeface="Calibri"/>
-              </a:rPr>
-              <a:t>▸  Run it as:  "../1. OCR/.venv/bin/python" analyze.py</a:t>
-            </a:r>
-          </a:p>
-          <a:p>
-            <a:pPr>
-              <a:spcAft>
-                <a:spcPts val="1200"/>
-              </a:spcAft>
-            </a:pPr>
-            <a:r>
-              <a:rPr sz="2000" b="1">
-                <a:solidFill>
-                  <a:srgbClr val="1A1D27"/>
-                </a:solidFill>
-                <a:latin typeface="Calibri"/>
-              </a:rPr>
-              <a:t>▸  A small thing, but a real one -- don't make a student re-download a gigabyte of ML libraries just to count tokens and write a spreadsheet</a:t>
-            </a:r>
-          </a:p>
-        </p:txBody>
-      </p:sp>
-      <p:sp>
-        <p:nvSpPr>
-          <p:cNvPr id="6" name="TextBox 5"/>
-          <p:cNvSpPr txBox="1"/>
-          <p:nvPr/>
-        </p:nvSpPr>
-        <p:spPr>
-          <a:xfrm>
-            <a:off x="11521440" y="6446520"/>
-            <a:ext cx="548640" cy="320040"/>
-          </a:xfrm>
-          <a:prstGeom prst="rect">
-            <a:avLst/>
-          </a:prstGeom>
-          <a:noFill/>
-        </p:spPr>
-        <p:txBody>
-          <a:bodyPr wrap="square">
-            <a:spAutoFit/>
-          </a:bodyPr>
-          <a:lstStyle/>
-          <a:p>
-            <a:pPr algn="r"/>
-            <a:r>
-              <a:rPr sz="1100" b="0" i="0">
-                <a:solidFill>
-                  <a:srgbClr val="5B6374"/>
-                </a:solidFill>
-                <a:latin typeface="Calibri"/>
-              </a:rPr>
-              <a:t>6</a:t>
-            </a:r>
-          </a:p>
-        </p:txBody>
-      </p:sp>
-    </p:spTree>
-  </p:cSld>
-  <p:clrMapOvr>
-    <a:masterClrMapping/>
-  </p:clrMapOvr>
-</p:sld>
-</file>
-
-<file path=ppt/slides/slide7.xml><?xml version="1.0" encoding="utf-8"?>
-<p:sld xmlns:a="http://schemas.openxmlformats.org/drawingml/2006/main" xmlns:p="http://schemas.openxmlformats.org/presentationml/2006/main" xmlns:r="http://schemas.openxmlformats.org/officeDocument/2006/relationships">
-  <p:cSld>
-    <p:bg>
-      <p:bgPr>
-        <a:solidFill>
-          <a:srgbClr val="FFFFFF"/>
-        </a:solidFill>
-        <a:effectLst/>
-      </p:bgPr>
-    </p:bg>
-    <p:spTree>
-      <p:nvGrpSpPr>
-        <p:cNvPr id="1" name=""/>
-        <p:cNvGrpSpPr/>
-        <p:nvPr/>
-      </p:nvGrpSpPr>
-      <p:grpSpPr/>
-      <p:sp>
-        <p:nvSpPr>
-          <p:cNvPr id="2" name="Rectangle 1"/>
-          <p:cNvSpPr/>
-          <p:nvPr/>
-        </p:nvSpPr>
-        <p:spPr>
-          <a:xfrm>
-            <a:off x="0" y="0"/>
-            <a:ext cx="12191695" cy="109728"/>
-          </a:xfrm>
-          <a:prstGeom prst="rect">
-            <a:avLst/>
-          </a:prstGeom>
-          <a:solidFill>
-            <a:srgbClr val="3E8EDE"/>
-          </a:solidFill>
-          <a:ln>
-            <a:noFill/>
-          </a:ln>
-        </p:spPr>
-        <p:style>
-          <a:lnRef idx="1">
-            <a:schemeClr val="accent1"/>
-          </a:lnRef>
-          <a:fillRef idx="3">
-            <a:schemeClr val="accent1"/>
-          </a:fillRef>
-          <a:effectRef idx="2">
-            <a:schemeClr val="accent1"/>
-          </a:effectRef>
-          <a:fontRef idx="minor">
-            <a:schemeClr val="lt1"/>
-          </a:fontRef>
-        </p:style>
-        <p:txBody>
-          <a:bodyPr rtlCol="0" anchor="ctr"/>
-          <a:lstStyle/>
-          <a:p>
-            <a:pPr algn="ctr"/>
-          </a:p>
-        </p:txBody>
-      </p:sp>
-      <p:sp>
-        <p:nvSpPr>
-          <p:cNvPr id="3" name="TextBox 2"/>
-          <p:cNvSpPr txBox="1"/>
-          <p:nvPr/>
-        </p:nvSpPr>
-        <p:spPr>
-          <a:xfrm>
-            <a:off x="640080" y="411480"/>
-            <a:ext cx="10881360" cy="457200"/>
-          </a:xfrm>
-          <a:prstGeom prst="rect">
-            <a:avLst/>
-          </a:prstGeom>
-          <a:noFill/>
-        </p:spPr>
-        <p:txBody>
-          <a:bodyPr wrap="square">
-            <a:spAutoFit/>
-          </a:bodyPr>
-          <a:lstStyle/>
-          <a:p>
-            <a:pPr algn="l"/>
-            <a:r>
-              <a:rPr sz="1500" b="1" i="0">
-                <a:solidFill>
-                  <a:srgbClr val="3E8EDE"/>
-                </a:solidFill>
-                <a:latin typeface="Calibri"/>
-              </a:rPr>
-              <a:t>THE CORE QUESTION</a:t>
-            </a:r>
-          </a:p>
-        </p:txBody>
-      </p:sp>
-      <p:sp>
-        <p:nvSpPr>
-          <p:cNvPr id="4" name="TextBox 3"/>
-          <p:cNvSpPr txBox="1"/>
-          <p:nvPr/>
-        </p:nvSpPr>
-        <p:spPr>
-          <a:xfrm>
-            <a:off x="640080" y="777240"/>
-            <a:ext cx="10881360" cy="822960"/>
-          </a:xfrm>
-          <a:prstGeom prst="rect">
-            <a:avLst/>
-          </a:prstGeom>
-          <a:noFill/>
-        </p:spPr>
-        <p:txBody>
-          <a:bodyPr wrap="square">
-            <a:spAutoFit/>
-          </a:bodyPr>
-          <a:lstStyle/>
-          <a:p>
-            <a:pPr algn="l"/>
-            <a:r>
-              <a:rPr sz="3000" b="1" i="0">
-                <a:solidFill>
-                  <a:srgbClr val="1A1D27"/>
-                </a:solidFill>
-                <a:latin typeface="Calibri"/>
-              </a:rPr>
-              <a:t>How Many Tokens Per Page, Really?</a:t>
-            </a:r>
-          </a:p>
-        </p:txBody>
-      </p:sp>
-      <p:sp>
-        <p:nvSpPr>
-          <p:cNvPr id="5" name="TextBox 4"/>
-          <p:cNvSpPr txBox="1"/>
-          <p:nvPr/>
-        </p:nvSpPr>
-        <p:spPr>
-          <a:xfrm>
-            <a:off x="731520" y="1691640"/>
-            <a:ext cx="10698480" cy="4480560"/>
-          </a:xfrm>
-          <a:prstGeom prst="rect">
-            <a:avLst/>
-          </a:prstGeom>
-          <a:noFill/>
-        </p:spPr>
-        <p:txBody>
-          <a:bodyPr wrap="square">
-            <a:spAutoFit/>
-          </a:bodyPr>
-          <a:lstStyle/>
-          <a:p>
-            <a:pPr>
-              <a:spcAft>
-                <a:spcPts val="1200"/>
-              </a:spcAft>
-            </a:pPr>
-            <a:r>
-              <a:rPr sz="2000" b="1">
-                <a:solidFill>
-                  <a:srgbClr val="1A1D27"/>
-                </a:solidFill>
-                <a:latin typeface="Calibri"/>
-              </a:rPr>
-              <a:t>▸  “Word count” is not “token count.” A word can be one token, several tokens, or a fraction of a shared token -- it depends on the tokenizer</a:t>
-            </a:r>
-          </a:p>
-          <a:p>
-            <a:pPr>
-              <a:spcAft>
-                <a:spcPts val="1200"/>
-              </a:spcAft>
-            </a:pPr>
-            <a:r>
-              <a:rPr sz="2000" b="1">
-                <a:solidFill>
-                  <a:srgbClr val="1A1D27"/>
-                </a:solidFill>
-                <a:latin typeface="Calibri"/>
-              </a:rPr>
-              <a:t>▸  Why this matters here specifically: every downstream step (Module 3's chunking, any embedding or LLM call) is budgeted in tokens, not words or characters</a:t>
-            </a:r>
-          </a:p>
-          <a:p>
-            <a:pPr>
-              <a:spcAft>
-                <a:spcPts val="1200"/>
-              </a:spcAft>
-            </a:pPr>
-            <a:r>
-              <a:rPr sz="2000" b="1">
-                <a:solidFill>
-                  <a:srgbClr val="1A1D27"/>
-                </a:solidFill>
-                <a:latin typeface="Calibri"/>
-              </a:rPr>
-              <a:t>▸  So “how to check tokens per page” has one honest answer: load the SAME tokenizer the extraction model uses, and count what it actually produces</a:t>
-            </a:r>
-          </a:p>
-          <a:p>
-            <a:pPr>
-              <a:spcAft>
-                <a:spcPts val="600"/>
-              </a:spcAft>
-            </a:pPr>
-            <a:r>
-              <a:rPr sz="1600" b="0">
-                <a:solidFill>
-                  <a:srgbClr val="5B6374"/>
-                </a:solidFill>
-                <a:latin typeface="Calibri"/>
-              </a:rPr>
-              <a:t>     –  Not estimate it. Not divide characters by 4. Count it.</a:t>
-            </a:r>
-          </a:p>
-        </p:txBody>
-      </p:sp>
-      <p:sp>
-        <p:nvSpPr>
-          <p:cNvPr id="6" name="TextBox 5"/>
-          <p:cNvSpPr txBox="1"/>
-          <p:nvPr/>
-        </p:nvSpPr>
-        <p:spPr>
-          <a:xfrm>
-            <a:off x="11521440" y="6446520"/>
-            <a:ext cx="548640" cy="320040"/>
-          </a:xfrm>
-          <a:prstGeom prst="rect">
-            <a:avLst/>
-          </a:prstGeom>
-          <a:noFill/>
-        </p:spPr>
-        <p:txBody>
-          <a:bodyPr wrap="square">
-            <a:spAutoFit/>
-          </a:bodyPr>
-          <a:lstStyle/>
-          <a:p>
-            <a:pPr algn="r"/>
-            <a:r>
-              <a:rPr sz="1100" b="0" i="0">
-                <a:solidFill>
-                  <a:srgbClr val="5B6374"/>
-                </a:solidFill>
-                <a:latin typeface="Calibri"/>
-              </a:rPr>
               <a:t>7</a:t>
             </a:r>
           </a:p>
@@ -7738,7 +6542,7 @@
             <a:avLst/>
           </a:prstGeom>
           <a:solidFill>
-            <a:srgbClr val="4CAF7D"/>
+            <a:srgbClr val="3E8EDE"/>
           </a:solidFill>
           <a:ln>
             <a:noFill/>
@@ -7792,11 +6596,11 @@
             <a:r>
               <a:rPr sz="1500" b="1" i="0">
                 <a:solidFill>
-                  <a:srgbClr val="4CAF7D"/>
-                </a:solidFill>
-                <a:latin typeface="Calibri"/>
-              </a:rPr>
-              <a:t>THE ACTUAL CODE</a:t>
+                  <a:srgbClr val="3E8EDE"/>
+                </a:solidFill>
+                <a:latin typeface="Calibri"/>
+              </a:rPr>
+              <a:t>WHAT ELSE GETS MEASURED</a:t>
             </a:r>
           </a:p>
         </p:txBody>
@@ -7810,7 +6614,7 @@
         <p:spPr>
           <a:xfrm>
             <a:off x="640080" y="777240"/>
-            <a:ext cx="10881360" cy="640080"/>
+            <a:ext cx="10881360" cy="822960"/>
           </a:xfrm>
           <a:prstGeom prst="rect">
             <a:avLst/>
@@ -7825,13 +6629,13 @@
           <a:p>
             <a:pPr algn="l"/>
             <a:r>
-              <a:rPr sz="2800" b="1" i="0">
+              <a:rPr sz="3000" b="1" i="0">
                 <a:solidFill>
                   <a:srgbClr val="1A1D27"/>
                 </a:solidFill>
                 <a:latin typeface="Calibri"/>
               </a:rPr>
-              <a:t>How Tokens/Page Is Actually Computed</a:t>
+              <a:t>Beyond Just Tokens</a:t>
             </a:r>
           </a:p>
         </p:txBody>
@@ -7844,8 +6648,8 @@
         </p:nvSpPr>
         <p:spPr>
           <a:xfrm>
-            <a:off x="731520" y="1417320"/>
-            <a:ext cx="10058400" cy="365760"/>
+            <a:off x="731520" y="1691640"/>
+            <a:ext cx="10698480" cy="4480560"/>
           </a:xfrm>
           <a:prstGeom prst="rect">
             <a:avLst/>
@@ -7858,186 +6662,90 @@
           </a:bodyPr>
           <a:lstStyle/>
           <a:p>
-            <a:pPr algn="l"/>
-            <a:r>
-              <a:rPr sz="1400" b="1" i="0">
-                <a:solidFill>
-                  <a:srgbClr val="5B6374"/>
-                </a:solidFill>
-                <a:latin typeface="Calibri"/>
-              </a:rPr>
-              <a:t>analysis/tokenizer_util.py</a:t>
-            </a:r>
-          </a:p>
-        </p:txBody>
-      </p:sp>
-      <p:sp>
-        <p:nvSpPr>
-          <p:cNvPr id="6" name="Rectangle 5"/>
-          <p:cNvSpPr/>
-          <p:nvPr/>
-        </p:nvSpPr>
-        <p:spPr>
-          <a:xfrm>
-            <a:off x="731520" y="1828800"/>
-            <a:ext cx="10698480" cy="3657600"/>
-          </a:xfrm>
-          <a:prstGeom prst="rect">
-            <a:avLst/>
-          </a:prstGeom>
-          <a:solidFill>
-            <a:srgbClr val="1E1E2E"/>
-          </a:solidFill>
-          <a:ln>
-            <a:noFill/>
-          </a:ln>
-        </p:spPr>
-        <p:style>
-          <a:lnRef idx="1">
-            <a:schemeClr val="accent1"/>
-          </a:lnRef>
-          <a:fillRef idx="3">
-            <a:schemeClr val="accent1"/>
-          </a:fillRef>
-          <a:effectRef idx="2">
-            <a:schemeClr val="accent1"/>
-          </a:effectRef>
-          <a:fontRef idx="minor">
-            <a:schemeClr val="lt1"/>
-          </a:fontRef>
-        </p:style>
-        <p:txBody>
-          <a:bodyPr rtlCol="0" anchor="t" wrap="square" lIns="320040" rIns="320040" tIns="274320" bIns="274320"/>
-          <a:lstStyle/>
-          <a:p>
-            <a:pPr algn="ctr"/>
-            <a:r>
-              <a:rPr sz="1400">
-                <a:solidFill>
-                  <a:srgbClr val="A6E3A1"/>
-                </a:solidFill>
-                <a:latin typeface="Consolas"/>
-              </a:rPr>
-              <a:t>from transformers import AutoTokenizer</a:t>
-            </a:r>
-          </a:p>
-          <a:p>
-            <a:r>
-              <a:rPr sz="1400">
-                <a:solidFill>
-                  <a:srgbClr val="A6E3A1"/>
-                </a:solidFill>
-                <a:latin typeface="Consolas"/>
-              </a:rPr>
-              <a:t> </a:t>
-            </a:r>
-          </a:p>
-          <a:p>
-            <a:r>
-              <a:rPr sz="1400">
-                <a:solidFill>
-                  <a:srgbClr val="A6E3A1"/>
-                </a:solidFill>
-                <a:latin typeface="Consolas"/>
-              </a:rPr>
-              <a:t>_TOKENIZER = AutoTokenizer.from_pretrained(config.TOKENIZER_MODEL_ID)</a:t>
-            </a:r>
-          </a:p>
-          <a:p>
-            <a:r>
-              <a:rPr sz="1400">
-                <a:solidFill>
-                  <a:srgbClr val="A6E3A1"/>
-                </a:solidFill>
-                <a:latin typeface="Consolas"/>
-              </a:rPr>
-              <a:t> </a:t>
-            </a:r>
-          </a:p>
-          <a:p>
-            <a:r>
-              <a:rPr sz="1400">
-                <a:solidFill>
-                  <a:srgbClr val="A6E3A1"/>
-                </a:solidFill>
-                <a:latin typeface="Consolas"/>
-              </a:rPr>
-              <a:t>def count_tokens(text: str) -&gt; int:</a:t>
-            </a:r>
-          </a:p>
-          <a:p>
-            <a:r>
-              <a:rPr sz="1400">
-                <a:solidFill>
-                  <a:srgbClr val="A6E3A1"/>
-                </a:solidFill>
-                <a:latin typeface="Consolas"/>
-              </a:rPr>
-              <a:t>    return len(_TOKENIZER(text, add_special_tokens=False)["input_ids"])</a:t>
-            </a:r>
-          </a:p>
-          <a:p>
-            <a:r>
-              <a:rPr sz="1400">
-                <a:solidFill>
-                  <a:srgbClr val="A6E3A1"/>
-                </a:solidFill>
-                <a:latin typeface="Consolas"/>
-              </a:rPr>
-              <a:t> </a:t>
-            </a:r>
-          </a:p>
-          <a:p>
-            <a:r>
-              <a:rPr sz="1400">
-                <a:solidFill>
-                  <a:srgbClr val="A6E3A1"/>
-                </a:solidFill>
-                <a:latin typeface="Consolas"/>
-              </a:rPr>
-              <a:t># tokens_per_page = count_tokens(markdown_text) / page_count</a:t>
-            </a:r>
-          </a:p>
-        </p:txBody>
-      </p:sp>
-      <p:sp>
-        <p:nvSpPr>
-          <p:cNvPr id="7" name="TextBox 6"/>
-          <p:cNvSpPr txBox="1"/>
-          <p:nvPr/>
-        </p:nvSpPr>
-        <p:spPr>
-          <a:xfrm>
-            <a:off x="731520" y="5669280"/>
-            <a:ext cx="10698480" cy="914400"/>
-          </a:xfrm>
-          <a:prstGeom prst="rect">
-            <a:avLst/>
-          </a:prstGeom>
-          <a:noFill/>
-        </p:spPr>
-        <p:txBody>
-          <a:bodyPr wrap="square">
-            <a:spAutoFit/>
-          </a:bodyPr>
-          <a:lstStyle/>
-          <a:p>
-            <a:pPr algn="l"/>
-            <a:r>
-              <a:rPr sz="1400" b="0" i="1">
-                <a:solidFill>
-                  <a:srgbClr val="5B6374"/>
-                </a:solidFill>
-                <a:latin typeface="Calibri"/>
-              </a:rPr>
-              <a:t>config.TOKENIZER_MODEL_ID is "Qwen/Qwen3.5-0.8B" -- the exact model Module 1 used to extract the text in the first place.</a:t>
-            </a:r>
-          </a:p>
-        </p:txBody>
-      </p:sp>
-      <p:sp>
-        <p:nvSpPr>
-          <p:cNvPr id="8" name="TextBox 7"/>
+            <a:pPr>
+              <a:spcAft>
+                <a:spcPts val="1200"/>
+              </a:spcAft>
+            </a:pPr>
+            <a:r>
+              <a:rPr sz="2000" b="1">
+                <a:solidFill>
+                  <a:srgbClr val="1A1D27"/>
+                </a:solidFill>
+                <a:latin typeface="Calibri"/>
+              </a:rPr>
+              <a:t>▸  How many images and tables actually made it into the extracted text, versus what the source document had</a:t>
+            </a:r>
+          </a:p>
+          <a:p>
+            <a:pPr>
+              <a:spcAft>
+                <a:spcPts val="1200"/>
+              </a:spcAft>
+            </a:pPr>
+            <a:r>
+              <a:rPr sz="2000" b="1">
+                <a:solidFill>
+                  <a:srgbClr val="1A1D27"/>
+                </a:solidFill>
+                <a:latin typeface="Calibri"/>
+              </a:rPr>
+              <a:t>▸  How many logos, signatures, stamps/seals, and other visual artifacts were detected, and where</a:t>
+            </a:r>
+          </a:p>
+          <a:p>
+            <a:pPr>
+              <a:spcAft>
+                <a:spcPts val="1200"/>
+              </a:spcAft>
+            </a:pPr>
+            <a:r>
+              <a:rPr sz="2000" b="1">
+                <a:solidFill>
+                  <a:srgbClr val="1A1D27"/>
+                </a:solidFill>
+                <a:latin typeface="Calibri"/>
+              </a:rPr>
+              <a:t>▸  How many regions the layout detector itself flagged as uncertain -- it wasn't sure what it was looking at</a:t>
+            </a:r>
+          </a:p>
+          <a:p>
+            <a:pPr>
+              <a:spcAft>
+                <a:spcPts val="1200"/>
+              </a:spcAft>
+            </a:pPr>
+            <a:r>
+              <a:rPr sz="2000" b="1">
+                <a:solidFill>
+                  <a:srgbClr val="1A1D27"/>
+                </a:solidFill>
+                <a:latin typeface="Calibri"/>
+              </a:rPr>
+              <a:t>▸  How many regions were dropped entirely and excluded from the document -- some correctly (headers/footers), some not</a:t>
+            </a:r>
+          </a:p>
+          <a:p>
+            <a:pPr>
+              <a:spcAft>
+                <a:spcPts val="1200"/>
+              </a:spcAft>
+            </a:pPr>
+            <a:r>
+              <a:rPr sz="2000" b="1">
+                <a:solidFill>
+                  <a:srgbClr val="1A1D27"/>
+                </a:solidFill>
+                <a:latin typeface="Calibri"/>
+              </a:rPr>
+              <a:t>▸  How many tables came out structurally broken -- malformed, not just imperfect</a:t>
+            </a:r>
+          </a:p>
+        </p:txBody>
+      </p:sp>
+      <p:sp>
+        <p:nvSpPr>
+          <p:cNvPr id="6" name="TextBox 5"/>
           <p:cNvSpPr txBox="1"/>
           <p:nvPr/>
         </p:nvSpPr>
@@ -8111,7 +6819,7 @@
             <a:avLst/>
           </a:prstGeom>
           <a:solidFill>
-            <a:srgbClr val="F2A63D"/>
+            <a:srgbClr val="3E8EDE"/>
           </a:solidFill>
           <a:ln>
             <a:noFill/>
@@ -8165,11 +6873,11 @@
             <a:r>
               <a:rPr sz="1500" b="1" i="0">
                 <a:solidFill>
-                  <a:srgbClr val="F2A63D"/>
-                </a:solidFill>
-                <a:latin typeface="Calibri"/>
-              </a:rPr>
-              <a:t>DID YOU KNOW</a:t>
+                  <a:srgbClr val="3E8EDE"/>
+                </a:solidFill>
+                <a:latin typeface="Calibri"/>
+              </a:rPr>
+              <a:t>THE DELIVERABLE</a:t>
             </a:r>
           </a:p>
         </p:txBody>
@@ -8204,7 +6912,7 @@
                 </a:solidFill>
                 <a:latin typeface="Calibri"/>
               </a:rPr>
-              <a:t>A “Word” Can Be Several Tokens — or Less Than One</a:t>
+              <a:t>One Workbook, Built for Validation</a:t>
             </a:r>
           </a:p>
         </p:txBody>
@@ -8243,7 +6951,7 @@
                 </a:solidFill>
                 <a:latin typeface="Calibri"/>
               </a:rPr>
-              <a:t>▸  Common English words are usually 1 token. Rare words, names, and numbers routinely split into 2-4 tokens</a:t>
+              <a:t>▸  Summary -- one row per document, every stat from the last two slides in one place, built to be scanned fast</a:t>
             </a:r>
           </a:p>
           <a:p>
@@ -8259,7 +6967,7 @@
                 </a:solidFill>
                 <a:latin typeface="Calibri"/>
               </a:rPr>
-              <a:t>▸  Punctuation-dense, symbol-heavy text (legal citations, document IDs, markdown headers) tokenizes LESS efficiently than plain prose -- more tokens for the same character count</a:t>
+              <a:t>▸  Artifacts Detail -- one row per detected logo/signature/stamp: page, description, exact location</a:t>
             </a:r>
           </a:p>
           <a:p>
@@ -8275,7 +6983,39 @@
                 </a:solidFill>
                 <a:latin typeface="Calibri"/>
               </a:rPr>
-              <a:t>▸  That's not a guess -- it's exactly what shows up two slides from now, comparing real documents from this project</a:t>
+              <a:t>▸  Low Confidence Regions -- one row per region the layout detector wasn't sure about</a:t>
+            </a:r>
+          </a:p>
+          <a:p>
+            <a:pPr>
+              <a:spcAft>
+                <a:spcPts val="1200"/>
+              </a:spcAft>
+            </a:pPr>
+            <a:r>
+              <a:rPr sz="2000" b="1">
+                <a:solidFill>
+                  <a:srgbClr val="1A1D27"/>
+                </a:solidFill>
+                <a:latin typeface="Calibri"/>
+              </a:rPr>
+              <a:t>▸  Dropped Regions -- one row per region excluded from the document, including anything misclassified and dropped by mistake</a:t>
+            </a:r>
+          </a:p>
+          <a:p>
+            <a:pPr>
+              <a:spcAft>
+                <a:spcPts val="600"/>
+              </a:spcAft>
+            </a:pPr>
+            <a:r>
+              <a:rPr sz="1600" b="0">
+                <a:solidFill>
+                  <a:srgbClr val="5B6374"/>
+                </a:solidFill>
+                <a:latin typeface="Calibri"/>
+              </a:rPr>
+              <a:t>     –  Every flagged row carries a location back to the original page -- a finding is only useful if it can be checked</a:t>
             </a:r>
           </a:p>
         </p:txBody>
@@ -8311,40 +7051,6 @@
                 <a:latin typeface="Calibri"/>
               </a:rPr>
               <a:t>9</a:t>
-            </a:r>
-          </a:p>
-        </p:txBody>
-      </p:sp>
-      <p:sp>
-        <p:nvSpPr>
-          <p:cNvPr id="7" name="TextBox 6"/>
-          <p:cNvSpPr txBox="1"/>
-          <p:nvPr/>
-        </p:nvSpPr>
-        <p:spPr>
-          <a:xfrm>
-            <a:off x="9692640" y="384048"/>
-            <a:ext cx="1828800" cy="457200"/>
-          </a:xfrm>
-          <a:prstGeom prst="rect">
-            <a:avLst/>
-          </a:prstGeom>
-          <a:noFill/>
-        </p:spPr>
-        <p:txBody>
-          <a:bodyPr wrap="none">
-            <a:spAutoFit/>
-          </a:bodyPr>
-          <a:lstStyle/>
-          <a:p>
-            <a:pPr algn="r"/>
-            <a:r>
-              <a:rPr sz="1200" b="1">
-                <a:solidFill>
-                  <a:srgbClr val="F2A63D"/>
-                </a:solidFill>
-              </a:rPr>
-              <a:t>★ DID YOU KNOW</a:t>
             </a:r>
           </a:p>
         </p:txBody>

--- a/2. ANALYSIS/Analysis_Module_Overview.pptx
+++ b/2. ANALYSIS/Analysis_Module_Overview.pptx
@@ -19,6 +19,8 @@
     <p:sldId id="267" r:id="rId18"/>
     <p:sldId id="268" r:id="rId19"/>
     <p:sldId id="269" r:id="rId20"/>
+    <p:sldId id="270" r:id="rId21"/>
+    <p:sldId id="271" r:id="rId22"/>
   </p:sldIdLst>
   <p:sldSz cx="12191695" cy="6858000" type="screen4x3"/>
   <p:notesSz cx="6858000" cy="9144000"/>
@@ -3652,7 +3654,7 @@
                 </a:solidFill>
                 <a:latin typeface="Calibri"/>
               </a:rPr>
-              <a:t>A VALIDATION HABIT</a:t>
+              <a:t>HUMAN-IN-THE-LOOP, BY DESIGN</a:t>
             </a:r>
           </a:p>
         </p:txBody>
@@ -3687,7 +3689,7 @@
                 </a:solidFill>
                 <a:latin typeface="Calibri"/>
               </a:rPr>
-              <a:t>Tokens/Page as an Anomaly Signal</a:t>
+              <a:t>A Flag Is Only Useful If Someone Can Act On It</a:t>
             </a:r>
           </a:p>
         </p:txBody>
@@ -3716,81 +3718,81 @@
           <a:p>
             <a:pPr>
               <a:spcAft>
-                <a:spcPts val="1200"/>
+                <a:spcPts val="1000"/>
               </a:spcAft>
             </a:pPr>
             <a:r>
-              <a:rPr sz="2000" b="1">
+              <a:rPr sz="1800" b="1">
                 <a:solidFill>
                   <a:srgbClr val="1A1D27"/>
                 </a:solidFill>
                 <a:latin typeface="Calibri"/>
               </a:rPr>
-              <a:t>▸  There's no universal “correct” tokens-per-page number -- it depends entirely on the document type</a:t>
+              <a:t>▸  Every flagged row -- low confidence, dropped region, malformed table -- carries a page number and a bounding box back to the original document</a:t>
             </a:r>
           </a:p>
           <a:p>
             <a:pPr>
               <a:spcAft>
-                <a:spcPts val="1200"/>
+                <a:spcPts val="1000"/>
               </a:spcAft>
             </a:pPr>
             <a:r>
-              <a:rPr sz="2000" b="1">
+              <a:rPr sz="1800" b="1">
                 <a:solidFill>
                   <a:srgbClr val="1A1D27"/>
                 </a:solidFill>
                 <a:latin typeface="Calibri"/>
               </a:rPr>
-              <a:t>▸  But once you have it for a batch of similar documents, an outlier is worth a look:</a:t>
+              <a:t>▸  That's not incidental: it's what turns a flag into a 30-second check instead of a full re-read of the document</a:t>
             </a:r>
           </a:p>
           <a:p>
             <a:pPr>
               <a:spcAft>
-                <a:spcPts val="600"/>
+                <a:spcPts val="1000"/>
               </a:spcAft>
             </a:pPr>
             <a:r>
-              <a:rPr sz="1600" b="0">
-                <a:solidFill>
-                  <a:srgbClr val="5B6374"/>
-                </a:solidFill>
-                <a:latin typeface="Calibri"/>
-              </a:rPr>
-              <a:t>     –  Much LOWER than its peers -- possible sign of missed or truncated content</a:t>
+              <a:rPr sz="1800" b="1">
+                <a:solidFill>
+                  <a:srgbClr val="1A1D27"/>
+                </a:solidFill>
+                <a:latin typeface="Calibri"/>
+              </a:rPr>
+              <a:t>▸  The loop: detector flags an uncertain region → it lands in the Excel workbook → a person looks at that exact spot on the original page → confirms a real problem, or clears it as a false alarm</a:t>
             </a:r>
           </a:p>
           <a:p>
             <a:pPr>
               <a:spcAft>
-                <a:spcPts val="600"/>
+                <a:spcPts val="500"/>
               </a:spcAft>
             </a:pPr>
             <a:r>
-              <a:rPr sz="1600" b="0">
+              <a:rPr sz="1500" b="0">
                 <a:solidFill>
                   <a:srgbClr val="5B6374"/>
                 </a:solidFill>
                 <a:latin typeface="Calibri"/>
               </a:rPr>
-              <a:t>     –  Much HIGHER than its peers -- possible sign of garbled or repeated extraction output</a:t>
+              <a:t>     –  The logo case study on the previous slide is this loop working end to end -- a two-minute human check catching a bug automation alone missed</a:t>
             </a:r>
           </a:p>
           <a:p>
             <a:pPr>
               <a:spcAft>
-                <a:spcPts val="1200"/>
+                <a:spcPts val="1000"/>
               </a:spcAft>
             </a:pPr>
             <a:r>
-              <a:rPr sz="2000" b="1">
+              <a:rPr sz="1800" b="1">
                 <a:solidFill>
                   <a:srgbClr val="1A1D27"/>
                 </a:solidFill>
                 <a:latin typeface="Calibri"/>
               </a:rPr>
-              <a:t>▸  The value isn't any single number -- it's being able to scan 50 rows and immediately see which ones don't look like the rest</a:t>
+              <a:t>▸  What this module doesn't do yet: feed a human's correction back into re-thresholding or retraining the detector -- that's the natural next step, not built here</a:t>
             </a:r>
           </a:p>
         </p:txBody>
@@ -3929,7 +3931,7 @@
                 </a:solidFill>
                 <a:latin typeface="Calibri"/>
               </a:rPr>
-              <a:t>A QUIET DETAIL</a:t>
+              <a:t>A VALIDATION HABIT</a:t>
             </a:r>
           </a:p>
         </p:txBody>
@@ -3964,7 +3966,7 @@
                 </a:solidFill>
                 <a:latin typeface="Calibri"/>
               </a:rPr>
-              <a:t>Partial Runs Get Skipped, Not Guessed At</a:t>
+              <a:t>Tokens/Page as an Anomaly Signal</a:t>
             </a:r>
           </a:p>
         </p:txBody>
@@ -4003,7 +4005,7 @@
                 </a:solidFill>
                 <a:latin typeface="Calibri"/>
               </a:rPr>
-              <a:t>▸  A document only gets analyzed once its extraction has actually finished, not while it's still in progress</a:t>
+              <a:t>▸  There's no universal “correct” tokens-per-page number -- it depends entirely on the document type</a:t>
             </a:r>
           </a:p>
           <a:p>
@@ -4019,7 +4021,39 @@
                 </a:solidFill>
                 <a:latin typeface="Calibri"/>
               </a:rPr>
-              <a:t>▸  An interrupted or still-running extraction leaves incomplete output</a:t>
+              <a:t>▸  But once you have it for a batch of similar documents, an outlier is worth a look:</a:t>
+            </a:r>
+          </a:p>
+          <a:p>
+            <a:pPr>
+              <a:spcAft>
+                <a:spcPts val="600"/>
+              </a:spcAft>
+            </a:pPr>
+            <a:r>
+              <a:rPr sz="1600" b="0">
+                <a:solidFill>
+                  <a:srgbClr val="5B6374"/>
+                </a:solidFill>
+                <a:latin typeface="Calibri"/>
+              </a:rPr>
+              <a:t>     –  Much LOWER than its peers -- possible sign of missed or truncated content</a:t>
+            </a:r>
+          </a:p>
+          <a:p>
+            <a:pPr>
+              <a:spcAft>
+                <a:spcPts val="600"/>
+              </a:spcAft>
+            </a:pPr>
+            <a:r>
+              <a:rPr sz="1600" b="0">
+                <a:solidFill>
+                  <a:srgbClr val="5B6374"/>
+                </a:solidFill>
+                <a:latin typeface="Calibri"/>
+              </a:rPr>
+              <a:t>     –  Much HIGHER than its peers -- possible sign of garbled or repeated extraction output</a:t>
             </a:r>
           </a:p>
           <a:p>
@@ -4035,7 +4069,7 @@
                 </a:solidFill>
                 <a:latin typeface="Calibri"/>
               </a:rPr>
-              <a:t>▸  That incomplete output gets skipped rather than guessed at -- a document either finished cleanly, or it isn't validated at all</a:t>
+              <a:t>▸  The value isn't any single number -- it's being able to scan 50 rows and immediately see which ones don't look like the rest</a:t>
             </a:r>
           </a:p>
         </p:txBody>
@@ -4174,7 +4208,7 @@
                 </a:solidFill>
                 <a:latin typeface="Calibri"/>
               </a:rPr>
-              <a:t>WRAP-UP</a:t>
+              <a:t>SAMPLING AT SCALE</a:t>
             </a:r>
           </a:p>
         </p:txBody>
@@ -4209,7 +4243,7 @@
                 </a:solidFill>
                 <a:latin typeface="Calibri"/>
               </a:rPr>
-              <a:t>Why This Module Matters</a:t>
+              <a:t>From 3 Documents to 3,000</a:t>
             </a:r>
           </a:p>
         </p:txBody>
@@ -4238,65 +4272,97 @@
           <a:p>
             <a:pPr>
               <a:spcAft>
-                <a:spcPts val="1200"/>
+                <a:spcPts val="800"/>
               </a:spcAft>
             </a:pPr>
             <a:r>
-              <a:rPr sz="2000" b="1">
+              <a:rPr sz="1600" b="1">
                 <a:solidFill>
                   <a:srgbClr val="1A1D27"/>
                 </a:solidFill>
                 <a:latin typeface="Calibri"/>
               </a:rPr>
-              <a:t>▸  It turns “the pipeline didn't crash” into “here's proof this document is actually usable”</a:t>
+              <a:t>▸  This module's corpus is 3 real documents -- reviewing every flagged row by hand is trivial at that size. It stops being trivial well before you reach a few thousand</a:t>
             </a:r>
           </a:p>
           <a:p>
             <a:pPr>
               <a:spcAft>
-                <a:spcPts val="1200"/>
+                <a:spcPts val="800"/>
               </a:spcAft>
             </a:pPr>
             <a:r>
-              <a:rPr sz="2000" b="1">
+              <a:rPr sz="1600" b="1">
                 <a:solidFill>
                   <a:srgbClr val="1A1D27"/>
                 </a:solidFill>
                 <a:latin typeface="Calibri"/>
               </a:rPr>
-              <a:t>▸  It lets one person identify which of many documents need a closer look, without opening every single one</a:t>
+              <a:t>▸  The fix isn't reviewing everything, and it isn't reviewing a random handful either -- it's spending human attention where the model already told you it's unsure</a:t>
             </a:r>
           </a:p>
           <a:p>
             <a:pPr>
               <a:spcAft>
-                <a:spcPts val="1200"/>
+                <a:spcPts val="400"/>
               </a:spcAft>
             </a:pPr>
             <a:r>
-              <a:rPr sz="2000" b="1">
-                <a:solidFill>
-                  <a:srgbClr val="1A1D27"/>
-                </a:solidFill>
-                <a:latin typeface="Calibri"/>
-              </a:rPr>
-              <a:t>▸  It turns a hidden extraction bug into a traceable, fixable finding, instead of a silent quality problem downstream</a:t>
+              <a:rPr sz="1300" b="0">
+                <a:solidFill>
+                  <a:srgbClr val="5B6374"/>
+                </a:solidFill>
+                <a:latin typeface="Calibri"/>
+              </a:rPr>
+              <a:t>     –  Targeted review, 100% coverage -- every document with any low-confidence region, dropped region, or malformed table. Usually a small minority of the corpus, which is exactly why full coverage stays affordable</a:t>
             </a:r>
           </a:p>
           <a:p>
             <a:pPr>
               <a:spcAft>
-                <a:spcPts val="1200"/>
+                <a:spcPts val="400"/>
               </a:spcAft>
             </a:pPr>
             <a:r>
-              <a:rPr sz="2000" b="1">
+              <a:rPr sz="1300" b="0">
+                <a:solidFill>
+                  <a:srgbClr val="5B6374"/>
+                </a:solidFill>
+                <a:latin typeface="Calibri"/>
+              </a:rPr>
+              <a:t>     –  Random audit sample of the rest -- a small percentage (5-10% is a common starting point) of documents that came back with zero flags, specifically to catch cases where the detector is confidently wrong</a:t>
+            </a:r>
+          </a:p>
+          <a:p>
+            <a:pPr>
+              <a:spcAft>
+                <a:spcPts val="800"/>
+              </a:spcAft>
+            </a:pPr>
+            <a:r>
+              <a:rPr sz="1600" b="1">
                 <a:solidFill>
                   <a:srgbClr val="1A1D27"/>
                 </a:solidFill>
                 <a:latin typeface="Calibri"/>
               </a:rPr>
-              <a:t>▸  Next: Module 3 takes this same validated output and turns it into retrieval-ready chunks -- recursive, semantic, and hierarchical strategies, compared on the same real documents</a:t>
+              <a:t>▸  Why the second bucket matters: a validation system that only ever double-checks its own doubts can't catch its own blind spots -- the audit sample is how you find out if “zero flags” is actually trustworthy</a:t>
+            </a:r>
+          </a:p>
+          <a:p>
+            <a:pPr>
+              <a:spcAft>
+                <a:spcPts val="800"/>
+              </a:spcAft>
+            </a:pPr>
+            <a:r>
+              <a:rPr sz="1600" b="1">
+                <a:solidFill>
+                  <a:srgbClr val="1A1D27"/>
+                </a:solidFill>
+                <a:latin typeface="Calibri"/>
+              </a:rPr>
+              <a:t>▸  Tokens/page outliers (previous slide) feed the same triage -- an outlier is one more reason to pull a document into the reviewed set even with zero layout flags</a:t>
             </a:r>
           </a:p>
         </p:txBody>
@@ -4304,6 +4370,41 @@
       <p:sp>
         <p:nvSpPr>
           <p:cNvPr id="6" name="TextBox 5"/>
+          <p:cNvSpPr txBox="1"/>
+          <p:nvPr/>
+        </p:nvSpPr>
+        <p:spPr>
+          <a:xfrm>
+            <a:off x="731520" y="6263640"/>
+            <a:ext cx="10698480" cy="411480"/>
+          </a:xfrm>
+          <a:prstGeom prst="rect">
+            <a:avLst/>
+          </a:prstGeom>
+          <a:noFill/>
+        </p:spPr>
+        <p:txBody>
+          <a:bodyPr wrap="square">
+            <a:spAutoFit/>
+          </a:bodyPr>
+          <a:lstStyle/>
+          <a:p>
+            <a:pPr algn="l"/>
+            <a:r>
+              <a:rPr sz="1200" b="0" i="1">
+                <a:solidFill>
+                  <a:srgbClr val="5B6374"/>
+                </a:solidFill>
+                <a:latin typeface="Calibri"/>
+              </a:rPr>
+              <a:t>This is methodology, not a result -- honest about what a 3-document teaching corpus can and can't demonstrate. The same low_confidence_count / dropped_region_count / tokens_per_page columns already in the Excel report are exactly what a sampling rule would key off of at real scale.</a:t>
+            </a:r>
+          </a:p>
+        </p:txBody>
+      </p:sp>
+      <p:sp>
+        <p:nvSpPr>
+          <p:cNvPr id="7" name="TextBox 6"/>
           <p:cNvSpPr txBox="1"/>
           <p:nvPr/>
         </p:nvSpPr>
@@ -4345,6 +4446,528 @@
 </file>
 
 <file path=ppt/slides/slide14.xml><?xml version="1.0" encoding="utf-8"?>
+<p:sld xmlns:a="http://schemas.openxmlformats.org/drawingml/2006/main" xmlns:p="http://schemas.openxmlformats.org/presentationml/2006/main" xmlns:r="http://schemas.openxmlformats.org/officeDocument/2006/relationships">
+  <p:cSld>
+    <p:bg>
+      <p:bgPr>
+        <a:solidFill>
+          <a:srgbClr val="FFFFFF"/>
+        </a:solidFill>
+        <a:effectLst/>
+      </p:bgPr>
+    </p:bg>
+    <p:spTree>
+      <p:nvGrpSpPr>
+        <p:cNvPr id="1" name=""/>
+        <p:cNvGrpSpPr/>
+        <p:nvPr/>
+      </p:nvGrpSpPr>
+      <p:grpSpPr/>
+      <p:sp>
+        <p:nvSpPr>
+          <p:cNvPr id="2" name="Rectangle 1"/>
+          <p:cNvSpPr/>
+          <p:nvPr/>
+        </p:nvSpPr>
+        <p:spPr>
+          <a:xfrm>
+            <a:off x="0" y="0"/>
+            <a:ext cx="12191695" cy="109728"/>
+          </a:xfrm>
+          <a:prstGeom prst="rect">
+            <a:avLst/>
+          </a:prstGeom>
+          <a:solidFill>
+            <a:srgbClr val="3E8EDE"/>
+          </a:solidFill>
+          <a:ln>
+            <a:noFill/>
+          </a:ln>
+        </p:spPr>
+        <p:style>
+          <a:lnRef idx="1">
+            <a:schemeClr val="accent1"/>
+          </a:lnRef>
+          <a:fillRef idx="3">
+            <a:schemeClr val="accent1"/>
+          </a:fillRef>
+          <a:effectRef idx="2">
+            <a:schemeClr val="accent1"/>
+          </a:effectRef>
+          <a:fontRef idx="minor">
+            <a:schemeClr val="lt1"/>
+          </a:fontRef>
+        </p:style>
+        <p:txBody>
+          <a:bodyPr rtlCol="0" anchor="ctr"/>
+          <a:lstStyle/>
+          <a:p>
+            <a:pPr algn="ctr"/>
+          </a:p>
+        </p:txBody>
+      </p:sp>
+      <p:sp>
+        <p:nvSpPr>
+          <p:cNvPr id="3" name="TextBox 2"/>
+          <p:cNvSpPr txBox="1"/>
+          <p:nvPr/>
+        </p:nvSpPr>
+        <p:spPr>
+          <a:xfrm>
+            <a:off x="640080" y="411480"/>
+            <a:ext cx="10881360" cy="457200"/>
+          </a:xfrm>
+          <a:prstGeom prst="rect">
+            <a:avLst/>
+          </a:prstGeom>
+          <a:noFill/>
+        </p:spPr>
+        <p:txBody>
+          <a:bodyPr wrap="square">
+            <a:spAutoFit/>
+          </a:bodyPr>
+          <a:lstStyle/>
+          <a:p>
+            <a:pPr algn="l"/>
+            <a:r>
+              <a:rPr sz="1500" b="1" i="0">
+                <a:solidFill>
+                  <a:srgbClr val="3E8EDE"/>
+                </a:solidFill>
+                <a:latin typeface="Calibri"/>
+              </a:rPr>
+              <a:t>A QUIET DETAIL</a:t>
+            </a:r>
+          </a:p>
+        </p:txBody>
+      </p:sp>
+      <p:sp>
+        <p:nvSpPr>
+          <p:cNvPr id="4" name="TextBox 3"/>
+          <p:cNvSpPr txBox="1"/>
+          <p:nvPr/>
+        </p:nvSpPr>
+        <p:spPr>
+          <a:xfrm>
+            <a:off x="640080" y="777240"/>
+            <a:ext cx="10881360" cy="822960"/>
+          </a:xfrm>
+          <a:prstGeom prst="rect">
+            <a:avLst/>
+          </a:prstGeom>
+          <a:noFill/>
+        </p:spPr>
+        <p:txBody>
+          <a:bodyPr wrap="square">
+            <a:spAutoFit/>
+          </a:bodyPr>
+          <a:lstStyle/>
+          <a:p>
+            <a:pPr algn="l"/>
+            <a:r>
+              <a:rPr sz="3000" b="1" i="0">
+                <a:solidFill>
+                  <a:srgbClr val="1A1D27"/>
+                </a:solidFill>
+                <a:latin typeface="Calibri"/>
+              </a:rPr>
+              <a:t>Partial Runs Get Skipped, Not Guessed At</a:t>
+            </a:r>
+          </a:p>
+        </p:txBody>
+      </p:sp>
+      <p:sp>
+        <p:nvSpPr>
+          <p:cNvPr id="5" name="TextBox 4"/>
+          <p:cNvSpPr txBox="1"/>
+          <p:nvPr/>
+        </p:nvSpPr>
+        <p:spPr>
+          <a:xfrm>
+            <a:off x="731520" y="1691640"/>
+            <a:ext cx="10698480" cy="4480560"/>
+          </a:xfrm>
+          <a:prstGeom prst="rect">
+            <a:avLst/>
+          </a:prstGeom>
+          <a:noFill/>
+        </p:spPr>
+        <p:txBody>
+          <a:bodyPr wrap="square">
+            <a:spAutoFit/>
+          </a:bodyPr>
+          <a:lstStyle/>
+          <a:p>
+            <a:pPr>
+              <a:spcAft>
+                <a:spcPts val="1200"/>
+              </a:spcAft>
+            </a:pPr>
+            <a:r>
+              <a:rPr sz="2000" b="1">
+                <a:solidFill>
+                  <a:srgbClr val="1A1D27"/>
+                </a:solidFill>
+                <a:latin typeface="Calibri"/>
+              </a:rPr>
+              <a:t>▸  A document only gets analyzed once its extraction has actually finished, not while it's still in progress</a:t>
+            </a:r>
+          </a:p>
+          <a:p>
+            <a:pPr>
+              <a:spcAft>
+                <a:spcPts val="1200"/>
+              </a:spcAft>
+            </a:pPr>
+            <a:r>
+              <a:rPr sz="2000" b="1">
+                <a:solidFill>
+                  <a:srgbClr val="1A1D27"/>
+                </a:solidFill>
+                <a:latin typeface="Calibri"/>
+              </a:rPr>
+              <a:t>▸  An interrupted or still-running extraction leaves incomplete output</a:t>
+            </a:r>
+          </a:p>
+          <a:p>
+            <a:pPr>
+              <a:spcAft>
+                <a:spcPts val="1200"/>
+              </a:spcAft>
+            </a:pPr>
+            <a:r>
+              <a:rPr sz="2000" b="1">
+                <a:solidFill>
+                  <a:srgbClr val="1A1D27"/>
+                </a:solidFill>
+                <a:latin typeface="Calibri"/>
+              </a:rPr>
+              <a:t>▸  That incomplete output gets skipped rather than guessed at -- a document either finished cleanly, or it isn't validated at all</a:t>
+            </a:r>
+          </a:p>
+        </p:txBody>
+      </p:sp>
+      <p:sp>
+        <p:nvSpPr>
+          <p:cNvPr id="6" name="TextBox 5"/>
+          <p:cNvSpPr txBox="1"/>
+          <p:nvPr/>
+        </p:nvSpPr>
+        <p:spPr>
+          <a:xfrm>
+            <a:off x="11521440" y="6446520"/>
+            <a:ext cx="548640" cy="320040"/>
+          </a:xfrm>
+          <a:prstGeom prst="rect">
+            <a:avLst/>
+          </a:prstGeom>
+          <a:noFill/>
+        </p:spPr>
+        <p:txBody>
+          <a:bodyPr wrap="square">
+            <a:spAutoFit/>
+          </a:bodyPr>
+          <a:lstStyle/>
+          <a:p>
+            <a:pPr algn="r"/>
+            <a:r>
+              <a:rPr sz="1100" b="0" i="0">
+                <a:solidFill>
+                  <a:srgbClr val="5B6374"/>
+                </a:solidFill>
+                <a:latin typeface="Calibri"/>
+              </a:rPr>
+              <a:t>14</a:t>
+            </a:r>
+          </a:p>
+        </p:txBody>
+      </p:sp>
+    </p:spTree>
+  </p:cSld>
+  <p:clrMapOvr>
+    <a:masterClrMapping/>
+  </p:clrMapOvr>
+</p:sld>
+</file>
+
+<file path=ppt/slides/slide15.xml><?xml version="1.0" encoding="utf-8"?>
+<p:sld xmlns:a="http://schemas.openxmlformats.org/drawingml/2006/main" xmlns:p="http://schemas.openxmlformats.org/presentationml/2006/main" xmlns:r="http://schemas.openxmlformats.org/officeDocument/2006/relationships">
+  <p:cSld>
+    <p:bg>
+      <p:bgPr>
+        <a:solidFill>
+          <a:srgbClr val="FFFFFF"/>
+        </a:solidFill>
+        <a:effectLst/>
+      </p:bgPr>
+    </p:bg>
+    <p:spTree>
+      <p:nvGrpSpPr>
+        <p:cNvPr id="1" name=""/>
+        <p:cNvGrpSpPr/>
+        <p:nvPr/>
+      </p:nvGrpSpPr>
+      <p:grpSpPr/>
+      <p:sp>
+        <p:nvSpPr>
+          <p:cNvPr id="2" name="Rectangle 1"/>
+          <p:cNvSpPr/>
+          <p:nvPr/>
+        </p:nvSpPr>
+        <p:spPr>
+          <a:xfrm>
+            <a:off x="0" y="0"/>
+            <a:ext cx="12191695" cy="109728"/>
+          </a:xfrm>
+          <a:prstGeom prst="rect">
+            <a:avLst/>
+          </a:prstGeom>
+          <a:solidFill>
+            <a:srgbClr val="3E8EDE"/>
+          </a:solidFill>
+          <a:ln>
+            <a:noFill/>
+          </a:ln>
+        </p:spPr>
+        <p:style>
+          <a:lnRef idx="1">
+            <a:schemeClr val="accent1"/>
+          </a:lnRef>
+          <a:fillRef idx="3">
+            <a:schemeClr val="accent1"/>
+          </a:fillRef>
+          <a:effectRef idx="2">
+            <a:schemeClr val="accent1"/>
+          </a:effectRef>
+          <a:fontRef idx="minor">
+            <a:schemeClr val="lt1"/>
+          </a:fontRef>
+        </p:style>
+        <p:txBody>
+          <a:bodyPr rtlCol="0" anchor="ctr"/>
+          <a:lstStyle/>
+          <a:p>
+            <a:pPr algn="ctr"/>
+          </a:p>
+        </p:txBody>
+      </p:sp>
+      <p:sp>
+        <p:nvSpPr>
+          <p:cNvPr id="3" name="TextBox 2"/>
+          <p:cNvSpPr txBox="1"/>
+          <p:nvPr/>
+        </p:nvSpPr>
+        <p:spPr>
+          <a:xfrm>
+            <a:off x="640080" y="411480"/>
+            <a:ext cx="10881360" cy="457200"/>
+          </a:xfrm>
+          <a:prstGeom prst="rect">
+            <a:avLst/>
+          </a:prstGeom>
+          <a:noFill/>
+        </p:spPr>
+        <p:txBody>
+          <a:bodyPr wrap="square">
+            <a:spAutoFit/>
+          </a:bodyPr>
+          <a:lstStyle/>
+          <a:p>
+            <a:pPr algn="l"/>
+            <a:r>
+              <a:rPr sz="1500" b="1" i="0">
+                <a:solidFill>
+                  <a:srgbClr val="3E8EDE"/>
+                </a:solidFill>
+                <a:latin typeface="Calibri"/>
+              </a:rPr>
+              <a:t>WRAP-UP</a:t>
+            </a:r>
+          </a:p>
+        </p:txBody>
+      </p:sp>
+      <p:sp>
+        <p:nvSpPr>
+          <p:cNvPr id="4" name="TextBox 3"/>
+          <p:cNvSpPr txBox="1"/>
+          <p:nvPr/>
+        </p:nvSpPr>
+        <p:spPr>
+          <a:xfrm>
+            <a:off x="640080" y="777240"/>
+            <a:ext cx="10881360" cy="822960"/>
+          </a:xfrm>
+          <a:prstGeom prst="rect">
+            <a:avLst/>
+          </a:prstGeom>
+          <a:noFill/>
+        </p:spPr>
+        <p:txBody>
+          <a:bodyPr wrap="square">
+            <a:spAutoFit/>
+          </a:bodyPr>
+          <a:lstStyle/>
+          <a:p>
+            <a:pPr algn="l"/>
+            <a:r>
+              <a:rPr sz="3000" b="1" i="0">
+                <a:solidFill>
+                  <a:srgbClr val="1A1D27"/>
+                </a:solidFill>
+                <a:latin typeface="Calibri"/>
+              </a:rPr>
+              <a:t>Why This Module Matters</a:t>
+            </a:r>
+          </a:p>
+        </p:txBody>
+      </p:sp>
+      <p:sp>
+        <p:nvSpPr>
+          <p:cNvPr id="5" name="TextBox 4"/>
+          <p:cNvSpPr txBox="1"/>
+          <p:nvPr/>
+        </p:nvSpPr>
+        <p:spPr>
+          <a:xfrm>
+            <a:off x="731520" y="1691640"/>
+            <a:ext cx="10698480" cy="4480560"/>
+          </a:xfrm>
+          <a:prstGeom prst="rect">
+            <a:avLst/>
+          </a:prstGeom>
+          <a:noFill/>
+        </p:spPr>
+        <p:txBody>
+          <a:bodyPr wrap="square">
+            <a:spAutoFit/>
+          </a:bodyPr>
+          <a:lstStyle/>
+          <a:p>
+            <a:pPr>
+              <a:spcAft>
+                <a:spcPts val="1000"/>
+              </a:spcAft>
+            </a:pPr>
+            <a:r>
+              <a:rPr sz="1800" b="1">
+                <a:solidFill>
+                  <a:srgbClr val="1A1D27"/>
+                </a:solidFill>
+                <a:latin typeface="Calibri"/>
+              </a:rPr>
+              <a:t>▸  It turns “the pipeline didn't crash” into “here's proof this document is actually usable”</a:t>
+            </a:r>
+          </a:p>
+          <a:p>
+            <a:pPr>
+              <a:spcAft>
+                <a:spcPts val="1000"/>
+              </a:spcAft>
+            </a:pPr>
+            <a:r>
+              <a:rPr sz="1800" b="1">
+                <a:solidFill>
+                  <a:srgbClr val="1A1D27"/>
+                </a:solidFill>
+                <a:latin typeface="Calibri"/>
+              </a:rPr>
+              <a:t>▸  Two independent checks, not one -- token analysis for how much came out, layout analysis for whether the model saw the page correctly</a:t>
+            </a:r>
+          </a:p>
+          <a:p>
+            <a:pPr>
+              <a:spcAft>
+                <a:spcPts val="1000"/>
+              </a:spcAft>
+            </a:pPr>
+            <a:r>
+              <a:rPr sz="1800" b="1">
+                <a:solidFill>
+                  <a:srgbClr val="1A1D27"/>
+                </a:solidFill>
+                <a:latin typeface="Calibri"/>
+              </a:rPr>
+              <a:t>▸  It's human-in-the-loop by design -- every flag carries an exact way back to the page a person needs to look at</a:t>
+            </a:r>
+          </a:p>
+          <a:p>
+            <a:pPr>
+              <a:spcAft>
+                <a:spcPts val="1000"/>
+              </a:spcAft>
+            </a:pPr>
+            <a:r>
+              <a:rPr sz="1800" b="1">
+                <a:solidFill>
+                  <a:srgbClr val="1A1D27"/>
+                </a:solidFill>
+                <a:latin typeface="Calibri"/>
+              </a:rPr>
+              <a:t>▸  It scales past hand-checking every document -- targeted review of what's flagged, random audits of what isn't, once the corpus is bigger than 3 files</a:t>
+            </a:r>
+          </a:p>
+          <a:p>
+            <a:pPr>
+              <a:spcAft>
+                <a:spcPts val="1000"/>
+              </a:spcAft>
+            </a:pPr>
+            <a:r>
+              <a:rPr sz="1800" b="1">
+                <a:solidFill>
+                  <a:srgbClr val="1A1D27"/>
+                </a:solidFill>
+                <a:latin typeface="Calibri"/>
+              </a:rPr>
+              <a:t>▸  Next: Module 3 takes this same validated output and turns it into retrieval-ready chunks -- recursive, semantic, and hierarchical strategies, compared on the same real documents</a:t>
+            </a:r>
+          </a:p>
+        </p:txBody>
+      </p:sp>
+      <p:sp>
+        <p:nvSpPr>
+          <p:cNvPr id="6" name="TextBox 5"/>
+          <p:cNvSpPr txBox="1"/>
+          <p:nvPr/>
+        </p:nvSpPr>
+        <p:spPr>
+          <a:xfrm>
+            <a:off x="11521440" y="6446520"/>
+            <a:ext cx="548640" cy="320040"/>
+          </a:xfrm>
+          <a:prstGeom prst="rect">
+            <a:avLst/>
+          </a:prstGeom>
+          <a:noFill/>
+        </p:spPr>
+        <p:txBody>
+          <a:bodyPr wrap="square">
+            <a:spAutoFit/>
+          </a:bodyPr>
+          <a:lstStyle/>
+          <a:p>
+            <a:pPr algn="r"/>
+            <a:r>
+              <a:rPr sz="1100" b="0" i="0">
+                <a:solidFill>
+                  <a:srgbClr val="5B6374"/>
+                </a:solidFill>
+                <a:latin typeface="Calibri"/>
+              </a:rPr>
+              <a:t>15</a:t>
+            </a:r>
+          </a:p>
+        </p:txBody>
+      </p:sp>
+    </p:spTree>
+  </p:cSld>
+  <p:clrMapOvr>
+    <a:masterClrMapping/>
+  </p:clrMapOvr>
+</p:sld>
+</file>
+
+<file path=ppt/slides/slide16.xml><?xml version="1.0" encoding="utf-8"?>
 <p:sld xmlns:a="http://schemas.openxmlformats.org/drawingml/2006/main" xmlns:p="http://schemas.openxmlformats.org/presentationml/2006/main" xmlns:r="http://schemas.openxmlformats.org/officeDocument/2006/relationships">
   <p:cSld>
     <p:bg>
@@ -6600,7 +7223,7 @@
                 </a:solidFill>
                 <a:latin typeface="Calibri"/>
               </a:rPr>
-              <a:t>WHAT ELSE GETS MEASURED</a:t>
+              <a:t>LAYOUT ANALYSIS</a:t>
             </a:r>
           </a:p>
         </p:txBody>
@@ -6635,7 +7258,7 @@
                 </a:solidFill>
                 <a:latin typeface="Calibri"/>
               </a:rPr>
-              <a:t>Beyond Just Tokens</a:t>
+              <a:t>The Other Half of Validation</a:t>
             </a:r>
           </a:p>
         </p:txBody>
@@ -6664,81 +7287,97 @@
           <a:p>
             <a:pPr>
               <a:spcAft>
-                <a:spcPts val="1200"/>
+                <a:spcPts val="1000"/>
               </a:spcAft>
             </a:pPr>
             <a:r>
-              <a:rPr sz="2000" b="1">
+              <a:rPr sz="1800" b="1">
                 <a:solidFill>
                   <a:srgbClr val="1A1D27"/>
                 </a:solidFill>
                 <a:latin typeface="Calibri"/>
               </a:rPr>
-              <a:t>▸  How many images and tables actually made it into the extracted text, versus what the source document had</a:t>
+              <a:t>▸  Token counting tells you how much content came out. It says nothing about whether the layout detector actually understood the page</a:t>
             </a:r>
           </a:p>
           <a:p>
             <a:pPr>
               <a:spcAft>
-                <a:spcPts val="1200"/>
+                <a:spcPts val="1000"/>
               </a:spcAft>
             </a:pPr>
             <a:r>
-              <a:rPr sz="2000" b="1">
+              <a:rPr sz="1800" b="1">
                 <a:solidFill>
                   <a:srgbClr val="1A1D27"/>
                 </a:solidFill>
                 <a:latin typeface="Calibri"/>
               </a:rPr>
-              <a:t>▸  How many logos, signatures, stamps/seals, and other visual artifacts were detected, and where</a:t>
+              <a:t>▸  Module 1's layout detector already assigns a confidence score to every region it finds -- Module 2 doesn't compute this, it surfaces what already exists</a:t>
             </a:r>
           </a:p>
           <a:p>
             <a:pPr>
               <a:spcAft>
-                <a:spcPts val="1200"/>
+                <a:spcPts val="500"/>
               </a:spcAft>
             </a:pPr>
             <a:r>
-              <a:rPr sz="2000" b="1">
-                <a:solidFill>
-                  <a:srgbClr val="1A1D27"/>
-                </a:solidFill>
-                <a:latin typeface="Calibri"/>
-              </a:rPr>
-              <a:t>▸  How many regions the layout detector itself flagged as uncertain -- it wasn't sure what it was looking at</a:t>
+              <a:rPr sz="1500" b="0">
+                <a:solidFill>
+                  <a:srgbClr val="5B6374"/>
+                </a:solidFill>
+                <a:latin typeface="Calibri"/>
+              </a:rPr>
+              <a:t>     –  low_confidence_regions -- the detector found something there, but wasn't sure what</a:t>
             </a:r>
           </a:p>
           <a:p>
             <a:pPr>
               <a:spcAft>
-                <a:spcPts val="1200"/>
+                <a:spcPts val="500"/>
               </a:spcAft>
             </a:pPr>
             <a:r>
-              <a:rPr sz="2000" b="1">
-                <a:solidFill>
-                  <a:srgbClr val="1A1D27"/>
-                </a:solidFill>
-                <a:latin typeface="Calibri"/>
-              </a:rPr>
-              <a:t>▸  How many regions were dropped entirely and excluded from the document -- some correctly (headers/footers), some not</a:t>
+              <a:rPr sz="1500" b="0">
+                <a:solidFill>
+                  <a:srgbClr val="5B6374"/>
+                </a:solidFill>
+                <a:latin typeface="Calibri"/>
+              </a:rPr>
+              <a:t>     –  dropped_regions -- the detector excluded a region entirely: correctly (headers/footers), or not (see the case study ahead)</a:t>
             </a:r>
           </a:p>
           <a:p>
             <a:pPr>
               <a:spcAft>
-                <a:spcPts val="1200"/>
+                <a:spcPts val="1000"/>
               </a:spcAft>
             </a:pPr>
             <a:r>
-              <a:rPr sz="2000" b="1">
+              <a:rPr sz="1800" b="1">
                 <a:solidFill>
                   <a:srgbClr val="1A1D27"/>
                 </a:solidFill>
                 <a:latin typeface="Calibri"/>
               </a:rPr>
-              <a:t>▸  How many tables came out structurally broken -- malformed, not just imperfect</a:t>
+              <a:t>▸  Same source also covers artifacts (logos, signatures, stamp/seals) and malformed tables -- structural failures, not content-volume ones</a:t>
+            </a:r>
+          </a:p>
+          <a:p>
+            <a:pPr>
+              <a:spcAft>
+                <a:spcPts val="1000"/>
+              </a:spcAft>
+            </a:pPr>
+            <a:r>
+              <a:rPr sz="1800" b="1">
+                <a:solidFill>
+                  <a:srgbClr val="1A1D27"/>
+                </a:solidFill>
+                <a:latin typeface="Calibri"/>
+              </a:rPr>
+              <a:t>▸  Two independent questions: token analysis asks “how much came out,” layout analysis asks “did it even see the page correctly”</a:t>
             </a:r>
           </a:p>
         </p:txBody>

--- a/2. ANALYSIS/Analysis_Module_Overview.pptx
+++ b/2. ANALYSIS/Analysis_Module_Overview.pptx
@@ -21,6 +21,11 @@
     <p:sldId id="269" r:id="rId20"/>
     <p:sldId id="270" r:id="rId21"/>
     <p:sldId id="271" r:id="rId22"/>
+    <p:sldId id="272" r:id="rId23"/>
+    <p:sldId id="273" r:id="rId24"/>
+    <p:sldId id="274" r:id="rId25"/>
+    <p:sldId id="275" r:id="rId26"/>
+    <p:sldId id="276" r:id="rId27"/>
   </p:sldIdLst>
   <p:sldSz cx="12191695" cy="6858000" type="screen4x3"/>
   <p:notesSz cx="6858000" cy="9144000"/>
@@ -3335,7 +3340,7 @@
             <a:avLst/>
           </a:prstGeom>
           <a:solidFill>
-            <a:srgbClr val="E06C5C"/>
+            <a:srgbClr val="3E8EDE"/>
           </a:solidFill>
           <a:ln>
             <a:noFill/>
@@ -3389,11 +3394,11 @@
             <a:r>
               <a:rPr sz="1500" b="1" i="0">
                 <a:solidFill>
-                  <a:srgbClr val="E06C5C"/>
-                </a:solidFill>
-                <a:latin typeface="Calibri"/>
-              </a:rPr>
-              <a:t>ROOT CAUSE ANALYSIS</a:t>
+                  <a:srgbClr val="3E8EDE"/>
+                </a:solidFill>
+                <a:latin typeface="Calibri"/>
+              </a:rPr>
+              <a:t>LAYOUT ANALYSIS</a:t>
             </a:r>
           </a:p>
         </p:txBody>
@@ -3428,7 +3433,7 @@
                 </a:solidFill>
                 <a:latin typeface="Calibri"/>
               </a:rPr>
-              <a:t>Tracing a Dropped Region Back to a Real Bug</a:t>
+              <a:t>The Other Half of Validation</a:t>
             </a:r>
           </a:p>
         </p:txBody>
@@ -3457,65 +3462,97 @@
           <a:p>
             <a:pPr>
               <a:spcAft>
-                <a:spcPts val="1200"/>
+                <a:spcPts val="1000"/>
               </a:spcAft>
             </a:pPr>
             <a:r>
-              <a:rPr sz="2000" b="1">
+              <a:rPr sz="1800" b="1">
                 <a:solidFill>
                   <a:srgbClr val="1A1D27"/>
                 </a:solidFill>
                 <a:latin typeface="Calibri"/>
               </a:rPr>
-              <a:t>▸  One document's Dropped Regions sheet flagged a region: low confidence, a specific location on the page</a:t>
+              <a:t>▸  Token counting tells you how much content came out. It says nothing about whether the layout detector actually understood the page</a:t>
             </a:r>
           </a:p>
           <a:p>
             <a:pPr>
               <a:spcAft>
-                <a:spcPts val="1200"/>
+                <a:spcPts val="1000"/>
               </a:spcAft>
             </a:pPr>
             <a:r>
-              <a:rPr sz="2000" b="1">
+              <a:rPr sz="1800" b="1">
                 <a:solidFill>
                   <a:srgbClr val="1A1D27"/>
                 </a:solidFill>
                 <a:latin typeface="Calibri"/>
               </a:rPr>
-              <a:t>▸  That location turned out to be the document's logo -- a real image the layout detector misclassified as page furniture and dropped before extraction ever saw it</a:t>
+              <a:t>▸  Module 1's layout detector already assigns a confidence score to every region it finds -- Module 2 doesn't compute this, it surfaces what already exists</a:t>
             </a:r>
           </a:p>
           <a:p>
             <a:pPr>
               <a:spcAft>
-                <a:spcPts val="1200"/>
+                <a:spcPts val="500"/>
               </a:spcAft>
             </a:pPr>
             <a:r>
-              <a:rPr sz="2000" b="1">
-                <a:solidFill>
-                  <a:srgbClr val="1A1D27"/>
-                </a:solidFill>
-                <a:latin typeface="Calibri"/>
-              </a:rPr>
-              <a:t>▸  Looking at that exact location on the original page image confirmed it immediately -- a visible box drawn right over the logo</a:t>
+              <a:rPr sz="1500" b="0">
+                <a:solidFill>
+                  <a:srgbClr val="5B6374"/>
+                </a:solidFill>
+                <a:latin typeface="Calibri"/>
+              </a:rPr>
+              <a:t>     –  low_confidence_regions -- the detector found something there, but wasn't sure what</a:t>
             </a:r>
           </a:p>
           <a:p>
             <a:pPr>
               <a:spcAft>
-                <a:spcPts val="600"/>
+                <a:spcPts val="500"/>
               </a:spcAft>
             </a:pPr>
             <a:r>
-              <a:rPr sz="1600" b="0">
+              <a:rPr sz="1500" b="0">
                 <a:solidFill>
                   <a:srgbClr val="5B6374"/>
                 </a:solidFill>
                 <a:latin typeface="Calibri"/>
               </a:rPr>
-              <a:t>     –  This is the whole point of keeping every dropped region instead of silently discarding them -- it turns a hidden bug into something traceable, and something fixable</a:t>
+              <a:t>     –  dropped_regions -- the detector excluded a region entirely: correctly (headers/footers), or not (see the case study ahead)</a:t>
+            </a:r>
+          </a:p>
+          <a:p>
+            <a:pPr>
+              <a:spcAft>
+                <a:spcPts val="1000"/>
+              </a:spcAft>
+            </a:pPr>
+            <a:r>
+              <a:rPr sz="1800" b="1">
+                <a:solidFill>
+                  <a:srgbClr val="1A1D27"/>
+                </a:solidFill>
+                <a:latin typeface="Calibri"/>
+              </a:rPr>
+              <a:t>▸  Same source also covers artifacts (logos, signatures, stamp/seals) and malformed tables -- structural failures, not content-volume ones</a:t>
+            </a:r>
+          </a:p>
+          <a:p>
+            <a:pPr>
+              <a:spcAft>
+                <a:spcPts val="1000"/>
+              </a:spcAft>
+            </a:pPr>
+            <a:r>
+              <a:rPr sz="1800" b="1">
+                <a:solidFill>
+                  <a:srgbClr val="1A1D27"/>
+                </a:solidFill>
+                <a:latin typeface="Calibri"/>
+              </a:rPr>
+              <a:t>▸  Two independent questions: token analysis asks “how much came out,” layout analysis asks “did it even see the page correctly”</a:t>
             </a:r>
           </a:p>
         </p:txBody>
@@ -3654,7 +3691,7 @@
                 </a:solidFill>
                 <a:latin typeface="Calibri"/>
               </a:rPr>
-              <a:t>HUMAN-IN-THE-LOOP, BY DESIGN</a:t>
+              <a:t>THE DELIVERABLE</a:t>
             </a:r>
           </a:p>
         </p:txBody>
@@ -3689,7 +3726,7 @@
                 </a:solidFill>
                 <a:latin typeface="Calibri"/>
               </a:rPr>
-              <a:t>A Flag Is Only Useful If Someone Can Act On It</a:t>
+              <a:t>One Workbook, Built for Validation</a:t>
             </a:r>
           </a:p>
         </p:txBody>
@@ -3718,81 +3755,81 @@
           <a:p>
             <a:pPr>
               <a:spcAft>
-                <a:spcPts val="1000"/>
+                <a:spcPts val="1200"/>
               </a:spcAft>
             </a:pPr>
             <a:r>
-              <a:rPr sz="1800" b="1">
+              <a:rPr sz="2000" b="1">
                 <a:solidFill>
                   <a:srgbClr val="1A1D27"/>
                 </a:solidFill>
                 <a:latin typeface="Calibri"/>
               </a:rPr>
-              <a:t>▸  Every flagged row -- low confidence, dropped region, malformed table -- carries a page number and a bounding box back to the original document</a:t>
+              <a:t>▸  Summary -- one row per document, every stat from the last two slides in one place, built to be scanned fast</a:t>
             </a:r>
           </a:p>
           <a:p>
             <a:pPr>
               <a:spcAft>
-                <a:spcPts val="1000"/>
+                <a:spcPts val="1200"/>
               </a:spcAft>
             </a:pPr>
             <a:r>
-              <a:rPr sz="1800" b="1">
+              <a:rPr sz="2000" b="1">
                 <a:solidFill>
                   <a:srgbClr val="1A1D27"/>
                 </a:solidFill>
                 <a:latin typeface="Calibri"/>
               </a:rPr>
-              <a:t>▸  That's not incidental: it's what turns a flag into a 30-second check instead of a full re-read of the document</a:t>
+              <a:t>▸  Artifacts Detail -- one row per detected logo/signature/stamp: page, description, exact location</a:t>
             </a:r>
           </a:p>
           <a:p>
             <a:pPr>
               <a:spcAft>
-                <a:spcPts val="1000"/>
+                <a:spcPts val="1200"/>
               </a:spcAft>
             </a:pPr>
             <a:r>
-              <a:rPr sz="1800" b="1">
+              <a:rPr sz="2000" b="1">
                 <a:solidFill>
                   <a:srgbClr val="1A1D27"/>
                 </a:solidFill>
                 <a:latin typeface="Calibri"/>
               </a:rPr>
-              <a:t>▸  The loop: detector flags an uncertain region → it lands in the Excel workbook → a person looks at that exact spot on the original page → confirms a real problem, or clears it as a false alarm</a:t>
+              <a:t>▸  Low Confidence Regions -- one row per region the layout detector wasn't sure about</a:t>
             </a:r>
           </a:p>
           <a:p>
             <a:pPr>
               <a:spcAft>
-                <a:spcPts val="500"/>
+                <a:spcPts val="1200"/>
               </a:spcAft>
             </a:pPr>
             <a:r>
-              <a:rPr sz="1500" b="0">
-                <a:solidFill>
-                  <a:srgbClr val="5B6374"/>
-                </a:solidFill>
-                <a:latin typeface="Calibri"/>
-              </a:rPr>
-              <a:t>     –  The logo case study on the previous slide is this loop working end to end -- a two-minute human check catching a bug automation alone missed</a:t>
+              <a:rPr sz="2000" b="1">
+                <a:solidFill>
+                  <a:srgbClr val="1A1D27"/>
+                </a:solidFill>
+                <a:latin typeface="Calibri"/>
+              </a:rPr>
+              <a:t>▸  Dropped Regions -- one row per region excluded from the document, including anything misclassified and dropped by mistake</a:t>
             </a:r>
           </a:p>
           <a:p>
             <a:pPr>
               <a:spcAft>
-                <a:spcPts val="1000"/>
+                <a:spcPts val="600"/>
               </a:spcAft>
             </a:pPr>
             <a:r>
-              <a:rPr sz="1800" b="1">
-                <a:solidFill>
-                  <a:srgbClr val="1A1D27"/>
-                </a:solidFill>
-                <a:latin typeface="Calibri"/>
-              </a:rPr>
-              <a:t>▸  What this module doesn't do yet: feed a human's correction back into re-thresholding or retraining the detector -- that's the natural next step, not built here</a:t>
+              <a:rPr sz="1600" b="0">
+                <a:solidFill>
+                  <a:srgbClr val="5B6374"/>
+                </a:solidFill>
+                <a:latin typeface="Calibri"/>
+              </a:rPr>
+              <a:t>     –  Every flagged row carries a location back to the original page -- a finding is only useful if it can be checked</a:t>
             </a:r>
           </a:p>
         </p:txBody>
@@ -3873,7 +3910,7 @@
             <a:avLst/>
           </a:prstGeom>
           <a:solidFill>
-            <a:srgbClr val="3E8EDE"/>
+            <a:srgbClr val="E06C5C"/>
           </a:solidFill>
           <a:ln>
             <a:noFill/>
@@ -3927,11 +3964,11 @@
             <a:r>
               <a:rPr sz="1500" b="1" i="0">
                 <a:solidFill>
-                  <a:srgbClr val="3E8EDE"/>
-                </a:solidFill>
-                <a:latin typeface="Calibri"/>
-              </a:rPr>
-              <a:t>A VALIDATION HABIT</a:t>
+                  <a:srgbClr val="E06C5C"/>
+                </a:solidFill>
+                <a:latin typeface="Calibri"/>
+              </a:rPr>
+              <a:t>ROOT CAUSE ANALYSIS</a:t>
             </a:r>
           </a:p>
         </p:txBody>
@@ -3966,7 +4003,7 @@
                 </a:solidFill>
                 <a:latin typeface="Calibri"/>
               </a:rPr>
-              <a:t>Tokens/Page as an Anomaly Signal</a:t>
+              <a:t>Tracing a Dropped Region Back to a Real Bug</a:t>
             </a:r>
           </a:p>
         </p:txBody>
@@ -4005,7 +4042,7 @@
                 </a:solidFill>
                 <a:latin typeface="Calibri"/>
               </a:rPr>
-              <a:t>▸  There's no universal “correct” tokens-per-page number -- it depends entirely on the document type</a:t>
+              <a:t>▸  One document's Dropped Regions sheet flagged a region: low confidence, a specific location on the page</a:t>
             </a:r>
           </a:p>
           <a:p>
@@ -4021,7 +4058,23 @@
                 </a:solidFill>
                 <a:latin typeface="Calibri"/>
               </a:rPr>
-              <a:t>▸  But once you have it for a batch of similar documents, an outlier is worth a look:</a:t>
+              <a:t>▸  That location turned out to be the document's logo -- a real image the layout detector misclassified as page furniture and dropped before extraction ever saw it</a:t>
+            </a:r>
+          </a:p>
+          <a:p>
+            <a:pPr>
+              <a:spcAft>
+                <a:spcPts val="1200"/>
+              </a:spcAft>
+            </a:pPr>
+            <a:r>
+              <a:rPr sz="2000" b="1">
+                <a:solidFill>
+                  <a:srgbClr val="1A1D27"/>
+                </a:solidFill>
+                <a:latin typeface="Calibri"/>
+              </a:rPr>
+              <a:t>▸  Looking at that exact location on the original page image confirmed it immediately -- a visible box drawn right over the logo</a:t>
             </a:r>
           </a:p>
           <a:p>
@@ -4037,39 +4090,7 @@
                 </a:solidFill>
                 <a:latin typeface="Calibri"/>
               </a:rPr>
-              <a:t>     –  Much LOWER than its peers -- possible sign of missed or truncated content</a:t>
-            </a:r>
-          </a:p>
-          <a:p>
-            <a:pPr>
-              <a:spcAft>
-                <a:spcPts val="600"/>
-              </a:spcAft>
-            </a:pPr>
-            <a:r>
-              <a:rPr sz="1600" b="0">
-                <a:solidFill>
-                  <a:srgbClr val="5B6374"/>
-                </a:solidFill>
-                <a:latin typeface="Calibri"/>
-              </a:rPr>
-              <a:t>     –  Much HIGHER than its peers -- possible sign of garbled or repeated extraction output</a:t>
-            </a:r>
-          </a:p>
-          <a:p>
-            <a:pPr>
-              <a:spcAft>
-                <a:spcPts val="1200"/>
-              </a:spcAft>
-            </a:pPr>
-            <a:r>
-              <a:rPr sz="2000" b="1">
-                <a:solidFill>
-                  <a:srgbClr val="1A1D27"/>
-                </a:solidFill>
-                <a:latin typeface="Calibri"/>
-              </a:rPr>
-              <a:t>▸  The value isn't any single number -- it's being able to scan 50 rows and immediately see which ones don't look like the rest</a:t>
+              <a:t>     –  This is the whole point of keeping every dropped region instead of silently discarding them -- it turns a hidden bug into something traceable, and something fixable</a:t>
             </a:r>
           </a:p>
         </p:txBody>
@@ -4208,7 +4229,7 @@
                 </a:solidFill>
                 <a:latin typeface="Calibri"/>
               </a:rPr>
-              <a:t>SAMPLING AT SCALE</a:t>
+              <a:t>HUMAN-IN-THE-LOOP, BY DESIGN</a:t>
             </a:r>
           </a:p>
         </p:txBody>
@@ -4243,7 +4264,7 @@
                 </a:solidFill>
                 <a:latin typeface="Calibri"/>
               </a:rPr>
-              <a:t>From 3 Documents to 3,000</a:t>
+              <a:t>A Flag Is Only Useful If Someone Can Act On It</a:t>
             </a:r>
           </a:p>
         </p:txBody>
@@ -4272,97 +4293,81 @@
           <a:p>
             <a:pPr>
               <a:spcAft>
-                <a:spcPts val="800"/>
+                <a:spcPts val="1000"/>
               </a:spcAft>
             </a:pPr>
             <a:r>
-              <a:rPr sz="1600" b="1">
+              <a:rPr sz="1800" b="1">
                 <a:solidFill>
                   <a:srgbClr val="1A1D27"/>
                 </a:solidFill>
                 <a:latin typeface="Calibri"/>
               </a:rPr>
-              <a:t>▸  This module's corpus is 3 real documents -- reviewing every flagged row by hand is trivial at that size. It stops being trivial well before you reach a few thousand</a:t>
+              <a:t>▸  Every flagged row -- low confidence, dropped region, malformed table -- carries a page number and a bounding box back to the original document</a:t>
             </a:r>
           </a:p>
           <a:p>
             <a:pPr>
               <a:spcAft>
-                <a:spcPts val="800"/>
+                <a:spcPts val="1000"/>
               </a:spcAft>
             </a:pPr>
             <a:r>
-              <a:rPr sz="1600" b="1">
+              <a:rPr sz="1800" b="1">
                 <a:solidFill>
                   <a:srgbClr val="1A1D27"/>
                 </a:solidFill>
                 <a:latin typeface="Calibri"/>
               </a:rPr>
-              <a:t>▸  The fix isn't reviewing everything, and it isn't reviewing a random handful either -- it's spending human attention where the model already told you it's unsure</a:t>
+              <a:t>▸  That's not incidental: it's what turns a flag into a 30-second check instead of a full re-read of the document</a:t>
             </a:r>
           </a:p>
           <a:p>
             <a:pPr>
               <a:spcAft>
-                <a:spcPts val="400"/>
+                <a:spcPts val="1000"/>
               </a:spcAft>
             </a:pPr>
             <a:r>
-              <a:rPr sz="1300" b="0">
-                <a:solidFill>
-                  <a:srgbClr val="5B6374"/>
-                </a:solidFill>
-                <a:latin typeface="Calibri"/>
-              </a:rPr>
-              <a:t>     –  Targeted review, 100% coverage -- every document with any low-confidence region, dropped region, or malformed table. Usually a small minority of the corpus, which is exactly why full coverage stays affordable</a:t>
+              <a:rPr sz="1800" b="1">
+                <a:solidFill>
+                  <a:srgbClr val="1A1D27"/>
+                </a:solidFill>
+                <a:latin typeface="Calibri"/>
+              </a:rPr>
+              <a:t>▸  The loop: detector flags an uncertain region → it lands in the Excel workbook → a person looks at that exact spot on the original page → confirms a real problem, or clears it as a false alarm</a:t>
             </a:r>
           </a:p>
           <a:p>
             <a:pPr>
               <a:spcAft>
-                <a:spcPts val="400"/>
+                <a:spcPts val="500"/>
               </a:spcAft>
             </a:pPr>
             <a:r>
-              <a:rPr sz="1300" b="0">
+              <a:rPr sz="1500" b="0">
                 <a:solidFill>
                   <a:srgbClr val="5B6374"/>
                 </a:solidFill>
                 <a:latin typeface="Calibri"/>
               </a:rPr>
-              <a:t>     –  Random audit sample of the rest -- a small percentage (5-10% is a common starting point) of documents that came back with zero flags, specifically to catch cases where the detector is confidently wrong</a:t>
+              <a:t>     –  The logo case study on the previous slide is this loop working end to end -- a two-minute human check catching a bug automation alone missed</a:t>
             </a:r>
           </a:p>
           <a:p>
             <a:pPr>
               <a:spcAft>
-                <a:spcPts val="800"/>
+                <a:spcPts val="1000"/>
               </a:spcAft>
             </a:pPr>
             <a:r>
-              <a:rPr sz="1600" b="1">
+              <a:rPr sz="1800" b="1">
                 <a:solidFill>
                   <a:srgbClr val="1A1D27"/>
                 </a:solidFill>
                 <a:latin typeface="Calibri"/>
               </a:rPr>
-              <a:t>▸  Why the second bucket matters: a validation system that only ever double-checks its own doubts can't catch its own blind spots -- the audit sample is how you find out if “zero flags” is actually trustworthy</a:t>
-            </a:r>
-          </a:p>
-          <a:p>
-            <a:pPr>
-              <a:spcAft>
-                <a:spcPts val="800"/>
-              </a:spcAft>
-            </a:pPr>
-            <a:r>
-              <a:rPr sz="1600" b="1">
-                <a:solidFill>
-                  <a:srgbClr val="1A1D27"/>
-                </a:solidFill>
-                <a:latin typeface="Calibri"/>
-              </a:rPr>
-              <a:t>▸  Tokens/page outliers (previous slide) feed the same triage -- an outlier is one more reason to pull a document into the reviewed set even with zero layout flags</a:t>
+              <a:t>▸  What this module doesn't do yet: feed a human's correction back into re-thresholding or retraining the detector -- that's the natural next step, not built here</a:t>
             </a:r>
           </a:p>
         </p:txBody>
@@ -4370,41 +4375,6 @@
       <p:sp>
         <p:nvSpPr>
           <p:cNvPr id="6" name="TextBox 5"/>
-          <p:cNvSpPr txBox="1"/>
-          <p:nvPr/>
-        </p:nvSpPr>
-        <p:spPr>
-          <a:xfrm>
-            <a:off x="731520" y="6263640"/>
-            <a:ext cx="10698480" cy="411480"/>
-          </a:xfrm>
-          <a:prstGeom prst="rect">
-            <a:avLst/>
-          </a:prstGeom>
-          <a:noFill/>
-        </p:spPr>
-        <p:txBody>
-          <a:bodyPr wrap="square">
-            <a:spAutoFit/>
-          </a:bodyPr>
-          <a:lstStyle/>
-          <a:p>
-            <a:pPr algn="l"/>
-            <a:r>
-              <a:rPr sz="1200" b="0" i="1">
-                <a:solidFill>
-                  <a:srgbClr val="5B6374"/>
-                </a:solidFill>
-                <a:latin typeface="Calibri"/>
-              </a:rPr>
-              <a:t>This is methodology, not a result -- honest about what a 3-document teaching corpus can and can't demonstrate. The same low_confidence_count / dropped_region_count / tokens_per_page columns already in the Excel report are exactly what a sampling rule would key off of at real scale.</a:t>
-            </a:r>
-          </a:p>
-        </p:txBody>
-      </p:sp>
-      <p:sp>
-        <p:nvSpPr>
-          <p:cNvPr id="7" name="TextBox 6"/>
           <p:cNvSpPr txBox="1"/>
           <p:nvPr/>
         </p:nvSpPr>
@@ -4536,7 +4506,7 @@
                 </a:solidFill>
                 <a:latin typeface="Calibri"/>
               </a:rPr>
-              <a:t>A QUIET DETAIL</a:t>
+              <a:t>A VALIDATION HABIT</a:t>
             </a:r>
           </a:p>
         </p:txBody>
@@ -4571,7 +4541,7 @@
                 </a:solidFill>
                 <a:latin typeface="Calibri"/>
               </a:rPr>
-              <a:t>Partial Runs Get Skipped, Not Guessed At</a:t>
+              <a:t>Tokens/Page as an Anomaly Signal</a:t>
             </a:r>
           </a:p>
         </p:txBody>
@@ -4610,7 +4580,7 @@
                 </a:solidFill>
                 <a:latin typeface="Calibri"/>
               </a:rPr>
-              <a:t>▸  A document only gets analyzed once its extraction has actually finished, not while it's still in progress</a:t>
+              <a:t>▸  There's no universal “correct” tokens-per-page number -- it depends entirely on the document type</a:t>
             </a:r>
           </a:p>
           <a:p>
@@ -4626,7 +4596,39 @@
                 </a:solidFill>
                 <a:latin typeface="Calibri"/>
               </a:rPr>
-              <a:t>▸  An interrupted or still-running extraction leaves incomplete output</a:t>
+              <a:t>▸  But once you have it for a batch of similar documents, an outlier is worth a look:</a:t>
+            </a:r>
+          </a:p>
+          <a:p>
+            <a:pPr>
+              <a:spcAft>
+                <a:spcPts val="600"/>
+              </a:spcAft>
+            </a:pPr>
+            <a:r>
+              <a:rPr sz="1600" b="0">
+                <a:solidFill>
+                  <a:srgbClr val="5B6374"/>
+                </a:solidFill>
+                <a:latin typeface="Calibri"/>
+              </a:rPr>
+              <a:t>     –  Much LOWER than its peers -- possible sign of missed or truncated content</a:t>
+            </a:r>
+          </a:p>
+          <a:p>
+            <a:pPr>
+              <a:spcAft>
+                <a:spcPts val="600"/>
+              </a:spcAft>
+            </a:pPr>
+            <a:r>
+              <a:rPr sz="1600" b="0">
+                <a:solidFill>
+                  <a:srgbClr val="5B6374"/>
+                </a:solidFill>
+                <a:latin typeface="Calibri"/>
+              </a:rPr>
+              <a:t>     –  Much HIGHER than its peers -- possible sign of garbled or repeated extraction output</a:t>
             </a:r>
           </a:p>
           <a:p>
@@ -4642,7 +4644,7 @@
                 </a:solidFill>
                 <a:latin typeface="Calibri"/>
               </a:rPr>
-              <a:t>▸  That incomplete output gets skipped rather than guessed at -- a document either finished cleanly, or it isn't validated at all</a:t>
+              <a:t>▸  The value isn't any single number -- it's being able to scan 50 rows and immediately see which ones don't look like the rest</a:t>
             </a:r>
           </a:p>
         </p:txBody>
@@ -4781,7 +4783,7 @@
                 </a:solidFill>
                 <a:latin typeface="Calibri"/>
               </a:rPr>
-              <a:t>WRAP-UP</a:t>
+              <a:t>THE SCALING PROBLEM</a:t>
             </a:r>
           </a:p>
         </p:txBody>
@@ -4816,7 +4818,7 @@
                 </a:solidFill>
                 <a:latin typeface="Calibri"/>
               </a:rPr>
-              <a:t>Why This Module Matters</a:t>
+              <a:t>Reviewing Everything Doesn't Scale</a:t>
             </a:r>
           </a:p>
         </p:txBody>
@@ -4845,81 +4847,49 @@
           <a:p>
             <a:pPr>
               <a:spcAft>
-                <a:spcPts val="1000"/>
+                <a:spcPts val="1200"/>
               </a:spcAft>
             </a:pPr>
             <a:r>
-              <a:rPr sz="1800" b="1">
+              <a:rPr sz="2000" b="1">
                 <a:solidFill>
                   <a:srgbClr val="1A1D27"/>
                 </a:solidFill>
                 <a:latin typeface="Calibri"/>
               </a:rPr>
-              <a:t>▸  It turns “the pipeline didn't crash” into “here's proof this document is actually usable”</a:t>
+              <a:t>▸  This module's corpus is 3 real documents -- reviewing every flagged row by hand is trivial at that size</a:t>
             </a:r>
           </a:p>
           <a:p>
             <a:pPr>
               <a:spcAft>
-                <a:spcPts val="1000"/>
+                <a:spcPts val="1200"/>
               </a:spcAft>
             </a:pPr>
             <a:r>
-              <a:rPr sz="1800" b="1">
+              <a:rPr sz="2000" b="1">
                 <a:solidFill>
                   <a:srgbClr val="1A1D27"/>
                 </a:solidFill>
                 <a:latin typeface="Calibri"/>
               </a:rPr>
-              <a:t>▸  Two independent checks, not one -- token analysis for how much came out, layout analysis for whether the model saw the page correctly</a:t>
+              <a:t>▸  That stops being trivial well before you reach a few hundred documents, let alone a few thousand</a:t>
             </a:r>
           </a:p>
           <a:p>
             <a:pPr>
               <a:spcAft>
-                <a:spcPts val="1000"/>
+                <a:spcPts val="1200"/>
               </a:spcAft>
             </a:pPr>
             <a:r>
-              <a:rPr sz="1800" b="1">
+              <a:rPr sz="2000" b="1">
                 <a:solidFill>
                   <a:srgbClr val="1A1D27"/>
                 </a:solidFill>
                 <a:latin typeface="Calibri"/>
               </a:rPr>
-              <a:t>▸  It's human-in-the-loop by design -- every flag carries an exact way back to the page a person needs to look at</a:t>
-            </a:r>
-          </a:p>
-          <a:p>
-            <a:pPr>
-              <a:spcAft>
-                <a:spcPts val="1000"/>
-              </a:spcAft>
-            </a:pPr>
-            <a:r>
-              <a:rPr sz="1800" b="1">
-                <a:solidFill>
-                  <a:srgbClr val="1A1D27"/>
-                </a:solidFill>
-                <a:latin typeface="Calibri"/>
-              </a:rPr>
-              <a:t>▸  It scales past hand-checking every document -- targeted review of what's flagged, random audits of what isn't, once the corpus is bigger than 3 files</a:t>
-            </a:r>
-          </a:p>
-          <a:p>
-            <a:pPr>
-              <a:spcAft>
-                <a:spcPts val="1000"/>
-              </a:spcAft>
-            </a:pPr>
-            <a:r>
-              <a:rPr sz="1800" b="1">
-                <a:solidFill>
-                  <a:srgbClr val="1A1D27"/>
-                </a:solidFill>
-                <a:latin typeface="Calibri"/>
-              </a:rPr>
-              <a:t>▸  Next: Module 3 takes this same validated output and turns it into retrieval-ready chunks -- recursive, semantic, and hierarchical strategies, compared on the same real documents</a:t>
+              <a:t>▸  The fix isn't reviewing everything by hand, and it isn't reviewing a random handful either</a:t>
             </a:r>
           </a:p>
         </p:txBody>
@@ -4973,7 +4943,7 @@
     <p:bg>
       <p:bgPr>
         <a:solidFill>
-          <a:srgbClr val="0F172A"/>
+          <a:srgbClr val="FFFFFF"/>
         </a:solidFill>
         <a:effectLst/>
       </p:bgPr>
@@ -5036,8 +5006,8 @@
         </p:nvSpPr>
         <p:spPr>
           <a:xfrm>
-            <a:off x="914400" y="2743200"/>
-            <a:ext cx="10332720" cy="1097280"/>
+            <a:off x="640080" y="411480"/>
+            <a:ext cx="10881360" cy="457200"/>
           </a:xfrm>
           <a:prstGeom prst="rect">
             <a:avLst/>
@@ -5052,13 +5022,13 @@
           <a:p>
             <a:pPr algn="l"/>
             <a:r>
-              <a:rPr sz="4000" b="1" i="0">
-                <a:solidFill>
-                  <a:srgbClr val="FFFFFF"/>
-                </a:solidFill>
-                <a:latin typeface="Calibri"/>
-              </a:rPr>
-              <a:t>Questions?</a:t>
+              <a:rPr sz="1500" b="1" i="0">
+                <a:solidFill>
+                  <a:srgbClr val="3E8EDE"/>
+                </a:solidFill>
+                <a:latin typeface="Calibri"/>
+              </a:rPr>
+              <a:t>STEP 1: TARGETED REVIEW</a:t>
             </a:r>
           </a:p>
         </p:txBody>
@@ -5071,8 +5041,8 @@
         </p:nvSpPr>
         <p:spPr>
           <a:xfrm>
-            <a:off x="914400" y="3749039"/>
-            <a:ext cx="10332720" cy="1280160"/>
+            <a:off x="640080" y="777240"/>
+            <a:ext cx="10881360" cy="822960"/>
           </a:xfrm>
           <a:prstGeom prst="rect">
             <a:avLst/>
@@ -5087,13 +5057,13 @@
           <a:p>
             <a:pPr algn="l"/>
             <a:r>
-              <a:rPr sz="1800" b="0" i="0">
-                <a:solidFill>
-                  <a:srgbClr val="8A93A6"/>
-                </a:solidFill>
-                <a:latin typeface="Calibri"/>
-              </a:rPr>
-              <a:t>2. ANALYSIS/  --  README.md has the full column-by-column report reference and every real number in this deck.</a:t>
+              <a:rPr sz="3000" b="1" i="0">
+                <a:solidFill>
+                  <a:srgbClr val="1A1D27"/>
+                </a:solidFill>
+                <a:latin typeface="Calibri"/>
+              </a:rPr>
+              <a:t>Full Coverage Where It's Cheap</a:t>
             </a:r>
           </a:p>
         </p:txBody>
@@ -5106,8 +5076,8 @@
         </p:nvSpPr>
         <p:spPr>
           <a:xfrm>
-            <a:off x="914400" y="6126480"/>
-            <a:ext cx="10332720" cy="457200"/>
+            <a:off x="731520" y="1691640"/>
+            <a:ext cx="10698480" cy="4480560"/>
           </a:xfrm>
           <a:prstGeom prst="rect">
             <a:avLst/>
@@ -5120,15 +5090,856 @@
           </a:bodyPr>
           <a:lstStyle/>
           <a:p>
+            <a:pPr>
+              <a:spcAft>
+                <a:spcPts val="1200"/>
+              </a:spcAft>
+            </a:pPr>
+            <a:r>
+              <a:rPr sz="2000" b="1">
+                <a:solidFill>
+                  <a:srgbClr val="1A1D27"/>
+                </a:solidFill>
+                <a:latin typeface="Calibri"/>
+              </a:rPr>
+              <a:t>▸  Review 100% of documents with any low-confidence region, dropped region, or malformed table -- no sampling at all</a:t>
+            </a:r>
+          </a:p>
+          <a:p>
+            <a:pPr>
+              <a:spcAft>
+                <a:spcPts val="1200"/>
+              </a:spcAft>
+            </a:pPr>
+            <a:r>
+              <a:rPr sz="2000" b="1">
+                <a:solidFill>
+                  <a:srgbClr val="1A1D27"/>
+                </a:solidFill>
+                <a:latin typeface="Calibri"/>
+              </a:rPr>
+              <a:t>▸  This bucket is usually a small minority of the corpus, which is exactly why full coverage of it stays affordable even at scale</a:t>
+            </a:r>
+          </a:p>
+          <a:p>
+            <a:pPr>
+              <a:spcAft>
+                <a:spcPts val="1200"/>
+              </a:spcAft>
+            </a:pPr>
+            <a:r>
+              <a:rPr sz="2000" b="1">
+                <a:solidFill>
+                  <a:srgbClr val="1A1D27"/>
+                </a:solidFill>
+                <a:latin typeface="Calibri"/>
+              </a:rPr>
+              <a:t>▸  The model already told you where it's unsure. Step 1 is just not ignoring that signal</a:t>
+            </a:r>
+          </a:p>
+        </p:txBody>
+      </p:sp>
+      <p:sp>
+        <p:nvSpPr>
+          <p:cNvPr id="6" name="TextBox 5"/>
+          <p:cNvSpPr txBox="1"/>
+          <p:nvPr/>
+        </p:nvSpPr>
+        <p:spPr>
+          <a:xfrm>
+            <a:off x="11521440" y="6446520"/>
+            <a:ext cx="548640" cy="320040"/>
+          </a:xfrm>
+          <a:prstGeom prst="rect">
+            <a:avLst/>
+          </a:prstGeom>
+          <a:noFill/>
+        </p:spPr>
+        <p:txBody>
+          <a:bodyPr wrap="square">
+            <a:spAutoFit/>
+          </a:bodyPr>
+          <a:lstStyle/>
+          <a:p>
+            <a:pPr algn="r"/>
+            <a:r>
+              <a:rPr sz="1100" b="0" i="0">
+                <a:solidFill>
+                  <a:srgbClr val="5B6374"/>
+                </a:solidFill>
+                <a:latin typeface="Calibri"/>
+              </a:rPr>
+              <a:t>16</a:t>
+            </a:r>
+          </a:p>
+        </p:txBody>
+      </p:sp>
+    </p:spTree>
+  </p:cSld>
+  <p:clrMapOvr>
+    <a:masterClrMapping/>
+  </p:clrMapOvr>
+</p:sld>
+</file>
+
+<file path=ppt/slides/slide17.xml><?xml version="1.0" encoding="utf-8"?>
+<p:sld xmlns:a="http://schemas.openxmlformats.org/drawingml/2006/main" xmlns:p="http://schemas.openxmlformats.org/presentationml/2006/main" xmlns:r="http://schemas.openxmlformats.org/officeDocument/2006/relationships">
+  <p:cSld>
+    <p:bg>
+      <p:bgPr>
+        <a:solidFill>
+          <a:srgbClr val="FFFFFF"/>
+        </a:solidFill>
+        <a:effectLst/>
+      </p:bgPr>
+    </p:bg>
+    <p:spTree>
+      <p:nvGrpSpPr>
+        <p:cNvPr id="1" name=""/>
+        <p:cNvGrpSpPr/>
+        <p:nvPr/>
+      </p:nvGrpSpPr>
+      <p:grpSpPr/>
+      <p:sp>
+        <p:nvSpPr>
+          <p:cNvPr id="2" name="Rectangle 1"/>
+          <p:cNvSpPr/>
+          <p:nvPr/>
+        </p:nvSpPr>
+        <p:spPr>
+          <a:xfrm>
+            <a:off x="0" y="0"/>
+            <a:ext cx="12191695" cy="109728"/>
+          </a:xfrm>
+          <a:prstGeom prst="rect">
+            <a:avLst/>
+          </a:prstGeom>
+          <a:solidFill>
+            <a:srgbClr val="3E8EDE"/>
+          </a:solidFill>
+          <a:ln>
+            <a:noFill/>
+          </a:ln>
+        </p:spPr>
+        <p:style>
+          <a:lnRef idx="1">
+            <a:schemeClr val="accent1"/>
+          </a:lnRef>
+          <a:fillRef idx="3">
+            <a:schemeClr val="accent1"/>
+          </a:fillRef>
+          <a:effectRef idx="2">
+            <a:schemeClr val="accent1"/>
+          </a:effectRef>
+          <a:fontRef idx="minor">
+            <a:schemeClr val="lt1"/>
+          </a:fontRef>
+        </p:style>
+        <p:txBody>
+          <a:bodyPr rtlCol="0" anchor="ctr"/>
+          <a:lstStyle/>
+          <a:p>
+            <a:pPr algn="ctr"/>
+          </a:p>
+        </p:txBody>
+      </p:sp>
+      <p:sp>
+        <p:nvSpPr>
+          <p:cNvPr id="3" name="TextBox 2"/>
+          <p:cNvSpPr txBox="1"/>
+          <p:nvPr/>
+        </p:nvSpPr>
+        <p:spPr>
+          <a:xfrm>
+            <a:off x="640080" y="411480"/>
+            <a:ext cx="10881360" cy="457200"/>
+          </a:xfrm>
+          <a:prstGeom prst="rect">
+            <a:avLst/>
+          </a:prstGeom>
+          <a:noFill/>
+        </p:spPr>
+        <p:txBody>
+          <a:bodyPr wrap="square">
+            <a:spAutoFit/>
+          </a:bodyPr>
+          <a:lstStyle/>
+          <a:p>
             <a:pPr algn="l"/>
             <a:r>
-              <a:rPr sz="1300" b="0" i="0">
+              <a:rPr sz="1500" b="1" i="0">
+                <a:solidFill>
+                  <a:srgbClr val="3E8EDE"/>
+                </a:solidFill>
+                <a:latin typeface="Calibri"/>
+              </a:rPr>
+              <a:t>STEP 2: RANDOM AUDITS</a:t>
+            </a:r>
+          </a:p>
+        </p:txBody>
+      </p:sp>
+      <p:sp>
+        <p:nvSpPr>
+          <p:cNvPr id="4" name="TextBox 3"/>
+          <p:cNvSpPr txBox="1"/>
+          <p:nvPr/>
+        </p:nvSpPr>
+        <p:spPr>
+          <a:xfrm>
+            <a:off x="640080" y="777240"/>
+            <a:ext cx="10881360" cy="822960"/>
+          </a:xfrm>
+          <a:prstGeom prst="rect">
+            <a:avLst/>
+          </a:prstGeom>
+          <a:noFill/>
+        </p:spPr>
+        <p:txBody>
+          <a:bodyPr wrap="square">
+            <a:spAutoFit/>
+          </a:bodyPr>
+          <a:lstStyle/>
+          <a:p>
+            <a:pPr algn="l"/>
+            <a:r>
+              <a:rPr sz="3000" b="1" i="0">
+                <a:solidFill>
+                  <a:srgbClr val="1A1D27"/>
+                </a:solidFill>
+                <a:latin typeface="Calibri"/>
+              </a:rPr>
+              <a:t>Catching What the Model Didn't Flag</a:t>
+            </a:r>
+          </a:p>
+        </p:txBody>
+      </p:sp>
+      <p:sp>
+        <p:nvSpPr>
+          <p:cNvPr id="5" name="TextBox 4"/>
+          <p:cNvSpPr txBox="1"/>
+          <p:nvPr/>
+        </p:nvSpPr>
+        <p:spPr>
+          <a:xfrm>
+            <a:off x="731520" y="1691640"/>
+            <a:ext cx="10698480" cy="4480560"/>
+          </a:xfrm>
+          <a:prstGeom prst="rect">
+            <a:avLst/>
+          </a:prstGeom>
+          <a:noFill/>
+        </p:spPr>
+        <p:txBody>
+          <a:bodyPr wrap="square">
+            <a:spAutoFit/>
+          </a:bodyPr>
+          <a:lstStyle/>
+          <a:p>
+            <a:pPr>
+              <a:spcAft>
+                <a:spcPts val="1200"/>
+              </a:spcAft>
+            </a:pPr>
+            <a:r>
+              <a:rPr sz="2000" b="1">
+                <a:solidFill>
+                  <a:srgbClr val="1A1D27"/>
+                </a:solidFill>
+                <a:latin typeface="Calibri"/>
+              </a:rPr>
+              <a:t>▸  Pull a small random sample -- 5-10% is a common starting point -- from documents that came back with zero flags</a:t>
+            </a:r>
+          </a:p>
+          <a:p>
+            <a:pPr>
+              <a:spcAft>
+                <a:spcPts val="1200"/>
+              </a:spcAft>
+            </a:pPr>
+            <a:r>
+              <a:rPr sz="2000" b="1">
+                <a:solidFill>
+                  <a:srgbClr val="1A1D27"/>
+                </a:solidFill>
+                <a:latin typeface="Calibri"/>
+              </a:rPr>
+              <a:t>▸  A validation system that only ever double-checks its own doubts can never catch its own blind spots</a:t>
+            </a:r>
+          </a:p>
+          <a:p>
+            <a:pPr>
+              <a:spcAft>
+                <a:spcPts val="1200"/>
+              </a:spcAft>
+            </a:pPr>
+            <a:r>
+              <a:rPr sz="2000" b="1">
+                <a:solidFill>
+                  <a:srgbClr val="1A1D27"/>
+                </a:solidFill>
+                <a:latin typeface="Calibri"/>
+              </a:rPr>
+              <a:t>▸  The audit sample is how you find out whether “zero flags” is actually trustworthy, or just confidently wrong</a:t>
+            </a:r>
+          </a:p>
+        </p:txBody>
+      </p:sp>
+      <p:sp>
+        <p:nvSpPr>
+          <p:cNvPr id="6" name="TextBox 5"/>
+          <p:cNvSpPr txBox="1"/>
+          <p:nvPr/>
+        </p:nvSpPr>
+        <p:spPr>
+          <a:xfrm>
+            <a:off x="11521440" y="6446520"/>
+            <a:ext cx="548640" cy="320040"/>
+          </a:xfrm>
+          <a:prstGeom prst="rect">
+            <a:avLst/>
+          </a:prstGeom>
+          <a:noFill/>
+        </p:spPr>
+        <p:txBody>
+          <a:bodyPr wrap="square">
+            <a:spAutoFit/>
+          </a:bodyPr>
+          <a:lstStyle/>
+          <a:p>
+            <a:pPr algn="r"/>
+            <a:r>
+              <a:rPr sz="1100" b="0" i="0">
                 <a:solidFill>
                   <a:srgbClr val="5B6374"/>
                 </a:solidFill>
                 <a:latin typeface="Calibri"/>
               </a:rPr>
-              <a:t>Module 2 of 3  ·  Data Processing → Analysis → Chunking</a:t>
+              <a:t>17</a:t>
+            </a:r>
+          </a:p>
+        </p:txBody>
+      </p:sp>
+    </p:spTree>
+  </p:cSld>
+  <p:clrMapOvr>
+    <a:masterClrMapping/>
+  </p:clrMapOvr>
+</p:sld>
+</file>
+
+<file path=ppt/slides/slide18.xml><?xml version="1.0" encoding="utf-8"?>
+<p:sld xmlns:a="http://schemas.openxmlformats.org/drawingml/2006/main" xmlns:p="http://schemas.openxmlformats.org/presentationml/2006/main" xmlns:r="http://schemas.openxmlformats.org/officeDocument/2006/relationships">
+  <p:cSld>
+    <p:bg>
+      <p:bgPr>
+        <a:solidFill>
+          <a:srgbClr val="FFFFFF"/>
+        </a:solidFill>
+        <a:effectLst/>
+      </p:bgPr>
+    </p:bg>
+    <p:spTree>
+      <p:nvGrpSpPr>
+        <p:cNvPr id="1" name=""/>
+        <p:cNvGrpSpPr/>
+        <p:nvPr/>
+      </p:nvGrpSpPr>
+      <p:grpSpPr/>
+      <p:sp>
+        <p:nvSpPr>
+          <p:cNvPr id="2" name="Rectangle 1"/>
+          <p:cNvSpPr/>
+          <p:nvPr/>
+        </p:nvSpPr>
+        <p:spPr>
+          <a:xfrm>
+            <a:off x="0" y="0"/>
+            <a:ext cx="12191695" cy="109728"/>
+          </a:xfrm>
+          <a:prstGeom prst="rect">
+            <a:avLst/>
+          </a:prstGeom>
+          <a:solidFill>
+            <a:srgbClr val="3E8EDE"/>
+          </a:solidFill>
+          <a:ln>
+            <a:noFill/>
+          </a:ln>
+        </p:spPr>
+        <p:style>
+          <a:lnRef idx="1">
+            <a:schemeClr val="accent1"/>
+          </a:lnRef>
+          <a:fillRef idx="3">
+            <a:schemeClr val="accent1"/>
+          </a:fillRef>
+          <a:effectRef idx="2">
+            <a:schemeClr val="accent1"/>
+          </a:effectRef>
+          <a:fontRef idx="minor">
+            <a:schemeClr val="lt1"/>
+          </a:fontRef>
+        </p:style>
+        <p:txBody>
+          <a:bodyPr rtlCol="0" anchor="ctr"/>
+          <a:lstStyle/>
+          <a:p>
+            <a:pPr algn="ctr"/>
+          </a:p>
+        </p:txBody>
+      </p:sp>
+      <p:sp>
+        <p:nvSpPr>
+          <p:cNvPr id="3" name="TextBox 2"/>
+          <p:cNvSpPr txBox="1"/>
+          <p:nvPr/>
+        </p:nvSpPr>
+        <p:spPr>
+          <a:xfrm>
+            <a:off x="640080" y="411480"/>
+            <a:ext cx="10881360" cy="457200"/>
+          </a:xfrm>
+          <a:prstGeom prst="rect">
+            <a:avLst/>
+          </a:prstGeom>
+          <a:noFill/>
+        </p:spPr>
+        <p:txBody>
+          <a:bodyPr wrap="square">
+            <a:spAutoFit/>
+          </a:bodyPr>
+          <a:lstStyle/>
+          <a:p>
+            <a:pPr algn="l"/>
+            <a:r>
+              <a:rPr sz="1500" b="1" i="0">
+                <a:solidFill>
+                  <a:srgbClr val="3E8EDE"/>
+                </a:solidFill>
+                <a:latin typeface="Calibri"/>
+              </a:rPr>
+              <a:t>PUTTING IT TOGETHER</a:t>
+            </a:r>
+          </a:p>
+        </p:txBody>
+      </p:sp>
+      <p:sp>
+        <p:nvSpPr>
+          <p:cNvPr id="4" name="TextBox 3"/>
+          <p:cNvSpPr txBox="1"/>
+          <p:nvPr/>
+        </p:nvSpPr>
+        <p:spPr>
+          <a:xfrm>
+            <a:off x="640080" y="777240"/>
+            <a:ext cx="10881360" cy="822960"/>
+          </a:xfrm>
+          <a:prstGeom prst="rect">
+            <a:avLst/>
+          </a:prstGeom>
+          <a:noFill/>
+        </p:spPr>
+        <p:txBody>
+          <a:bodyPr wrap="square">
+            <a:spAutoFit/>
+          </a:bodyPr>
+          <a:lstStyle/>
+          <a:p>
+            <a:pPr algn="l"/>
+            <a:r>
+              <a:rPr sz="3000" b="1" i="0">
+                <a:solidFill>
+                  <a:srgbClr val="1A1D27"/>
+                </a:solidFill>
+                <a:latin typeface="Calibri"/>
+              </a:rPr>
+              <a:t>A Simple Sampling Rule</a:t>
+            </a:r>
+          </a:p>
+        </p:txBody>
+      </p:sp>
+      <p:sp>
+        <p:nvSpPr>
+          <p:cNvPr id="5" name="TextBox 4"/>
+          <p:cNvSpPr txBox="1"/>
+          <p:nvPr/>
+        </p:nvSpPr>
+        <p:spPr>
+          <a:xfrm>
+            <a:off x="731520" y="1691640"/>
+            <a:ext cx="10698480" cy="4480560"/>
+          </a:xfrm>
+          <a:prstGeom prst="rect">
+            <a:avLst/>
+          </a:prstGeom>
+          <a:noFill/>
+        </p:spPr>
+        <p:txBody>
+          <a:bodyPr wrap="square">
+            <a:spAutoFit/>
+          </a:bodyPr>
+          <a:lstStyle/>
+          <a:p>
+            <a:pPr>
+              <a:spcAft>
+                <a:spcPts val="1200"/>
+              </a:spcAft>
+            </a:pPr>
+            <a:r>
+              <a:rPr sz="2000" b="1">
+                <a:solidFill>
+                  <a:srgbClr val="1A1D27"/>
+                </a:solidFill>
+                <a:latin typeface="Calibri"/>
+              </a:rPr>
+              <a:t>▸  Review: 100% of flagged documents, plus a random 5-10% audit of the clean bucket, plus any tokens/page outlier (previous slide) -- flagged or not</a:t>
+            </a:r>
+          </a:p>
+          <a:p>
+            <a:pPr>
+              <a:spcAft>
+                <a:spcPts val="1200"/>
+              </a:spcAft>
+            </a:pPr>
+            <a:r>
+              <a:rPr sz="2000" b="1">
+                <a:solidFill>
+                  <a:srgbClr val="1A1D27"/>
+                </a:solidFill>
+                <a:latin typeface="Calibri"/>
+              </a:rPr>
+              <a:t>▸  If the audit sample starts turning up real problems, raise the audit percentage -- the hit rate tells you whether 5-10% is actually enough</a:t>
+            </a:r>
+          </a:p>
+          <a:p>
+            <a:pPr>
+              <a:spcAft>
+                <a:spcPts val="600"/>
+              </a:spcAft>
+            </a:pPr>
+            <a:r>
+              <a:rPr sz="1600" b="0">
+                <a:solidFill>
+                  <a:srgbClr val="5B6374"/>
+                </a:solidFill>
+                <a:latin typeface="Calibri"/>
+              </a:rPr>
+              <a:t>     –  e.g., audits at 5% keep finding real issues → raise to 10-15% and re-check until it mostly comes back clean</a:t>
+            </a:r>
+          </a:p>
+        </p:txBody>
+      </p:sp>
+      <p:sp>
+        <p:nvSpPr>
+          <p:cNvPr id="6" name="TextBox 5"/>
+          <p:cNvSpPr txBox="1"/>
+          <p:nvPr/>
+        </p:nvSpPr>
+        <p:spPr>
+          <a:xfrm>
+            <a:off x="731520" y="6263640"/>
+            <a:ext cx="10698480" cy="411480"/>
+          </a:xfrm>
+          <a:prstGeom prst="rect">
+            <a:avLst/>
+          </a:prstGeom>
+          <a:noFill/>
+        </p:spPr>
+        <p:txBody>
+          <a:bodyPr wrap="square">
+            <a:spAutoFit/>
+          </a:bodyPr>
+          <a:lstStyle/>
+          <a:p>
+            <a:pPr algn="l"/>
+            <a:r>
+              <a:rPr sz="1200" b="0" i="1">
+                <a:solidFill>
+                  <a:srgbClr val="5B6374"/>
+                </a:solidFill>
+                <a:latin typeface="Calibri"/>
+              </a:rPr>
+              <a:t>This is methodology, not a result -- honest about what a 3-document teaching corpus can and can't demonstrate. The same low_confidence_count / dropped_region_count / tokens_per_page columns already in the Excel report are exactly what a sampling rule would key off of at real scale.</a:t>
+            </a:r>
+          </a:p>
+        </p:txBody>
+      </p:sp>
+      <p:sp>
+        <p:nvSpPr>
+          <p:cNvPr id="7" name="TextBox 6"/>
+          <p:cNvSpPr txBox="1"/>
+          <p:nvPr/>
+        </p:nvSpPr>
+        <p:spPr>
+          <a:xfrm>
+            <a:off x="11521440" y="6446520"/>
+            <a:ext cx="548640" cy="320040"/>
+          </a:xfrm>
+          <a:prstGeom prst="rect">
+            <a:avLst/>
+          </a:prstGeom>
+          <a:noFill/>
+        </p:spPr>
+        <p:txBody>
+          <a:bodyPr wrap="square">
+            <a:spAutoFit/>
+          </a:bodyPr>
+          <a:lstStyle/>
+          <a:p>
+            <a:pPr algn="r"/>
+            <a:r>
+              <a:rPr sz="1100" b="0" i="0">
+                <a:solidFill>
+                  <a:srgbClr val="5B6374"/>
+                </a:solidFill>
+                <a:latin typeface="Calibri"/>
+              </a:rPr>
+              <a:t>18</a:t>
+            </a:r>
+          </a:p>
+        </p:txBody>
+      </p:sp>
+    </p:spTree>
+  </p:cSld>
+  <p:clrMapOvr>
+    <a:masterClrMapping/>
+  </p:clrMapOvr>
+</p:sld>
+</file>
+
+<file path=ppt/slides/slide19.xml><?xml version="1.0" encoding="utf-8"?>
+<p:sld xmlns:a="http://schemas.openxmlformats.org/drawingml/2006/main" xmlns:p="http://schemas.openxmlformats.org/presentationml/2006/main" xmlns:r="http://schemas.openxmlformats.org/officeDocument/2006/relationships">
+  <p:cSld>
+    <p:bg>
+      <p:bgPr>
+        <a:solidFill>
+          <a:srgbClr val="FFFFFF"/>
+        </a:solidFill>
+        <a:effectLst/>
+      </p:bgPr>
+    </p:bg>
+    <p:spTree>
+      <p:nvGrpSpPr>
+        <p:cNvPr id="1" name=""/>
+        <p:cNvGrpSpPr/>
+        <p:nvPr/>
+      </p:nvGrpSpPr>
+      <p:grpSpPr/>
+      <p:sp>
+        <p:nvSpPr>
+          <p:cNvPr id="2" name="Rectangle 1"/>
+          <p:cNvSpPr/>
+          <p:nvPr/>
+        </p:nvSpPr>
+        <p:spPr>
+          <a:xfrm>
+            <a:off x="0" y="0"/>
+            <a:ext cx="12191695" cy="109728"/>
+          </a:xfrm>
+          <a:prstGeom prst="rect">
+            <a:avLst/>
+          </a:prstGeom>
+          <a:solidFill>
+            <a:srgbClr val="3E8EDE"/>
+          </a:solidFill>
+          <a:ln>
+            <a:noFill/>
+          </a:ln>
+        </p:spPr>
+        <p:style>
+          <a:lnRef idx="1">
+            <a:schemeClr val="accent1"/>
+          </a:lnRef>
+          <a:fillRef idx="3">
+            <a:schemeClr val="accent1"/>
+          </a:fillRef>
+          <a:effectRef idx="2">
+            <a:schemeClr val="accent1"/>
+          </a:effectRef>
+          <a:fontRef idx="minor">
+            <a:schemeClr val="lt1"/>
+          </a:fontRef>
+        </p:style>
+        <p:txBody>
+          <a:bodyPr rtlCol="0" anchor="ctr"/>
+          <a:lstStyle/>
+          <a:p>
+            <a:pPr algn="ctr"/>
+          </a:p>
+        </p:txBody>
+      </p:sp>
+      <p:sp>
+        <p:nvSpPr>
+          <p:cNvPr id="3" name="TextBox 2"/>
+          <p:cNvSpPr txBox="1"/>
+          <p:nvPr/>
+        </p:nvSpPr>
+        <p:spPr>
+          <a:xfrm>
+            <a:off x="640080" y="411480"/>
+            <a:ext cx="10881360" cy="457200"/>
+          </a:xfrm>
+          <a:prstGeom prst="rect">
+            <a:avLst/>
+          </a:prstGeom>
+          <a:noFill/>
+        </p:spPr>
+        <p:txBody>
+          <a:bodyPr wrap="square">
+            <a:spAutoFit/>
+          </a:bodyPr>
+          <a:lstStyle/>
+          <a:p>
+            <a:pPr algn="l"/>
+            <a:r>
+              <a:rPr sz="1500" b="1" i="0">
+                <a:solidFill>
+                  <a:srgbClr val="3E8EDE"/>
+                </a:solidFill>
+                <a:latin typeface="Calibri"/>
+              </a:rPr>
+              <a:t>A QUIET DETAIL</a:t>
+            </a:r>
+          </a:p>
+        </p:txBody>
+      </p:sp>
+      <p:sp>
+        <p:nvSpPr>
+          <p:cNvPr id="4" name="TextBox 3"/>
+          <p:cNvSpPr txBox="1"/>
+          <p:nvPr/>
+        </p:nvSpPr>
+        <p:spPr>
+          <a:xfrm>
+            <a:off x="640080" y="777240"/>
+            <a:ext cx="10881360" cy="822960"/>
+          </a:xfrm>
+          <a:prstGeom prst="rect">
+            <a:avLst/>
+          </a:prstGeom>
+          <a:noFill/>
+        </p:spPr>
+        <p:txBody>
+          <a:bodyPr wrap="square">
+            <a:spAutoFit/>
+          </a:bodyPr>
+          <a:lstStyle/>
+          <a:p>
+            <a:pPr algn="l"/>
+            <a:r>
+              <a:rPr sz="3000" b="1" i="0">
+                <a:solidFill>
+                  <a:srgbClr val="1A1D27"/>
+                </a:solidFill>
+                <a:latin typeface="Calibri"/>
+              </a:rPr>
+              <a:t>Partial Runs Get Skipped, Not Guessed At</a:t>
+            </a:r>
+          </a:p>
+        </p:txBody>
+      </p:sp>
+      <p:sp>
+        <p:nvSpPr>
+          <p:cNvPr id="5" name="TextBox 4"/>
+          <p:cNvSpPr txBox="1"/>
+          <p:nvPr/>
+        </p:nvSpPr>
+        <p:spPr>
+          <a:xfrm>
+            <a:off x="731520" y="1691640"/>
+            <a:ext cx="10698480" cy="4480560"/>
+          </a:xfrm>
+          <a:prstGeom prst="rect">
+            <a:avLst/>
+          </a:prstGeom>
+          <a:noFill/>
+        </p:spPr>
+        <p:txBody>
+          <a:bodyPr wrap="square">
+            <a:spAutoFit/>
+          </a:bodyPr>
+          <a:lstStyle/>
+          <a:p>
+            <a:pPr>
+              <a:spcAft>
+                <a:spcPts val="1200"/>
+              </a:spcAft>
+            </a:pPr>
+            <a:r>
+              <a:rPr sz="2000" b="1">
+                <a:solidFill>
+                  <a:srgbClr val="1A1D27"/>
+                </a:solidFill>
+                <a:latin typeface="Calibri"/>
+              </a:rPr>
+              <a:t>▸  A document only gets analyzed once its extraction has actually finished, not while it's still in progress</a:t>
+            </a:r>
+          </a:p>
+          <a:p>
+            <a:pPr>
+              <a:spcAft>
+                <a:spcPts val="1200"/>
+              </a:spcAft>
+            </a:pPr>
+            <a:r>
+              <a:rPr sz="2000" b="1">
+                <a:solidFill>
+                  <a:srgbClr val="1A1D27"/>
+                </a:solidFill>
+                <a:latin typeface="Calibri"/>
+              </a:rPr>
+              <a:t>▸  An interrupted or still-running extraction leaves incomplete output</a:t>
+            </a:r>
+          </a:p>
+          <a:p>
+            <a:pPr>
+              <a:spcAft>
+                <a:spcPts val="1200"/>
+              </a:spcAft>
+            </a:pPr>
+            <a:r>
+              <a:rPr sz="2000" b="1">
+                <a:solidFill>
+                  <a:srgbClr val="1A1D27"/>
+                </a:solidFill>
+                <a:latin typeface="Calibri"/>
+              </a:rPr>
+              <a:t>▸  That incomplete output gets skipped rather than guessed at -- a document either finished cleanly, or it isn't validated at all</a:t>
+            </a:r>
+          </a:p>
+        </p:txBody>
+      </p:sp>
+      <p:sp>
+        <p:nvSpPr>
+          <p:cNvPr id="6" name="TextBox 5"/>
+          <p:cNvSpPr txBox="1"/>
+          <p:nvPr/>
+        </p:nvSpPr>
+        <p:spPr>
+          <a:xfrm>
+            <a:off x="11521440" y="6446520"/>
+            <a:ext cx="548640" cy="320040"/>
+          </a:xfrm>
+          <a:prstGeom prst="rect">
+            <a:avLst/>
+          </a:prstGeom>
+          <a:noFill/>
+        </p:spPr>
+        <p:txBody>
+          <a:bodyPr wrap="square">
+            <a:spAutoFit/>
+          </a:bodyPr>
+          <a:lstStyle/>
+          <a:p>
+            <a:pPr algn="r"/>
+            <a:r>
+              <a:rPr sz="1100" b="0" i="0">
+                <a:solidFill>
+                  <a:srgbClr val="5B6374"/>
+                </a:solidFill>
+                <a:latin typeface="Calibri"/>
+              </a:rPr>
+              <a:t>19</a:t>
             </a:r>
           </a:p>
         </p:txBody>
@@ -5503,6 +6314,457 @@
 </p:sld>
 </file>
 
+<file path=ppt/slides/slide20.xml><?xml version="1.0" encoding="utf-8"?>
+<p:sld xmlns:a="http://schemas.openxmlformats.org/drawingml/2006/main" xmlns:p="http://schemas.openxmlformats.org/presentationml/2006/main" xmlns:r="http://schemas.openxmlformats.org/officeDocument/2006/relationships">
+  <p:cSld>
+    <p:bg>
+      <p:bgPr>
+        <a:solidFill>
+          <a:srgbClr val="FFFFFF"/>
+        </a:solidFill>
+        <a:effectLst/>
+      </p:bgPr>
+    </p:bg>
+    <p:spTree>
+      <p:nvGrpSpPr>
+        <p:cNvPr id="1" name=""/>
+        <p:cNvGrpSpPr/>
+        <p:nvPr/>
+      </p:nvGrpSpPr>
+      <p:grpSpPr/>
+      <p:sp>
+        <p:nvSpPr>
+          <p:cNvPr id="2" name="Rectangle 1"/>
+          <p:cNvSpPr/>
+          <p:nvPr/>
+        </p:nvSpPr>
+        <p:spPr>
+          <a:xfrm>
+            <a:off x="0" y="0"/>
+            <a:ext cx="12191695" cy="109728"/>
+          </a:xfrm>
+          <a:prstGeom prst="rect">
+            <a:avLst/>
+          </a:prstGeom>
+          <a:solidFill>
+            <a:srgbClr val="3E8EDE"/>
+          </a:solidFill>
+          <a:ln>
+            <a:noFill/>
+          </a:ln>
+        </p:spPr>
+        <p:style>
+          <a:lnRef idx="1">
+            <a:schemeClr val="accent1"/>
+          </a:lnRef>
+          <a:fillRef idx="3">
+            <a:schemeClr val="accent1"/>
+          </a:fillRef>
+          <a:effectRef idx="2">
+            <a:schemeClr val="accent1"/>
+          </a:effectRef>
+          <a:fontRef idx="minor">
+            <a:schemeClr val="lt1"/>
+          </a:fontRef>
+        </p:style>
+        <p:txBody>
+          <a:bodyPr rtlCol="0" anchor="ctr"/>
+          <a:lstStyle/>
+          <a:p>
+            <a:pPr algn="ctr"/>
+          </a:p>
+        </p:txBody>
+      </p:sp>
+      <p:sp>
+        <p:nvSpPr>
+          <p:cNvPr id="3" name="TextBox 2"/>
+          <p:cNvSpPr txBox="1"/>
+          <p:nvPr/>
+        </p:nvSpPr>
+        <p:spPr>
+          <a:xfrm>
+            <a:off x="640080" y="411480"/>
+            <a:ext cx="10881360" cy="457200"/>
+          </a:xfrm>
+          <a:prstGeom prst="rect">
+            <a:avLst/>
+          </a:prstGeom>
+          <a:noFill/>
+        </p:spPr>
+        <p:txBody>
+          <a:bodyPr wrap="square">
+            <a:spAutoFit/>
+          </a:bodyPr>
+          <a:lstStyle/>
+          <a:p>
+            <a:pPr algn="l"/>
+            <a:r>
+              <a:rPr sz="1500" b="1" i="0">
+                <a:solidFill>
+                  <a:srgbClr val="3E8EDE"/>
+                </a:solidFill>
+                <a:latin typeface="Calibri"/>
+              </a:rPr>
+              <a:t>WRAP-UP</a:t>
+            </a:r>
+          </a:p>
+        </p:txBody>
+      </p:sp>
+      <p:sp>
+        <p:nvSpPr>
+          <p:cNvPr id="4" name="TextBox 3"/>
+          <p:cNvSpPr txBox="1"/>
+          <p:nvPr/>
+        </p:nvSpPr>
+        <p:spPr>
+          <a:xfrm>
+            <a:off x="640080" y="777240"/>
+            <a:ext cx="10881360" cy="822960"/>
+          </a:xfrm>
+          <a:prstGeom prst="rect">
+            <a:avLst/>
+          </a:prstGeom>
+          <a:noFill/>
+        </p:spPr>
+        <p:txBody>
+          <a:bodyPr wrap="square">
+            <a:spAutoFit/>
+          </a:bodyPr>
+          <a:lstStyle/>
+          <a:p>
+            <a:pPr algn="l"/>
+            <a:r>
+              <a:rPr sz="3000" b="1" i="0">
+                <a:solidFill>
+                  <a:srgbClr val="1A1D27"/>
+                </a:solidFill>
+                <a:latin typeface="Calibri"/>
+              </a:rPr>
+              <a:t>Why This Module Matters</a:t>
+            </a:r>
+          </a:p>
+        </p:txBody>
+      </p:sp>
+      <p:sp>
+        <p:nvSpPr>
+          <p:cNvPr id="5" name="TextBox 4"/>
+          <p:cNvSpPr txBox="1"/>
+          <p:nvPr/>
+        </p:nvSpPr>
+        <p:spPr>
+          <a:xfrm>
+            <a:off x="731520" y="1691640"/>
+            <a:ext cx="10698480" cy="4480560"/>
+          </a:xfrm>
+          <a:prstGeom prst="rect">
+            <a:avLst/>
+          </a:prstGeom>
+          <a:noFill/>
+        </p:spPr>
+        <p:txBody>
+          <a:bodyPr wrap="square">
+            <a:spAutoFit/>
+          </a:bodyPr>
+          <a:lstStyle/>
+          <a:p>
+            <a:pPr>
+              <a:spcAft>
+                <a:spcPts val="1000"/>
+              </a:spcAft>
+            </a:pPr>
+            <a:r>
+              <a:rPr sz="1800" b="1">
+                <a:solidFill>
+                  <a:srgbClr val="1A1D27"/>
+                </a:solidFill>
+                <a:latin typeface="Calibri"/>
+              </a:rPr>
+              <a:t>▸  It turns “the pipeline didn't crash” into “here's proof this document is actually usable”</a:t>
+            </a:r>
+          </a:p>
+          <a:p>
+            <a:pPr>
+              <a:spcAft>
+                <a:spcPts val="1000"/>
+              </a:spcAft>
+            </a:pPr>
+            <a:r>
+              <a:rPr sz="1800" b="1">
+                <a:solidFill>
+                  <a:srgbClr val="1A1D27"/>
+                </a:solidFill>
+                <a:latin typeface="Calibri"/>
+              </a:rPr>
+              <a:t>▸  Two independent checks, not one -- token analysis for how much came out, layout analysis for whether the model saw the page correctly</a:t>
+            </a:r>
+          </a:p>
+          <a:p>
+            <a:pPr>
+              <a:spcAft>
+                <a:spcPts val="1000"/>
+              </a:spcAft>
+            </a:pPr>
+            <a:r>
+              <a:rPr sz="1800" b="1">
+                <a:solidFill>
+                  <a:srgbClr val="1A1D27"/>
+                </a:solidFill>
+                <a:latin typeface="Calibri"/>
+              </a:rPr>
+              <a:t>▸  It's human-in-the-loop by design -- every flag carries an exact way back to the page a person needs to look at</a:t>
+            </a:r>
+          </a:p>
+          <a:p>
+            <a:pPr>
+              <a:spcAft>
+                <a:spcPts val="1000"/>
+              </a:spcAft>
+            </a:pPr>
+            <a:r>
+              <a:rPr sz="1800" b="1">
+                <a:solidFill>
+                  <a:srgbClr val="1A1D27"/>
+                </a:solidFill>
+                <a:latin typeface="Calibri"/>
+              </a:rPr>
+              <a:t>▸  It scales past hand-checking every document -- targeted review of what's flagged, random audits of what isn't, once the corpus is bigger than 3 files</a:t>
+            </a:r>
+          </a:p>
+          <a:p>
+            <a:pPr>
+              <a:spcAft>
+                <a:spcPts val="1000"/>
+              </a:spcAft>
+            </a:pPr>
+            <a:r>
+              <a:rPr sz="1800" b="1">
+                <a:solidFill>
+                  <a:srgbClr val="1A1D27"/>
+                </a:solidFill>
+                <a:latin typeface="Calibri"/>
+              </a:rPr>
+              <a:t>▸  Next: Module 3 takes this same validated output and turns it into retrieval-ready chunks -- recursive, semantic, and hierarchical strategies, compared on the same real documents</a:t>
+            </a:r>
+          </a:p>
+        </p:txBody>
+      </p:sp>
+      <p:sp>
+        <p:nvSpPr>
+          <p:cNvPr id="6" name="TextBox 5"/>
+          <p:cNvSpPr txBox="1"/>
+          <p:nvPr/>
+        </p:nvSpPr>
+        <p:spPr>
+          <a:xfrm>
+            <a:off x="11521440" y="6446520"/>
+            <a:ext cx="548640" cy="320040"/>
+          </a:xfrm>
+          <a:prstGeom prst="rect">
+            <a:avLst/>
+          </a:prstGeom>
+          <a:noFill/>
+        </p:spPr>
+        <p:txBody>
+          <a:bodyPr wrap="square">
+            <a:spAutoFit/>
+          </a:bodyPr>
+          <a:lstStyle/>
+          <a:p>
+            <a:pPr algn="r"/>
+            <a:r>
+              <a:rPr sz="1100" b="0" i="0">
+                <a:solidFill>
+                  <a:srgbClr val="5B6374"/>
+                </a:solidFill>
+                <a:latin typeface="Calibri"/>
+              </a:rPr>
+              <a:t>20</a:t>
+            </a:r>
+          </a:p>
+        </p:txBody>
+      </p:sp>
+    </p:spTree>
+  </p:cSld>
+  <p:clrMapOvr>
+    <a:masterClrMapping/>
+  </p:clrMapOvr>
+</p:sld>
+</file>
+
+<file path=ppt/slides/slide21.xml><?xml version="1.0" encoding="utf-8"?>
+<p:sld xmlns:a="http://schemas.openxmlformats.org/drawingml/2006/main" xmlns:p="http://schemas.openxmlformats.org/presentationml/2006/main" xmlns:r="http://schemas.openxmlformats.org/officeDocument/2006/relationships">
+  <p:cSld>
+    <p:bg>
+      <p:bgPr>
+        <a:solidFill>
+          <a:srgbClr val="0F172A"/>
+        </a:solidFill>
+        <a:effectLst/>
+      </p:bgPr>
+    </p:bg>
+    <p:spTree>
+      <p:nvGrpSpPr>
+        <p:cNvPr id="1" name=""/>
+        <p:cNvGrpSpPr/>
+        <p:nvPr/>
+      </p:nvGrpSpPr>
+      <p:grpSpPr/>
+      <p:sp>
+        <p:nvSpPr>
+          <p:cNvPr id="2" name="Rectangle 1"/>
+          <p:cNvSpPr/>
+          <p:nvPr/>
+        </p:nvSpPr>
+        <p:spPr>
+          <a:xfrm>
+            <a:off x="0" y="0"/>
+            <a:ext cx="12191695" cy="109728"/>
+          </a:xfrm>
+          <a:prstGeom prst="rect">
+            <a:avLst/>
+          </a:prstGeom>
+          <a:solidFill>
+            <a:srgbClr val="3E8EDE"/>
+          </a:solidFill>
+          <a:ln>
+            <a:noFill/>
+          </a:ln>
+        </p:spPr>
+        <p:style>
+          <a:lnRef idx="1">
+            <a:schemeClr val="accent1"/>
+          </a:lnRef>
+          <a:fillRef idx="3">
+            <a:schemeClr val="accent1"/>
+          </a:fillRef>
+          <a:effectRef idx="2">
+            <a:schemeClr val="accent1"/>
+          </a:effectRef>
+          <a:fontRef idx="minor">
+            <a:schemeClr val="lt1"/>
+          </a:fontRef>
+        </p:style>
+        <p:txBody>
+          <a:bodyPr rtlCol="0" anchor="ctr"/>
+          <a:lstStyle/>
+          <a:p>
+            <a:pPr algn="ctr"/>
+          </a:p>
+        </p:txBody>
+      </p:sp>
+      <p:sp>
+        <p:nvSpPr>
+          <p:cNvPr id="3" name="TextBox 2"/>
+          <p:cNvSpPr txBox="1"/>
+          <p:nvPr/>
+        </p:nvSpPr>
+        <p:spPr>
+          <a:xfrm>
+            <a:off x="914400" y="2743200"/>
+            <a:ext cx="10332720" cy="1097280"/>
+          </a:xfrm>
+          <a:prstGeom prst="rect">
+            <a:avLst/>
+          </a:prstGeom>
+          <a:noFill/>
+        </p:spPr>
+        <p:txBody>
+          <a:bodyPr wrap="square">
+            <a:spAutoFit/>
+          </a:bodyPr>
+          <a:lstStyle/>
+          <a:p>
+            <a:pPr algn="l"/>
+            <a:r>
+              <a:rPr sz="4000" b="1" i="0">
+                <a:solidFill>
+                  <a:srgbClr val="FFFFFF"/>
+                </a:solidFill>
+                <a:latin typeface="Calibri"/>
+              </a:rPr>
+              <a:t>Questions?</a:t>
+            </a:r>
+          </a:p>
+        </p:txBody>
+      </p:sp>
+      <p:sp>
+        <p:nvSpPr>
+          <p:cNvPr id="4" name="TextBox 3"/>
+          <p:cNvSpPr txBox="1"/>
+          <p:nvPr/>
+        </p:nvSpPr>
+        <p:spPr>
+          <a:xfrm>
+            <a:off x="914400" y="3749039"/>
+            <a:ext cx="10332720" cy="1280160"/>
+          </a:xfrm>
+          <a:prstGeom prst="rect">
+            <a:avLst/>
+          </a:prstGeom>
+          <a:noFill/>
+        </p:spPr>
+        <p:txBody>
+          <a:bodyPr wrap="square">
+            <a:spAutoFit/>
+          </a:bodyPr>
+          <a:lstStyle/>
+          <a:p>
+            <a:pPr algn="l"/>
+            <a:r>
+              <a:rPr sz="1800" b="0" i="0">
+                <a:solidFill>
+                  <a:srgbClr val="8A93A6"/>
+                </a:solidFill>
+                <a:latin typeface="Calibri"/>
+              </a:rPr>
+              <a:t>2. ANALYSIS/  --  README.md has the full column-by-column report reference and every real number in this deck.</a:t>
+            </a:r>
+          </a:p>
+        </p:txBody>
+      </p:sp>
+      <p:sp>
+        <p:nvSpPr>
+          <p:cNvPr id="5" name="TextBox 4"/>
+          <p:cNvSpPr txBox="1"/>
+          <p:nvPr/>
+        </p:nvSpPr>
+        <p:spPr>
+          <a:xfrm>
+            <a:off x="914400" y="6126480"/>
+            <a:ext cx="10332720" cy="457200"/>
+          </a:xfrm>
+          <a:prstGeom prst="rect">
+            <a:avLst/>
+          </a:prstGeom>
+          <a:noFill/>
+        </p:spPr>
+        <p:txBody>
+          <a:bodyPr wrap="square">
+            <a:spAutoFit/>
+          </a:bodyPr>
+          <a:lstStyle/>
+          <a:p>
+            <a:pPr algn="l"/>
+            <a:r>
+              <a:rPr sz="1300" b="0" i="0">
+                <a:solidFill>
+                  <a:srgbClr val="5B6374"/>
+                </a:solidFill>
+                <a:latin typeface="Calibri"/>
+              </a:rPr>
+              <a:t>Module 2 of 3  ·  Data Processing → Analysis → Chunking</a:t>
+            </a:r>
+          </a:p>
+        </p:txBody>
+      </p:sp>
+    </p:spTree>
+  </p:cSld>
+  <p:clrMapOvr>
+    <a:masterClrMapping/>
+  </p:clrMapOvr>
+</p:sld>
+</file>
+
 <file path=ppt/slides/slide3.xml><?xml version="1.0" encoding="utf-8"?>
 <p:sld xmlns:a="http://schemas.openxmlformats.org/drawingml/2006/main" xmlns:p="http://schemas.openxmlformats.org/presentationml/2006/main" xmlns:r="http://schemas.openxmlformats.org/officeDocument/2006/relationships">
   <p:cSld>
@@ -6377,7 +7639,7 @@
                 </a:solidFill>
                 <a:latin typeface="Calibri"/>
               </a:rPr>
-              <a:t>THE CORE QUESTION</a:t>
+              <a:t>WORDS VS. TOKENS</a:t>
             </a:r>
           </a:p>
         </p:txBody>
@@ -6412,7 +7674,7 @@
                 </a:solidFill>
                 <a:latin typeface="Calibri"/>
               </a:rPr>
-              <a:t>How Many Tokens Per Page, Really?</a:t>
+              <a:t>Why “Word Count” Isn't Enough</a:t>
             </a:r>
           </a:p>
         </p:txBody>
@@ -6451,7 +7713,7 @@
                 </a:solidFill>
                 <a:latin typeface="Calibri"/>
               </a:rPr>
-              <a:t>▸  “Word count” is not “token count.” A word can be one token, several tokens, or a fraction of a shared token -- it depends on the tokenizer</a:t>
+              <a:t>▸  A word can be one token, several tokens, or a fraction of a token shared with other words -- it depends entirely on the tokenizer</a:t>
             </a:r>
           </a:p>
           <a:p>
@@ -6467,7 +7729,7 @@
                 </a:solidFill>
                 <a:latin typeface="Calibri"/>
               </a:rPr>
-              <a:t>▸  Why this matters here specifically: every downstream step (chunking, any embedding or LLM call) is budgeted in tokens, not words or characters</a:t>
+              <a:t>▸  So two documents with the same word count can have very different token counts, and vice versa</a:t>
             </a:r>
           </a:p>
           <a:p>
@@ -6483,7 +7745,7 @@
                 </a:solidFill>
                 <a:latin typeface="Calibri"/>
               </a:rPr>
-              <a:t>▸  So this module counts tokens with the SAME tokenizer the extraction model uses, rather than estimating -- an approximation here would quietly mislead every step after it</a:t>
+              <a:t>▸  Word count is a rough proxy at best. If token count is what actually matters downstream, word count isn't a stand-in for it</a:t>
             </a:r>
           </a:p>
         </p:txBody>
@@ -6532,6 +7794,496 @@
 </file>
 
 <file path=ppt/slides/slide7.xml><?xml version="1.0" encoding="utf-8"?>
+<p:sld xmlns:a="http://schemas.openxmlformats.org/drawingml/2006/main" xmlns:p="http://schemas.openxmlformats.org/presentationml/2006/main" xmlns:r="http://schemas.openxmlformats.org/officeDocument/2006/relationships">
+  <p:cSld>
+    <p:bg>
+      <p:bgPr>
+        <a:solidFill>
+          <a:srgbClr val="FFFFFF"/>
+        </a:solidFill>
+        <a:effectLst/>
+      </p:bgPr>
+    </p:bg>
+    <p:spTree>
+      <p:nvGrpSpPr>
+        <p:cNvPr id="1" name=""/>
+        <p:cNvGrpSpPr/>
+        <p:nvPr/>
+      </p:nvGrpSpPr>
+      <p:grpSpPr/>
+      <p:sp>
+        <p:nvSpPr>
+          <p:cNvPr id="2" name="Rectangle 1"/>
+          <p:cNvSpPr/>
+          <p:nvPr/>
+        </p:nvSpPr>
+        <p:spPr>
+          <a:xfrm>
+            <a:off x="0" y="0"/>
+            <a:ext cx="12191695" cy="109728"/>
+          </a:xfrm>
+          <a:prstGeom prst="rect">
+            <a:avLst/>
+          </a:prstGeom>
+          <a:solidFill>
+            <a:srgbClr val="3E8EDE"/>
+          </a:solidFill>
+          <a:ln>
+            <a:noFill/>
+          </a:ln>
+        </p:spPr>
+        <p:style>
+          <a:lnRef idx="1">
+            <a:schemeClr val="accent1"/>
+          </a:lnRef>
+          <a:fillRef idx="3">
+            <a:schemeClr val="accent1"/>
+          </a:fillRef>
+          <a:effectRef idx="2">
+            <a:schemeClr val="accent1"/>
+          </a:effectRef>
+          <a:fontRef idx="minor">
+            <a:schemeClr val="lt1"/>
+          </a:fontRef>
+        </p:style>
+        <p:txBody>
+          <a:bodyPr rtlCol="0" anchor="ctr"/>
+          <a:lstStyle/>
+          <a:p>
+            <a:pPr algn="ctr"/>
+          </a:p>
+        </p:txBody>
+      </p:sp>
+      <p:sp>
+        <p:nvSpPr>
+          <p:cNvPr id="3" name="TextBox 2"/>
+          <p:cNvSpPr txBox="1"/>
+          <p:nvPr/>
+        </p:nvSpPr>
+        <p:spPr>
+          <a:xfrm>
+            <a:off x="640080" y="411480"/>
+            <a:ext cx="10881360" cy="457200"/>
+          </a:xfrm>
+          <a:prstGeom prst="rect">
+            <a:avLst/>
+          </a:prstGeom>
+          <a:noFill/>
+        </p:spPr>
+        <p:txBody>
+          <a:bodyPr wrap="square">
+            <a:spAutoFit/>
+          </a:bodyPr>
+          <a:lstStyle/>
+          <a:p>
+            <a:pPr algn="l"/>
+            <a:r>
+              <a:rPr sz="1500" b="1" i="0">
+                <a:solidFill>
+                  <a:srgbClr val="3E8EDE"/>
+                </a:solidFill>
+                <a:latin typeface="Calibri"/>
+              </a:rPr>
+              <a:t>WHY IT MATTERS HERE</a:t>
+            </a:r>
+          </a:p>
+        </p:txBody>
+      </p:sp>
+      <p:sp>
+        <p:nvSpPr>
+          <p:cNvPr id="4" name="TextBox 3"/>
+          <p:cNvSpPr txBox="1"/>
+          <p:nvPr/>
+        </p:nvSpPr>
+        <p:spPr>
+          <a:xfrm>
+            <a:off x="640080" y="777240"/>
+            <a:ext cx="10881360" cy="822960"/>
+          </a:xfrm>
+          <a:prstGeom prst="rect">
+            <a:avLst/>
+          </a:prstGeom>
+          <a:noFill/>
+        </p:spPr>
+        <p:txBody>
+          <a:bodyPr wrap="square">
+            <a:spAutoFit/>
+          </a:bodyPr>
+          <a:lstStyle/>
+          <a:p>
+            <a:pPr algn="l"/>
+            <a:r>
+              <a:rPr sz="3000" b="1" i="0">
+                <a:solidFill>
+                  <a:srgbClr val="1A1D27"/>
+                </a:solidFill>
+                <a:latin typeface="Calibri"/>
+              </a:rPr>
+              <a:t>Every Downstream Step Is Budgeted in Tokens</a:t>
+            </a:r>
+          </a:p>
+        </p:txBody>
+      </p:sp>
+      <p:sp>
+        <p:nvSpPr>
+          <p:cNvPr id="5" name="TextBox 4"/>
+          <p:cNvSpPr txBox="1"/>
+          <p:nvPr/>
+        </p:nvSpPr>
+        <p:spPr>
+          <a:xfrm>
+            <a:off x="731520" y="1691640"/>
+            <a:ext cx="10698480" cy="4480560"/>
+          </a:xfrm>
+          <a:prstGeom prst="rect">
+            <a:avLst/>
+          </a:prstGeom>
+          <a:noFill/>
+        </p:spPr>
+        <p:txBody>
+          <a:bodyPr wrap="square">
+            <a:spAutoFit/>
+          </a:bodyPr>
+          <a:lstStyle/>
+          <a:p>
+            <a:pPr>
+              <a:spcAft>
+                <a:spcPts val="1200"/>
+              </a:spcAft>
+            </a:pPr>
+            <a:r>
+              <a:rPr sz="2000" b="1">
+                <a:solidFill>
+                  <a:srgbClr val="1A1D27"/>
+                </a:solidFill>
+                <a:latin typeface="Calibri"/>
+              </a:rPr>
+              <a:t>▸  Chunking (Module 3) splits documents by token count, not word count or character count</a:t>
+            </a:r>
+          </a:p>
+          <a:p>
+            <a:pPr>
+              <a:spcAft>
+                <a:spcPts val="1200"/>
+              </a:spcAft>
+            </a:pPr>
+            <a:r>
+              <a:rPr sz="2000" b="1">
+                <a:solidFill>
+                  <a:srgbClr val="1A1D27"/>
+                </a:solidFill>
+                <a:latin typeface="Calibri"/>
+              </a:rPr>
+              <a:t>▸  Every embedding call and every LLM call downstream has a token limit, not a word limit</a:t>
+            </a:r>
+          </a:p>
+          <a:p>
+            <a:pPr>
+              <a:spcAft>
+                <a:spcPts val="1200"/>
+              </a:spcAft>
+            </a:pPr>
+            <a:r>
+              <a:rPr sz="2000" b="1">
+                <a:solidFill>
+                  <a:srgbClr val="1A1D27"/>
+                </a:solidFill>
+                <a:latin typeface="Calibri"/>
+              </a:rPr>
+              <a:t>▸  Get the token count wrong here, and every budget calculated from it downstream is wrong too</a:t>
+            </a:r>
+          </a:p>
+        </p:txBody>
+      </p:sp>
+      <p:sp>
+        <p:nvSpPr>
+          <p:cNvPr id="6" name="TextBox 5"/>
+          <p:cNvSpPr txBox="1"/>
+          <p:nvPr/>
+        </p:nvSpPr>
+        <p:spPr>
+          <a:xfrm>
+            <a:off x="11521440" y="6446520"/>
+            <a:ext cx="548640" cy="320040"/>
+          </a:xfrm>
+          <a:prstGeom prst="rect">
+            <a:avLst/>
+          </a:prstGeom>
+          <a:noFill/>
+        </p:spPr>
+        <p:txBody>
+          <a:bodyPr wrap="square">
+            <a:spAutoFit/>
+          </a:bodyPr>
+          <a:lstStyle/>
+          <a:p>
+            <a:pPr algn="r"/>
+            <a:r>
+              <a:rPr sz="1100" b="0" i="0">
+                <a:solidFill>
+                  <a:srgbClr val="5B6374"/>
+                </a:solidFill>
+                <a:latin typeface="Calibri"/>
+              </a:rPr>
+              <a:t>7</a:t>
+            </a:r>
+          </a:p>
+        </p:txBody>
+      </p:sp>
+    </p:spTree>
+  </p:cSld>
+  <p:clrMapOvr>
+    <a:masterClrMapping/>
+  </p:clrMapOvr>
+</p:sld>
+</file>
+
+<file path=ppt/slides/slide8.xml><?xml version="1.0" encoding="utf-8"?>
+<p:sld xmlns:a="http://schemas.openxmlformats.org/drawingml/2006/main" xmlns:p="http://schemas.openxmlformats.org/presentationml/2006/main" xmlns:r="http://schemas.openxmlformats.org/officeDocument/2006/relationships">
+  <p:cSld>
+    <p:bg>
+      <p:bgPr>
+        <a:solidFill>
+          <a:srgbClr val="FFFFFF"/>
+        </a:solidFill>
+        <a:effectLst/>
+      </p:bgPr>
+    </p:bg>
+    <p:spTree>
+      <p:nvGrpSpPr>
+        <p:cNvPr id="1" name=""/>
+        <p:cNvGrpSpPr/>
+        <p:nvPr/>
+      </p:nvGrpSpPr>
+      <p:grpSpPr/>
+      <p:sp>
+        <p:nvSpPr>
+          <p:cNvPr id="2" name="Rectangle 1"/>
+          <p:cNvSpPr/>
+          <p:nvPr/>
+        </p:nvSpPr>
+        <p:spPr>
+          <a:xfrm>
+            <a:off x="0" y="0"/>
+            <a:ext cx="12191695" cy="109728"/>
+          </a:xfrm>
+          <a:prstGeom prst="rect">
+            <a:avLst/>
+          </a:prstGeom>
+          <a:solidFill>
+            <a:srgbClr val="3E8EDE"/>
+          </a:solidFill>
+          <a:ln>
+            <a:noFill/>
+          </a:ln>
+        </p:spPr>
+        <p:style>
+          <a:lnRef idx="1">
+            <a:schemeClr val="accent1"/>
+          </a:lnRef>
+          <a:fillRef idx="3">
+            <a:schemeClr val="accent1"/>
+          </a:fillRef>
+          <a:effectRef idx="2">
+            <a:schemeClr val="accent1"/>
+          </a:effectRef>
+          <a:fontRef idx="minor">
+            <a:schemeClr val="lt1"/>
+          </a:fontRef>
+        </p:style>
+        <p:txBody>
+          <a:bodyPr rtlCol="0" anchor="ctr"/>
+          <a:lstStyle/>
+          <a:p>
+            <a:pPr algn="ctr"/>
+          </a:p>
+        </p:txBody>
+      </p:sp>
+      <p:sp>
+        <p:nvSpPr>
+          <p:cNvPr id="3" name="TextBox 2"/>
+          <p:cNvSpPr txBox="1"/>
+          <p:nvPr/>
+        </p:nvSpPr>
+        <p:spPr>
+          <a:xfrm>
+            <a:off x="640080" y="411480"/>
+            <a:ext cx="10881360" cy="457200"/>
+          </a:xfrm>
+          <a:prstGeom prst="rect">
+            <a:avLst/>
+          </a:prstGeom>
+          <a:noFill/>
+        </p:spPr>
+        <p:txBody>
+          <a:bodyPr wrap="square">
+            <a:spAutoFit/>
+          </a:bodyPr>
+          <a:lstStyle/>
+          <a:p>
+            <a:pPr algn="l"/>
+            <a:r>
+              <a:rPr sz="1500" b="1" i="0">
+                <a:solidFill>
+                  <a:srgbClr val="3E8EDE"/>
+                </a:solidFill>
+                <a:latin typeface="Calibri"/>
+              </a:rPr>
+              <a:t>HOW IT'S COUNTED</a:t>
+            </a:r>
+          </a:p>
+        </p:txBody>
+      </p:sp>
+      <p:sp>
+        <p:nvSpPr>
+          <p:cNvPr id="4" name="TextBox 3"/>
+          <p:cNvSpPr txBox="1"/>
+          <p:nvPr/>
+        </p:nvSpPr>
+        <p:spPr>
+          <a:xfrm>
+            <a:off x="640080" y="777240"/>
+            <a:ext cx="10881360" cy="822960"/>
+          </a:xfrm>
+          <a:prstGeom prst="rect">
+            <a:avLst/>
+          </a:prstGeom>
+          <a:noFill/>
+        </p:spPr>
+        <p:txBody>
+          <a:bodyPr wrap="square">
+            <a:spAutoFit/>
+          </a:bodyPr>
+          <a:lstStyle/>
+          <a:p>
+            <a:pPr algn="l"/>
+            <a:r>
+              <a:rPr sz="3000" b="1" i="0">
+                <a:solidFill>
+                  <a:srgbClr val="1A1D27"/>
+                </a:solidFill>
+                <a:latin typeface="Calibri"/>
+              </a:rPr>
+              <a:t>The Same Tokenizer the Extraction Model Used</a:t>
+            </a:r>
+          </a:p>
+        </p:txBody>
+      </p:sp>
+      <p:sp>
+        <p:nvSpPr>
+          <p:cNvPr id="5" name="TextBox 4"/>
+          <p:cNvSpPr txBox="1"/>
+          <p:nvPr/>
+        </p:nvSpPr>
+        <p:spPr>
+          <a:xfrm>
+            <a:off x="731520" y="1691640"/>
+            <a:ext cx="10698480" cy="4480560"/>
+          </a:xfrm>
+          <a:prstGeom prst="rect">
+            <a:avLst/>
+          </a:prstGeom>
+          <a:noFill/>
+        </p:spPr>
+        <p:txBody>
+          <a:bodyPr wrap="square">
+            <a:spAutoFit/>
+          </a:bodyPr>
+          <a:lstStyle/>
+          <a:p>
+            <a:pPr>
+              <a:spcAft>
+                <a:spcPts val="1200"/>
+              </a:spcAft>
+            </a:pPr>
+            <a:r>
+              <a:rPr sz="2000" b="1">
+                <a:solidFill>
+                  <a:srgbClr val="1A1D27"/>
+                </a:solidFill>
+                <a:latin typeface="Calibri"/>
+              </a:rPr>
+              <a:t>▸  This module counts tokens with the exact tokenizer Qwen3.5-0.8B (Module 1's extraction model) uses</a:t>
+            </a:r>
+          </a:p>
+          <a:p>
+            <a:pPr>
+              <a:spcAft>
+                <a:spcPts val="1200"/>
+              </a:spcAft>
+            </a:pPr>
+            <a:r>
+              <a:rPr sz="2000" b="1">
+                <a:solidFill>
+                  <a:srgbClr val="1A1D27"/>
+                </a:solidFill>
+                <a:latin typeface="Calibri"/>
+              </a:rPr>
+              <a:t>▸  Not an estimate, not a generic word-to-token multiplier -- the real tokenizer, run for real, on every document</a:t>
+            </a:r>
+          </a:p>
+          <a:p>
+            <a:pPr>
+              <a:spcAft>
+                <a:spcPts val="1200"/>
+              </a:spcAft>
+            </a:pPr>
+            <a:r>
+              <a:rPr sz="2000" b="1">
+                <a:solidFill>
+                  <a:srgbClr val="1A1D27"/>
+                </a:solidFill>
+                <a:latin typeface="Calibri"/>
+              </a:rPr>
+              <a:t>▸  An approximation here wouldn't just be slightly off -- it would quietly mislead every token-budgeted step that reads this number afterward</a:t>
+            </a:r>
+          </a:p>
+        </p:txBody>
+      </p:sp>
+      <p:sp>
+        <p:nvSpPr>
+          <p:cNvPr id="6" name="TextBox 5"/>
+          <p:cNvSpPr txBox="1"/>
+          <p:nvPr/>
+        </p:nvSpPr>
+        <p:spPr>
+          <a:xfrm>
+            <a:off x="11521440" y="6446520"/>
+            <a:ext cx="548640" cy="320040"/>
+          </a:xfrm>
+          <a:prstGeom prst="rect">
+            <a:avLst/>
+          </a:prstGeom>
+          <a:noFill/>
+        </p:spPr>
+        <p:txBody>
+          <a:bodyPr wrap="square">
+            <a:spAutoFit/>
+          </a:bodyPr>
+          <a:lstStyle/>
+          <a:p>
+            <a:pPr algn="r"/>
+            <a:r>
+              <a:rPr sz="1100" b="0" i="0">
+                <a:solidFill>
+                  <a:srgbClr val="5B6374"/>
+                </a:solidFill>
+                <a:latin typeface="Calibri"/>
+              </a:rPr>
+              <a:t>8</a:t>
+            </a:r>
+          </a:p>
+        </p:txBody>
+      </p:sp>
+    </p:spTree>
+  </p:cSld>
+  <p:clrMapOvr>
+    <a:masterClrMapping/>
+  </p:clrMapOvr>
+</p:sld>
+</file>
+
+<file path=ppt/slides/slide9.xml><?xml version="1.0" encoding="utf-8"?>
 <p:sld xmlns:a="http://schemas.openxmlformats.org/drawingml/2006/main" xmlns:p="http://schemas.openxmlformats.org/presentationml/2006/main" xmlns:r="http://schemas.openxmlformats.org/officeDocument/2006/relationships">
   <p:cSld>
     <p:bg>
@@ -7119,576 +8871,6 @@
                 </a:solidFill>
                 <a:latin typeface="Calibri"/>
               </a:rPr>
-              <a:t>7</a:t>
-            </a:r>
-          </a:p>
-        </p:txBody>
-      </p:sp>
-    </p:spTree>
-  </p:cSld>
-  <p:clrMapOvr>
-    <a:masterClrMapping/>
-  </p:clrMapOvr>
-</p:sld>
-</file>
-
-<file path=ppt/slides/slide8.xml><?xml version="1.0" encoding="utf-8"?>
-<p:sld xmlns:a="http://schemas.openxmlformats.org/drawingml/2006/main" xmlns:p="http://schemas.openxmlformats.org/presentationml/2006/main" xmlns:r="http://schemas.openxmlformats.org/officeDocument/2006/relationships">
-  <p:cSld>
-    <p:bg>
-      <p:bgPr>
-        <a:solidFill>
-          <a:srgbClr val="FFFFFF"/>
-        </a:solidFill>
-        <a:effectLst/>
-      </p:bgPr>
-    </p:bg>
-    <p:spTree>
-      <p:nvGrpSpPr>
-        <p:cNvPr id="1" name=""/>
-        <p:cNvGrpSpPr/>
-        <p:nvPr/>
-      </p:nvGrpSpPr>
-      <p:grpSpPr/>
-      <p:sp>
-        <p:nvSpPr>
-          <p:cNvPr id="2" name="Rectangle 1"/>
-          <p:cNvSpPr/>
-          <p:nvPr/>
-        </p:nvSpPr>
-        <p:spPr>
-          <a:xfrm>
-            <a:off x="0" y="0"/>
-            <a:ext cx="12191695" cy="109728"/>
-          </a:xfrm>
-          <a:prstGeom prst="rect">
-            <a:avLst/>
-          </a:prstGeom>
-          <a:solidFill>
-            <a:srgbClr val="3E8EDE"/>
-          </a:solidFill>
-          <a:ln>
-            <a:noFill/>
-          </a:ln>
-        </p:spPr>
-        <p:style>
-          <a:lnRef idx="1">
-            <a:schemeClr val="accent1"/>
-          </a:lnRef>
-          <a:fillRef idx="3">
-            <a:schemeClr val="accent1"/>
-          </a:fillRef>
-          <a:effectRef idx="2">
-            <a:schemeClr val="accent1"/>
-          </a:effectRef>
-          <a:fontRef idx="minor">
-            <a:schemeClr val="lt1"/>
-          </a:fontRef>
-        </p:style>
-        <p:txBody>
-          <a:bodyPr rtlCol="0" anchor="ctr"/>
-          <a:lstStyle/>
-          <a:p>
-            <a:pPr algn="ctr"/>
-          </a:p>
-        </p:txBody>
-      </p:sp>
-      <p:sp>
-        <p:nvSpPr>
-          <p:cNvPr id="3" name="TextBox 2"/>
-          <p:cNvSpPr txBox="1"/>
-          <p:nvPr/>
-        </p:nvSpPr>
-        <p:spPr>
-          <a:xfrm>
-            <a:off x="640080" y="411480"/>
-            <a:ext cx="10881360" cy="457200"/>
-          </a:xfrm>
-          <a:prstGeom prst="rect">
-            <a:avLst/>
-          </a:prstGeom>
-          <a:noFill/>
-        </p:spPr>
-        <p:txBody>
-          <a:bodyPr wrap="square">
-            <a:spAutoFit/>
-          </a:bodyPr>
-          <a:lstStyle/>
-          <a:p>
-            <a:pPr algn="l"/>
-            <a:r>
-              <a:rPr sz="1500" b="1" i="0">
-                <a:solidFill>
-                  <a:srgbClr val="3E8EDE"/>
-                </a:solidFill>
-                <a:latin typeface="Calibri"/>
-              </a:rPr>
-              <a:t>LAYOUT ANALYSIS</a:t>
-            </a:r>
-          </a:p>
-        </p:txBody>
-      </p:sp>
-      <p:sp>
-        <p:nvSpPr>
-          <p:cNvPr id="4" name="TextBox 3"/>
-          <p:cNvSpPr txBox="1"/>
-          <p:nvPr/>
-        </p:nvSpPr>
-        <p:spPr>
-          <a:xfrm>
-            <a:off x="640080" y="777240"/>
-            <a:ext cx="10881360" cy="822960"/>
-          </a:xfrm>
-          <a:prstGeom prst="rect">
-            <a:avLst/>
-          </a:prstGeom>
-          <a:noFill/>
-        </p:spPr>
-        <p:txBody>
-          <a:bodyPr wrap="square">
-            <a:spAutoFit/>
-          </a:bodyPr>
-          <a:lstStyle/>
-          <a:p>
-            <a:pPr algn="l"/>
-            <a:r>
-              <a:rPr sz="3000" b="1" i="0">
-                <a:solidFill>
-                  <a:srgbClr val="1A1D27"/>
-                </a:solidFill>
-                <a:latin typeface="Calibri"/>
-              </a:rPr>
-              <a:t>The Other Half of Validation</a:t>
-            </a:r>
-          </a:p>
-        </p:txBody>
-      </p:sp>
-      <p:sp>
-        <p:nvSpPr>
-          <p:cNvPr id="5" name="TextBox 4"/>
-          <p:cNvSpPr txBox="1"/>
-          <p:nvPr/>
-        </p:nvSpPr>
-        <p:spPr>
-          <a:xfrm>
-            <a:off x="731520" y="1691640"/>
-            <a:ext cx="10698480" cy="4480560"/>
-          </a:xfrm>
-          <a:prstGeom prst="rect">
-            <a:avLst/>
-          </a:prstGeom>
-          <a:noFill/>
-        </p:spPr>
-        <p:txBody>
-          <a:bodyPr wrap="square">
-            <a:spAutoFit/>
-          </a:bodyPr>
-          <a:lstStyle/>
-          <a:p>
-            <a:pPr>
-              <a:spcAft>
-                <a:spcPts val="1000"/>
-              </a:spcAft>
-            </a:pPr>
-            <a:r>
-              <a:rPr sz="1800" b="1">
-                <a:solidFill>
-                  <a:srgbClr val="1A1D27"/>
-                </a:solidFill>
-                <a:latin typeface="Calibri"/>
-              </a:rPr>
-              <a:t>▸  Token counting tells you how much content came out. It says nothing about whether the layout detector actually understood the page</a:t>
-            </a:r>
-          </a:p>
-          <a:p>
-            <a:pPr>
-              <a:spcAft>
-                <a:spcPts val="1000"/>
-              </a:spcAft>
-            </a:pPr>
-            <a:r>
-              <a:rPr sz="1800" b="1">
-                <a:solidFill>
-                  <a:srgbClr val="1A1D27"/>
-                </a:solidFill>
-                <a:latin typeface="Calibri"/>
-              </a:rPr>
-              <a:t>▸  Module 1's layout detector already assigns a confidence score to every region it finds -- Module 2 doesn't compute this, it surfaces what already exists</a:t>
-            </a:r>
-          </a:p>
-          <a:p>
-            <a:pPr>
-              <a:spcAft>
-                <a:spcPts val="500"/>
-              </a:spcAft>
-            </a:pPr>
-            <a:r>
-              <a:rPr sz="1500" b="0">
-                <a:solidFill>
-                  <a:srgbClr val="5B6374"/>
-                </a:solidFill>
-                <a:latin typeface="Calibri"/>
-              </a:rPr>
-              <a:t>     –  low_confidence_regions -- the detector found something there, but wasn't sure what</a:t>
-            </a:r>
-          </a:p>
-          <a:p>
-            <a:pPr>
-              <a:spcAft>
-                <a:spcPts val="500"/>
-              </a:spcAft>
-            </a:pPr>
-            <a:r>
-              <a:rPr sz="1500" b="0">
-                <a:solidFill>
-                  <a:srgbClr val="5B6374"/>
-                </a:solidFill>
-                <a:latin typeface="Calibri"/>
-              </a:rPr>
-              <a:t>     –  dropped_regions -- the detector excluded a region entirely: correctly (headers/footers), or not (see the case study ahead)</a:t>
-            </a:r>
-          </a:p>
-          <a:p>
-            <a:pPr>
-              <a:spcAft>
-                <a:spcPts val="1000"/>
-              </a:spcAft>
-            </a:pPr>
-            <a:r>
-              <a:rPr sz="1800" b="1">
-                <a:solidFill>
-                  <a:srgbClr val="1A1D27"/>
-                </a:solidFill>
-                <a:latin typeface="Calibri"/>
-              </a:rPr>
-              <a:t>▸  Same source also covers artifacts (logos, signatures, stamp/seals) and malformed tables -- structural failures, not content-volume ones</a:t>
-            </a:r>
-          </a:p>
-          <a:p>
-            <a:pPr>
-              <a:spcAft>
-                <a:spcPts val="1000"/>
-              </a:spcAft>
-            </a:pPr>
-            <a:r>
-              <a:rPr sz="1800" b="1">
-                <a:solidFill>
-                  <a:srgbClr val="1A1D27"/>
-                </a:solidFill>
-                <a:latin typeface="Calibri"/>
-              </a:rPr>
-              <a:t>▸  Two independent questions: token analysis asks “how much came out,” layout analysis asks “did it even see the page correctly”</a:t>
-            </a:r>
-          </a:p>
-        </p:txBody>
-      </p:sp>
-      <p:sp>
-        <p:nvSpPr>
-          <p:cNvPr id="6" name="TextBox 5"/>
-          <p:cNvSpPr txBox="1"/>
-          <p:nvPr/>
-        </p:nvSpPr>
-        <p:spPr>
-          <a:xfrm>
-            <a:off x="11521440" y="6446520"/>
-            <a:ext cx="548640" cy="320040"/>
-          </a:xfrm>
-          <a:prstGeom prst="rect">
-            <a:avLst/>
-          </a:prstGeom>
-          <a:noFill/>
-        </p:spPr>
-        <p:txBody>
-          <a:bodyPr wrap="square">
-            <a:spAutoFit/>
-          </a:bodyPr>
-          <a:lstStyle/>
-          <a:p>
-            <a:pPr algn="r"/>
-            <a:r>
-              <a:rPr sz="1100" b="0" i="0">
-                <a:solidFill>
-                  <a:srgbClr val="5B6374"/>
-                </a:solidFill>
-                <a:latin typeface="Calibri"/>
-              </a:rPr>
-              <a:t>8</a:t>
-            </a:r>
-          </a:p>
-        </p:txBody>
-      </p:sp>
-    </p:spTree>
-  </p:cSld>
-  <p:clrMapOvr>
-    <a:masterClrMapping/>
-  </p:clrMapOvr>
-</p:sld>
-</file>
-
-<file path=ppt/slides/slide9.xml><?xml version="1.0" encoding="utf-8"?>
-<p:sld xmlns:a="http://schemas.openxmlformats.org/drawingml/2006/main" xmlns:p="http://schemas.openxmlformats.org/presentationml/2006/main" xmlns:r="http://schemas.openxmlformats.org/officeDocument/2006/relationships">
-  <p:cSld>
-    <p:bg>
-      <p:bgPr>
-        <a:solidFill>
-          <a:srgbClr val="FFFFFF"/>
-        </a:solidFill>
-        <a:effectLst/>
-      </p:bgPr>
-    </p:bg>
-    <p:spTree>
-      <p:nvGrpSpPr>
-        <p:cNvPr id="1" name=""/>
-        <p:cNvGrpSpPr/>
-        <p:nvPr/>
-      </p:nvGrpSpPr>
-      <p:grpSpPr/>
-      <p:sp>
-        <p:nvSpPr>
-          <p:cNvPr id="2" name="Rectangle 1"/>
-          <p:cNvSpPr/>
-          <p:nvPr/>
-        </p:nvSpPr>
-        <p:spPr>
-          <a:xfrm>
-            <a:off x="0" y="0"/>
-            <a:ext cx="12191695" cy="109728"/>
-          </a:xfrm>
-          <a:prstGeom prst="rect">
-            <a:avLst/>
-          </a:prstGeom>
-          <a:solidFill>
-            <a:srgbClr val="3E8EDE"/>
-          </a:solidFill>
-          <a:ln>
-            <a:noFill/>
-          </a:ln>
-        </p:spPr>
-        <p:style>
-          <a:lnRef idx="1">
-            <a:schemeClr val="accent1"/>
-          </a:lnRef>
-          <a:fillRef idx="3">
-            <a:schemeClr val="accent1"/>
-          </a:fillRef>
-          <a:effectRef idx="2">
-            <a:schemeClr val="accent1"/>
-          </a:effectRef>
-          <a:fontRef idx="minor">
-            <a:schemeClr val="lt1"/>
-          </a:fontRef>
-        </p:style>
-        <p:txBody>
-          <a:bodyPr rtlCol="0" anchor="ctr"/>
-          <a:lstStyle/>
-          <a:p>
-            <a:pPr algn="ctr"/>
-          </a:p>
-        </p:txBody>
-      </p:sp>
-      <p:sp>
-        <p:nvSpPr>
-          <p:cNvPr id="3" name="TextBox 2"/>
-          <p:cNvSpPr txBox="1"/>
-          <p:nvPr/>
-        </p:nvSpPr>
-        <p:spPr>
-          <a:xfrm>
-            <a:off x="640080" y="411480"/>
-            <a:ext cx="10881360" cy="457200"/>
-          </a:xfrm>
-          <a:prstGeom prst="rect">
-            <a:avLst/>
-          </a:prstGeom>
-          <a:noFill/>
-        </p:spPr>
-        <p:txBody>
-          <a:bodyPr wrap="square">
-            <a:spAutoFit/>
-          </a:bodyPr>
-          <a:lstStyle/>
-          <a:p>
-            <a:pPr algn="l"/>
-            <a:r>
-              <a:rPr sz="1500" b="1" i="0">
-                <a:solidFill>
-                  <a:srgbClr val="3E8EDE"/>
-                </a:solidFill>
-                <a:latin typeface="Calibri"/>
-              </a:rPr>
-              <a:t>THE DELIVERABLE</a:t>
-            </a:r>
-          </a:p>
-        </p:txBody>
-      </p:sp>
-      <p:sp>
-        <p:nvSpPr>
-          <p:cNvPr id="4" name="TextBox 3"/>
-          <p:cNvSpPr txBox="1"/>
-          <p:nvPr/>
-        </p:nvSpPr>
-        <p:spPr>
-          <a:xfrm>
-            <a:off x="640080" y="777240"/>
-            <a:ext cx="10881360" cy="822960"/>
-          </a:xfrm>
-          <a:prstGeom prst="rect">
-            <a:avLst/>
-          </a:prstGeom>
-          <a:noFill/>
-        </p:spPr>
-        <p:txBody>
-          <a:bodyPr wrap="square">
-            <a:spAutoFit/>
-          </a:bodyPr>
-          <a:lstStyle/>
-          <a:p>
-            <a:pPr algn="l"/>
-            <a:r>
-              <a:rPr sz="3000" b="1" i="0">
-                <a:solidFill>
-                  <a:srgbClr val="1A1D27"/>
-                </a:solidFill>
-                <a:latin typeface="Calibri"/>
-              </a:rPr>
-              <a:t>One Workbook, Built for Validation</a:t>
-            </a:r>
-          </a:p>
-        </p:txBody>
-      </p:sp>
-      <p:sp>
-        <p:nvSpPr>
-          <p:cNvPr id="5" name="TextBox 4"/>
-          <p:cNvSpPr txBox="1"/>
-          <p:nvPr/>
-        </p:nvSpPr>
-        <p:spPr>
-          <a:xfrm>
-            <a:off x="731520" y="1691640"/>
-            <a:ext cx="10698480" cy="4480560"/>
-          </a:xfrm>
-          <a:prstGeom prst="rect">
-            <a:avLst/>
-          </a:prstGeom>
-          <a:noFill/>
-        </p:spPr>
-        <p:txBody>
-          <a:bodyPr wrap="square">
-            <a:spAutoFit/>
-          </a:bodyPr>
-          <a:lstStyle/>
-          <a:p>
-            <a:pPr>
-              <a:spcAft>
-                <a:spcPts val="1200"/>
-              </a:spcAft>
-            </a:pPr>
-            <a:r>
-              <a:rPr sz="2000" b="1">
-                <a:solidFill>
-                  <a:srgbClr val="1A1D27"/>
-                </a:solidFill>
-                <a:latin typeface="Calibri"/>
-              </a:rPr>
-              <a:t>▸  Summary -- one row per document, every stat from the last two slides in one place, built to be scanned fast</a:t>
-            </a:r>
-          </a:p>
-          <a:p>
-            <a:pPr>
-              <a:spcAft>
-                <a:spcPts val="1200"/>
-              </a:spcAft>
-            </a:pPr>
-            <a:r>
-              <a:rPr sz="2000" b="1">
-                <a:solidFill>
-                  <a:srgbClr val="1A1D27"/>
-                </a:solidFill>
-                <a:latin typeface="Calibri"/>
-              </a:rPr>
-              <a:t>▸  Artifacts Detail -- one row per detected logo/signature/stamp: page, description, exact location</a:t>
-            </a:r>
-          </a:p>
-          <a:p>
-            <a:pPr>
-              <a:spcAft>
-                <a:spcPts val="1200"/>
-              </a:spcAft>
-            </a:pPr>
-            <a:r>
-              <a:rPr sz="2000" b="1">
-                <a:solidFill>
-                  <a:srgbClr val="1A1D27"/>
-                </a:solidFill>
-                <a:latin typeface="Calibri"/>
-              </a:rPr>
-              <a:t>▸  Low Confidence Regions -- one row per region the layout detector wasn't sure about</a:t>
-            </a:r>
-          </a:p>
-          <a:p>
-            <a:pPr>
-              <a:spcAft>
-                <a:spcPts val="1200"/>
-              </a:spcAft>
-            </a:pPr>
-            <a:r>
-              <a:rPr sz="2000" b="1">
-                <a:solidFill>
-                  <a:srgbClr val="1A1D27"/>
-                </a:solidFill>
-                <a:latin typeface="Calibri"/>
-              </a:rPr>
-              <a:t>▸  Dropped Regions -- one row per region excluded from the document, including anything misclassified and dropped by mistake</a:t>
-            </a:r>
-          </a:p>
-          <a:p>
-            <a:pPr>
-              <a:spcAft>
-                <a:spcPts val="600"/>
-              </a:spcAft>
-            </a:pPr>
-            <a:r>
-              <a:rPr sz="1600" b="0">
-                <a:solidFill>
-                  <a:srgbClr val="5B6374"/>
-                </a:solidFill>
-                <a:latin typeface="Calibri"/>
-              </a:rPr>
-              <a:t>     –  Every flagged row carries a location back to the original page -- a finding is only useful if it can be checked</a:t>
-            </a:r>
-          </a:p>
-        </p:txBody>
-      </p:sp>
-      <p:sp>
-        <p:nvSpPr>
-          <p:cNvPr id="6" name="TextBox 5"/>
-          <p:cNvSpPr txBox="1"/>
-          <p:nvPr/>
-        </p:nvSpPr>
-        <p:spPr>
-          <a:xfrm>
-            <a:off x="11521440" y="6446520"/>
-            <a:ext cx="548640" cy="320040"/>
-          </a:xfrm>
-          <a:prstGeom prst="rect">
-            <a:avLst/>
-          </a:prstGeom>
-          <a:noFill/>
-        </p:spPr>
-        <p:txBody>
-          <a:bodyPr wrap="square">
-            <a:spAutoFit/>
-          </a:bodyPr>
-          <a:lstStyle/>
-          <a:p>
-            <a:pPr algn="r"/>
-            <a:r>
-              <a:rPr sz="1100" b="0" i="0">
-                <a:solidFill>
-                  <a:srgbClr val="5B6374"/>
-                </a:solidFill>
-                <a:latin typeface="Calibri"/>
-              </a:rPr>
               <a:t>9</a:t>
             </a:r>
           </a:p>

--- a/2. ANALYSIS/Analysis_Module_Overview.pptx
+++ b/2. ANALYSIS/Analysis_Module_Overview.pptx
@@ -3628,385 +3628,7 @@
 </p:sld>
 </file>
 
-<file path=ppt/slides/slide12.xml><?xml version="1.0" encoding="utf-8"?>
-<p:sld xmlns:a="http://schemas.openxmlformats.org/drawingml/2006/main" xmlns:r="http://schemas.openxmlformats.org/officeDocument/2006/relationships" xmlns:p="http://schemas.openxmlformats.org/presentationml/2006/main">
-  <p:cSld name="Slide 12">
-    <p:spTree>
-      <p:nvGrpSpPr>
-        <p:cNvPr id="1" name=""/>
-        <p:cNvGrpSpPr/>
-        <p:nvPr/>
-      </p:nvGrpSpPr>
-      <p:grpSpPr>
-        <a:xfrm>
-          <a:off x="0" y="0"/>
-          <a:ext cx="0" cy="0"/>
-          <a:chOff x="0" y="0"/>
-          <a:chExt cx="0" cy="0"/>
-        </a:xfrm>
-      </p:grpSpPr>
-      <p:sp>
-        <p:nvSpPr>
-          <p:cNvPr id="2" name="Text 0"/>
-          <p:cNvSpPr/>
-          <p:nvPr/>
-        </p:nvSpPr>
-        <p:spPr>
-          <a:xfrm>
-            <a:off x="502920" y="438912"/>
-            <a:ext cx="2743200" cy="201168"/>
-          </a:xfrm>
-          <a:prstGeom prst="rect">
-            <a:avLst/>
-          </a:prstGeom>
-          <a:noFill/>
-          <a:ln/>
-        </p:spPr>
-        <p:txBody>
-          <a:bodyPr wrap="square" lIns="0" tIns="0" rIns="0" bIns="0" rtlCol="0" anchor="ctr"/>
-          <a:lstStyle/>
-          <a:p>
-            <a:pPr indent="0" marL="0">
-              <a:buNone/>
-            </a:pPr>
-            <a:r>
-              <a:rPr lang="en-US" sz="800" b="1" dirty="0">
-                <a:solidFill>
-                  <a:srgbClr val="2F80ED"/>
-                </a:solidFill>
-              </a:rPr>
-              <a:t>REAL NUMBERS</a:t>
-            </a:r>
-            <a:endParaRPr lang="en-US" sz="800" dirty="0"/>
-          </a:p>
-        </p:txBody>
-      </p:sp>
-      <p:sp>
-        <p:nvSpPr>
-          <p:cNvPr id="3" name="Text 1"/>
-          <p:cNvSpPr/>
-          <p:nvPr/>
-        </p:nvSpPr>
-        <p:spPr>
-          <a:xfrm>
-            <a:off x="502920" y="713232"/>
-            <a:ext cx="10972800" cy="530352"/>
-          </a:xfrm>
-          <a:prstGeom prst="rect">
-            <a:avLst/>
-          </a:prstGeom>
-          <a:noFill/>
-          <a:ln/>
-        </p:spPr>
-        <p:txBody>
-          <a:bodyPr wrap="square" lIns="0" tIns="0" rIns="0" bIns="0" rtlCol="0" anchor="ctr">
-            <a:normAutofit/>
-          </a:bodyPr>
-          <a:lstStyle/>
-          <a:p>
-            <a:pPr indent="0" marL="0">
-              <a:buNone/>
-            </a:pPr>
-            <a:r>
-              <a:rPr lang="en-US" sz="2600" b="1" dirty="0">
-                <a:solidFill>
-                  <a:srgbClr val="172033"/>
-                </a:solidFill>
-              </a:rPr>
-              <a:t>Tokens Per Page, Three Real Documents</a:t>
-            </a:r>
-            <a:endParaRPr lang="en-US" sz="2600" dirty="0"/>
-          </a:p>
-        </p:txBody>
-      </p:sp>
-      <p:sp>
-        <p:nvSpPr>
-          <p:cNvPr id="4" name="Text 2"/>
-          <p:cNvSpPr/>
-          <p:nvPr/>
-        </p:nvSpPr>
-        <p:spPr>
-          <a:xfrm>
-            <a:off x="502920" y="1261872"/>
-            <a:ext cx="10789920" cy="329184"/>
-          </a:xfrm>
-          <a:prstGeom prst="rect">
-            <a:avLst/>
-          </a:prstGeom>
-          <a:noFill/>
-          <a:ln/>
-        </p:spPr>
-        <p:txBody>
-          <a:bodyPr wrap="square" lIns="0" tIns="0" rIns="0" bIns="0" rtlCol="0" anchor="ctr">
-            <a:normAutofit/>
-          </a:bodyPr>
-          <a:lstStyle/>
-          <a:p>
-            <a:pPr indent="0" marL="0">
-              <a:buNone/>
-            </a:pPr>
-            <a:r>
-              <a:rPr lang="en-US" sz="1250" dirty="0">
-                <a:solidFill>
-                  <a:srgbClr val="687385"/>
-                </a:solidFill>
-              </a:rPr>
-              <a:t>Content density tells you more than raw document length.</a:t>
-            </a:r>
-            <a:endParaRPr lang="en-US" sz="1250" dirty="0"/>
-          </a:p>
-        </p:txBody>
-      </p:sp>
-      <p:graphicFrame>
-        <p:nvGraphicFramePr>
-          <p:cNvPr id="5" name="Chart 0" descr=""/>
-          <p:cNvGraphicFramePr/>
-          <p:nvPr/>
-        </p:nvGraphicFramePr>
-        <p:xfrm>
-          <a:off x="685800" y="1828800"/>
-          <a:ext cx="6446520" cy="3611880"/>
-        </p:xfrm>
-        <a:graphic xmlns:a="http://schemas.openxmlformats.org/drawingml/2006/main">
-          <a:graphicData uri="http://schemas.openxmlformats.org/drawingml/2006/chart">
-            <c:chart xmlns:c="http://schemas.openxmlformats.org/drawingml/2006/chart" r:id="rId1"/>
-          </a:graphicData>
-        </a:graphic>
-      </p:graphicFrame>
-      <p:sp>
-        <p:nvSpPr>
-          <p:cNvPr id="6" name="Shape 3"/>
-          <p:cNvSpPr/>
-          <p:nvPr/>
-        </p:nvSpPr>
-        <p:spPr>
-          <a:xfrm>
-            <a:off x="7452360" y="1828800"/>
-            <a:ext cx="4069080" cy="3611880"/>
-          </a:xfrm>
-          <a:prstGeom prst="roundRect">
-            <a:avLst>
-              <a:gd name="adj" fmla="val 2025"/>
-            </a:avLst>
-          </a:prstGeom>
-          <a:solidFill>
-            <a:srgbClr val="FFFFFF"/>
-          </a:solidFill>
-          <a:ln w="12700">
-            <a:solidFill>
-              <a:srgbClr val="D8DEE9"/>
-            </a:solidFill>
-            <a:prstDash val="solid"/>
-          </a:ln>
-          <a:effectLst>
-            <a:outerShdw sx="100000" sy="100000" kx="0" ky="0" algn="bl" rotWithShape="0" blurRad="1.209470961743788e+115" dist="8.063139744958588e+114" dir="2.763423996509167e+135">
-              <a:srgbClr val="000000">
-                <a:alpha val="1.3e+139"/>
-              </a:srgbClr>
-            </a:outerShdw>
-          </a:effectLst>
-        </p:spPr>
-        <p:txBody>
-          <a:bodyPr/>
-          <a:p/>
-        </p:txBody>
-      </p:sp>
-      <p:pic>
-        <p:nvPicPr>
-          <p:cNvPr id="7" name="Image 0" descr="/mnt/data/nasa_iss_chart.png">    </p:cNvPr>
-          <p:cNvPicPr>
-            <a:picLocks noChangeAspect="1"/>
-          </p:cNvPicPr>
-          <p:nvPr/>
-        </p:nvPicPr>
-        <p:blipFill>
-          <a:blip r:embed="rId2"/>
-          <a:stretch>
-            <a:fillRect/>
-          </a:stretch>
-        </p:blipFill>
-        <p:spPr>
-          <a:xfrm>
-            <a:off x="7662672" y="2181416"/>
-            <a:ext cx="3639312" cy="2047113"/>
-          </a:xfrm>
-          <a:prstGeom prst="rect">
-            <a:avLst/>
-          </a:prstGeom>
-        </p:spPr>
-      </p:pic>
-      <p:sp>
-        <p:nvSpPr>
-          <p:cNvPr id="8" name="Text 4"/>
-          <p:cNvSpPr/>
-          <p:nvPr/>
-        </p:nvSpPr>
-        <p:spPr>
-          <a:xfrm>
-            <a:off x="7754112" y="4553712"/>
-            <a:ext cx="3474720" cy="182880"/>
-          </a:xfrm>
-          <a:prstGeom prst="rect">
-            <a:avLst/>
-          </a:prstGeom>
-          <a:noFill/>
-          <a:ln/>
-        </p:spPr>
-        <p:txBody>
-          <a:bodyPr wrap="square" lIns="0" tIns="0" rIns="0" bIns="0" rtlCol="0" anchor="ctr"/>
-          <a:lstStyle/>
-          <a:p>
-            <a:pPr algn="ctr" indent="0" marL="0">
-              <a:buNone/>
-            </a:pPr>
-            <a:r>
-              <a:rPr lang="en-US" sz="1050" b="1" dirty="0">
-                <a:solidFill>
-                  <a:srgbClr val="172033"/>
-                </a:solidFill>
-              </a:rPr>
-              <a:t>NASA ISS factsheet visual context</a:t>
-            </a:r>
-            <a:endParaRPr lang="en-US" sz="1050" dirty="0"/>
-          </a:p>
-        </p:txBody>
-      </p:sp>
-      <p:sp>
-        <p:nvSpPr>
-          <p:cNvPr id="9" name="Text 5"/>
-          <p:cNvSpPr/>
-          <p:nvPr/>
-        </p:nvSpPr>
-        <p:spPr>
-          <a:xfrm>
-            <a:off x="7754112" y="4846320"/>
-            <a:ext cx="3474720" cy="438912"/>
-          </a:xfrm>
-          <a:prstGeom prst="rect">
-            <a:avLst/>
-          </a:prstGeom>
-          <a:noFill/>
-          <a:ln/>
-        </p:spPr>
-        <p:txBody>
-          <a:bodyPr wrap="square" lIns="0" tIns="0" rIns="0" bIns="0" rtlCol="0" anchor="ctr">
-            <a:normAutofit/>
-          </a:bodyPr>
-          <a:lstStyle/>
-          <a:p>
-            <a:pPr algn="ctr" indent="0" marL="0">
-              <a:buNone/>
-            </a:pPr>
-            <a:r>
-              <a:rPr lang="en-US" sz="1050" dirty="0">
-                <a:solidFill>
-                  <a:srgbClr val="687385"/>
-                </a:solidFill>
-              </a:rPr>
-              <a:t>Despite 2 pages, this document averaged only 247.5 tokens/page in the measured corpus.</a:t>
-            </a:r>
-            <a:endParaRPr lang="en-US" sz="1050" dirty="0"/>
-          </a:p>
-        </p:txBody>
-      </p:sp>
-      <p:sp>
-        <p:nvSpPr>
-          <p:cNvPr id="10" name="Text 6"/>
-          <p:cNvSpPr/>
-          <p:nvPr/>
-        </p:nvSpPr>
-        <p:spPr>
-          <a:xfrm>
-            <a:off x="502920" y="6473952"/>
-            <a:ext cx="10789920" cy="164592"/>
-          </a:xfrm>
-          <a:prstGeom prst="rect">
-            <a:avLst/>
-          </a:prstGeom>
-          <a:noFill/>
-          <a:ln/>
-        </p:spPr>
-        <p:txBody>
-          <a:bodyPr wrap="square" lIns="0" tIns="0" rIns="0" bIns="0" rtlCol="0" anchor="ctr">
-            <a:normAutofit/>
-          </a:bodyPr>
-          <a:lstStyle/>
-          <a:p>
-            <a:pPr indent="0" marL="0">
-              <a:buNone/>
-            </a:pPr>
-            <a:r>
-              <a:rPr lang="en-US" sz="650" dirty="0">
-                <a:solidFill>
-                  <a:srgbClr val="7A8493"/>
-                </a:solidFill>
-              </a:rPr>
-              <a:t>Data: provided Module 2 deck. Image: NASA Headquarters, “NASA Science Facilities on the International Space Station,” https://svs.gsfc.nasa.gov/30280</a:t>
-            </a:r>
-            <a:endParaRPr lang="en-US" sz="650" dirty="0"/>
-          </a:p>
-        </p:txBody>
-      </p:sp>
-      <p:sp>
-        <p:nvSpPr>
-          <p:cNvPr id="25" name="Slide Number Placeholder 0"/>
-          <p:cNvSpPr>
-            <a:spLocks noGrp="1"/>
-          </p:cNvSpPr>
-          <p:nvPr>
-            <p:ph type="sldNum" sz="quarter" idx="4294967295"/>
-          </p:nvPr>
-        </p:nvSpPr>
-        <p:spPr>
-          <a:xfrm>
-            <a:off x="11612880" y="6510528"/>
-            <a:ext cx="800000" cy="300000"/>
-          </a:xfrm>
-          <a:prstGeom prst="rect">
-            <a:avLst/>
-          </a:prstGeom>
-          <a:extLst>
-            <a:ext uri="{C572A759-6A51-4108-AA02-DFA0A04FC94B}">
-              <ma14:wrappingTextBoxFlag xmlns:ma14="http://schemas.microsoft.com/office/mac/drawingml/2011/main" val="0"/>
-            </a:ext>
-          </a:extLst>
-        </p:spPr>
-        <p:txBody>
-          <a:bodyPr/>
-          <a:lstStyle>
-            <a:lvl1pPr>
-              <a:defRPr sz="650">
-                <a:solidFill>
-                  <a:srgbClr val="9AA4B2"/>
-                </a:solidFill>
-                <a:latin typeface="Aptos"/>
-                <a:ea typeface="Aptos"/>
-                <a:cs typeface="Aptos"/>
-              </a:defRPr>
-            </a:lvl1pPr>
-          </a:lstStyle>
-          <a:p>
-            <a:pPr algn="l"/>
-            <a:fld id="{F7021451-1387-4CA6-816F-3879F97B5CBC}" type="slidenum">
-              <a:rPr b="0" lang="en-US"/>
-              <a:t>12</a:t>
-            </a:fld>
-            <a:endParaRPr lang="en-US"/>
-          </a:p>
-        </p:txBody>
-      </p:sp>
-    </p:spTree>
-  </p:cSld>
-  <p:clrMapOvr>
-    <a:masterClrMapping/>
-  </p:clrMapOvr>
-  <p:transition spd="fast" advClick="1">
-    <p:fade/>
-  </p:transition>
-</p:sld>
-</file>
-
-<file path=ppt/slides/slide13.xml><?xml version="1.0" encoding="utf-8"?>
+<file path=ppt/slides/slide10.xml><?xml version="1.0" encoding="utf-8"?>
 <p:sld xmlns:a="http://schemas.openxmlformats.org/drawingml/2006/main" xmlns:r="http://schemas.openxmlformats.org/officeDocument/2006/relationships" xmlns:p="http://schemas.openxmlformats.org/presentationml/2006/main">
   <p:cSld name="Slide 13">
     <p:spTree>
@@ -5092,7 +4714,7 @@
 </p:sld>
 </file>
 
-<file path=ppt/slides/slide14.xml><?xml version="1.0" encoding="utf-8"?>
+<file path=ppt/slides/slide11.xml><?xml version="1.0" encoding="utf-8"?>
 <p:sld xmlns:a="http://schemas.openxmlformats.org/drawingml/2006/main" xmlns:r="http://schemas.openxmlformats.org/officeDocument/2006/relationships" xmlns:p="http://schemas.openxmlformats.org/presentationml/2006/main">
   <p:cSld name="Slide 14">
     <p:spTree>
@@ -7195,7 +6817,7 @@
 </p:sld>
 </file>
 
-<file path=ppt/slides/slide15.xml><?xml version="1.0" encoding="utf-8"?>
+<file path=ppt/slides/slide12.xml><?xml version="1.0" encoding="utf-8"?>
 <p:sld xmlns:a="http://schemas.openxmlformats.org/drawingml/2006/main" xmlns:r="http://schemas.openxmlformats.org/officeDocument/2006/relationships" xmlns:p="http://schemas.openxmlformats.org/presentationml/2006/main">
   <p:cSld name="Slide 15">
     <p:spTree>
@@ -8403,7 +8025,7 @@
 </p:sld>
 </file>
 
-<file path=ppt/slides/slide16.xml><?xml version="1.0" encoding="utf-8"?>
+<file path=ppt/slides/slide13.xml><?xml version="1.0" encoding="utf-8"?>
 <p:sld xmlns:a="http://schemas.openxmlformats.org/drawingml/2006/main" xmlns:r="http://schemas.openxmlformats.org/officeDocument/2006/relationships" xmlns:p="http://schemas.openxmlformats.org/presentationml/2006/main">
   <p:cSld name="Slide 16">
     <p:spTree>
@@ -9183,7 +8805,7 @@
 </p:sld>
 </file>
 
-<file path=ppt/slides/slide17.xml><?xml version="1.0" encoding="utf-8"?>
+<file path=ppt/slides/slide14.xml><?xml version="1.0" encoding="utf-8"?>
 <p:sld xmlns:a="http://schemas.openxmlformats.org/drawingml/2006/main" xmlns:r="http://schemas.openxmlformats.org/officeDocument/2006/relationships" xmlns:p="http://schemas.openxmlformats.org/presentationml/2006/main">
   <p:cSld name="Slide 17">
     <p:spTree>
@@ -10103,7 +9725,7 @@
 </p:sld>
 </file>
 
-<file path=ppt/slides/slide18.xml><?xml version="1.0" encoding="utf-8"?>
+<file path=ppt/slides/slide15.xml><?xml version="1.0" encoding="utf-8"?>
 <p:sld xmlns:a="http://schemas.openxmlformats.org/drawingml/2006/main" xmlns:r="http://schemas.openxmlformats.org/officeDocument/2006/relationships" xmlns:p="http://schemas.openxmlformats.org/presentationml/2006/main">
   <p:cSld name="Slide 18">
     <p:spTree>
@@ -10701,7 +10323,7 @@
 </p:sld>
 </file>
 
-<file path=ppt/slides/slide19.xml><?xml version="1.0" encoding="utf-8"?>
+<file path=ppt/slides/slide16.xml><?xml version="1.0" encoding="utf-8"?>
 <p:sld xmlns:a="http://schemas.openxmlformats.org/drawingml/2006/main" xmlns:r="http://schemas.openxmlformats.org/officeDocument/2006/relationships" xmlns:p="http://schemas.openxmlformats.org/presentationml/2006/main">
   <p:cSld name="Slide 19">
     <p:spTree>
@@ -11380,6 +11002,3189 @@
             <a:fld id="{F7021451-1387-4CA6-816F-3879F97B5CBC}" type="slidenum">
               <a:rPr b="0" lang="en-US"/>
               <a:t>19</a:t>
+            </a:fld>
+            <a:endParaRPr lang="en-US"/>
+          </a:p>
+        </p:txBody>
+      </p:sp>
+    </p:spTree>
+  </p:cSld>
+  <p:clrMapOvr>
+    <a:masterClrMapping/>
+  </p:clrMapOvr>
+  <p:transition spd="fast" advClick="1">
+    <p:fade/>
+  </p:transition>
+</p:sld>
+</file>
+
+<file path=ppt/slides/slide17.xml><?xml version="1.0" encoding="utf-8"?>
+<p:sld xmlns:a="http://schemas.openxmlformats.org/drawingml/2006/main" xmlns:r="http://schemas.openxmlformats.org/officeDocument/2006/relationships" xmlns:p="http://schemas.openxmlformats.org/presentationml/2006/main">
+  <p:cSld name="Slide 20">
+    <p:spTree>
+      <p:nvGrpSpPr>
+        <p:cNvPr id="1" name=""/>
+        <p:cNvGrpSpPr/>
+        <p:nvPr/>
+      </p:nvGrpSpPr>
+      <p:grpSpPr>
+        <a:xfrm>
+          <a:off x="0" y="0"/>
+          <a:ext cx="0" cy="0"/>
+          <a:chOff x="0" y="0"/>
+          <a:chExt cx="0" cy="0"/>
+        </a:xfrm>
+      </p:grpSpPr>
+      <p:sp>
+        <p:nvSpPr>
+          <p:cNvPr id="2" name="Text 0"/>
+          <p:cNvSpPr/>
+          <p:nvPr/>
+        </p:nvSpPr>
+        <p:spPr>
+          <a:xfrm>
+            <a:off x="502920" y="438912"/>
+            <a:ext cx="2743200" cy="201168"/>
+          </a:xfrm>
+          <a:prstGeom prst="rect">
+            <a:avLst/>
+          </a:prstGeom>
+          <a:noFill/>
+          <a:ln/>
+        </p:spPr>
+        <p:txBody>
+          <a:bodyPr wrap="square" lIns="0" tIns="0" rIns="0" bIns="0" rtlCol="0" anchor="ctr"/>
+          <a:lstStyle/>
+          <a:p>
+            <a:pPr indent="0" marL="0">
+              <a:buNone/>
+            </a:pPr>
+            <a:r>
+              <a:rPr lang="en-US" sz="800" b="1" dirty="0">
+                <a:solidFill>
+                  <a:srgbClr val="2F80ED"/>
+                </a:solidFill>
+              </a:rPr>
+              <a:t>STEP 2: RANDOM AUDITS</a:t>
+            </a:r>
+            <a:endParaRPr lang="en-US" sz="800" dirty="0"/>
+          </a:p>
+        </p:txBody>
+      </p:sp>
+      <p:sp>
+        <p:nvSpPr>
+          <p:cNvPr id="3" name="Text 1"/>
+          <p:cNvSpPr/>
+          <p:nvPr/>
+        </p:nvSpPr>
+        <p:spPr>
+          <a:xfrm>
+            <a:off x="502920" y="713232"/>
+            <a:ext cx="10972800" cy="530352"/>
+          </a:xfrm>
+          <a:prstGeom prst="rect">
+            <a:avLst/>
+          </a:prstGeom>
+          <a:noFill/>
+          <a:ln/>
+        </p:spPr>
+        <p:txBody>
+          <a:bodyPr wrap="square" lIns="0" tIns="0" rIns="0" bIns="0" rtlCol="0" anchor="ctr">
+            <a:normAutofit/>
+          </a:bodyPr>
+          <a:lstStyle/>
+          <a:p>
+            <a:pPr indent="0" marL="0">
+              <a:buNone/>
+            </a:pPr>
+            <a:r>
+              <a:rPr lang="en-US" sz="2600" b="1" dirty="0">
+                <a:solidFill>
+                  <a:srgbClr val="172033"/>
+                </a:solidFill>
+              </a:rPr>
+              <a:t>Catching What the Model Didn’t Flag</a:t>
+            </a:r>
+            <a:endParaRPr lang="en-US" sz="2600" dirty="0"/>
+          </a:p>
+        </p:txBody>
+      </p:sp>
+      <p:sp>
+        <p:nvSpPr>
+          <p:cNvPr id="4" name="Shape 2"/>
+          <p:cNvSpPr/>
+          <p:nvPr/>
+        </p:nvSpPr>
+        <p:spPr>
+          <a:xfrm>
+            <a:off x="868680" y="1874520"/>
+            <a:ext cx="4069080" cy="3474720"/>
+          </a:xfrm>
+          <a:prstGeom prst="roundRect">
+            <a:avLst>
+              <a:gd name="adj" fmla="val 2105"/>
+            </a:avLst>
+          </a:prstGeom>
+          <a:solidFill>
+            <a:srgbClr val="F2FBF6"/>
+          </a:solidFill>
+          <a:ln w="12700">
+            <a:solidFill>
+              <a:srgbClr val="9AD7B5"/>
+            </a:solidFill>
+            <a:prstDash val="solid"/>
+          </a:ln>
+          <a:effectLst>
+            <a:outerShdw sx="100000" sy="100000" kx="0" ky="0" algn="bl" rotWithShape="0" blurRad="5.539301206729498e+180" dist="3.692867471152999e+180" dir="7.795922815053669e+211">
+              <a:srgbClr val="000000">
+                <a:alpha val="1.2999999999999997e+219"/>
+              </a:srgbClr>
+            </a:outerShdw>
+          </a:effectLst>
+        </p:spPr>
+        <p:txBody>
+          <a:bodyPr/>
+          <a:p/>
+        </p:txBody>
+      </p:sp>
+      <p:sp>
+        <p:nvSpPr>
+          <p:cNvPr id="5" name="Text 3"/>
+          <p:cNvSpPr/>
+          <p:nvPr/>
+        </p:nvSpPr>
+        <p:spPr>
+          <a:xfrm>
+            <a:off x="1188720" y="2194560"/>
+            <a:ext cx="3429000" cy="228600"/>
+          </a:xfrm>
+          <a:prstGeom prst="rect">
+            <a:avLst/>
+          </a:prstGeom>
+          <a:noFill/>
+          <a:ln/>
+        </p:spPr>
+        <p:txBody>
+          <a:bodyPr wrap="square" lIns="0" tIns="0" rIns="0" bIns="0" rtlCol="0" anchor="ctr"/>
+          <a:lstStyle/>
+          <a:p>
+            <a:pPr algn="ctr" indent="0" marL="0">
+              <a:buNone/>
+            </a:pPr>
+            <a:r>
+              <a:rPr lang="en-US" sz="1400" b="1" dirty="0">
+                <a:solidFill>
+                  <a:srgbClr val="2FA36B"/>
+                </a:solidFill>
+              </a:rPr>
+              <a:t>CLEAN BUCKET</a:t>
+            </a:r>
+            <a:endParaRPr lang="en-US" sz="1400" dirty="0"/>
+          </a:p>
+        </p:txBody>
+      </p:sp>
+      <p:sp>
+        <p:nvSpPr>
+          <p:cNvPr id="6" name="Text 4"/>
+          <p:cNvSpPr/>
+          <p:nvPr/>
+        </p:nvSpPr>
+        <p:spPr>
+          <a:xfrm>
+            <a:off x="1188720" y="2788920"/>
+            <a:ext cx="3429000" cy="594360"/>
+          </a:xfrm>
+          <a:prstGeom prst="rect">
+            <a:avLst/>
+          </a:prstGeom>
+          <a:noFill/>
+          <a:ln/>
+        </p:spPr>
+        <p:txBody>
+          <a:bodyPr wrap="square" lIns="0" tIns="0" rIns="0" bIns="0" rtlCol="0" anchor="ctr"/>
+          <a:lstStyle/>
+          <a:p>
+            <a:pPr algn="ctr" indent="0" marL="0">
+              <a:buNone/>
+            </a:pPr>
+            <a:r>
+              <a:rPr lang="en-US" sz="4000" b="1" dirty="0">
+                <a:solidFill>
+                  <a:srgbClr val="2FA36B"/>
+                </a:solidFill>
+              </a:rPr>
+              <a:t>5–10%</a:t>
+            </a:r>
+            <a:endParaRPr lang="en-US" sz="4000" dirty="0"/>
+          </a:p>
+        </p:txBody>
+      </p:sp>
+      <p:sp>
+        <p:nvSpPr>
+          <p:cNvPr id="7" name="Text 5"/>
+          <p:cNvSpPr/>
+          <p:nvPr/>
+        </p:nvSpPr>
+        <p:spPr>
+          <a:xfrm>
+            <a:off x="1188720" y="3584448"/>
+            <a:ext cx="3429000" cy="256032"/>
+          </a:xfrm>
+          <a:prstGeom prst="rect">
+            <a:avLst/>
+          </a:prstGeom>
+          <a:noFill/>
+          <a:ln/>
+        </p:spPr>
+        <p:txBody>
+          <a:bodyPr wrap="square" lIns="0" tIns="0" rIns="0" bIns="0" rtlCol="0" anchor="ctr"/>
+          <a:lstStyle/>
+          <a:p>
+            <a:pPr algn="ctr" indent="0" marL="0">
+              <a:buNone/>
+            </a:pPr>
+            <a:r>
+              <a:rPr lang="en-US" sz="1300" b="1" dirty="0">
+                <a:solidFill>
+                  <a:srgbClr val="172033"/>
+                </a:solidFill>
+              </a:rPr>
+              <a:t>random audit starting point</a:t>
+            </a:r>
+            <a:endParaRPr lang="en-US" sz="1300" dirty="0"/>
+          </a:p>
+        </p:txBody>
+      </p:sp>
+      <p:sp>
+        <p:nvSpPr>
+          <p:cNvPr id="8" name="Shape 6"/>
+          <p:cNvSpPr/>
+          <p:nvPr/>
+        </p:nvSpPr>
+        <p:spPr>
+          <a:xfrm>
+            <a:off x="1417320" y="4096512"/>
+            <a:ext cx="128016" cy="128016"/>
+          </a:xfrm>
+          <a:prstGeom prst="ellipse">
+            <a:avLst/>
+          </a:prstGeom>
+          <a:solidFill>
+            <a:srgbClr val="A7D8BE"/>
+          </a:solidFill>
+          <a:ln w="12700">
+            <a:solidFill>
+              <a:srgbClr val="A7D8BE"/>
+            </a:solidFill>
+            <a:prstDash val="solid"/>
+          </a:ln>
+        </p:spPr>
+        <p:txBody>
+          <a:bodyPr/>
+          <a:p/>
+        </p:txBody>
+      </p:sp>
+      <p:sp>
+        <p:nvSpPr>
+          <p:cNvPr id="9" name="Shape 7"/>
+          <p:cNvSpPr/>
+          <p:nvPr/>
+        </p:nvSpPr>
+        <p:spPr>
+          <a:xfrm>
+            <a:off x="1856232" y="4096512"/>
+            <a:ext cx="128016" cy="128016"/>
+          </a:xfrm>
+          <a:prstGeom prst="ellipse">
+            <a:avLst/>
+          </a:prstGeom>
+          <a:solidFill>
+            <a:srgbClr val="A7D8BE"/>
+          </a:solidFill>
+          <a:ln w="12700">
+            <a:solidFill>
+              <a:srgbClr val="A7D8BE"/>
+            </a:solidFill>
+            <a:prstDash val="solid"/>
+          </a:ln>
+        </p:spPr>
+        <p:txBody>
+          <a:bodyPr/>
+          <a:p/>
+        </p:txBody>
+      </p:sp>
+      <p:sp>
+        <p:nvSpPr>
+          <p:cNvPr id="10" name="Shape 8"/>
+          <p:cNvSpPr/>
+          <p:nvPr/>
+        </p:nvSpPr>
+        <p:spPr>
+          <a:xfrm>
+            <a:off x="2295144" y="4096512"/>
+            <a:ext cx="128016" cy="128016"/>
+          </a:xfrm>
+          <a:prstGeom prst="ellipse">
+            <a:avLst/>
+          </a:prstGeom>
+          <a:solidFill>
+            <a:srgbClr val="F59E0B"/>
+          </a:solidFill>
+          <a:ln w="12700">
+            <a:solidFill>
+              <a:srgbClr val="F59E0B"/>
+            </a:solidFill>
+            <a:prstDash val="solid"/>
+          </a:ln>
+        </p:spPr>
+        <p:txBody>
+          <a:bodyPr/>
+          <a:p/>
+        </p:txBody>
+      </p:sp>
+      <p:sp>
+        <p:nvSpPr>
+          <p:cNvPr id="11" name="Shape 9"/>
+          <p:cNvSpPr/>
+          <p:nvPr/>
+        </p:nvSpPr>
+        <p:spPr>
+          <a:xfrm>
+            <a:off x="2734056" y="4096512"/>
+            <a:ext cx="128016" cy="128016"/>
+          </a:xfrm>
+          <a:prstGeom prst="ellipse">
+            <a:avLst/>
+          </a:prstGeom>
+          <a:solidFill>
+            <a:srgbClr val="A7D8BE"/>
+          </a:solidFill>
+          <a:ln w="12700">
+            <a:solidFill>
+              <a:srgbClr val="A7D8BE"/>
+            </a:solidFill>
+            <a:prstDash val="solid"/>
+          </a:ln>
+        </p:spPr>
+        <p:txBody>
+          <a:bodyPr/>
+          <a:p/>
+        </p:txBody>
+      </p:sp>
+      <p:sp>
+        <p:nvSpPr>
+          <p:cNvPr id="12" name="Shape 10"/>
+          <p:cNvSpPr/>
+          <p:nvPr/>
+        </p:nvSpPr>
+        <p:spPr>
+          <a:xfrm>
+            <a:off x="3172968" y="4096512"/>
+            <a:ext cx="128016" cy="128016"/>
+          </a:xfrm>
+          <a:prstGeom prst="ellipse">
+            <a:avLst/>
+          </a:prstGeom>
+          <a:solidFill>
+            <a:srgbClr val="A7D8BE"/>
+          </a:solidFill>
+          <a:ln w="12700">
+            <a:solidFill>
+              <a:srgbClr val="A7D8BE"/>
+            </a:solidFill>
+            <a:prstDash val="solid"/>
+          </a:ln>
+        </p:spPr>
+        <p:txBody>
+          <a:bodyPr/>
+          <a:p/>
+        </p:txBody>
+      </p:sp>
+      <p:sp>
+        <p:nvSpPr>
+          <p:cNvPr id="13" name="Shape 11"/>
+          <p:cNvSpPr/>
+          <p:nvPr/>
+        </p:nvSpPr>
+        <p:spPr>
+          <a:xfrm>
+            <a:off x="3611880" y="4096512"/>
+            <a:ext cx="128016" cy="128016"/>
+          </a:xfrm>
+          <a:prstGeom prst="ellipse">
+            <a:avLst/>
+          </a:prstGeom>
+          <a:solidFill>
+            <a:srgbClr val="A7D8BE"/>
+          </a:solidFill>
+          <a:ln w="12700">
+            <a:solidFill>
+              <a:srgbClr val="A7D8BE"/>
+            </a:solidFill>
+            <a:prstDash val="solid"/>
+          </a:ln>
+        </p:spPr>
+        <p:txBody>
+          <a:bodyPr/>
+          <a:p/>
+        </p:txBody>
+      </p:sp>
+      <p:sp>
+        <p:nvSpPr>
+          <p:cNvPr id="14" name="Shape 12"/>
+          <p:cNvSpPr/>
+          <p:nvPr/>
+        </p:nvSpPr>
+        <p:spPr>
+          <a:xfrm>
+            <a:off x="4050792" y="4096512"/>
+            <a:ext cx="128016" cy="128016"/>
+          </a:xfrm>
+          <a:prstGeom prst="ellipse">
+            <a:avLst/>
+          </a:prstGeom>
+          <a:solidFill>
+            <a:srgbClr val="A7D8BE"/>
+          </a:solidFill>
+          <a:ln w="12700">
+            <a:solidFill>
+              <a:srgbClr val="A7D8BE"/>
+            </a:solidFill>
+            <a:prstDash val="solid"/>
+          </a:ln>
+        </p:spPr>
+        <p:txBody>
+          <a:bodyPr/>
+          <a:p/>
+        </p:txBody>
+      </p:sp>
+      <p:sp>
+        <p:nvSpPr>
+          <p:cNvPr id="15" name="Shape 13"/>
+          <p:cNvSpPr/>
+          <p:nvPr/>
+        </p:nvSpPr>
+        <p:spPr>
+          <a:xfrm>
+            <a:off x="1417320" y="4352544"/>
+            <a:ext cx="128016" cy="128016"/>
+          </a:xfrm>
+          <a:prstGeom prst="ellipse">
+            <a:avLst/>
+          </a:prstGeom>
+          <a:solidFill>
+            <a:srgbClr val="A7D8BE"/>
+          </a:solidFill>
+          <a:ln w="12700">
+            <a:solidFill>
+              <a:srgbClr val="A7D8BE"/>
+            </a:solidFill>
+            <a:prstDash val="solid"/>
+          </a:ln>
+        </p:spPr>
+        <p:txBody>
+          <a:bodyPr/>
+          <a:p/>
+        </p:txBody>
+      </p:sp>
+      <p:sp>
+        <p:nvSpPr>
+          <p:cNvPr id="16" name="Shape 14"/>
+          <p:cNvSpPr/>
+          <p:nvPr/>
+        </p:nvSpPr>
+        <p:spPr>
+          <a:xfrm>
+            <a:off x="1856232" y="4352544"/>
+            <a:ext cx="128016" cy="128016"/>
+          </a:xfrm>
+          <a:prstGeom prst="ellipse">
+            <a:avLst/>
+          </a:prstGeom>
+          <a:solidFill>
+            <a:srgbClr val="A7D8BE"/>
+          </a:solidFill>
+          <a:ln w="12700">
+            <a:solidFill>
+              <a:srgbClr val="A7D8BE"/>
+            </a:solidFill>
+            <a:prstDash val="solid"/>
+          </a:ln>
+        </p:spPr>
+        <p:txBody>
+          <a:bodyPr/>
+          <a:p/>
+        </p:txBody>
+      </p:sp>
+      <p:sp>
+        <p:nvSpPr>
+          <p:cNvPr id="17" name="Shape 15"/>
+          <p:cNvSpPr/>
+          <p:nvPr/>
+        </p:nvSpPr>
+        <p:spPr>
+          <a:xfrm>
+            <a:off x="2295144" y="4352544"/>
+            <a:ext cx="128016" cy="128016"/>
+          </a:xfrm>
+          <a:prstGeom prst="ellipse">
+            <a:avLst/>
+          </a:prstGeom>
+          <a:solidFill>
+            <a:srgbClr val="F59E0B"/>
+          </a:solidFill>
+          <a:ln w="12700">
+            <a:solidFill>
+              <a:srgbClr val="F59E0B"/>
+            </a:solidFill>
+            <a:prstDash val="solid"/>
+          </a:ln>
+        </p:spPr>
+        <p:txBody>
+          <a:bodyPr/>
+          <a:p/>
+        </p:txBody>
+      </p:sp>
+      <p:sp>
+        <p:nvSpPr>
+          <p:cNvPr id="18" name="Shape 16"/>
+          <p:cNvSpPr/>
+          <p:nvPr/>
+        </p:nvSpPr>
+        <p:spPr>
+          <a:xfrm>
+            <a:off x="2734056" y="4352544"/>
+            <a:ext cx="128016" cy="128016"/>
+          </a:xfrm>
+          <a:prstGeom prst="ellipse">
+            <a:avLst/>
+          </a:prstGeom>
+          <a:solidFill>
+            <a:srgbClr val="A7D8BE"/>
+          </a:solidFill>
+          <a:ln w="12700">
+            <a:solidFill>
+              <a:srgbClr val="A7D8BE"/>
+            </a:solidFill>
+            <a:prstDash val="solid"/>
+          </a:ln>
+        </p:spPr>
+        <p:txBody>
+          <a:bodyPr/>
+          <a:p/>
+        </p:txBody>
+      </p:sp>
+      <p:sp>
+        <p:nvSpPr>
+          <p:cNvPr id="19" name="Shape 17"/>
+          <p:cNvSpPr/>
+          <p:nvPr/>
+        </p:nvSpPr>
+        <p:spPr>
+          <a:xfrm>
+            <a:off x="3172968" y="4352544"/>
+            <a:ext cx="128016" cy="128016"/>
+          </a:xfrm>
+          <a:prstGeom prst="ellipse">
+            <a:avLst/>
+          </a:prstGeom>
+          <a:solidFill>
+            <a:srgbClr val="A7D8BE"/>
+          </a:solidFill>
+          <a:ln w="12700">
+            <a:solidFill>
+              <a:srgbClr val="A7D8BE"/>
+            </a:solidFill>
+            <a:prstDash val="solid"/>
+          </a:ln>
+        </p:spPr>
+        <p:txBody>
+          <a:bodyPr/>
+          <a:p/>
+        </p:txBody>
+      </p:sp>
+      <p:sp>
+        <p:nvSpPr>
+          <p:cNvPr id="20" name="Shape 18"/>
+          <p:cNvSpPr/>
+          <p:nvPr/>
+        </p:nvSpPr>
+        <p:spPr>
+          <a:xfrm>
+            <a:off x="3611880" y="4352544"/>
+            <a:ext cx="128016" cy="128016"/>
+          </a:xfrm>
+          <a:prstGeom prst="ellipse">
+            <a:avLst/>
+          </a:prstGeom>
+          <a:solidFill>
+            <a:srgbClr val="A7D8BE"/>
+          </a:solidFill>
+          <a:ln w="12700">
+            <a:solidFill>
+              <a:srgbClr val="A7D8BE"/>
+            </a:solidFill>
+            <a:prstDash val="solid"/>
+          </a:ln>
+        </p:spPr>
+        <p:txBody>
+          <a:bodyPr/>
+          <a:p/>
+        </p:txBody>
+      </p:sp>
+      <p:sp>
+        <p:nvSpPr>
+          <p:cNvPr id="21" name="Shape 19"/>
+          <p:cNvSpPr/>
+          <p:nvPr/>
+        </p:nvSpPr>
+        <p:spPr>
+          <a:xfrm>
+            <a:off x="4050792" y="4352544"/>
+            <a:ext cx="128016" cy="128016"/>
+          </a:xfrm>
+          <a:prstGeom prst="ellipse">
+            <a:avLst/>
+          </a:prstGeom>
+          <a:solidFill>
+            <a:srgbClr val="A7D8BE"/>
+          </a:solidFill>
+          <a:ln w="12700">
+            <a:solidFill>
+              <a:srgbClr val="A7D8BE"/>
+            </a:solidFill>
+            <a:prstDash val="solid"/>
+          </a:ln>
+        </p:spPr>
+        <p:txBody>
+          <a:bodyPr/>
+          <a:p/>
+        </p:txBody>
+      </p:sp>
+      <p:sp>
+        <p:nvSpPr>
+          <p:cNvPr id="22" name="Shape 20"/>
+          <p:cNvSpPr/>
+          <p:nvPr/>
+        </p:nvSpPr>
+        <p:spPr>
+          <a:xfrm>
+            <a:off x="1417320" y="4608576"/>
+            <a:ext cx="128016" cy="128016"/>
+          </a:xfrm>
+          <a:prstGeom prst="ellipse">
+            <a:avLst/>
+          </a:prstGeom>
+          <a:solidFill>
+            <a:srgbClr val="A7D8BE"/>
+          </a:solidFill>
+          <a:ln w="12700">
+            <a:solidFill>
+              <a:srgbClr val="A7D8BE"/>
+            </a:solidFill>
+            <a:prstDash val="solid"/>
+          </a:ln>
+        </p:spPr>
+        <p:txBody>
+          <a:bodyPr/>
+          <a:p/>
+        </p:txBody>
+      </p:sp>
+      <p:sp>
+        <p:nvSpPr>
+          <p:cNvPr id="23" name="Shape 21"/>
+          <p:cNvSpPr/>
+          <p:nvPr/>
+        </p:nvSpPr>
+        <p:spPr>
+          <a:xfrm>
+            <a:off x="1856232" y="4608576"/>
+            <a:ext cx="128016" cy="128016"/>
+          </a:xfrm>
+          <a:prstGeom prst="ellipse">
+            <a:avLst/>
+          </a:prstGeom>
+          <a:solidFill>
+            <a:srgbClr val="A7D8BE"/>
+          </a:solidFill>
+          <a:ln w="12700">
+            <a:solidFill>
+              <a:srgbClr val="A7D8BE"/>
+            </a:solidFill>
+            <a:prstDash val="solid"/>
+          </a:ln>
+        </p:spPr>
+        <p:txBody>
+          <a:bodyPr/>
+          <a:p/>
+        </p:txBody>
+      </p:sp>
+      <p:sp>
+        <p:nvSpPr>
+          <p:cNvPr id="24" name="Shape 22"/>
+          <p:cNvSpPr/>
+          <p:nvPr/>
+        </p:nvSpPr>
+        <p:spPr>
+          <a:xfrm>
+            <a:off x="2295144" y="4608576"/>
+            <a:ext cx="128016" cy="128016"/>
+          </a:xfrm>
+          <a:prstGeom prst="ellipse">
+            <a:avLst/>
+          </a:prstGeom>
+          <a:solidFill>
+            <a:srgbClr val="A7D8BE"/>
+          </a:solidFill>
+          <a:ln w="12700">
+            <a:solidFill>
+              <a:srgbClr val="A7D8BE"/>
+            </a:solidFill>
+            <a:prstDash val="solid"/>
+          </a:ln>
+        </p:spPr>
+        <p:txBody>
+          <a:bodyPr/>
+          <a:p/>
+        </p:txBody>
+      </p:sp>
+      <p:sp>
+        <p:nvSpPr>
+          <p:cNvPr id="25" name="Shape 23"/>
+          <p:cNvSpPr/>
+          <p:nvPr/>
+        </p:nvSpPr>
+        <p:spPr>
+          <a:xfrm>
+            <a:off x="2734056" y="4608576"/>
+            <a:ext cx="128016" cy="128016"/>
+          </a:xfrm>
+          <a:prstGeom prst="ellipse">
+            <a:avLst/>
+          </a:prstGeom>
+          <a:solidFill>
+            <a:srgbClr val="A7D8BE"/>
+          </a:solidFill>
+          <a:ln w="12700">
+            <a:solidFill>
+              <a:srgbClr val="A7D8BE"/>
+            </a:solidFill>
+            <a:prstDash val="solid"/>
+          </a:ln>
+        </p:spPr>
+        <p:txBody>
+          <a:bodyPr/>
+          <a:p/>
+        </p:txBody>
+      </p:sp>
+      <p:sp>
+        <p:nvSpPr>
+          <p:cNvPr id="26" name="Shape 24"/>
+          <p:cNvSpPr/>
+          <p:nvPr/>
+        </p:nvSpPr>
+        <p:spPr>
+          <a:xfrm>
+            <a:off x="3172968" y="4608576"/>
+            <a:ext cx="128016" cy="128016"/>
+          </a:xfrm>
+          <a:prstGeom prst="ellipse">
+            <a:avLst/>
+          </a:prstGeom>
+          <a:solidFill>
+            <a:srgbClr val="F59E0B"/>
+          </a:solidFill>
+          <a:ln w="12700">
+            <a:solidFill>
+              <a:srgbClr val="F59E0B"/>
+            </a:solidFill>
+            <a:prstDash val="solid"/>
+          </a:ln>
+        </p:spPr>
+        <p:txBody>
+          <a:bodyPr/>
+          <a:p/>
+        </p:txBody>
+      </p:sp>
+      <p:sp>
+        <p:nvSpPr>
+          <p:cNvPr id="27" name="Shape 25"/>
+          <p:cNvSpPr/>
+          <p:nvPr/>
+        </p:nvSpPr>
+        <p:spPr>
+          <a:xfrm>
+            <a:off x="3611880" y="4608576"/>
+            <a:ext cx="128016" cy="128016"/>
+          </a:xfrm>
+          <a:prstGeom prst="ellipse">
+            <a:avLst/>
+          </a:prstGeom>
+          <a:solidFill>
+            <a:srgbClr val="A7D8BE"/>
+          </a:solidFill>
+          <a:ln w="12700">
+            <a:solidFill>
+              <a:srgbClr val="A7D8BE"/>
+            </a:solidFill>
+            <a:prstDash val="solid"/>
+          </a:ln>
+        </p:spPr>
+        <p:txBody>
+          <a:bodyPr/>
+          <a:p/>
+        </p:txBody>
+      </p:sp>
+      <p:sp>
+        <p:nvSpPr>
+          <p:cNvPr id="28" name="Shape 26"/>
+          <p:cNvSpPr/>
+          <p:nvPr/>
+        </p:nvSpPr>
+        <p:spPr>
+          <a:xfrm>
+            <a:off x="4050792" y="4608576"/>
+            <a:ext cx="128016" cy="128016"/>
+          </a:xfrm>
+          <a:prstGeom prst="ellipse">
+            <a:avLst/>
+          </a:prstGeom>
+          <a:solidFill>
+            <a:srgbClr val="A7D8BE"/>
+          </a:solidFill>
+          <a:ln w="12700">
+            <a:solidFill>
+              <a:srgbClr val="A7D8BE"/>
+            </a:solidFill>
+            <a:prstDash val="solid"/>
+          </a:ln>
+        </p:spPr>
+        <p:txBody>
+          <a:bodyPr/>
+          <a:p/>
+        </p:txBody>
+      </p:sp>
+      <p:sp>
+        <p:nvSpPr>
+          <p:cNvPr id="29" name="Shape 27"/>
+          <p:cNvSpPr/>
+          <p:nvPr/>
+        </p:nvSpPr>
+        <p:spPr>
+          <a:xfrm>
+            <a:off x="1417320" y="4864608"/>
+            <a:ext cx="128016" cy="128016"/>
+          </a:xfrm>
+          <a:prstGeom prst="ellipse">
+            <a:avLst/>
+          </a:prstGeom>
+          <a:solidFill>
+            <a:srgbClr val="A7D8BE"/>
+          </a:solidFill>
+          <a:ln w="12700">
+            <a:solidFill>
+              <a:srgbClr val="A7D8BE"/>
+            </a:solidFill>
+            <a:prstDash val="solid"/>
+          </a:ln>
+        </p:spPr>
+        <p:txBody>
+          <a:bodyPr/>
+          <a:p/>
+        </p:txBody>
+      </p:sp>
+      <p:sp>
+        <p:nvSpPr>
+          <p:cNvPr id="30" name="Shape 28"/>
+          <p:cNvSpPr/>
+          <p:nvPr/>
+        </p:nvSpPr>
+        <p:spPr>
+          <a:xfrm>
+            <a:off x="1856232" y="4864608"/>
+            <a:ext cx="128016" cy="128016"/>
+          </a:xfrm>
+          <a:prstGeom prst="ellipse">
+            <a:avLst/>
+          </a:prstGeom>
+          <a:solidFill>
+            <a:srgbClr val="A7D8BE"/>
+          </a:solidFill>
+          <a:ln w="12700">
+            <a:solidFill>
+              <a:srgbClr val="A7D8BE"/>
+            </a:solidFill>
+            <a:prstDash val="solid"/>
+          </a:ln>
+        </p:spPr>
+        <p:txBody>
+          <a:bodyPr/>
+          <a:p/>
+        </p:txBody>
+      </p:sp>
+      <p:sp>
+        <p:nvSpPr>
+          <p:cNvPr id="31" name="Shape 29"/>
+          <p:cNvSpPr/>
+          <p:nvPr/>
+        </p:nvSpPr>
+        <p:spPr>
+          <a:xfrm>
+            <a:off x="2295144" y="4864608"/>
+            <a:ext cx="128016" cy="128016"/>
+          </a:xfrm>
+          <a:prstGeom prst="ellipse">
+            <a:avLst/>
+          </a:prstGeom>
+          <a:solidFill>
+            <a:srgbClr val="A7D8BE"/>
+          </a:solidFill>
+          <a:ln w="12700">
+            <a:solidFill>
+              <a:srgbClr val="A7D8BE"/>
+            </a:solidFill>
+            <a:prstDash val="solid"/>
+          </a:ln>
+        </p:spPr>
+        <p:txBody>
+          <a:bodyPr/>
+          <a:p/>
+        </p:txBody>
+      </p:sp>
+      <p:sp>
+        <p:nvSpPr>
+          <p:cNvPr id="32" name="Shape 30"/>
+          <p:cNvSpPr/>
+          <p:nvPr/>
+        </p:nvSpPr>
+        <p:spPr>
+          <a:xfrm>
+            <a:off x="2734056" y="4864608"/>
+            <a:ext cx="128016" cy="128016"/>
+          </a:xfrm>
+          <a:prstGeom prst="ellipse">
+            <a:avLst/>
+          </a:prstGeom>
+          <a:solidFill>
+            <a:srgbClr val="A7D8BE"/>
+          </a:solidFill>
+          <a:ln w="12700">
+            <a:solidFill>
+              <a:srgbClr val="A7D8BE"/>
+            </a:solidFill>
+            <a:prstDash val="solid"/>
+          </a:ln>
+        </p:spPr>
+        <p:txBody>
+          <a:bodyPr/>
+          <a:p/>
+        </p:txBody>
+      </p:sp>
+      <p:sp>
+        <p:nvSpPr>
+          <p:cNvPr id="33" name="Shape 31"/>
+          <p:cNvSpPr/>
+          <p:nvPr/>
+        </p:nvSpPr>
+        <p:spPr>
+          <a:xfrm>
+            <a:off x="3172968" y="4864608"/>
+            <a:ext cx="128016" cy="128016"/>
+          </a:xfrm>
+          <a:prstGeom prst="ellipse">
+            <a:avLst/>
+          </a:prstGeom>
+          <a:solidFill>
+            <a:srgbClr val="A7D8BE"/>
+          </a:solidFill>
+          <a:ln w="12700">
+            <a:solidFill>
+              <a:srgbClr val="A7D8BE"/>
+            </a:solidFill>
+            <a:prstDash val="solid"/>
+          </a:ln>
+        </p:spPr>
+        <p:txBody>
+          <a:bodyPr/>
+          <a:p/>
+        </p:txBody>
+      </p:sp>
+      <p:sp>
+        <p:nvSpPr>
+          <p:cNvPr id="34" name="Shape 32"/>
+          <p:cNvSpPr/>
+          <p:nvPr/>
+        </p:nvSpPr>
+        <p:spPr>
+          <a:xfrm>
+            <a:off x="3611880" y="4864608"/>
+            <a:ext cx="128016" cy="128016"/>
+          </a:xfrm>
+          <a:prstGeom prst="ellipse">
+            <a:avLst/>
+          </a:prstGeom>
+          <a:solidFill>
+            <a:srgbClr val="A7D8BE"/>
+          </a:solidFill>
+          <a:ln w="12700">
+            <a:solidFill>
+              <a:srgbClr val="A7D8BE"/>
+            </a:solidFill>
+            <a:prstDash val="solid"/>
+          </a:ln>
+        </p:spPr>
+        <p:txBody>
+          <a:bodyPr/>
+          <a:p/>
+        </p:txBody>
+      </p:sp>
+      <p:sp>
+        <p:nvSpPr>
+          <p:cNvPr id="35" name="Shape 33"/>
+          <p:cNvSpPr/>
+          <p:nvPr/>
+        </p:nvSpPr>
+        <p:spPr>
+          <a:xfrm>
+            <a:off x="4050792" y="4864608"/>
+            <a:ext cx="128016" cy="128016"/>
+          </a:xfrm>
+          <a:prstGeom prst="ellipse">
+            <a:avLst/>
+          </a:prstGeom>
+          <a:solidFill>
+            <a:srgbClr val="A7D8BE"/>
+          </a:solidFill>
+          <a:ln w="12700">
+            <a:solidFill>
+              <a:srgbClr val="A7D8BE"/>
+            </a:solidFill>
+            <a:prstDash val="solid"/>
+          </a:ln>
+        </p:spPr>
+        <p:txBody>
+          <a:bodyPr/>
+          <a:p/>
+        </p:txBody>
+      </p:sp>
+      <p:sp>
+        <p:nvSpPr>
+          <p:cNvPr id="36" name="Shape 34"/>
+          <p:cNvSpPr/>
+          <p:nvPr/>
+        </p:nvSpPr>
+        <p:spPr>
+          <a:xfrm>
+            <a:off x="1417320" y="5120640"/>
+            <a:ext cx="128016" cy="128016"/>
+          </a:xfrm>
+          <a:prstGeom prst="ellipse">
+            <a:avLst/>
+          </a:prstGeom>
+          <a:solidFill>
+            <a:srgbClr val="A7D8BE"/>
+          </a:solidFill>
+          <a:ln w="12700">
+            <a:solidFill>
+              <a:srgbClr val="A7D8BE"/>
+            </a:solidFill>
+            <a:prstDash val="solid"/>
+          </a:ln>
+        </p:spPr>
+        <p:txBody>
+          <a:bodyPr/>
+          <a:p/>
+        </p:txBody>
+      </p:sp>
+      <p:sp>
+        <p:nvSpPr>
+          <p:cNvPr id="37" name="Shape 35"/>
+          <p:cNvSpPr/>
+          <p:nvPr/>
+        </p:nvSpPr>
+        <p:spPr>
+          <a:xfrm>
+            <a:off x="1856232" y="5120640"/>
+            <a:ext cx="128016" cy="128016"/>
+          </a:xfrm>
+          <a:prstGeom prst="ellipse">
+            <a:avLst/>
+          </a:prstGeom>
+          <a:solidFill>
+            <a:srgbClr val="A7D8BE"/>
+          </a:solidFill>
+          <a:ln w="12700">
+            <a:solidFill>
+              <a:srgbClr val="A7D8BE"/>
+            </a:solidFill>
+            <a:prstDash val="solid"/>
+          </a:ln>
+        </p:spPr>
+        <p:txBody>
+          <a:bodyPr/>
+          <a:p/>
+        </p:txBody>
+      </p:sp>
+      <p:sp>
+        <p:nvSpPr>
+          <p:cNvPr id="38" name="Shape 36"/>
+          <p:cNvSpPr/>
+          <p:nvPr/>
+        </p:nvSpPr>
+        <p:spPr>
+          <a:xfrm>
+            <a:off x="2295144" y="5120640"/>
+            <a:ext cx="128016" cy="128016"/>
+          </a:xfrm>
+          <a:prstGeom prst="ellipse">
+            <a:avLst/>
+          </a:prstGeom>
+          <a:solidFill>
+            <a:srgbClr val="A7D8BE"/>
+          </a:solidFill>
+          <a:ln w="12700">
+            <a:solidFill>
+              <a:srgbClr val="A7D8BE"/>
+            </a:solidFill>
+            <a:prstDash val="solid"/>
+          </a:ln>
+        </p:spPr>
+        <p:txBody>
+          <a:bodyPr/>
+          <a:p/>
+        </p:txBody>
+      </p:sp>
+      <p:sp>
+        <p:nvSpPr>
+          <p:cNvPr id="39" name="Shape 37"/>
+          <p:cNvSpPr/>
+          <p:nvPr/>
+        </p:nvSpPr>
+        <p:spPr>
+          <a:xfrm>
+            <a:off x="2734056" y="5120640"/>
+            <a:ext cx="128016" cy="128016"/>
+          </a:xfrm>
+          <a:prstGeom prst="ellipse">
+            <a:avLst/>
+          </a:prstGeom>
+          <a:solidFill>
+            <a:srgbClr val="A7D8BE"/>
+          </a:solidFill>
+          <a:ln w="12700">
+            <a:solidFill>
+              <a:srgbClr val="A7D8BE"/>
+            </a:solidFill>
+            <a:prstDash val="solid"/>
+          </a:ln>
+        </p:spPr>
+        <p:txBody>
+          <a:bodyPr/>
+          <a:p/>
+        </p:txBody>
+      </p:sp>
+      <p:sp>
+        <p:nvSpPr>
+          <p:cNvPr id="40" name="Shape 38"/>
+          <p:cNvSpPr/>
+          <p:nvPr/>
+        </p:nvSpPr>
+        <p:spPr>
+          <a:xfrm>
+            <a:off x="3172968" y="5120640"/>
+            <a:ext cx="128016" cy="128016"/>
+          </a:xfrm>
+          <a:prstGeom prst="ellipse">
+            <a:avLst/>
+          </a:prstGeom>
+          <a:solidFill>
+            <a:srgbClr val="A7D8BE"/>
+          </a:solidFill>
+          <a:ln w="12700">
+            <a:solidFill>
+              <a:srgbClr val="A7D8BE"/>
+            </a:solidFill>
+            <a:prstDash val="solid"/>
+          </a:ln>
+        </p:spPr>
+        <p:txBody>
+          <a:bodyPr/>
+          <a:p/>
+        </p:txBody>
+      </p:sp>
+      <p:sp>
+        <p:nvSpPr>
+          <p:cNvPr id="41" name="Shape 39"/>
+          <p:cNvSpPr/>
+          <p:nvPr/>
+        </p:nvSpPr>
+        <p:spPr>
+          <a:xfrm>
+            <a:off x="3611880" y="5120640"/>
+            <a:ext cx="128016" cy="128016"/>
+          </a:xfrm>
+          <a:prstGeom prst="ellipse">
+            <a:avLst/>
+          </a:prstGeom>
+          <a:solidFill>
+            <a:srgbClr val="A7D8BE"/>
+          </a:solidFill>
+          <a:ln w="12700">
+            <a:solidFill>
+              <a:srgbClr val="A7D8BE"/>
+            </a:solidFill>
+            <a:prstDash val="solid"/>
+          </a:ln>
+        </p:spPr>
+        <p:txBody>
+          <a:bodyPr/>
+          <a:p/>
+        </p:txBody>
+      </p:sp>
+      <p:sp>
+        <p:nvSpPr>
+          <p:cNvPr id="42" name="Shape 40"/>
+          <p:cNvSpPr/>
+          <p:nvPr/>
+        </p:nvSpPr>
+        <p:spPr>
+          <a:xfrm>
+            <a:off x="4050792" y="5120640"/>
+            <a:ext cx="128016" cy="128016"/>
+          </a:xfrm>
+          <a:prstGeom prst="ellipse">
+            <a:avLst/>
+          </a:prstGeom>
+          <a:solidFill>
+            <a:srgbClr val="A7D8BE"/>
+          </a:solidFill>
+          <a:ln w="12700">
+            <a:solidFill>
+              <a:srgbClr val="A7D8BE"/>
+            </a:solidFill>
+            <a:prstDash val="solid"/>
+          </a:ln>
+        </p:spPr>
+        <p:txBody>
+          <a:bodyPr/>
+          <a:p/>
+        </p:txBody>
+      </p:sp>
+      <p:sp>
+        <p:nvSpPr>
+          <p:cNvPr id="43" name="Shape 41"/>
+          <p:cNvSpPr/>
+          <p:nvPr/>
+        </p:nvSpPr>
+        <p:spPr>
+          <a:xfrm>
+            <a:off x="5532120" y="1874520"/>
+            <a:ext cx="5623560" cy="3474720"/>
+          </a:xfrm>
+          <a:prstGeom prst="roundRect">
+            <a:avLst>
+              <a:gd name="adj" fmla="val 2105"/>
+            </a:avLst>
+          </a:prstGeom>
+          <a:solidFill>
+            <a:srgbClr val="FFFFFF"/>
+          </a:solidFill>
+          <a:ln w="12700">
+            <a:solidFill>
+              <a:srgbClr val="D8DEE9"/>
+            </a:solidFill>
+            <a:prstDash val="solid"/>
+          </a:ln>
+          <a:effectLst>
+            <a:outerShdw sx="100000" sy="100000" kx="0" ky="0" algn="bl" rotWithShape="0" blurRad="7.034912532546463e+184" dist="4.689941688364309e+184" dir="4.677553689032201e+216">
+              <a:srgbClr val="000000">
+                <a:alpha val="1.2999999999999996e+224"/>
+              </a:srgbClr>
+            </a:outerShdw>
+          </a:effectLst>
+        </p:spPr>
+        <p:txBody>
+          <a:bodyPr/>
+          <a:p/>
+        </p:txBody>
+      </p:sp>
+      <p:sp>
+        <p:nvSpPr>
+          <p:cNvPr id="44" name="Text 42"/>
+          <p:cNvSpPr/>
+          <p:nvPr/>
+        </p:nvSpPr>
+        <p:spPr>
+          <a:xfrm>
+            <a:off x="5897880" y="2267712"/>
+            <a:ext cx="4892040" cy="228600"/>
+          </a:xfrm>
+          <a:prstGeom prst="rect">
+            <a:avLst/>
+          </a:prstGeom>
+          <a:noFill/>
+          <a:ln/>
+        </p:spPr>
+        <p:txBody>
+          <a:bodyPr wrap="square" lIns="0" tIns="0" rIns="0" bIns="0" rtlCol="0" anchor="ctr"/>
+          <a:lstStyle/>
+          <a:p>
+            <a:pPr indent="0" marL="0">
+              <a:buNone/>
+            </a:pPr>
+            <a:r>
+              <a:rPr lang="en-US" sz="1500" b="1" dirty="0">
+                <a:solidFill>
+                  <a:srgbClr val="172033"/>
+                </a:solidFill>
+              </a:rPr>
+              <a:t>Why audit “clean” documents?</a:t>
+            </a:r>
+            <a:endParaRPr lang="en-US" sz="1500" dirty="0"/>
+          </a:p>
+        </p:txBody>
+      </p:sp>
+      <p:sp>
+        <p:nvSpPr>
+          <p:cNvPr id="45" name="Text 43"/>
+          <p:cNvSpPr/>
+          <p:nvPr/>
+        </p:nvSpPr>
+        <p:spPr>
+          <a:xfrm>
+            <a:off x="5897880" y="2834640"/>
+            <a:ext cx="4754880" cy="777240"/>
+          </a:xfrm>
+          <a:prstGeom prst="rect">
+            <a:avLst/>
+          </a:prstGeom>
+          <a:noFill/>
+          <a:ln/>
+        </p:spPr>
+        <p:txBody>
+          <a:bodyPr wrap="square" lIns="0" tIns="0" rIns="0" bIns="0" rtlCol="0" anchor="ctr">
+            <a:normAutofit/>
+          </a:bodyPr>
+          <a:lstStyle/>
+          <a:p>
+            <a:pPr indent="0" marL="0">
+              <a:buNone/>
+            </a:pPr>
+            <a:r>
+              <a:rPr lang="en-US" sz="1700" b="1" dirty="0">
+                <a:solidFill>
+                  <a:srgbClr val="F59E0B"/>
+                </a:solidFill>
+              </a:rPr>
+              <a:t>A validator that only checks its own doubts can never discover its own blind spots.</a:t>
+            </a:r>
+            <a:endParaRPr lang="en-US" sz="1700" dirty="0"/>
+          </a:p>
+        </p:txBody>
+      </p:sp>
+      <p:sp>
+        <p:nvSpPr>
+          <p:cNvPr id="46" name="Text 44"/>
+          <p:cNvSpPr/>
+          <p:nvPr/>
+        </p:nvSpPr>
+        <p:spPr>
+          <a:xfrm>
+            <a:off x="5897880" y="3977640"/>
+            <a:ext cx="4663440" cy="603504"/>
+          </a:xfrm>
+          <a:prstGeom prst="rect">
+            <a:avLst/>
+          </a:prstGeom>
+          <a:noFill/>
+          <a:ln/>
+        </p:spPr>
+        <p:txBody>
+          <a:bodyPr wrap="square" lIns="0" tIns="0" rIns="0" bIns="0" rtlCol="0" anchor="ctr">
+            <a:normAutofit/>
+          </a:bodyPr>
+          <a:lstStyle/>
+          <a:p>
+            <a:pPr indent="0" marL="0">
+              <a:buNone/>
+            </a:pPr>
+            <a:r>
+              <a:rPr lang="en-US" sz="1250" dirty="0">
+                <a:solidFill>
+                  <a:srgbClr val="687385"/>
+                </a:solidFill>
+              </a:rPr>
+              <a:t>Audit hit rate becomes evidence about whether “zero flags” is actually trustworthy.</a:t>
+            </a:r>
+            <a:endParaRPr lang="en-US" sz="1250" dirty="0"/>
+          </a:p>
+        </p:txBody>
+      </p:sp>
+      <p:sp>
+        <p:nvSpPr>
+          <p:cNvPr id="25" name="Slide Number Placeholder 0"/>
+          <p:cNvSpPr>
+            <a:spLocks noGrp="1"/>
+          </p:cNvSpPr>
+          <p:nvPr>
+            <p:ph type="sldNum" sz="quarter" idx="4294967295"/>
+          </p:nvPr>
+        </p:nvSpPr>
+        <p:spPr>
+          <a:xfrm>
+            <a:off x="11612880" y="6510528"/>
+            <a:ext cx="800000" cy="300000"/>
+          </a:xfrm>
+          <a:prstGeom prst="rect">
+            <a:avLst/>
+          </a:prstGeom>
+          <a:extLst>
+            <a:ext uri="{C572A759-6A51-4108-AA02-DFA0A04FC94B}">
+              <ma14:wrappingTextBoxFlag xmlns:ma14="http://schemas.microsoft.com/office/mac/drawingml/2011/main" val="0"/>
+            </a:ext>
+          </a:extLst>
+        </p:spPr>
+        <p:txBody>
+          <a:bodyPr/>
+          <a:lstStyle>
+            <a:lvl1pPr>
+              <a:defRPr sz="650">
+                <a:solidFill>
+                  <a:srgbClr val="9AA4B2"/>
+                </a:solidFill>
+                <a:latin typeface="Aptos"/>
+                <a:ea typeface="Aptos"/>
+                <a:cs typeface="Aptos"/>
+              </a:defRPr>
+            </a:lvl1pPr>
+          </a:lstStyle>
+          <a:p>
+            <a:pPr algn="l"/>
+            <a:fld id="{F7021451-1387-4CA6-816F-3879F97B5CBC}" type="slidenum">
+              <a:rPr b="0" lang="en-US"/>
+              <a:t>20</a:t>
+            </a:fld>
+            <a:endParaRPr lang="en-US"/>
+          </a:p>
+        </p:txBody>
+      </p:sp>
+    </p:spTree>
+  </p:cSld>
+  <p:clrMapOvr>
+    <a:masterClrMapping/>
+  </p:clrMapOvr>
+  <p:transition spd="fast" advClick="1">
+    <p:fade/>
+  </p:transition>
+</p:sld>
+</file>
+
+<file path=ppt/slides/slide18.xml><?xml version="1.0" encoding="utf-8"?>
+<p:sld xmlns:a="http://schemas.openxmlformats.org/drawingml/2006/main" xmlns:r="http://schemas.openxmlformats.org/officeDocument/2006/relationships" xmlns:p="http://schemas.openxmlformats.org/presentationml/2006/main">
+  <p:cSld name="Slide 21">
+    <p:spTree>
+      <p:nvGrpSpPr>
+        <p:cNvPr id="1" name=""/>
+        <p:cNvGrpSpPr/>
+        <p:nvPr/>
+      </p:nvGrpSpPr>
+      <p:grpSpPr>
+        <a:xfrm>
+          <a:off x="0" y="0"/>
+          <a:ext cx="0" cy="0"/>
+          <a:chOff x="0" y="0"/>
+          <a:chExt cx="0" cy="0"/>
+        </a:xfrm>
+      </p:grpSpPr>
+      <p:sp>
+        <p:nvSpPr>
+          <p:cNvPr id="2" name="Text 0"/>
+          <p:cNvSpPr/>
+          <p:nvPr/>
+        </p:nvSpPr>
+        <p:spPr>
+          <a:xfrm>
+            <a:off x="502920" y="438912"/>
+            <a:ext cx="2743200" cy="201168"/>
+          </a:xfrm>
+          <a:prstGeom prst="rect">
+            <a:avLst/>
+          </a:prstGeom>
+          <a:noFill/>
+          <a:ln/>
+        </p:spPr>
+        <p:txBody>
+          <a:bodyPr wrap="square" lIns="0" tIns="0" rIns="0" bIns="0" rtlCol="0" anchor="ctr"/>
+          <a:lstStyle/>
+          <a:p>
+            <a:pPr indent="0" marL="0">
+              <a:buNone/>
+            </a:pPr>
+            <a:r>
+              <a:rPr lang="en-US" sz="800" b="1" dirty="0">
+                <a:solidFill>
+                  <a:srgbClr val="2F80ED"/>
+                </a:solidFill>
+              </a:rPr>
+              <a:t>PUTTING IT TOGETHER</a:t>
+            </a:r>
+            <a:endParaRPr lang="en-US" sz="800" dirty="0"/>
+          </a:p>
+        </p:txBody>
+      </p:sp>
+      <p:sp>
+        <p:nvSpPr>
+          <p:cNvPr id="3" name="Text 1"/>
+          <p:cNvSpPr/>
+          <p:nvPr/>
+        </p:nvSpPr>
+        <p:spPr>
+          <a:xfrm>
+            <a:off x="502920" y="713232"/>
+            <a:ext cx="10972800" cy="530352"/>
+          </a:xfrm>
+          <a:prstGeom prst="rect">
+            <a:avLst/>
+          </a:prstGeom>
+          <a:noFill/>
+          <a:ln/>
+        </p:spPr>
+        <p:txBody>
+          <a:bodyPr wrap="square" lIns="0" tIns="0" rIns="0" bIns="0" rtlCol="0" anchor="ctr">
+            <a:normAutofit/>
+          </a:bodyPr>
+          <a:lstStyle/>
+          <a:p>
+            <a:pPr indent="0" marL="0">
+              <a:buNone/>
+            </a:pPr>
+            <a:r>
+              <a:rPr lang="en-US" sz="2600" b="1" dirty="0">
+                <a:solidFill>
+                  <a:srgbClr val="172033"/>
+                </a:solidFill>
+              </a:rPr>
+              <a:t>A Simple Sampling Rule</a:t>
+            </a:r>
+            <a:endParaRPr lang="en-US" sz="2600" dirty="0"/>
+          </a:p>
+        </p:txBody>
+      </p:sp>
+      <p:sp>
+        <p:nvSpPr>
+          <p:cNvPr id="4" name="Text 2"/>
+          <p:cNvSpPr/>
+          <p:nvPr/>
+        </p:nvSpPr>
+        <p:spPr>
+          <a:xfrm>
+            <a:off x="502920" y="1261872"/>
+            <a:ext cx="10789920" cy="329184"/>
+          </a:xfrm>
+          <a:prstGeom prst="rect">
+            <a:avLst/>
+          </a:prstGeom>
+          <a:noFill/>
+          <a:ln/>
+        </p:spPr>
+        <p:txBody>
+          <a:bodyPr wrap="square" lIns="0" tIns="0" rIns="0" bIns="0" rtlCol="0" anchor="ctr">
+            <a:normAutofit/>
+          </a:bodyPr>
+          <a:lstStyle/>
+          <a:p>
+            <a:pPr indent="0" marL="0">
+              <a:buNone/>
+            </a:pPr>
+            <a:r>
+              <a:rPr lang="en-US" sz="1250" dirty="0">
+                <a:solidFill>
+                  <a:srgbClr val="687385"/>
+                </a:solidFill>
+              </a:rPr>
+              <a:t>Methodology — not a result from the three-document teaching corpus.</a:t>
+            </a:r>
+            <a:endParaRPr lang="en-US" sz="1250" dirty="0"/>
+          </a:p>
+        </p:txBody>
+      </p:sp>
+      <p:sp>
+        <p:nvSpPr>
+          <p:cNvPr id="5" name="Shape 3"/>
+          <p:cNvSpPr/>
+          <p:nvPr/>
+        </p:nvSpPr>
+        <p:spPr>
+          <a:xfrm>
+            <a:off x="868680" y="1920240"/>
+            <a:ext cx="2331720" cy="960120"/>
+          </a:xfrm>
+          <a:prstGeom prst="roundRect">
+            <a:avLst>
+              <a:gd name="adj" fmla="val 7619"/>
+            </a:avLst>
+          </a:prstGeom>
+          <a:solidFill>
+            <a:srgbClr val="F7F9FC"/>
+          </a:solidFill>
+          <a:ln w="12700">
+            <a:solidFill>
+              <a:srgbClr val="D8DEE9"/>
+            </a:solidFill>
+            <a:prstDash val="solid"/>
+          </a:ln>
+          <a:effectLst>
+            <a:outerShdw sx="100000" sy="100000" kx="0" ky="0" algn="bl" rotWithShape="0" blurRad="8.934338916334009e+188" dist="5.956225944222673e+188" dir="2.806532213419321e+221">
+              <a:srgbClr val="000000">
+                <a:alpha val="1.2999999999999997e+229"/>
+              </a:srgbClr>
+            </a:outerShdw>
+          </a:effectLst>
+        </p:spPr>
+        <p:txBody>
+          <a:bodyPr/>
+          <a:p/>
+        </p:txBody>
+      </p:sp>
+      <p:sp>
+        <p:nvSpPr>
+          <p:cNvPr id="6" name="Text 4"/>
+          <p:cNvSpPr/>
+          <p:nvPr/>
+        </p:nvSpPr>
+        <p:spPr>
+          <a:xfrm>
+            <a:off x="1234440" y="2258568"/>
+            <a:ext cx="1600200" cy="201168"/>
+          </a:xfrm>
+          <a:prstGeom prst="rect">
+            <a:avLst/>
+          </a:prstGeom>
+          <a:noFill/>
+          <a:ln/>
+        </p:spPr>
+        <p:txBody>
+          <a:bodyPr wrap="square" lIns="0" tIns="0" rIns="0" bIns="0" rtlCol="0" anchor="ctr"/>
+          <a:lstStyle/>
+          <a:p>
+            <a:pPr algn="ctr" indent="0" marL="0">
+              <a:buNone/>
+            </a:pPr>
+            <a:r>
+              <a:rPr lang="en-US" sz="1400" b="1" dirty="0">
+                <a:solidFill>
+                  <a:srgbClr val="172033"/>
+                </a:solidFill>
+              </a:rPr>
+              <a:t>DOCUMENT</a:t>
+            </a:r>
+            <a:endParaRPr lang="en-US" sz="1400" dirty="0"/>
+          </a:p>
+        </p:txBody>
+      </p:sp>
+      <p:sp>
+        <p:nvSpPr>
+          <p:cNvPr id="7" name="Shape 5"/>
+          <p:cNvSpPr/>
+          <p:nvPr/>
+        </p:nvSpPr>
+        <p:spPr>
+          <a:xfrm>
+            <a:off x="3337560" y="2404872"/>
+            <a:ext cx="822960" cy="0"/>
+          </a:xfrm>
+          <a:prstGeom prst="line">
+            <a:avLst/>
+          </a:prstGeom>
+          <a:noFill/>
+          <a:ln w="29210">
+            <a:solidFill>
+              <a:srgbClr val="687385"/>
+            </a:solidFill>
+            <a:prstDash val="solid"/>
+            <a:headEnd type="none"/>
+            <a:tailEnd type="triangle"/>
+          </a:ln>
+        </p:spPr>
+        <p:txBody>
+          <a:bodyPr/>
+          <a:p/>
+        </p:txBody>
+      </p:sp>
+      <p:sp>
+        <p:nvSpPr>
+          <p:cNvPr id="8" name="Shape 6"/>
+          <p:cNvSpPr/>
+          <p:nvPr/>
+        </p:nvSpPr>
+        <p:spPr>
+          <a:xfrm>
+            <a:off x="4297680" y="1828800"/>
+            <a:ext cx="2788920" cy="1143000"/>
+          </a:xfrm>
+          <a:prstGeom prst="roundRect">
+            <a:avLst>
+              <a:gd name="adj" fmla="val 6400"/>
+            </a:avLst>
+          </a:prstGeom>
+          <a:solidFill>
+            <a:srgbClr val="FFF7E8"/>
+          </a:solidFill>
+          <a:ln w="12700">
+            <a:solidFill>
+              <a:srgbClr val="F2D29A"/>
+            </a:solidFill>
+            <a:prstDash val="solid"/>
+          </a:ln>
+          <a:effectLst>
+            <a:outerShdw sx="100000" sy="100000" kx="0" ky="0" algn="bl" rotWithShape="0" blurRad="1.1346610423744191e+193" dist="7.564406949162794e+192" dir="1.6839193280515925e+226">
+              <a:srgbClr val="000000">
+                <a:alpha val="1.2999999999999997e+234"/>
+              </a:srgbClr>
+            </a:outerShdw>
+          </a:effectLst>
+        </p:spPr>
+        <p:txBody>
+          <a:bodyPr/>
+          <a:p/>
+        </p:txBody>
+      </p:sp>
+      <p:sp>
+        <p:nvSpPr>
+          <p:cNvPr id="9" name="Text 7"/>
+          <p:cNvSpPr/>
+          <p:nvPr/>
+        </p:nvSpPr>
+        <p:spPr>
+          <a:xfrm>
+            <a:off x="4572000" y="2084832"/>
+            <a:ext cx="2240280" cy="502920"/>
+          </a:xfrm>
+          <a:prstGeom prst="rect">
+            <a:avLst/>
+          </a:prstGeom>
+          <a:noFill/>
+          <a:ln/>
+        </p:spPr>
+        <p:txBody>
+          <a:bodyPr wrap="square" lIns="0" tIns="0" rIns="0" bIns="0" rtlCol="0" anchor="ctr">
+            <a:normAutofit/>
+          </a:bodyPr>
+          <a:lstStyle/>
+          <a:p>
+            <a:pPr algn="ctr" indent="0" marL="0">
+              <a:buNone/>
+            </a:pPr>
+            <a:r>
+              <a:rPr lang="en-US" sz="1200" b="1" dirty="0">
+                <a:solidFill>
+                  <a:srgbClr val="F59E0B"/>
+                </a:solidFill>
+              </a:rPr>
+              <a:t>Any flags?</a:t>
+            </a:r>
+            <a:endParaRPr lang="en-US" sz="1200" dirty="0"/>
+          </a:p>
+          <a:p>
+            <a:pPr algn="ctr" indent="0" marL="0">
+              <a:buNone/>
+            </a:pPr>
+            <a:r>
+              <a:rPr lang="en-US" sz="1200" b="1" dirty="0">
+                <a:solidFill>
+                  <a:srgbClr val="F59E0B"/>
+                </a:solidFill>
+              </a:rPr>
+              <a:t>low confidence / dropped / malformed</a:t>
+            </a:r>
+            <a:endParaRPr lang="en-US" sz="1200" dirty="0"/>
+          </a:p>
+        </p:txBody>
+      </p:sp>
+      <p:sp>
+        <p:nvSpPr>
+          <p:cNvPr id="10" name="Shape 8"/>
+          <p:cNvSpPr/>
+          <p:nvPr/>
+        </p:nvSpPr>
+        <p:spPr>
+          <a:xfrm>
+            <a:off x="5669280" y="3063240"/>
+            <a:ext cx="0" cy="640080"/>
+          </a:xfrm>
+          <a:prstGeom prst="line">
+            <a:avLst/>
+          </a:prstGeom>
+          <a:noFill/>
+          <a:ln w="29210">
+            <a:solidFill>
+              <a:srgbClr val="E45757"/>
+            </a:solidFill>
+            <a:prstDash val="solid"/>
+            <a:headEnd type="none"/>
+            <a:tailEnd type="triangle"/>
+          </a:ln>
+        </p:spPr>
+        <p:txBody>
+          <a:bodyPr/>
+          <a:p/>
+        </p:txBody>
+      </p:sp>
+      <p:sp>
+        <p:nvSpPr>
+          <p:cNvPr id="11" name="Text 9"/>
+          <p:cNvSpPr/>
+          <p:nvPr/>
+        </p:nvSpPr>
+        <p:spPr>
+          <a:xfrm>
+            <a:off x="5806440" y="3246120"/>
+            <a:ext cx="502920" cy="164592"/>
+          </a:xfrm>
+          <a:prstGeom prst="rect">
+            <a:avLst/>
+          </a:prstGeom>
+          <a:noFill/>
+          <a:ln/>
+        </p:spPr>
+        <p:txBody>
+          <a:bodyPr wrap="square" lIns="0" tIns="0" rIns="0" bIns="0" rtlCol="0" anchor="ctr"/>
+          <a:lstStyle/>
+          <a:p>
+            <a:pPr indent="0" marL="0">
+              <a:buNone/>
+            </a:pPr>
+            <a:r>
+              <a:rPr lang="en-US" sz="800" b="1" dirty="0">
+                <a:solidFill>
+                  <a:srgbClr val="E45757"/>
+                </a:solidFill>
+              </a:rPr>
+              <a:t>YES</a:t>
+            </a:r>
+            <a:endParaRPr lang="en-US" sz="800" dirty="0"/>
+          </a:p>
+        </p:txBody>
+      </p:sp>
+      <p:sp>
+        <p:nvSpPr>
+          <p:cNvPr id="12" name="Shape 10"/>
+          <p:cNvSpPr/>
+          <p:nvPr/>
+        </p:nvSpPr>
+        <p:spPr>
+          <a:xfrm>
+            <a:off x="4434840" y="3822192"/>
+            <a:ext cx="2514600" cy="1097280"/>
+          </a:xfrm>
+          <a:prstGeom prst="roundRect">
+            <a:avLst>
+              <a:gd name="adj" fmla="val 6667"/>
+            </a:avLst>
+          </a:prstGeom>
+          <a:solidFill>
+            <a:srgbClr val="FFF1F1"/>
+          </a:solidFill>
+          <a:ln w="12700">
+            <a:solidFill>
+              <a:srgbClr val="F1B1B1"/>
+            </a:solidFill>
+            <a:prstDash val="solid"/>
+          </a:ln>
+          <a:effectLst>
+            <a:outerShdw sx="100000" sy="100000" kx="0" ky="0" algn="bl" rotWithShape="0" blurRad="1.4410195238155123e+197" dist="9.606796825436748e+196" dir="1.0103515968309554e+231">
+              <a:srgbClr val="000000">
+                <a:alpha val="1.2999999999999996e+239"/>
+              </a:srgbClr>
+            </a:outerShdw>
+          </a:effectLst>
+        </p:spPr>
+        <p:txBody>
+          <a:bodyPr/>
+          <a:p/>
+        </p:txBody>
+      </p:sp>
+      <p:sp>
+        <p:nvSpPr>
+          <p:cNvPr id="13" name="Text 11"/>
+          <p:cNvSpPr/>
+          <p:nvPr/>
+        </p:nvSpPr>
+        <p:spPr>
+          <a:xfrm>
+            <a:off x="4754880" y="4224528"/>
+            <a:ext cx="1874520" cy="228600"/>
+          </a:xfrm>
+          <a:prstGeom prst="rect">
+            <a:avLst/>
+          </a:prstGeom>
+          <a:noFill/>
+          <a:ln/>
+        </p:spPr>
+        <p:txBody>
+          <a:bodyPr wrap="square" lIns="0" tIns="0" rIns="0" bIns="0" rtlCol="0" anchor="ctr"/>
+          <a:lstStyle/>
+          <a:p>
+            <a:pPr algn="ctr" indent="0" marL="0">
+              <a:buNone/>
+            </a:pPr>
+            <a:r>
+              <a:rPr lang="en-US" sz="1600" b="1" dirty="0">
+                <a:solidFill>
+                  <a:srgbClr val="E45757"/>
+                </a:solidFill>
+              </a:rPr>
+              <a:t>REVIEW 100%</a:t>
+            </a:r>
+            <a:endParaRPr lang="en-US" sz="1600" dirty="0"/>
+          </a:p>
+        </p:txBody>
+      </p:sp>
+      <p:sp>
+        <p:nvSpPr>
+          <p:cNvPr id="14" name="Shape 12"/>
+          <p:cNvSpPr/>
+          <p:nvPr/>
+        </p:nvSpPr>
+        <p:spPr>
+          <a:xfrm>
+            <a:off x="7223760" y="2404872"/>
+            <a:ext cx="822960" cy="0"/>
+          </a:xfrm>
+          <a:prstGeom prst="line">
+            <a:avLst/>
+          </a:prstGeom>
+          <a:noFill/>
+          <a:ln w="29210">
+            <a:solidFill>
+              <a:srgbClr val="2FA36B"/>
+            </a:solidFill>
+            <a:prstDash val="solid"/>
+            <a:headEnd type="none"/>
+            <a:tailEnd type="triangle"/>
+          </a:ln>
+        </p:spPr>
+        <p:txBody>
+          <a:bodyPr/>
+          <a:p/>
+        </p:txBody>
+      </p:sp>
+      <p:sp>
+        <p:nvSpPr>
+          <p:cNvPr id="15" name="Text 13"/>
+          <p:cNvSpPr/>
+          <p:nvPr/>
+        </p:nvSpPr>
+        <p:spPr>
+          <a:xfrm>
+            <a:off x="7388352" y="2084832"/>
+            <a:ext cx="411480" cy="164592"/>
+          </a:xfrm>
+          <a:prstGeom prst="rect">
+            <a:avLst/>
+          </a:prstGeom>
+          <a:noFill/>
+          <a:ln/>
+        </p:spPr>
+        <p:txBody>
+          <a:bodyPr wrap="square" lIns="0" tIns="0" rIns="0" bIns="0" rtlCol="0" anchor="ctr"/>
+          <a:lstStyle/>
+          <a:p>
+            <a:pPr algn="ctr" indent="0" marL="0">
+              <a:buNone/>
+            </a:pPr>
+            <a:r>
+              <a:rPr lang="en-US" sz="800" b="1" dirty="0">
+                <a:solidFill>
+                  <a:srgbClr val="2FA36B"/>
+                </a:solidFill>
+              </a:rPr>
+              <a:t>NO</a:t>
+            </a:r>
+            <a:endParaRPr lang="en-US" sz="800" dirty="0"/>
+          </a:p>
+        </p:txBody>
+      </p:sp>
+      <p:sp>
+        <p:nvSpPr>
+          <p:cNvPr id="16" name="Shape 14"/>
+          <p:cNvSpPr/>
+          <p:nvPr/>
+        </p:nvSpPr>
+        <p:spPr>
+          <a:xfrm>
+            <a:off x="8183880" y="1828800"/>
+            <a:ext cx="2971800" cy="1143000"/>
+          </a:xfrm>
+          <a:prstGeom prst="roundRect">
+            <a:avLst>
+              <a:gd name="adj" fmla="val 6400"/>
+            </a:avLst>
+          </a:prstGeom>
+          <a:solidFill>
+            <a:srgbClr val="F2FBF6"/>
+          </a:solidFill>
+          <a:ln w="12700">
+            <a:solidFill>
+              <a:srgbClr val="9AD7B5"/>
+            </a:solidFill>
+            <a:prstDash val="solid"/>
+          </a:ln>
+          <a:effectLst>
+            <a:outerShdw sx="100000" sy="100000" kx="0" ky="0" algn="bl" rotWithShape="0" blurRad="1.8300947952457007e+201" dist="1.220063196830467e+201" dir="6.062109580985733e+235">
+              <a:srgbClr val="000000">
+                <a:alpha val="1.2999999999999996e+244"/>
+              </a:srgbClr>
+            </a:outerShdw>
+          </a:effectLst>
+        </p:spPr>
+        <p:txBody>
+          <a:bodyPr/>
+          <a:p/>
+        </p:txBody>
+      </p:sp>
+      <p:sp>
+        <p:nvSpPr>
+          <p:cNvPr id="17" name="Text 15"/>
+          <p:cNvSpPr/>
+          <p:nvPr/>
+        </p:nvSpPr>
+        <p:spPr>
+          <a:xfrm>
+            <a:off x="8458200" y="2240280"/>
+            <a:ext cx="2423160" cy="274320"/>
+          </a:xfrm>
+          <a:prstGeom prst="rect">
+            <a:avLst/>
+          </a:prstGeom>
+          <a:noFill/>
+          <a:ln/>
+        </p:spPr>
+        <p:txBody>
+          <a:bodyPr wrap="square" lIns="0" tIns="0" rIns="0" bIns="0" rtlCol="0" anchor="ctr"/>
+          <a:lstStyle/>
+          <a:p>
+            <a:pPr algn="ctr" indent="0" marL="0">
+              <a:buNone/>
+            </a:pPr>
+            <a:r>
+              <a:rPr lang="en-US" sz="1300" b="1" dirty="0">
+                <a:solidFill>
+                  <a:srgbClr val="2FA36B"/>
+                </a:solidFill>
+              </a:rPr>
+              <a:t>Tokens/page outlier?</a:t>
+            </a:r>
+            <a:endParaRPr lang="en-US" sz="1300" dirty="0"/>
+          </a:p>
+        </p:txBody>
+      </p:sp>
+      <p:sp>
+        <p:nvSpPr>
+          <p:cNvPr id="18" name="Shape 16"/>
+          <p:cNvSpPr/>
+          <p:nvPr/>
+        </p:nvSpPr>
+        <p:spPr>
+          <a:xfrm>
+            <a:off x="9674352" y="3063240"/>
+            <a:ext cx="0" cy="640080"/>
+          </a:xfrm>
+          <a:prstGeom prst="line">
+            <a:avLst/>
+          </a:prstGeom>
+          <a:noFill/>
+          <a:ln w="29210">
+            <a:solidFill>
+              <a:srgbClr val="F59E0B"/>
+            </a:solidFill>
+            <a:prstDash val="solid"/>
+            <a:headEnd type="none"/>
+            <a:tailEnd type="triangle"/>
+          </a:ln>
+        </p:spPr>
+        <p:txBody>
+          <a:bodyPr/>
+          <a:p/>
+        </p:txBody>
+      </p:sp>
+      <p:sp>
+        <p:nvSpPr>
+          <p:cNvPr id="19" name="Text 17"/>
+          <p:cNvSpPr/>
+          <p:nvPr/>
+        </p:nvSpPr>
+        <p:spPr>
+          <a:xfrm>
+            <a:off x="9829800" y="3246120"/>
+            <a:ext cx="502920" cy="164592"/>
+          </a:xfrm>
+          <a:prstGeom prst="rect">
+            <a:avLst/>
+          </a:prstGeom>
+          <a:noFill/>
+          <a:ln/>
+        </p:spPr>
+        <p:txBody>
+          <a:bodyPr wrap="square" lIns="0" tIns="0" rIns="0" bIns="0" rtlCol="0" anchor="ctr"/>
+          <a:lstStyle/>
+          <a:p>
+            <a:pPr indent="0" marL="0">
+              <a:buNone/>
+            </a:pPr>
+            <a:r>
+              <a:rPr lang="en-US" sz="800" b="1" dirty="0">
+                <a:solidFill>
+                  <a:srgbClr val="F59E0B"/>
+                </a:solidFill>
+              </a:rPr>
+              <a:t>YES</a:t>
+            </a:r>
+            <a:endParaRPr lang="en-US" sz="800" dirty="0"/>
+          </a:p>
+        </p:txBody>
+      </p:sp>
+      <p:sp>
+        <p:nvSpPr>
+          <p:cNvPr id="20" name="Shape 18"/>
+          <p:cNvSpPr/>
+          <p:nvPr/>
+        </p:nvSpPr>
+        <p:spPr>
+          <a:xfrm>
+            <a:off x="8458200" y="3822192"/>
+            <a:ext cx="2423160" cy="1097280"/>
+          </a:xfrm>
+          <a:prstGeom prst="roundRect">
+            <a:avLst>
+              <a:gd name="adj" fmla="val 6667"/>
+            </a:avLst>
+          </a:prstGeom>
+          <a:solidFill>
+            <a:srgbClr val="FFF7E8"/>
+          </a:solidFill>
+          <a:ln w="12700">
+            <a:solidFill>
+              <a:srgbClr val="F2D29A"/>
+            </a:solidFill>
+            <a:prstDash val="solid"/>
+          </a:ln>
+          <a:effectLst>
+            <a:outerShdw sx="100000" sy="100000" kx="0" ky="0" algn="bl" rotWithShape="0" blurRad="2.3242203899620397e+205" dist="1.5494802599746932e+205" dir="3.63726574859144e+240">
+              <a:srgbClr val="000000">
+                <a:alpha val="1.2999999999999995e+249"/>
+              </a:srgbClr>
+            </a:outerShdw>
+          </a:effectLst>
+        </p:spPr>
+        <p:txBody>
+          <a:bodyPr/>
+          <a:p/>
+        </p:txBody>
+      </p:sp>
+      <p:sp>
+        <p:nvSpPr>
+          <p:cNvPr id="21" name="Text 19"/>
+          <p:cNvSpPr/>
+          <p:nvPr/>
+        </p:nvSpPr>
+        <p:spPr>
+          <a:xfrm>
+            <a:off x="8823960" y="4224528"/>
+            <a:ext cx="1691640" cy="228600"/>
+          </a:xfrm>
+          <a:prstGeom prst="rect">
+            <a:avLst/>
+          </a:prstGeom>
+          <a:noFill/>
+          <a:ln/>
+        </p:spPr>
+        <p:txBody>
+          <a:bodyPr wrap="square" lIns="0" tIns="0" rIns="0" bIns="0" rtlCol="0" anchor="ctr"/>
+          <a:lstStyle/>
+          <a:p>
+            <a:pPr algn="ctr" indent="0" marL="0">
+              <a:buNone/>
+            </a:pPr>
+            <a:r>
+              <a:rPr lang="en-US" sz="1600" b="1" dirty="0">
+                <a:solidFill>
+                  <a:srgbClr val="F59E0B"/>
+                </a:solidFill>
+              </a:rPr>
+              <a:t>REVIEW</a:t>
+            </a:r>
+            <a:endParaRPr lang="en-US" sz="1600" dirty="0"/>
+          </a:p>
+        </p:txBody>
+      </p:sp>
+      <p:sp>
+        <p:nvSpPr>
+          <p:cNvPr id="22" name="Shape 20"/>
+          <p:cNvSpPr/>
+          <p:nvPr/>
+        </p:nvSpPr>
+        <p:spPr>
+          <a:xfrm>
+            <a:off x="11219688" y="2404872"/>
+            <a:ext cx="438912" cy="0"/>
+          </a:xfrm>
+          <a:prstGeom prst="line">
+            <a:avLst/>
+          </a:prstGeom>
+          <a:noFill/>
+          <a:ln w="29210">
+            <a:solidFill>
+              <a:srgbClr val="2F80ED"/>
+            </a:solidFill>
+            <a:prstDash val="solid"/>
+            <a:headEnd type="none"/>
+            <a:tailEnd type="triangle"/>
+          </a:ln>
+        </p:spPr>
+        <p:txBody>
+          <a:bodyPr/>
+          <a:p/>
+        </p:txBody>
+      </p:sp>
+      <p:sp>
+        <p:nvSpPr>
+          <p:cNvPr id="23" name="Text 21"/>
+          <p:cNvSpPr/>
+          <p:nvPr/>
+        </p:nvSpPr>
+        <p:spPr>
+          <a:xfrm>
+            <a:off x="11201400" y="2084832"/>
+            <a:ext cx="411480" cy="164592"/>
+          </a:xfrm>
+          <a:prstGeom prst="rect">
+            <a:avLst/>
+          </a:prstGeom>
+          <a:noFill/>
+          <a:ln/>
+        </p:spPr>
+        <p:txBody>
+          <a:bodyPr wrap="square" lIns="0" tIns="0" rIns="0" bIns="0" rtlCol="0" anchor="ctr"/>
+          <a:lstStyle/>
+          <a:p>
+            <a:pPr algn="ctr" indent="0" marL="0">
+              <a:buNone/>
+            </a:pPr>
+            <a:r>
+              <a:rPr lang="en-US" sz="800" b="1" dirty="0">
+                <a:solidFill>
+                  <a:srgbClr val="2F80ED"/>
+                </a:solidFill>
+              </a:rPr>
+              <a:t>NO</a:t>
+            </a:r>
+            <a:endParaRPr lang="en-US" sz="800" dirty="0"/>
+          </a:p>
+        </p:txBody>
+      </p:sp>
+      <p:sp>
+        <p:nvSpPr>
+          <p:cNvPr id="24" name="Shape 22"/>
+          <p:cNvSpPr/>
+          <p:nvPr/>
+        </p:nvSpPr>
+        <p:spPr>
+          <a:xfrm>
+            <a:off x="10991088" y="3822192"/>
+            <a:ext cx="969264" cy="1097280"/>
+          </a:xfrm>
+          <a:prstGeom prst="roundRect">
+            <a:avLst>
+              <a:gd name="adj" fmla="val 7547"/>
+            </a:avLst>
+          </a:prstGeom>
+          <a:solidFill>
+            <a:srgbClr val="EAF3FF"/>
+          </a:solidFill>
+          <a:ln w="12700">
+            <a:solidFill>
+              <a:srgbClr val="B7D8FF"/>
+            </a:solidFill>
+            <a:prstDash val="solid"/>
+          </a:ln>
+        </p:spPr>
+        <p:txBody>
+          <a:bodyPr/>
+          <a:p/>
+        </p:txBody>
+      </p:sp>
+      <p:sp>
+        <p:nvSpPr>
+          <p:cNvPr id="25" name="Text 23"/>
+          <p:cNvSpPr/>
+          <p:nvPr/>
+        </p:nvSpPr>
+        <p:spPr>
+          <a:xfrm>
+            <a:off x="11027664" y="4123944"/>
+            <a:ext cx="896112" cy="438912"/>
+          </a:xfrm>
+          <a:prstGeom prst="rect">
+            <a:avLst/>
+          </a:prstGeom>
+          <a:noFill/>
+          <a:ln/>
+        </p:spPr>
+        <p:txBody>
+          <a:bodyPr wrap="square" lIns="0" tIns="0" rIns="0" bIns="0" rtlCol="0" anchor="ctr"/>
+          <a:lstStyle/>
+          <a:p>
+            <a:pPr algn="ctr" indent="0" marL="0">
+              <a:buNone/>
+            </a:pPr>
+            <a:r>
+              <a:rPr lang="en-US" sz="1200" b="1" dirty="0">
+                <a:solidFill>
+                  <a:srgbClr val="2F80ED"/>
+                </a:solidFill>
+              </a:rPr>
+              <a:t>AUDIT</a:t>
+            </a:r>
+            <a:endParaRPr lang="en-US" sz="1200" dirty="0"/>
+          </a:p>
+          <a:p>
+            <a:pPr algn="ctr" indent="0" marL="0">
+              <a:buNone/>
+            </a:pPr>
+            <a:r>
+              <a:rPr lang="en-US" sz="1200" b="1" dirty="0">
+                <a:solidFill>
+                  <a:srgbClr val="2F80ED"/>
+                </a:solidFill>
+              </a:rPr>
+              <a:t>5–10%</a:t>
+            </a:r>
+            <a:endParaRPr lang="en-US" sz="1200" dirty="0"/>
+          </a:p>
+        </p:txBody>
+      </p:sp>
+      <p:sp>
+        <p:nvSpPr>
+          <p:cNvPr id="26" name="Shape 24"/>
+          <p:cNvSpPr/>
+          <p:nvPr/>
+        </p:nvSpPr>
+        <p:spPr>
+          <a:xfrm>
+            <a:off x="1965960" y="5577840"/>
+            <a:ext cx="8321040" cy="502920"/>
+          </a:xfrm>
+          <a:prstGeom prst="roundRect">
+            <a:avLst>
+              <a:gd name="adj" fmla="val 7273"/>
+            </a:avLst>
+          </a:prstGeom>
+          <a:solidFill>
+            <a:srgbClr val="EAF3FF"/>
+          </a:solidFill>
+          <a:ln w="12700">
+            <a:solidFill>
+              <a:srgbClr val="B7D8FF"/>
+            </a:solidFill>
+            <a:prstDash val="solid"/>
+          </a:ln>
+        </p:spPr>
+        <p:txBody>
+          <a:bodyPr/>
+          <a:p/>
+        </p:txBody>
+      </p:sp>
+      <p:sp>
+        <p:nvSpPr>
+          <p:cNvPr id="27" name="Text 25"/>
+          <p:cNvSpPr/>
+          <p:nvPr/>
+        </p:nvSpPr>
+        <p:spPr>
+          <a:xfrm>
+            <a:off x="2240280" y="5742432"/>
+            <a:ext cx="7772400" cy="182880"/>
+          </a:xfrm>
+          <a:prstGeom prst="rect">
+            <a:avLst/>
+          </a:prstGeom>
+          <a:noFill/>
+          <a:ln/>
+        </p:spPr>
+        <p:txBody>
+          <a:bodyPr wrap="square" lIns="0" tIns="0" rIns="0" bIns="0" rtlCol="0" anchor="ctr"/>
+          <a:lstStyle/>
+          <a:p>
+            <a:pPr algn="ctr" indent="0" marL="0">
+              <a:buNone/>
+            </a:pPr>
+            <a:r>
+              <a:rPr lang="en-US" sz="1150" b="1" dirty="0">
+                <a:solidFill>
+                  <a:srgbClr val="2F80ED"/>
+                </a:solidFill>
+              </a:rPr>
+              <a:t>If audits keep finding real issues → raise the clean-bucket audit rate until the hit rate falls.</a:t>
+            </a:r>
+            <a:endParaRPr lang="en-US" sz="1150" dirty="0"/>
+          </a:p>
+        </p:txBody>
+      </p:sp>
+      <p:sp>
+        <p:nvSpPr>
+          <p:cNvPr id="25" name="Slide Number Placeholder 0"/>
+          <p:cNvSpPr>
+            <a:spLocks noGrp="1"/>
+          </p:cNvSpPr>
+          <p:nvPr>
+            <p:ph type="sldNum" sz="quarter" idx="4294967295"/>
+          </p:nvPr>
+        </p:nvSpPr>
+        <p:spPr>
+          <a:xfrm>
+            <a:off x="11612880" y="6510528"/>
+            <a:ext cx="800000" cy="300000"/>
+          </a:xfrm>
+          <a:prstGeom prst="rect">
+            <a:avLst/>
+          </a:prstGeom>
+          <a:extLst>
+            <a:ext uri="{C572A759-6A51-4108-AA02-DFA0A04FC94B}">
+              <ma14:wrappingTextBoxFlag xmlns:ma14="http://schemas.microsoft.com/office/mac/drawingml/2011/main" val="0"/>
+            </a:ext>
+          </a:extLst>
+        </p:spPr>
+        <p:txBody>
+          <a:bodyPr/>
+          <a:lstStyle>
+            <a:lvl1pPr>
+              <a:defRPr sz="650">
+                <a:solidFill>
+                  <a:srgbClr val="9AA4B2"/>
+                </a:solidFill>
+                <a:latin typeface="Aptos"/>
+                <a:ea typeface="Aptos"/>
+                <a:cs typeface="Aptos"/>
+              </a:defRPr>
+            </a:lvl1pPr>
+          </a:lstStyle>
+          <a:p>
+            <a:pPr algn="l"/>
+            <a:fld id="{F7021451-1387-4CA6-816F-3879F97B5CBC}" type="slidenum">
+              <a:rPr b="0" lang="en-US"/>
+              <a:t>21</a:t>
+            </a:fld>
+            <a:endParaRPr lang="en-US"/>
+          </a:p>
+        </p:txBody>
+      </p:sp>
+    </p:spTree>
+  </p:cSld>
+  <p:clrMapOvr>
+    <a:masterClrMapping/>
+  </p:clrMapOvr>
+  <p:transition spd="fast" advClick="1">
+    <p:fade/>
+  </p:transition>
+</p:sld>
+</file>
+
+<file path=ppt/slides/slide19.xml><?xml version="1.0" encoding="utf-8"?>
+<p:sld xmlns:a="http://schemas.openxmlformats.org/drawingml/2006/main" xmlns:r="http://schemas.openxmlformats.org/officeDocument/2006/relationships" xmlns:p="http://schemas.openxmlformats.org/presentationml/2006/main">
+  <p:cSld name="Slide 22">
+    <p:spTree>
+      <p:nvGrpSpPr>
+        <p:cNvPr id="1" name=""/>
+        <p:cNvGrpSpPr/>
+        <p:nvPr/>
+      </p:nvGrpSpPr>
+      <p:grpSpPr>
+        <a:xfrm>
+          <a:off x="0" y="0"/>
+          <a:ext cx="0" cy="0"/>
+          <a:chOff x="0" y="0"/>
+          <a:chExt cx="0" cy="0"/>
+        </a:xfrm>
+      </p:grpSpPr>
+      <p:sp>
+        <p:nvSpPr>
+          <p:cNvPr id="2" name="Text 0"/>
+          <p:cNvSpPr/>
+          <p:nvPr/>
+        </p:nvSpPr>
+        <p:spPr>
+          <a:xfrm>
+            <a:off x="502920" y="438912"/>
+            <a:ext cx="2743200" cy="201168"/>
+          </a:xfrm>
+          <a:prstGeom prst="rect">
+            <a:avLst/>
+          </a:prstGeom>
+          <a:noFill/>
+          <a:ln/>
+        </p:spPr>
+        <p:txBody>
+          <a:bodyPr wrap="square" lIns="0" tIns="0" rIns="0" bIns="0" rtlCol="0" anchor="ctr"/>
+          <a:lstStyle/>
+          <a:p>
+            <a:pPr indent="0" marL="0">
+              <a:buNone/>
+            </a:pPr>
+            <a:r>
+              <a:rPr lang="en-US" sz="800" b="1" dirty="0">
+                <a:solidFill>
+                  <a:srgbClr val="2F80ED"/>
+                </a:solidFill>
+              </a:rPr>
+              <a:t>A QUIET DETAIL</a:t>
+            </a:r>
+            <a:endParaRPr lang="en-US" sz="800" dirty="0"/>
+          </a:p>
+        </p:txBody>
+      </p:sp>
+      <p:sp>
+        <p:nvSpPr>
+          <p:cNvPr id="3" name="Text 1"/>
+          <p:cNvSpPr/>
+          <p:nvPr/>
+        </p:nvSpPr>
+        <p:spPr>
+          <a:xfrm>
+            <a:off x="502920" y="713232"/>
+            <a:ext cx="10972800" cy="530352"/>
+          </a:xfrm>
+          <a:prstGeom prst="rect">
+            <a:avLst/>
+          </a:prstGeom>
+          <a:noFill/>
+          <a:ln/>
+        </p:spPr>
+        <p:txBody>
+          <a:bodyPr wrap="square" lIns="0" tIns="0" rIns="0" bIns="0" rtlCol="0" anchor="ctr">
+            <a:normAutofit/>
+          </a:bodyPr>
+          <a:lstStyle/>
+          <a:p>
+            <a:pPr indent="0" marL="0">
+              <a:buNone/>
+            </a:pPr>
+            <a:r>
+              <a:rPr lang="en-US" sz="2600" b="1" dirty="0">
+                <a:solidFill>
+                  <a:srgbClr val="172033"/>
+                </a:solidFill>
+              </a:rPr>
+              <a:t>Partial Runs Get Skipped, Not Guessed At</a:t>
+            </a:r>
+            <a:endParaRPr lang="en-US" sz="2600" dirty="0"/>
+          </a:p>
+        </p:txBody>
+      </p:sp>
+      <p:sp>
+        <p:nvSpPr>
+          <p:cNvPr id="4" name="Shape 2"/>
+          <p:cNvSpPr/>
+          <p:nvPr/>
+        </p:nvSpPr>
+        <p:spPr>
+          <a:xfrm>
+            <a:off x="914400" y="2011680"/>
+            <a:ext cx="10058400" cy="804672"/>
+          </a:xfrm>
+          <a:prstGeom prst="roundRect">
+            <a:avLst>
+              <a:gd name="adj" fmla="val 9091"/>
+            </a:avLst>
+          </a:prstGeom>
+          <a:solidFill>
+            <a:srgbClr val="FFFFFF"/>
+          </a:solidFill>
+          <a:ln w="12700">
+            <a:solidFill>
+              <a:srgbClr val="D8DEE9"/>
+            </a:solidFill>
+            <a:prstDash val="solid"/>
+          </a:ln>
+          <a:effectLst>
+            <a:outerShdw sx="100000" sy="100000" kx="0" ky="0" algn="bl" rotWithShape="0" blurRad="2.9517598952517903e+209" dist="1.9678399301678603e+209" dir="2.182359449154864e+245">
+              <a:srgbClr val="000000">
+                <a:alpha val="1.2999999999999995e+254"/>
+              </a:srgbClr>
+            </a:outerShdw>
+          </a:effectLst>
+        </p:spPr>
+        <p:txBody>
+          <a:bodyPr/>
+          <a:p/>
+        </p:txBody>
+      </p:sp>
+      <p:sp>
+        <p:nvSpPr>
+          <p:cNvPr id="5" name="Shape 3"/>
+          <p:cNvSpPr/>
+          <p:nvPr/>
+        </p:nvSpPr>
+        <p:spPr>
+          <a:xfrm>
+            <a:off x="1143000" y="2157984"/>
+            <a:ext cx="438912" cy="438912"/>
+          </a:xfrm>
+          <a:prstGeom prst="ellipse">
+            <a:avLst/>
+          </a:prstGeom>
+          <a:solidFill>
+            <a:srgbClr val="2FA36B"/>
+          </a:solidFill>
+          <a:ln w="12700">
+            <a:solidFill>
+              <a:srgbClr val="2FA36B"/>
+            </a:solidFill>
+            <a:prstDash val="solid"/>
+          </a:ln>
+        </p:spPr>
+        <p:txBody>
+          <a:bodyPr/>
+          <a:p/>
+        </p:txBody>
+      </p:sp>
+      <p:sp>
+        <p:nvSpPr>
+          <p:cNvPr id="6" name="Text 4"/>
+          <p:cNvSpPr/>
+          <p:nvPr/>
+        </p:nvSpPr>
+        <p:spPr>
+          <a:xfrm>
+            <a:off x="1143000" y="2240280"/>
+            <a:ext cx="438912" cy="210312"/>
+          </a:xfrm>
+          <a:prstGeom prst="rect">
+            <a:avLst/>
+          </a:prstGeom>
+          <a:noFill/>
+          <a:ln/>
+        </p:spPr>
+        <p:txBody>
+          <a:bodyPr wrap="square" lIns="0" tIns="0" rIns="0" bIns="0" rtlCol="0" anchor="ctr"/>
+          <a:lstStyle/>
+          <a:p>
+            <a:pPr algn="ctr" indent="0" marL="0">
+              <a:buNone/>
+            </a:pPr>
+            <a:r>
+              <a:rPr lang="en-US" sz="1400" b="1" dirty="0">
+                <a:solidFill>
+                  <a:srgbClr val="FFFFFF"/>
+                </a:solidFill>
+              </a:rPr>
+              <a:t>✓</a:t>
+            </a:r>
+            <a:endParaRPr lang="en-US" sz="1400" dirty="0"/>
+          </a:p>
+        </p:txBody>
+      </p:sp>
+      <p:sp>
+        <p:nvSpPr>
+          <p:cNvPr id="7" name="Text 5"/>
+          <p:cNvSpPr/>
+          <p:nvPr/>
+        </p:nvSpPr>
+        <p:spPr>
+          <a:xfrm>
+            <a:off x="1764792" y="2221992"/>
+            <a:ext cx="1508760" cy="219456"/>
+          </a:xfrm>
+          <a:prstGeom prst="rect">
+            <a:avLst/>
+          </a:prstGeom>
+          <a:noFill/>
+          <a:ln/>
+        </p:spPr>
+        <p:txBody>
+          <a:bodyPr wrap="square" lIns="0" tIns="0" rIns="0" bIns="0" rtlCol="0" anchor="ctr"/>
+          <a:lstStyle/>
+          <a:p>
+            <a:pPr indent="0" marL="0">
+              <a:buNone/>
+            </a:pPr>
+            <a:r>
+              <a:rPr lang="en-US" sz="1300" b="1" dirty="0">
+                <a:solidFill>
+                  <a:srgbClr val="2FA36B"/>
+                </a:solidFill>
+              </a:rPr>
+              <a:t>FINISHED</a:t>
+            </a:r>
+            <a:endParaRPr lang="en-US" sz="1300" dirty="0"/>
+          </a:p>
+        </p:txBody>
+      </p:sp>
+      <p:sp>
+        <p:nvSpPr>
+          <p:cNvPr id="8" name="Text 6"/>
+          <p:cNvSpPr/>
+          <p:nvPr/>
+        </p:nvSpPr>
+        <p:spPr>
+          <a:xfrm>
+            <a:off x="3520440" y="2221992"/>
+            <a:ext cx="6172200" cy="219456"/>
+          </a:xfrm>
+          <a:prstGeom prst="rect">
+            <a:avLst/>
+          </a:prstGeom>
+          <a:noFill/>
+          <a:ln/>
+        </p:spPr>
+        <p:txBody>
+          <a:bodyPr wrap="square" lIns="0" tIns="0" rIns="0" bIns="0" rtlCol="0" anchor="ctr"/>
+          <a:lstStyle/>
+          <a:p>
+            <a:pPr indent="0" marL="0">
+              <a:buNone/>
+            </a:pPr>
+            <a:r>
+              <a:rPr lang="en-US" sz="1200" dirty="0">
+                <a:solidFill>
+                  <a:srgbClr val="687385"/>
+                </a:solidFill>
+              </a:rPr>
+              <a:t>complete extraction → analyze</a:t>
+            </a:r>
+            <a:endParaRPr lang="en-US" sz="1200" dirty="0"/>
+          </a:p>
+        </p:txBody>
+      </p:sp>
+      <p:sp>
+        <p:nvSpPr>
+          <p:cNvPr id="9" name="Shape 7"/>
+          <p:cNvSpPr/>
+          <p:nvPr/>
+        </p:nvSpPr>
+        <p:spPr>
+          <a:xfrm>
+            <a:off x="914400" y="3246120"/>
+            <a:ext cx="10058400" cy="804672"/>
+          </a:xfrm>
+          <a:prstGeom prst="roundRect">
+            <a:avLst>
+              <a:gd name="adj" fmla="val 9091"/>
+            </a:avLst>
+          </a:prstGeom>
+          <a:solidFill>
+            <a:srgbClr val="FFFFFF"/>
+          </a:solidFill>
+          <a:ln w="12700">
+            <a:solidFill>
+              <a:srgbClr val="D8DEE9"/>
+            </a:solidFill>
+            <a:prstDash val="solid"/>
+          </a:ln>
+          <a:effectLst>
+            <a:outerShdw sx="100000" sy="100000" kx="0" ky="0" algn="bl" rotWithShape="0" blurRad="3.7487350669697734e+213" dist="2.4991567113131827e+213" dir="1.3094156694929184e+250">
+              <a:srgbClr val="000000">
+                <a:alpha val="1.2999999999999995e+259"/>
+              </a:srgbClr>
+            </a:outerShdw>
+          </a:effectLst>
+        </p:spPr>
+        <p:txBody>
+          <a:bodyPr/>
+          <a:p/>
+        </p:txBody>
+      </p:sp>
+      <p:sp>
+        <p:nvSpPr>
+          <p:cNvPr id="10" name="Shape 8"/>
+          <p:cNvSpPr/>
+          <p:nvPr/>
+        </p:nvSpPr>
+        <p:spPr>
+          <a:xfrm>
+            <a:off x="1143000" y="3392424"/>
+            <a:ext cx="438912" cy="438912"/>
+          </a:xfrm>
+          <a:prstGeom prst="ellipse">
+            <a:avLst/>
+          </a:prstGeom>
+          <a:solidFill>
+            <a:srgbClr val="F59E0B"/>
+          </a:solidFill>
+          <a:ln w="12700">
+            <a:solidFill>
+              <a:srgbClr val="F59E0B"/>
+            </a:solidFill>
+            <a:prstDash val="solid"/>
+          </a:ln>
+        </p:spPr>
+        <p:txBody>
+          <a:bodyPr/>
+          <a:p/>
+        </p:txBody>
+      </p:sp>
+      <p:sp>
+        <p:nvSpPr>
+          <p:cNvPr id="11" name="Text 9"/>
+          <p:cNvSpPr/>
+          <p:nvPr/>
+        </p:nvSpPr>
+        <p:spPr>
+          <a:xfrm>
+            <a:off x="1143000" y="3474720"/>
+            <a:ext cx="438912" cy="210312"/>
+          </a:xfrm>
+          <a:prstGeom prst="rect">
+            <a:avLst/>
+          </a:prstGeom>
+          <a:noFill/>
+          <a:ln/>
+        </p:spPr>
+        <p:txBody>
+          <a:bodyPr wrap="square" lIns="0" tIns="0" rIns="0" bIns="0" rtlCol="0" anchor="ctr"/>
+          <a:lstStyle/>
+          <a:p>
+            <a:pPr algn="ctr" indent="0" marL="0">
+              <a:buNone/>
+            </a:pPr>
+            <a:r>
+              <a:rPr lang="en-US" sz="1400" b="1" dirty="0">
+                <a:solidFill>
+                  <a:srgbClr val="FFFFFF"/>
+                </a:solidFill>
+              </a:rPr>
+              <a:t>…</a:t>
+            </a:r>
+            <a:endParaRPr lang="en-US" sz="1400" dirty="0"/>
+          </a:p>
+        </p:txBody>
+      </p:sp>
+      <p:sp>
+        <p:nvSpPr>
+          <p:cNvPr id="12" name="Text 10"/>
+          <p:cNvSpPr/>
+          <p:nvPr/>
+        </p:nvSpPr>
+        <p:spPr>
+          <a:xfrm>
+            <a:off x="1764792" y="3456432"/>
+            <a:ext cx="1508760" cy="219456"/>
+          </a:xfrm>
+          <a:prstGeom prst="rect">
+            <a:avLst/>
+          </a:prstGeom>
+          <a:noFill/>
+          <a:ln/>
+        </p:spPr>
+        <p:txBody>
+          <a:bodyPr wrap="square" lIns="0" tIns="0" rIns="0" bIns="0" rtlCol="0" anchor="ctr"/>
+          <a:lstStyle/>
+          <a:p>
+            <a:pPr indent="0" marL="0">
+              <a:buNone/>
+            </a:pPr>
+            <a:r>
+              <a:rPr lang="en-US" sz="1300" b="1" dirty="0">
+                <a:solidFill>
+                  <a:srgbClr val="F59E0B"/>
+                </a:solidFill>
+              </a:rPr>
+              <a:t>IN PROGRESS</a:t>
+            </a:r>
+            <a:endParaRPr lang="en-US" sz="1300" dirty="0"/>
+          </a:p>
+        </p:txBody>
+      </p:sp>
+      <p:sp>
+        <p:nvSpPr>
+          <p:cNvPr id="13" name="Text 11"/>
+          <p:cNvSpPr/>
+          <p:nvPr/>
+        </p:nvSpPr>
+        <p:spPr>
+          <a:xfrm>
+            <a:off x="3520440" y="3456432"/>
+            <a:ext cx="6172200" cy="219456"/>
+          </a:xfrm>
+          <a:prstGeom prst="rect">
+            <a:avLst/>
+          </a:prstGeom>
+          <a:noFill/>
+          <a:ln/>
+        </p:spPr>
+        <p:txBody>
+          <a:bodyPr wrap="square" lIns="0" tIns="0" rIns="0" bIns="0" rtlCol="0" anchor="ctr"/>
+          <a:lstStyle/>
+          <a:p>
+            <a:pPr indent="0" marL="0">
+              <a:buNone/>
+            </a:pPr>
+            <a:r>
+              <a:rPr lang="en-US" sz="1200" dirty="0">
+                <a:solidFill>
+                  <a:srgbClr val="687385"/>
+                </a:solidFill>
+              </a:rPr>
+              <a:t>output incomplete → wait</a:t>
+            </a:r>
+            <a:endParaRPr lang="en-US" sz="1200" dirty="0"/>
+          </a:p>
+        </p:txBody>
+      </p:sp>
+      <p:sp>
+        <p:nvSpPr>
+          <p:cNvPr id="14" name="Shape 12"/>
+          <p:cNvSpPr/>
+          <p:nvPr/>
+        </p:nvSpPr>
+        <p:spPr>
+          <a:xfrm>
+            <a:off x="914400" y="4480560"/>
+            <a:ext cx="10058400" cy="804672"/>
+          </a:xfrm>
+          <a:prstGeom prst="roundRect">
+            <a:avLst>
+              <a:gd name="adj" fmla="val 9091"/>
+            </a:avLst>
+          </a:prstGeom>
+          <a:solidFill>
+            <a:srgbClr val="FFFFFF"/>
+          </a:solidFill>
+          <a:ln w="12700">
+            <a:solidFill>
+              <a:srgbClr val="D8DEE9"/>
+            </a:solidFill>
+            <a:prstDash val="solid"/>
+          </a:ln>
+          <a:effectLst>
+            <a:outerShdw sx="100000" sy="100000" kx="0" ky="0" algn="bl" rotWithShape="0" blurRad="4.760893535051613e+217" dist="3.173929023367742e+217" dir="7.85649401695751e+254">
+              <a:srgbClr val="000000">
+                <a:alpha val="1.2999999999999995e+264"/>
+              </a:srgbClr>
+            </a:outerShdw>
+          </a:effectLst>
+        </p:spPr>
+        <p:txBody>
+          <a:bodyPr/>
+          <a:p/>
+        </p:txBody>
+      </p:sp>
+      <p:sp>
+        <p:nvSpPr>
+          <p:cNvPr id="15" name="Shape 13"/>
+          <p:cNvSpPr/>
+          <p:nvPr/>
+        </p:nvSpPr>
+        <p:spPr>
+          <a:xfrm>
+            <a:off x="1143000" y="4626864"/>
+            <a:ext cx="438912" cy="438912"/>
+          </a:xfrm>
+          <a:prstGeom prst="ellipse">
+            <a:avLst/>
+          </a:prstGeom>
+          <a:solidFill>
+            <a:srgbClr val="687385"/>
+          </a:solidFill>
+          <a:ln w="12700">
+            <a:solidFill>
+              <a:srgbClr val="687385"/>
+            </a:solidFill>
+            <a:prstDash val="solid"/>
+          </a:ln>
+        </p:spPr>
+        <p:txBody>
+          <a:bodyPr/>
+          <a:p/>
+        </p:txBody>
+      </p:sp>
+      <p:sp>
+        <p:nvSpPr>
+          <p:cNvPr id="16" name="Text 14"/>
+          <p:cNvSpPr/>
+          <p:nvPr/>
+        </p:nvSpPr>
+        <p:spPr>
+          <a:xfrm>
+            <a:off x="1143000" y="4709160"/>
+            <a:ext cx="438912" cy="210312"/>
+          </a:xfrm>
+          <a:prstGeom prst="rect">
+            <a:avLst/>
+          </a:prstGeom>
+          <a:noFill/>
+          <a:ln/>
+        </p:spPr>
+        <p:txBody>
+          <a:bodyPr wrap="square" lIns="0" tIns="0" rIns="0" bIns="0" rtlCol="0" anchor="ctr"/>
+          <a:lstStyle/>
+          <a:p>
+            <a:pPr algn="ctr" indent="0" marL="0">
+              <a:buNone/>
+            </a:pPr>
+            <a:r>
+              <a:rPr lang="en-US" sz="1400" b="1" dirty="0">
+                <a:solidFill>
+                  <a:srgbClr val="FFFFFF"/>
+                </a:solidFill>
+              </a:rPr>
+              <a:t>×</a:t>
+            </a:r>
+            <a:endParaRPr lang="en-US" sz="1400" dirty="0"/>
+          </a:p>
+        </p:txBody>
+      </p:sp>
+      <p:sp>
+        <p:nvSpPr>
+          <p:cNvPr id="17" name="Text 15"/>
+          <p:cNvSpPr/>
+          <p:nvPr/>
+        </p:nvSpPr>
+        <p:spPr>
+          <a:xfrm>
+            <a:off x="1764792" y="4690872"/>
+            <a:ext cx="1508760" cy="219456"/>
+          </a:xfrm>
+          <a:prstGeom prst="rect">
+            <a:avLst/>
+          </a:prstGeom>
+          <a:noFill/>
+          <a:ln/>
+        </p:spPr>
+        <p:txBody>
+          <a:bodyPr wrap="square" lIns="0" tIns="0" rIns="0" bIns="0" rtlCol="0" anchor="ctr"/>
+          <a:lstStyle/>
+          <a:p>
+            <a:pPr indent="0" marL="0">
+              <a:buNone/>
+            </a:pPr>
+            <a:r>
+              <a:rPr lang="en-US" sz="1300" b="1" dirty="0">
+                <a:solidFill>
+                  <a:srgbClr val="687385"/>
+                </a:solidFill>
+              </a:rPr>
+              <a:t>INTERRUPTED</a:t>
+            </a:r>
+            <a:endParaRPr lang="en-US" sz="1300" dirty="0"/>
+          </a:p>
+        </p:txBody>
+      </p:sp>
+      <p:sp>
+        <p:nvSpPr>
+          <p:cNvPr id="18" name="Text 16"/>
+          <p:cNvSpPr/>
+          <p:nvPr/>
+        </p:nvSpPr>
+        <p:spPr>
+          <a:xfrm>
+            <a:off x="3520440" y="4690872"/>
+            <a:ext cx="6172200" cy="219456"/>
+          </a:xfrm>
+          <a:prstGeom prst="rect">
+            <a:avLst/>
+          </a:prstGeom>
+          <a:noFill/>
+          <a:ln/>
+        </p:spPr>
+        <p:txBody>
+          <a:bodyPr wrap="square" lIns="0" tIns="0" rIns="0" bIns="0" rtlCol="0" anchor="ctr"/>
+          <a:lstStyle/>
+          <a:p>
+            <a:pPr indent="0" marL="0">
+              <a:buNone/>
+            </a:pPr>
+            <a:r>
+              <a:rPr lang="en-US" sz="1200" dirty="0">
+                <a:solidFill>
+                  <a:srgbClr val="687385"/>
+                </a:solidFill>
+              </a:rPr>
+              <a:t>output incomplete → skip</a:t>
+            </a:r>
+            <a:endParaRPr lang="en-US" sz="1200" dirty="0"/>
+          </a:p>
+        </p:txBody>
+      </p:sp>
+      <p:sp>
+        <p:nvSpPr>
+          <p:cNvPr id="19" name="Text 17"/>
+          <p:cNvSpPr/>
+          <p:nvPr/>
+        </p:nvSpPr>
+        <p:spPr>
+          <a:xfrm>
+            <a:off x="1874520" y="5715000"/>
+            <a:ext cx="8366760" cy="310896"/>
+          </a:xfrm>
+          <a:prstGeom prst="rect">
+            <a:avLst/>
+          </a:prstGeom>
+          <a:noFill/>
+          <a:ln/>
+        </p:spPr>
+        <p:txBody>
+          <a:bodyPr wrap="square" lIns="0" tIns="0" rIns="0" bIns="0" rtlCol="0" anchor="ctr"/>
+          <a:lstStyle/>
+          <a:p>
+            <a:pPr algn="ctr" indent="0" marL="0">
+              <a:buNone/>
+            </a:pPr>
+            <a:r>
+              <a:rPr lang="en-US" sz="1500" b="1" dirty="0">
+                <a:solidFill>
+                  <a:srgbClr val="172033"/>
+                </a:solidFill>
+              </a:rPr>
+              <a:t>Validation should never invent certainty from incomplete evidence.</a:t>
+            </a:r>
+            <a:endParaRPr lang="en-US" sz="1500" dirty="0"/>
+          </a:p>
+        </p:txBody>
+      </p:sp>
+      <p:sp>
+        <p:nvSpPr>
+          <p:cNvPr id="25" name="Slide Number Placeholder 0"/>
+          <p:cNvSpPr>
+            <a:spLocks noGrp="1"/>
+          </p:cNvSpPr>
+          <p:nvPr>
+            <p:ph type="sldNum" sz="quarter" idx="4294967295"/>
+          </p:nvPr>
+        </p:nvSpPr>
+        <p:spPr>
+          <a:xfrm>
+            <a:off x="11612880" y="6510528"/>
+            <a:ext cx="800000" cy="300000"/>
+          </a:xfrm>
+          <a:prstGeom prst="rect">
+            <a:avLst/>
+          </a:prstGeom>
+          <a:extLst>
+            <a:ext uri="{C572A759-6A51-4108-AA02-DFA0A04FC94B}">
+              <ma14:wrappingTextBoxFlag xmlns:ma14="http://schemas.microsoft.com/office/mac/drawingml/2011/main" val="0"/>
+            </a:ext>
+          </a:extLst>
+        </p:spPr>
+        <p:txBody>
+          <a:bodyPr/>
+          <a:lstStyle>
+            <a:lvl1pPr>
+              <a:defRPr sz="650">
+                <a:solidFill>
+                  <a:srgbClr val="9AA4B2"/>
+                </a:solidFill>
+                <a:latin typeface="Aptos"/>
+                <a:ea typeface="Aptos"/>
+                <a:cs typeface="Aptos"/>
+              </a:defRPr>
+            </a:lvl1pPr>
+          </a:lstStyle>
+          <a:p>
+            <a:pPr algn="l"/>
+            <a:fld id="{F7021451-1387-4CA6-816F-3879F97B5CBC}" type="slidenum">
+              <a:rPr b="0" lang="en-US"/>
+              <a:t>22</a:t>
             </a:fld>
             <a:endParaRPr lang="en-US"/>
           </a:p>
@@ -12668,3189 +15473,6 @@
 
 <file path=ppt/slides/slide20.xml><?xml version="1.0" encoding="utf-8"?>
 <p:sld xmlns:a="http://schemas.openxmlformats.org/drawingml/2006/main" xmlns:r="http://schemas.openxmlformats.org/officeDocument/2006/relationships" xmlns:p="http://schemas.openxmlformats.org/presentationml/2006/main">
-  <p:cSld name="Slide 20">
-    <p:spTree>
-      <p:nvGrpSpPr>
-        <p:cNvPr id="1" name=""/>
-        <p:cNvGrpSpPr/>
-        <p:nvPr/>
-      </p:nvGrpSpPr>
-      <p:grpSpPr>
-        <a:xfrm>
-          <a:off x="0" y="0"/>
-          <a:ext cx="0" cy="0"/>
-          <a:chOff x="0" y="0"/>
-          <a:chExt cx="0" cy="0"/>
-        </a:xfrm>
-      </p:grpSpPr>
-      <p:sp>
-        <p:nvSpPr>
-          <p:cNvPr id="2" name="Text 0"/>
-          <p:cNvSpPr/>
-          <p:nvPr/>
-        </p:nvSpPr>
-        <p:spPr>
-          <a:xfrm>
-            <a:off x="502920" y="438912"/>
-            <a:ext cx="2743200" cy="201168"/>
-          </a:xfrm>
-          <a:prstGeom prst="rect">
-            <a:avLst/>
-          </a:prstGeom>
-          <a:noFill/>
-          <a:ln/>
-        </p:spPr>
-        <p:txBody>
-          <a:bodyPr wrap="square" lIns="0" tIns="0" rIns="0" bIns="0" rtlCol="0" anchor="ctr"/>
-          <a:lstStyle/>
-          <a:p>
-            <a:pPr indent="0" marL="0">
-              <a:buNone/>
-            </a:pPr>
-            <a:r>
-              <a:rPr lang="en-US" sz="800" b="1" dirty="0">
-                <a:solidFill>
-                  <a:srgbClr val="2F80ED"/>
-                </a:solidFill>
-              </a:rPr>
-              <a:t>STEP 2: RANDOM AUDITS</a:t>
-            </a:r>
-            <a:endParaRPr lang="en-US" sz="800" dirty="0"/>
-          </a:p>
-        </p:txBody>
-      </p:sp>
-      <p:sp>
-        <p:nvSpPr>
-          <p:cNvPr id="3" name="Text 1"/>
-          <p:cNvSpPr/>
-          <p:nvPr/>
-        </p:nvSpPr>
-        <p:spPr>
-          <a:xfrm>
-            <a:off x="502920" y="713232"/>
-            <a:ext cx="10972800" cy="530352"/>
-          </a:xfrm>
-          <a:prstGeom prst="rect">
-            <a:avLst/>
-          </a:prstGeom>
-          <a:noFill/>
-          <a:ln/>
-        </p:spPr>
-        <p:txBody>
-          <a:bodyPr wrap="square" lIns="0" tIns="0" rIns="0" bIns="0" rtlCol="0" anchor="ctr">
-            <a:normAutofit/>
-          </a:bodyPr>
-          <a:lstStyle/>
-          <a:p>
-            <a:pPr indent="0" marL="0">
-              <a:buNone/>
-            </a:pPr>
-            <a:r>
-              <a:rPr lang="en-US" sz="2600" b="1" dirty="0">
-                <a:solidFill>
-                  <a:srgbClr val="172033"/>
-                </a:solidFill>
-              </a:rPr>
-              <a:t>Catching What the Model Didn’t Flag</a:t>
-            </a:r>
-            <a:endParaRPr lang="en-US" sz="2600" dirty="0"/>
-          </a:p>
-        </p:txBody>
-      </p:sp>
-      <p:sp>
-        <p:nvSpPr>
-          <p:cNvPr id="4" name="Shape 2"/>
-          <p:cNvSpPr/>
-          <p:nvPr/>
-        </p:nvSpPr>
-        <p:spPr>
-          <a:xfrm>
-            <a:off x="868680" y="1874520"/>
-            <a:ext cx="4069080" cy="3474720"/>
-          </a:xfrm>
-          <a:prstGeom prst="roundRect">
-            <a:avLst>
-              <a:gd name="adj" fmla="val 2105"/>
-            </a:avLst>
-          </a:prstGeom>
-          <a:solidFill>
-            <a:srgbClr val="F2FBF6"/>
-          </a:solidFill>
-          <a:ln w="12700">
-            <a:solidFill>
-              <a:srgbClr val="9AD7B5"/>
-            </a:solidFill>
-            <a:prstDash val="solid"/>
-          </a:ln>
-          <a:effectLst>
-            <a:outerShdw sx="100000" sy="100000" kx="0" ky="0" algn="bl" rotWithShape="0" blurRad="5.539301206729498e+180" dist="3.692867471152999e+180" dir="7.795922815053669e+211">
-              <a:srgbClr val="000000">
-                <a:alpha val="1.2999999999999997e+219"/>
-              </a:srgbClr>
-            </a:outerShdw>
-          </a:effectLst>
-        </p:spPr>
-        <p:txBody>
-          <a:bodyPr/>
-          <a:p/>
-        </p:txBody>
-      </p:sp>
-      <p:sp>
-        <p:nvSpPr>
-          <p:cNvPr id="5" name="Text 3"/>
-          <p:cNvSpPr/>
-          <p:nvPr/>
-        </p:nvSpPr>
-        <p:spPr>
-          <a:xfrm>
-            <a:off x="1188720" y="2194560"/>
-            <a:ext cx="3429000" cy="228600"/>
-          </a:xfrm>
-          <a:prstGeom prst="rect">
-            <a:avLst/>
-          </a:prstGeom>
-          <a:noFill/>
-          <a:ln/>
-        </p:spPr>
-        <p:txBody>
-          <a:bodyPr wrap="square" lIns="0" tIns="0" rIns="0" bIns="0" rtlCol="0" anchor="ctr"/>
-          <a:lstStyle/>
-          <a:p>
-            <a:pPr algn="ctr" indent="0" marL="0">
-              <a:buNone/>
-            </a:pPr>
-            <a:r>
-              <a:rPr lang="en-US" sz="1400" b="1" dirty="0">
-                <a:solidFill>
-                  <a:srgbClr val="2FA36B"/>
-                </a:solidFill>
-              </a:rPr>
-              <a:t>CLEAN BUCKET</a:t>
-            </a:r>
-            <a:endParaRPr lang="en-US" sz="1400" dirty="0"/>
-          </a:p>
-        </p:txBody>
-      </p:sp>
-      <p:sp>
-        <p:nvSpPr>
-          <p:cNvPr id="6" name="Text 4"/>
-          <p:cNvSpPr/>
-          <p:nvPr/>
-        </p:nvSpPr>
-        <p:spPr>
-          <a:xfrm>
-            <a:off x="1188720" y="2788920"/>
-            <a:ext cx="3429000" cy="594360"/>
-          </a:xfrm>
-          <a:prstGeom prst="rect">
-            <a:avLst/>
-          </a:prstGeom>
-          <a:noFill/>
-          <a:ln/>
-        </p:spPr>
-        <p:txBody>
-          <a:bodyPr wrap="square" lIns="0" tIns="0" rIns="0" bIns="0" rtlCol="0" anchor="ctr"/>
-          <a:lstStyle/>
-          <a:p>
-            <a:pPr algn="ctr" indent="0" marL="0">
-              <a:buNone/>
-            </a:pPr>
-            <a:r>
-              <a:rPr lang="en-US" sz="4000" b="1" dirty="0">
-                <a:solidFill>
-                  <a:srgbClr val="2FA36B"/>
-                </a:solidFill>
-              </a:rPr>
-              <a:t>5–10%</a:t>
-            </a:r>
-            <a:endParaRPr lang="en-US" sz="4000" dirty="0"/>
-          </a:p>
-        </p:txBody>
-      </p:sp>
-      <p:sp>
-        <p:nvSpPr>
-          <p:cNvPr id="7" name="Text 5"/>
-          <p:cNvSpPr/>
-          <p:nvPr/>
-        </p:nvSpPr>
-        <p:spPr>
-          <a:xfrm>
-            <a:off x="1188720" y="3584448"/>
-            <a:ext cx="3429000" cy="256032"/>
-          </a:xfrm>
-          <a:prstGeom prst="rect">
-            <a:avLst/>
-          </a:prstGeom>
-          <a:noFill/>
-          <a:ln/>
-        </p:spPr>
-        <p:txBody>
-          <a:bodyPr wrap="square" lIns="0" tIns="0" rIns="0" bIns="0" rtlCol="0" anchor="ctr"/>
-          <a:lstStyle/>
-          <a:p>
-            <a:pPr algn="ctr" indent="0" marL="0">
-              <a:buNone/>
-            </a:pPr>
-            <a:r>
-              <a:rPr lang="en-US" sz="1300" b="1" dirty="0">
-                <a:solidFill>
-                  <a:srgbClr val="172033"/>
-                </a:solidFill>
-              </a:rPr>
-              <a:t>random audit starting point</a:t>
-            </a:r>
-            <a:endParaRPr lang="en-US" sz="1300" dirty="0"/>
-          </a:p>
-        </p:txBody>
-      </p:sp>
-      <p:sp>
-        <p:nvSpPr>
-          <p:cNvPr id="8" name="Shape 6"/>
-          <p:cNvSpPr/>
-          <p:nvPr/>
-        </p:nvSpPr>
-        <p:spPr>
-          <a:xfrm>
-            <a:off x="1417320" y="4096512"/>
-            <a:ext cx="128016" cy="128016"/>
-          </a:xfrm>
-          <a:prstGeom prst="ellipse">
-            <a:avLst/>
-          </a:prstGeom>
-          <a:solidFill>
-            <a:srgbClr val="A7D8BE"/>
-          </a:solidFill>
-          <a:ln w="12700">
-            <a:solidFill>
-              <a:srgbClr val="A7D8BE"/>
-            </a:solidFill>
-            <a:prstDash val="solid"/>
-          </a:ln>
-        </p:spPr>
-        <p:txBody>
-          <a:bodyPr/>
-          <a:p/>
-        </p:txBody>
-      </p:sp>
-      <p:sp>
-        <p:nvSpPr>
-          <p:cNvPr id="9" name="Shape 7"/>
-          <p:cNvSpPr/>
-          <p:nvPr/>
-        </p:nvSpPr>
-        <p:spPr>
-          <a:xfrm>
-            <a:off x="1856232" y="4096512"/>
-            <a:ext cx="128016" cy="128016"/>
-          </a:xfrm>
-          <a:prstGeom prst="ellipse">
-            <a:avLst/>
-          </a:prstGeom>
-          <a:solidFill>
-            <a:srgbClr val="A7D8BE"/>
-          </a:solidFill>
-          <a:ln w="12700">
-            <a:solidFill>
-              <a:srgbClr val="A7D8BE"/>
-            </a:solidFill>
-            <a:prstDash val="solid"/>
-          </a:ln>
-        </p:spPr>
-        <p:txBody>
-          <a:bodyPr/>
-          <a:p/>
-        </p:txBody>
-      </p:sp>
-      <p:sp>
-        <p:nvSpPr>
-          <p:cNvPr id="10" name="Shape 8"/>
-          <p:cNvSpPr/>
-          <p:nvPr/>
-        </p:nvSpPr>
-        <p:spPr>
-          <a:xfrm>
-            <a:off x="2295144" y="4096512"/>
-            <a:ext cx="128016" cy="128016"/>
-          </a:xfrm>
-          <a:prstGeom prst="ellipse">
-            <a:avLst/>
-          </a:prstGeom>
-          <a:solidFill>
-            <a:srgbClr val="F59E0B"/>
-          </a:solidFill>
-          <a:ln w="12700">
-            <a:solidFill>
-              <a:srgbClr val="F59E0B"/>
-            </a:solidFill>
-            <a:prstDash val="solid"/>
-          </a:ln>
-        </p:spPr>
-        <p:txBody>
-          <a:bodyPr/>
-          <a:p/>
-        </p:txBody>
-      </p:sp>
-      <p:sp>
-        <p:nvSpPr>
-          <p:cNvPr id="11" name="Shape 9"/>
-          <p:cNvSpPr/>
-          <p:nvPr/>
-        </p:nvSpPr>
-        <p:spPr>
-          <a:xfrm>
-            <a:off x="2734056" y="4096512"/>
-            <a:ext cx="128016" cy="128016"/>
-          </a:xfrm>
-          <a:prstGeom prst="ellipse">
-            <a:avLst/>
-          </a:prstGeom>
-          <a:solidFill>
-            <a:srgbClr val="A7D8BE"/>
-          </a:solidFill>
-          <a:ln w="12700">
-            <a:solidFill>
-              <a:srgbClr val="A7D8BE"/>
-            </a:solidFill>
-            <a:prstDash val="solid"/>
-          </a:ln>
-        </p:spPr>
-        <p:txBody>
-          <a:bodyPr/>
-          <a:p/>
-        </p:txBody>
-      </p:sp>
-      <p:sp>
-        <p:nvSpPr>
-          <p:cNvPr id="12" name="Shape 10"/>
-          <p:cNvSpPr/>
-          <p:nvPr/>
-        </p:nvSpPr>
-        <p:spPr>
-          <a:xfrm>
-            <a:off x="3172968" y="4096512"/>
-            <a:ext cx="128016" cy="128016"/>
-          </a:xfrm>
-          <a:prstGeom prst="ellipse">
-            <a:avLst/>
-          </a:prstGeom>
-          <a:solidFill>
-            <a:srgbClr val="A7D8BE"/>
-          </a:solidFill>
-          <a:ln w="12700">
-            <a:solidFill>
-              <a:srgbClr val="A7D8BE"/>
-            </a:solidFill>
-            <a:prstDash val="solid"/>
-          </a:ln>
-        </p:spPr>
-        <p:txBody>
-          <a:bodyPr/>
-          <a:p/>
-        </p:txBody>
-      </p:sp>
-      <p:sp>
-        <p:nvSpPr>
-          <p:cNvPr id="13" name="Shape 11"/>
-          <p:cNvSpPr/>
-          <p:nvPr/>
-        </p:nvSpPr>
-        <p:spPr>
-          <a:xfrm>
-            <a:off x="3611880" y="4096512"/>
-            <a:ext cx="128016" cy="128016"/>
-          </a:xfrm>
-          <a:prstGeom prst="ellipse">
-            <a:avLst/>
-          </a:prstGeom>
-          <a:solidFill>
-            <a:srgbClr val="A7D8BE"/>
-          </a:solidFill>
-          <a:ln w="12700">
-            <a:solidFill>
-              <a:srgbClr val="A7D8BE"/>
-            </a:solidFill>
-            <a:prstDash val="solid"/>
-          </a:ln>
-        </p:spPr>
-        <p:txBody>
-          <a:bodyPr/>
-          <a:p/>
-        </p:txBody>
-      </p:sp>
-      <p:sp>
-        <p:nvSpPr>
-          <p:cNvPr id="14" name="Shape 12"/>
-          <p:cNvSpPr/>
-          <p:nvPr/>
-        </p:nvSpPr>
-        <p:spPr>
-          <a:xfrm>
-            <a:off x="4050792" y="4096512"/>
-            <a:ext cx="128016" cy="128016"/>
-          </a:xfrm>
-          <a:prstGeom prst="ellipse">
-            <a:avLst/>
-          </a:prstGeom>
-          <a:solidFill>
-            <a:srgbClr val="A7D8BE"/>
-          </a:solidFill>
-          <a:ln w="12700">
-            <a:solidFill>
-              <a:srgbClr val="A7D8BE"/>
-            </a:solidFill>
-            <a:prstDash val="solid"/>
-          </a:ln>
-        </p:spPr>
-        <p:txBody>
-          <a:bodyPr/>
-          <a:p/>
-        </p:txBody>
-      </p:sp>
-      <p:sp>
-        <p:nvSpPr>
-          <p:cNvPr id="15" name="Shape 13"/>
-          <p:cNvSpPr/>
-          <p:nvPr/>
-        </p:nvSpPr>
-        <p:spPr>
-          <a:xfrm>
-            <a:off x="1417320" y="4352544"/>
-            <a:ext cx="128016" cy="128016"/>
-          </a:xfrm>
-          <a:prstGeom prst="ellipse">
-            <a:avLst/>
-          </a:prstGeom>
-          <a:solidFill>
-            <a:srgbClr val="A7D8BE"/>
-          </a:solidFill>
-          <a:ln w="12700">
-            <a:solidFill>
-              <a:srgbClr val="A7D8BE"/>
-            </a:solidFill>
-            <a:prstDash val="solid"/>
-          </a:ln>
-        </p:spPr>
-        <p:txBody>
-          <a:bodyPr/>
-          <a:p/>
-        </p:txBody>
-      </p:sp>
-      <p:sp>
-        <p:nvSpPr>
-          <p:cNvPr id="16" name="Shape 14"/>
-          <p:cNvSpPr/>
-          <p:nvPr/>
-        </p:nvSpPr>
-        <p:spPr>
-          <a:xfrm>
-            <a:off x="1856232" y="4352544"/>
-            <a:ext cx="128016" cy="128016"/>
-          </a:xfrm>
-          <a:prstGeom prst="ellipse">
-            <a:avLst/>
-          </a:prstGeom>
-          <a:solidFill>
-            <a:srgbClr val="A7D8BE"/>
-          </a:solidFill>
-          <a:ln w="12700">
-            <a:solidFill>
-              <a:srgbClr val="A7D8BE"/>
-            </a:solidFill>
-            <a:prstDash val="solid"/>
-          </a:ln>
-        </p:spPr>
-        <p:txBody>
-          <a:bodyPr/>
-          <a:p/>
-        </p:txBody>
-      </p:sp>
-      <p:sp>
-        <p:nvSpPr>
-          <p:cNvPr id="17" name="Shape 15"/>
-          <p:cNvSpPr/>
-          <p:nvPr/>
-        </p:nvSpPr>
-        <p:spPr>
-          <a:xfrm>
-            <a:off x="2295144" y="4352544"/>
-            <a:ext cx="128016" cy="128016"/>
-          </a:xfrm>
-          <a:prstGeom prst="ellipse">
-            <a:avLst/>
-          </a:prstGeom>
-          <a:solidFill>
-            <a:srgbClr val="F59E0B"/>
-          </a:solidFill>
-          <a:ln w="12700">
-            <a:solidFill>
-              <a:srgbClr val="F59E0B"/>
-            </a:solidFill>
-            <a:prstDash val="solid"/>
-          </a:ln>
-        </p:spPr>
-        <p:txBody>
-          <a:bodyPr/>
-          <a:p/>
-        </p:txBody>
-      </p:sp>
-      <p:sp>
-        <p:nvSpPr>
-          <p:cNvPr id="18" name="Shape 16"/>
-          <p:cNvSpPr/>
-          <p:nvPr/>
-        </p:nvSpPr>
-        <p:spPr>
-          <a:xfrm>
-            <a:off x="2734056" y="4352544"/>
-            <a:ext cx="128016" cy="128016"/>
-          </a:xfrm>
-          <a:prstGeom prst="ellipse">
-            <a:avLst/>
-          </a:prstGeom>
-          <a:solidFill>
-            <a:srgbClr val="A7D8BE"/>
-          </a:solidFill>
-          <a:ln w="12700">
-            <a:solidFill>
-              <a:srgbClr val="A7D8BE"/>
-            </a:solidFill>
-            <a:prstDash val="solid"/>
-          </a:ln>
-        </p:spPr>
-        <p:txBody>
-          <a:bodyPr/>
-          <a:p/>
-        </p:txBody>
-      </p:sp>
-      <p:sp>
-        <p:nvSpPr>
-          <p:cNvPr id="19" name="Shape 17"/>
-          <p:cNvSpPr/>
-          <p:nvPr/>
-        </p:nvSpPr>
-        <p:spPr>
-          <a:xfrm>
-            <a:off x="3172968" y="4352544"/>
-            <a:ext cx="128016" cy="128016"/>
-          </a:xfrm>
-          <a:prstGeom prst="ellipse">
-            <a:avLst/>
-          </a:prstGeom>
-          <a:solidFill>
-            <a:srgbClr val="A7D8BE"/>
-          </a:solidFill>
-          <a:ln w="12700">
-            <a:solidFill>
-              <a:srgbClr val="A7D8BE"/>
-            </a:solidFill>
-            <a:prstDash val="solid"/>
-          </a:ln>
-        </p:spPr>
-        <p:txBody>
-          <a:bodyPr/>
-          <a:p/>
-        </p:txBody>
-      </p:sp>
-      <p:sp>
-        <p:nvSpPr>
-          <p:cNvPr id="20" name="Shape 18"/>
-          <p:cNvSpPr/>
-          <p:nvPr/>
-        </p:nvSpPr>
-        <p:spPr>
-          <a:xfrm>
-            <a:off x="3611880" y="4352544"/>
-            <a:ext cx="128016" cy="128016"/>
-          </a:xfrm>
-          <a:prstGeom prst="ellipse">
-            <a:avLst/>
-          </a:prstGeom>
-          <a:solidFill>
-            <a:srgbClr val="A7D8BE"/>
-          </a:solidFill>
-          <a:ln w="12700">
-            <a:solidFill>
-              <a:srgbClr val="A7D8BE"/>
-            </a:solidFill>
-            <a:prstDash val="solid"/>
-          </a:ln>
-        </p:spPr>
-        <p:txBody>
-          <a:bodyPr/>
-          <a:p/>
-        </p:txBody>
-      </p:sp>
-      <p:sp>
-        <p:nvSpPr>
-          <p:cNvPr id="21" name="Shape 19"/>
-          <p:cNvSpPr/>
-          <p:nvPr/>
-        </p:nvSpPr>
-        <p:spPr>
-          <a:xfrm>
-            <a:off x="4050792" y="4352544"/>
-            <a:ext cx="128016" cy="128016"/>
-          </a:xfrm>
-          <a:prstGeom prst="ellipse">
-            <a:avLst/>
-          </a:prstGeom>
-          <a:solidFill>
-            <a:srgbClr val="A7D8BE"/>
-          </a:solidFill>
-          <a:ln w="12700">
-            <a:solidFill>
-              <a:srgbClr val="A7D8BE"/>
-            </a:solidFill>
-            <a:prstDash val="solid"/>
-          </a:ln>
-        </p:spPr>
-        <p:txBody>
-          <a:bodyPr/>
-          <a:p/>
-        </p:txBody>
-      </p:sp>
-      <p:sp>
-        <p:nvSpPr>
-          <p:cNvPr id="22" name="Shape 20"/>
-          <p:cNvSpPr/>
-          <p:nvPr/>
-        </p:nvSpPr>
-        <p:spPr>
-          <a:xfrm>
-            <a:off x="1417320" y="4608576"/>
-            <a:ext cx="128016" cy="128016"/>
-          </a:xfrm>
-          <a:prstGeom prst="ellipse">
-            <a:avLst/>
-          </a:prstGeom>
-          <a:solidFill>
-            <a:srgbClr val="A7D8BE"/>
-          </a:solidFill>
-          <a:ln w="12700">
-            <a:solidFill>
-              <a:srgbClr val="A7D8BE"/>
-            </a:solidFill>
-            <a:prstDash val="solid"/>
-          </a:ln>
-        </p:spPr>
-        <p:txBody>
-          <a:bodyPr/>
-          <a:p/>
-        </p:txBody>
-      </p:sp>
-      <p:sp>
-        <p:nvSpPr>
-          <p:cNvPr id="23" name="Shape 21"/>
-          <p:cNvSpPr/>
-          <p:nvPr/>
-        </p:nvSpPr>
-        <p:spPr>
-          <a:xfrm>
-            <a:off x="1856232" y="4608576"/>
-            <a:ext cx="128016" cy="128016"/>
-          </a:xfrm>
-          <a:prstGeom prst="ellipse">
-            <a:avLst/>
-          </a:prstGeom>
-          <a:solidFill>
-            <a:srgbClr val="A7D8BE"/>
-          </a:solidFill>
-          <a:ln w="12700">
-            <a:solidFill>
-              <a:srgbClr val="A7D8BE"/>
-            </a:solidFill>
-            <a:prstDash val="solid"/>
-          </a:ln>
-        </p:spPr>
-        <p:txBody>
-          <a:bodyPr/>
-          <a:p/>
-        </p:txBody>
-      </p:sp>
-      <p:sp>
-        <p:nvSpPr>
-          <p:cNvPr id="24" name="Shape 22"/>
-          <p:cNvSpPr/>
-          <p:nvPr/>
-        </p:nvSpPr>
-        <p:spPr>
-          <a:xfrm>
-            <a:off x="2295144" y="4608576"/>
-            <a:ext cx="128016" cy="128016"/>
-          </a:xfrm>
-          <a:prstGeom prst="ellipse">
-            <a:avLst/>
-          </a:prstGeom>
-          <a:solidFill>
-            <a:srgbClr val="A7D8BE"/>
-          </a:solidFill>
-          <a:ln w="12700">
-            <a:solidFill>
-              <a:srgbClr val="A7D8BE"/>
-            </a:solidFill>
-            <a:prstDash val="solid"/>
-          </a:ln>
-        </p:spPr>
-        <p:txBody>
-          <a:bodyPr/>
-          <a:p/>
-        </p:txBody>
-      </p:sp>
-      <p:sp>
-        <p:nvSpPr>
-          <p:cNvPr id="25" name="Shape 23"/>
-          <p:cNvSpPr/>
-          <p:nvPr/>
-        </p:nvSpPr>
-        <p:spPr>
-          <a:xfrm>
-            <a:off x="2734056" y="4608576"/>
-            <a:ext cx="128016" cy="128016"/>
-          </a:xfrm>
-          <a:prstGeom prst="ellipse">
-            <a:avLst/>
-          </a:prstGeom>
-          <a:solidFill>
-            <a:srgbClr val="A7D8BE"/>
-          </a:solidFill>
-          <a:ln w="12700">
-            <a:solidFill>
-              <a:srgbClr val="A7D8BE"/>
-            </a:solidFill>
-            <a:prstDash val="solid"/>
-          </a:ln>
-        </p:spPr>
-        <p:txBody>
-          <a:bodyPr/>
-          <a:p/>
-        </p:txBody>
-      </p:sp>
-      <p:sp>
-        <p:nvSpPr>
-          <p:cNvPr id="26" name="Shape 24"/>
-          <p:cNvSpPr/>
-          <p:nvPr/>
-        </p:nvSpPr>
-        <p:spPr>
-          <a:xfrm>
-            <a:off x="3172968" y="4608576"/>
-            <a:ext cx="128016" cy="128016"/>
-          </a:xfrm>
-          <a:prstGeom prst="ellipse">
-            <a:avLst/>
-          </a:prstGeom>
-          <a:solidFill>
-            <a:srgbClr val="F59E0B"/>
-          </a:solidFill>
-          <a:ln w="12700">
-            <a:solidFill>
-              <a:srgbClr val="F59E0B"/>
-            </a:solidFill>
-            <a:prstDash val="solid"/>
-          </a:ln>
-        </p:spPr>
-        <p:txBody>
-          <a:bodyPr/>
-          <a:p/>
-        </p:txBody>
-      </p:sp>
-      <p:sp>
-        <p:nvSpPr>
-          <p:cNvPr id="27" name="Shape 25"/>
-          <p:cNvSpPr/>
-          <p:nvPr/>
-        </p:nvSpPr>
-        <p:spPr>
-          <a:xfrm>
-            <a:off x="3611880" y="4608576"/>
-            <a:ext cx="128016" cy="128016"/>
-          </a:xfrm>
-          <a:prstGeom prst="ellipse">
-            <a:avLst/>
-          </a:prstGeom>
-          <a:solidFill>
-            <a:srgbClr val="A7D8BE"/>
-          </a:solidFill>
-          <a:ln w="12700">
-            <a:solidFill>
-              <a:srgbClr val="A7D8BE"/>
-            </a:solidFill>
-            <a:prstDash val="solid"/>
-          </a:ln>
-        </p:spPr>
-        <p:txBody>
-          <a:bodyPr/>
-          <a:p/>
-        </p:txBody>
-      </p:sp>
-      <p:sp>
-        <p:nvSpPr>
-          <p:cNvPr id="28" name="Shape 26"/>
-          <p:cNvSpPr/>
-          <p:nvPr/>
-        </p:nvSpPr>
-        <p:spPr>
-          <a:xfrm>
-            <a:off x="4050792" y="4608576"/>
-            <a:ext cx="128016" cy="128016"/>
-          </a:xfrm>
-          <a:prstGeom prst="ellipse">
-            <a:avLst/>
-          </a:prstGeom>
-          <a:solidFill>
-            <a:srgbClr val="A7D8BE"/>
-          </a:solidFill>
-          <a:ln w="12700">
-            <a:solidFill>
-              <a:srgbClr val="A7D8BE"/>
-            </a:solidFill>
-            <a:prstDash val="solid"/>
-          </a:ln>
-        </p:spPr>
-        <p:txBody>
-          <a:bodyPr/>
-          <a:p/>
-        </p:txBody>
-      </p:sp>
-      <p:sp>
-        <p:nvSpPr>
-          <p:cNvPr id="29" name="Shape 27"/>
-          <p:cNvSpPr/>
-          <p:nvPr/>
-        </p:nvSpPr>
-        <p:spPr>
-          <a:xfrm>
-            <a:off x="1417320" y="4864608"/>
-            <a:ext cx="128016" cy="128016"/>
-          </a:xfrm>
-          <a:prstGeom prst="ellipse">
-            <a:avLst/>
-          </a:prstGeom>
-          <a:solidFill>
-            <a:srgbClr val="A7D8BE"/>
-          </a:solidFill>
-          <a:ln w="12700">
-            <a:solidFill>
-              <a:srgbClr val="A7D8BE"/>
-            </a:solidFill>
-            <a:prstDash val="solid"/>
-          </a:ln>
-        </p:spPr>
-        <p:txBody>
-          <a:bodyPr/>
-          <a:p/>
-        </p:txBody>
-      </p:sp>
-      <p:sp>
-        <p:nvSpPr>
-          <p:cNvPr id="30" name="Shape 28"/>
-          <p:cNvSpPr/>
-          <p:nvPr/>
-        </p:nvSpPr>
-        <p:spPr>
-          <a:xfrm>
-            <a:off x="1856232" y="4864608"/>
-            <a:ext cx="128016" cy="128016"/>
-          </a:xfrm>
-          <a:prstGeom prst="ellipse">
-            <a:avLst/>
-          </a:prstGeom>
-          <a:solidFill>
-            <a:srgbClr val="A7D8BE"/>
-          </a:solidFill>
-          <a:ln w="12700">
-            <a:solidFill>
-              <a:srgbClr val="A7D8BE"/>
-            </a:solidFill>
-            <a:prstDash val="solid"/>
-          </a:ln>
-        </p:spPr>
-        <p:txBody>
-          <a:bodyPr/>
-          <a:p/>
-        </p:txBody>
-      </p:sp>
-      <p:sp>
-        <p:nvSpPr>
-          <p:cNvPr id="31" name="Shape 29"/>
-          <p:cNvSpPr/>
-          <p:nvPr/>
-        </p:nvSpPr>
-        <p:spPr>
-          <a:xfrm>
-            <a:off x="2295144" y="4864608"/>
-            <a:ext cx="128016" cy="128016"/>
-          </a:xfrm>
-          <a:prstGeom prst="ellipse">
-            <a:avLst/>
-          </a:prstGeom>
-          <a:solidFill>
-            <a:srgbClr val="A7D8BE"/>
-          </a:solidFill>
-          <a:ln w="12700">
-            <a:solidFill>
-              <a:srgbClr val="A7D8BE"/>
-            </a:solidFill>
-            <a:prstDash val="solid"/>
-          </a:ln>
-        </p:spPr>
-        <p:txBody>
-          <a:bodyPr/>
-          <a:p/>
-        </p:txBody>
-      </p:sp>
-      <p:sp>
-        <p:nvSpPr>
-          <p:cNvPr id="32" name="Shape 30"/>
-          <p:cNvSpPr/>
-          <p:nvPr/>
-        </p:nvSpPr>
-        <p:spPr>
-          <a:xfrm>
-            <a:off x="2734056" y="4864608"/>
-            <a:ext cx="128016" cy="128016"/>
-          </a:xfrm>
-          <a:prstGeom prst="ellipse">
-            <a:avLst/>
-          </a:prstGeom>
-          <a:solidFill>
-            <a:srgbClr val="A7D8BE"/>
-          </a:solidFill>
-          <a:ln w="12700">
-            <a:solidFill>
-              <a:srgbClr val="A7D8BE"/>
-            </a:solidFill>
-            <a:prstDash val="solid"/>
-          </a:ln>
-        </p:spPr>
-        <p:txBody>
-          <a:bodyPr/>
-          <a:p/>
-        </p:txBody>
-      </p:sp>
-      <p:sp>
-        <p:nvSpPr>
-          <p:cNvPr id="33" name="Shape 31"/>
-          <p:cNvSpPr/>
-          <p:nvPr/>
-        </p:nvSpPr>
-        <p:spPr>
-          <a:xfrm>
-            <a:off x="3172968" y="4864608"/>
-            <a:ext cx="128016" cy="128016"/>
-          </a:xfrm>
-          <a:prstGeom prst="ellipse">
-            <a:avLst/>
-          </a:prstGeom>
-          <a:solidFill>
-            <a:srgbClr val="A7D8BE"/>
-          </a:solidFill>
-          <a:ln w="12700">
-            <a:solidFill>
-              <a:srgbClr val="A7D8BE"/>
-            </a:solidFill>
-            <a:prstDash val="solid"/>
-          </a:ln>
-        </p:spPr>
-        <p:txBody>
-          <a:bodyPr/>
-          <a:p/>
-        </p:txBody>
-      </p:sp>
-      <p:sp>
-        <p:nvSpPr>
-          <p:cNvPr id="34" name="Shape 32"/>
-          <p:cNvSpPr/>
-          <p:nvPr/>
-        </p:nvSpPr>
-        <p:spPr>
-          <a:xfrm>
-            <a:off x="3611880" y="4864608"/>
-            <a:ext cx="128016" cy="128016"/>
-          </a:xfrm>
-          <a:prstGeom prst="ellipse">
-            <a:avLst/>
-          </a:prstGeom>
-          <a:solidFill>
-            <a:srgbClr val="A7D8BE"/>
-          </a:solidFill>
-          <a:ln w="12700">
-            <a:solidFill>
-              <a:srgbClr val="A7D8BE"/>
-            </a:solidFill>
-            <a:prstDash val="solid"/>
-          </a:ln>
-        </p:spPr>
-        <p:txBody>
-          <a:bodyPr/>
-          <a:p/>
-        </p:txBody>
-      </p:sp>
-      <p:sp>
-        <p:nvSpPr>
-          <p:cNvPr id="35" name="Shape 33"/>
-          <p:cNvSpPr/>
-          <p:nvPr/>
-        </p:nvSpPr>
-        <p:spPr>
-          <a:xfrm>
-            <a:off x="4050792" y="4864608"/>
-            <a:ext cx="128016" cy="128016"/>
-          </a:xfrm>
-          <a:prstGeom prst="ellipse">
-            <a:avLst/>
-          </a:prstGeom>
-          <a:solidFill>
-            <a:srgbClr val="A7D8BE"/>
-          </a:solidFill>
-          <a:ln w="12700">
-            <a:solidFill>
-              <a:srgbClr val="A7D8BE"/>
-            </a:solidFill>
-            <a:prstDash val="solid"/>
-          </a:ln>
-        </p:spPr>
-        <p:txBody>
-          <a:bodyPr/>
-          <a:p/>
-        </p:txBody>
-      </p:sp>
-      <p:sp>
-        <p:nvSpPr>
-          <p:cNvPr id="36" name="Shape 34"/>
-          <p:cNvSpPr/>
-          <p:nvPr/>
-        </p:nvSpPr>
-        <p:spPr>
-          <a:xfrm>
-            <a:off x="1417320" y="5120640"/>
-            <a:ext cx="128016" cy="128016"/>
-          </a:xfrm>
-          <a:prstGeom prst="ellipse">
-            <a:avLst/>
-          </a:prstGeom>
-          <a:solidFill>
-            <a:srgbClr val="A7D8BE"/>
-          </a:solidFill>
-          <a:ln w="12700">
-            <a:solidFill>
-              <a:srgbClr val="A7D8BE"/>
-            </a:solidFill>
-            <a:prstDash val="solid"/>
-          </a:ln>
-        </p:spPr>
-        <p:txBody>
-          <a:bodyPr/>
-          <a:p/>
-        </p:txBody>
-      </p:sp>
-      <p:sp>
-        <p:nvSpPr>
-          <p:cNvPr id="37" name="Shape 35"/>
-          <p:cNvSpPr/>
-          <p:nvPr/>
-        </p:nvSpPr>
-        <p:spPr>
-          <a:xfrm>
-            <a:off x="1856232" y="5120640"/>
-            <a:ext cx="128016" cy="128016"/>
-          </a:xfrm>
-          <a:prstGeom prst="ellipse">
-            <a:avLst/>
-          </a:prstGeom>
-          <a:solidFill>
-            <a:srgbClr val="A7D8BE"/>
-          </a:solidFill>
-          <a:ln w="12700">
-            <a:solidFill>
-              <a:srgbClr val="A7D8BE"/>
-            </a:solidFill>
-            <a:prstDash val="solid"/>
-          </a:ln>
-        </p:spPr>
-        <p:txBody>
-          <a:bodyPr/>
-          <a:p/>
-        </p:txBody>
-      </p:sp>
-      <p:sp>
-        <p:nvSpPr>
-          <p:cNvPr id="38" name="Shape 36"/>
-          <p:cNvSpPr/>
-          <p:nvPr/>
-        </p:nvSpPr>
-        <p:spPr>
-          <a:xfrm>
-            <a:off x="2295144" y="5120640"/>
-            <a:ext cx="128016" cy="128016"/>
-          </a:xfrm>
-          <a:prstGeom prst="ellipse">
-            <a:avLst/>
-          </a:prstGeom>
-          <a:solidFill>
-            <a:srgbClr val="A7D8BE"/>
-          </a:solidFill>
-          <a:ln w="12700">
-            <a:solidFill>
-              <a:srgbClr val="A7D8BE"/>
-            </a:solidFill>
-            <a:prstDash val="solid"/>
-          </a:ln>
-        </p:spPr>
-        <p:txBody>
-          <a:bodyPr/>
-          <a:p/>
-        </p:txBody>
-      </p:sp>
-      <p:sp>
-        <p:nvSpPr>
-          <p:cNvPr id="39" name="Shape 37"/>
-          <p:cNvSpPr/>
-          <p:nvPr/>
-        </p:nvSpPr>
-        <p:spPr>
-          <a:xfrm>
-            <a:off x="2734056" y="5120640"/>
-            <a:ext cx="128016" cy="128016"/>
-          </a:xfrm>
-          <a:prstGeom prst="ellipse">
-            <a:avLst/>
-          </a:prstGeom>
-          <a:solidFill>
-            <a:srgbClr val="A7D8BE"/>
-          </a:solidFill>
-          <a:ln w="12700">
-            <a:solidFill>
-              <a:srgbClr val="A7D8BE"/>
-            </a:solidFill>
-            <a:prstDash val="solid"/>
-          </a:ln>
-        </p:spPr>
-        <p:txBody>
-          <a:bodyPr/>
-          <a:p/>
-        </p:txBody>
-      </p:sp>
-      <p:sp>
-        <p:nvSpPr>
-          <p:cNvPr id="40" name="Shape 38"/>
-          <p:cNvSpPr/>
-          <p:nvPr/>
-        </p:nvSpPr>
-        <p:spPr>
-          <a:xfrm>
-            <a:off x="3172968" y="5120640"/>
-            <a:ext cx="128016" cy="128016"/>
-          </a:xfrm>
-          <a:prstGeom prst="ellipse">
-            <a:avLst/>
-          </a:prstGeom>
-          <a:solidFill>
-            <a:srgbClr val="A7D8BE"/>
-          </a:solidFill>
-          <a:ln w="12700">
-            <a:solidFill>
-              <a:srgbClr val="A7D8BE"/>
-            </a:solidFill>
-            <a:prstDash val="solid"/>
-          </a:ln>
-        </p:spPr>
-        <p:txBody>
-          <a:bodyPr/>
-          <a:p/>
-        </p:txBody>
-      </p:sp>
-      <p:sp>
-        <p:nvSpPr>
-          <p:cNvPr id="41" name="Shape 39"/>
-          <p:cNvSpPr/>
-          <p:nvPr/>
-        </p:nvSpPr>
-        <p:spPr>
-          <a:xfrm>
-            <a:off x="3611880" y="5120640"/>
-            <a:ext cx="128016" cy="128016"/>
-          </a:xfrm>
-          <a:prstGeom prst="ellipse">
-            <a:avLst/>
-          </a:prstGeom>
-          <a:solidFill>
-            <a:srgbClr val="A7D8BE"/>
-          </a:solidFill>
-          <a:ln w="12700">
-            <a:solidFill>
-              <a:srgbClr val="A7D8BE"/>
-            </a:solidFill>
-            <a:prstDash val="solid"/>
-          </a:ln>
-        </p:spPr>
-        <p:txBody>
-          <a:bodyPr/>
-          <a:p/>
-        </p:txBody>
-      </p:sp>
-      <p:sp>
-        <p:nvSpPr>
-          <p:cNvPr id="42" name="Shape 40"/>
-          <p:cNvSpPr/>
-          <p:nvPr/>
-        </p:nvSpPr>
-        <p:spPr>
-          <a:xfrm>
-            <a:off x="4050792" y="5120640"/>
-            <a:ext cx="128016" cy="128016"/>
-          </a:xfrm>
-          <a:prstGeom prst="ellipse">
-            <a:avLst/>
-          </a:prstGeom>
-          <a:solidFill>
-            <a:srgbClr val="A7D8BE"/>
-          </a:solidFill>
-          <a:ln w="12700">
-            <a:solidFill>
-              <a:srgbClr val="A7D8BE"/>
-            </a:solidFill>
-            <a:prstDash val="solid"/>
-          </a:ln>
-        </p:spPr>
-        <p:txBody>
-          <a:bodyPr/>
-          <a:p/>
-        </p:txBody>
-      </p:sp>
-      <p:sp>
-        <p:nvSpPr>
-          <p:cNvPr id="43" name="Shape 41"/>
-          <p:cNvSpPr/>
-          <p:nvPr/>
-        </p:nvSpPr>
-        <p:spPr>
-          <a:xfrm>
-            <a:off x="5532120" y="1874520"/>
-            <a:ext cx="5623560" cy="3474720"/>
-          </a:xfrm>
-          <a:prstGeom prst="roundRect">
-            <a:avLst>
-              <a:gd name="adj" fmla="val 2105"/>
-            </a:avLst>
-          </a:prstGeom>
-          <a:solidFill>
-            <a:srgbClr val="FFFFFF"/>
-          </a:solidFill>
-          <a:ln w="12700">
-            <a:solidFill>
-              <a:srgbClr val="D8DEE9"/>
-            </a:solidFill>
-            <a:prstDash val="solid"/>
-          </a:ln>
-          <a:effectLst>
-            <a:outerShdw sx="100000" sy="100000" kx="0" ky="0" algn="bl" rotWithShape="0" blurRad="7.034912532546463e+184" dist="4.689941688364309e+184" dir="4.677553689032201e+216">
-              <a:srgbClr val="000000">
-                <a:alpha val="1.2999999999999996e+224"/>
-              </a:srgbClr>
-            </a:outerShdw>
-          </a:effectLst>
-        </p:spPr>
-        <p:txBody>
-          <a:bodyPr/>
-          <a:p/>
-        </p:txBody>
-      </p:sp>
-      <p:sp>
-        <p:nvSpPr>
-          <p:cNvPr id="44" name="Text 42"/>
-          <p:cNvSpPr/>
-          <p:nvPr/>
-        </p:nvSpPr>
-        <p:spPr>
-          <a:xfrm>
-            <a:off x="5897880" y="2267712"/>
-            <a:ext cx="4892040" cy="228600"/>
-          </a:xfrm>
-          <a:prstGeom prst="rect">
-            <a:avLst/>
-          </a:prstGeom>
-          <a:noFill/>
-          <a:ln/>
-        </p:spPr>
-        <p:txBody>
-          <a:bodyPr wrap="square" lIns="0" tIns="0" rIns="0" bIns="0" rtlCol="0" anchor="ctr"/>
-          <a:lstStyle/>
-          <a:p>
-            <a:pPr indent="0" marL="0">
-              <a:buNone/>
-            </a:pPr>
-            <a:r>
-              <a:rPr lang="en-US" sz="1500" b="1" dirty="0">
-                <a:solidFill>
-                  <a:srgbClr val="172033"/>
-                </a:solidFill>
-              </a:rPr>
-              <a:t>Why audit “clean” documents?</a:t>
-            </a:r>
-            <a:endParaRPr lang="en-US" sz="1500" dirty="0"/>
-          </a:p>
-        </p:txBody>
-      </p:sp>
-      <p:sp>
-        <p:nvSpPr>
-          <p:cNvPr id="45" name="Text 43"/>
-          <p:cNvSpPr/>
-          <p:nvPr/>
-        </p:nvSpPr>
-        <p:spPr>
-          <a:xfrm>
-            <a:off x="5897880" y="2834640"/>
-            <a:ext cx="4754880" cy="777240"/>
-          </a:xfrm>
-          <a:prstGeom prst="rect">
-            <a:avLst/>
-          </a:prstGeom>
-          <a:noFill/>
-          <a:ln/>
-        </p:spPr>
-        <p:txBody>
-          <a:bodyPr wrap="square" lIns="0" tIns="0" rIns="0" bIns="0" rtlCol="0" anchor="ctr">
-            <a:normAutofit/>
-          </a:bodyPr>
-          <a:lstStyle/>
-          <a:p>
-            <a:pPr indent="0" marL="0">
-              <a:buNone/>
-            </a:pPr>
-            <a:r>
-              <a:rPr lang="en-US" sz="1700" b="1" dirty="0">
-                <a:solidFill>
-                  <a:srgbClr val="F59E0B"/>
-                </a:solidFill>
-              </a:rPr>
-              <a:t>A validator that only checks its own doubts can never discover its own blind spots.</a:t>
-            </a:r>
-            <a:endParaRPr lang="en-US" sz="1700" dirty="0"/>
-          </a:p>
-        </p:txBody>
-      </p:sp>
-      <p:sp>
-        <p:nvSpPr>
-          <p:cNvPr id="46" name="Text 44"/>
-          <p:cNvSpPr/>
-          <p:nvPr/>
-        </p:nvSpPr>
-        <p:spPr>
-          <a:xfrm>
-            <a:off x="5897880" y="3977640"/>
-            <a:ext cx="4663440" cy="603504"/>
-          </a:xfrm>
-          <a:prstGeom prst="rect">
-            <a:avLst/>
-          </a:prstGeom>
-          <a:noFill/>
-          <a:ln/>
-        </p:spPr>
-        <p:txBody>
-          <a:bodyPr wrap="square" lIns="0" tIns="0" rIns="0" bIns="0" rtlCol="0" anchor="ctr">
-            <a:normAutofit/>
-          </a:bodyPr>
-          <a:lstStyle/>
-          <a:p>
-            <a:pPr indent="0" marL="0">
-              <a:buNone/>
-            </a:pPr>
-            <a:r>
-              <a:rPr lang="en-US" sz="1250" dirty="0">
-                <a:solidFill>
-                  <a:srgbClr val="687385"/>
-                </a:solidFill>
-              </a:rPr>
-              <a:t>Audit hit rate becomes evidence about whether “zero flags” is actually trustworthy.</a:t>
-            </a:r>
-            <a:endParaRPr lang="en-US" sz="1250" dirty="0"/>
-          </a:p>
-        </p:txBody>
-      </p:sp>
-      <p:sp>
-        <p:nvSpPr>
-          <p:cNvPr id="25" name="Slide Number Placeholder 0"/>
-          <p:cNvSpPr>
-            <a:spLocks noGrp="1"/>
-          </p:cNvSpPr>
-          <p:nvPr>
-            <p:ph type="sldNum" sz="quarter" idx="4294967295"/>
-          </p:nvPr>
-        </p:nvSpPr>
-        <p:spPr>
-          <a:xfrm>
-            <a:off x="11612880" y="6510528"/>
-            <a:ext cx="800000" cy="300000"/>
-          </a:xfrm>
-          <a:prstGeom prst="rect">
-            <a:avLst/>
-          </a:prstGeom>
-          <a:extLst>
-            <a:ext uri="{C572A759-6A51-4108-AA02-DFA0A04FC94B}">
-              <ma14:wrappingTextBoxFlag xmlns:ma14="http://schemas.microsoft.com/office/mac/drawingml/2011/main" val="0"/>
-            </a:ext>
-          </a:extLst>
-        </p:spPr>
-        <p:txBody>
-          <a:bodyPr/>
-          <a:lstStyle>
-            <a:lvl1pPr>
-              <a:defRPr sz="650">
-                <a:solidFill>
-                  <a:srgbClr val="9AA4B2"/>
-                </a:solidFill>
-                <a:latin typeface="Aptos"/>
-                <a:ea typeface="Aptos"/>
-                <a:cs typeface="Aptos"/>
-              </a:defRPr>
-            </a:lvl1pPr>
-          </a:lstStyle>
-          <a:p>
-            <a:pPr algn="l"/>
-            <a:fld id="{F7021451-1387-4CA6-816F-3879F97B5CBC}" type="slidenum">
-              <a:rPr b="0" lang="en-US"/>
-              <a:t>20</a:t>
-            </a:fld>
-            <a:endParaRPr lang="en-US"/>
-          </a:p>
-        </p:txBody>
-      </p:sp>
-    </p:spTree>
-  </p:cSld>
-  <p:clrMapOvr>
-    <a:masterClrMapping/>
-  </p:clrMapOvr>
-  <p:transition spd="fast" advClick="1">
-    <p:fade/>
-  </p:transition>
-</p:sld>
-</file>
-
-<file path=ppt/slides/slide21.xml><?xml version="1.0" encoding="utf-8"?>
-<p:sld xmlns:a="http://schemas.openxmlformats.org/drawingml/2006/main" xmlns:r="http://schemas.openxmlformats.org/officeDocument/2006/relationships" xmlns:p="http://schemas.openxmlformats.org/presentationml/2006/main">
-  <p:cSld name="Slide 21">
-    <p:spTree>
-      <p:nvGrpSpPr>
-        <p:cNvPr id="1" name=""/>
-        <p:cNvGrpSpPr/>
-        <p:nvPr/>
-      </p:nvGrpSpPr>
-      <p:grpSpPr>
-        <a:xfrm>
-          <a:off x="0" y="0"/>
-          <a:ext cx="0" cy="0"/>
-          <a:chOff x="0" y="0"/>
-          <a:chExt cx="0" cy="0"/>
-        </a:xfrm>
-      </p:grpSpPr>
-      <p:sp>
-        <p:nvSpPr>
-          <p:cNvPr id="2" name="Text 0"/>
-          <p:cNvSpPr/>
-          <p:nvPr/>
-        </p:nvSpPr>
-        <p:spPr>
-          <a:xfrm>
-            <a:off x="502920" y="438912"/>
-            <a:ext cx="2743200" cy="201168"/>
-          </a:xfrm>
-          <a:prstGeom prst="rect">
-            <a:avLst/>
-          </a:prstGeom>
-          <a:noFill/>
-          <a:ln/>
-        </p:spPr>
-        <p:txBody>
-          <a:bodyPr wrap="square" lIns="0" tIns="0" rIns="0" bIns="0" rtlCol="0" anchor="ctr"/>
-          <a:lstStyle/>
-          <a:p>
-            <a:pPr indent="0" marL="0">
-              <a:buNone/>
-            </a:pPr>
-            <a:r>
-              <a:rPr lang="en-US" sz="800" b="1" dirty="0">
-                <a:solidFill>
-                  <a:srgbClr val="2F80ED"/>
-                </a:solidFill>
-              </a:rPr>
-              <a:t>PUTTING IT TOGETHER</a:t>
-            </a:r>
-            <a:endParaRPr lang="en-US" sz="800" dirty="0"/>
-          </a:p>
-        </p:txBody>
-      </p:sp>
-      <p:sp>
-        <p:nvSpPr>
-          <p:cNvPr id="3" name="Text 1"/>
-          <p:cNvSpPr/>
-          <p:nvPr/>
-        </p:nvSpPr>
-        <p:spPr>
-          <a:xfrm>
-            <a:off x="502920" y="713232"/>
-            <a:ext cx="10972800" cy="530352"/>
-          </a:xfrm>
-          <a:prstGeom prst="rect">
-            <a:avLst/>
-          </a:prstGeom>
-          <a:noFill/>
-          <a:ln/>
-        </p:spPr>
-        <p:txBody>
-          <a:bodyPr wrap="square" lIns="0" tIns="0" rIns="0" bIns="0" rtlCol="0" anchor="ctr">
-            <a:normAutofit/>
-          </a:bodyPr>
-          <a:lstStyle/>
-          <a:p>
-            <a:pPr indent="0" marL="0">
-              <a:buNone/>
-            </a:pPr>
-            <a:r>
-              <a:rPr lang="en-US" sz="2600" b="1" dirty="0">
-                <a:solidFill>
-                  <a:srgbClr val="172033"/>
-                </a:solidFill>
-              </a:rPr>
-              <a:t>A Simple Sampling Rule</a:t>
-            </a:r>
-            <a:endParaRPr lang="en-US" sz="2600" dirty="0"/>
-          </a:p>
-        </p:txBody>
-      </p:sp>
-      <p:sp>
-        <p:nvSpPr>
-          <p:cNvPr id="4" name="Text 2"/>
-          <p:cNvSpPr/>
-          <p:nvPr/>
-        </p:nvSpPr>
-        <p:spPr>
-          <a:xfrm>
-            <a:off x="502920" y="1261872"/>
-            <a:ext cx="10789920" cy="329184"/>
-          </a:xfrm>
-          <a:prstGeom prst="rect">
-            <a:avLst/>
-          </a:prstGeom>
-          <a:noFill/>
-          <a:ln/>
-        </p:spPr>
-        <p:txBody>
-          <a:bodyPr wrap="square" lIns="0" tIns="0" rIns="0" bIns="0" rtlCol="0" anchor="ctr">
-            <a:normAutofit/>
-          </a:bodyPr>
-          <a:lstStyle/>
-          <a:p>
-            <a:pPr indent="0" marL="0">
-              <a:buNone/>
-            </a:pPr>
-            <a:r>
-              <a:rPr lang="en-US" sz="1250" dirty="0">
-                <a:solidFill>
-                  <a:srgbClr val="687385"/>
-                </a:solidFill>
-              </a:rPr>
-              <a:t>Methodology — not a result from the three-document teaching corpus.</a:t>
-            </a:r>
-            <a:endParaRPr lang="en-US" sz="1250" dirty="0"/>
-          </a:p>
-        </p:txBody>
-      </p:sp>
-      <p:sp>
-        <p:nvSpPr>
-          <p:cNvPr id="5" name="Shape 3"/>
-          <p:cNvSpPr/>
-          <p:nvPr/>
-        </p:nvSpPr>
-        <p:spPr>
-          <a:xfrm>
-            <a:off x="868680" y="1920240"/>
-            <a:ext cx="2331720" cy="960120"/>
-          </a:xfrm>
-          <a:prstGeom prst="roundRect">
-            <a:avLst>
-              <a:gd name="adj" fmla="val 7619"/>
-            </a:avLst>
-          </a:prstGeom>
-          <a:solidFill>
-            <a:srgbClr val="F7F9FC"/>
-          </a:solidFill>
-          <a:ln w="12700">
-            <a:solidFill>
-              <a:srgbClr val="D8DEE9"/>
-            </a:solidFill>
-            <a:prstDash val="solid"/>
-          </a:ln>
-          <a:effectLst>
-            <a:outerShdw sx="100000" sy="100000" kx="0" ky="0" algn="bl" rotWithShape="0" blurRad="8.934338916334009e+188" dist="5.956225944222673e+188" dir="2.806532213419321e+221">
-              <a:srgbClr val="000000">
-                <a:alpha val="1.2999999999999997e+229"/>
-              </a:srgbClr>
-            </a:outerShdw>
-          </a:effectLst>
-        </p:spPr>
-        <p:txBody>
-          <a:bodyPr/>
-          <a:p/>
-        </p:txBody>
-      </p:sp>
-      <p:sp>
-        <p:nvSpPr>
-          <p:cNvPr id="6" name="Text 4"/>
-          <p:cNvSpPr/>
-          <p:nvPr/>
-        </p:nvSpPr>
-        <p:spPr>
-          <a:xfrm>
-            <a:off x="1234440" y="2258568"/>
-            <a:ext cx="1600200" cy="201168"/>
-          </a:xfrm>
-          <a:prstGeom prst="rect">
-            <a:avLst/>
-          </a:prstGeom>
-          <a:noFill/>
-          <a:ln/>
-        </p:spPr>
-        <p:txBody>
-          <a:bodyPr wrap="square" lIns="0" tIns="0" rIns="0" bIns="0" rtlCol="0" anchor="ctr"/>
-          <a:lstStyle/>
-          <a:p>
-            <a:pPr algn="ctr" indent="0" marL="0">
-              <a:buNone/>
-            </a:pPr>
-            <a:r>
-              <a:rPr lang="en-US" sz="1400" b="1" dirty="0">
-                <a:solidFill>
-                  <a:srgbClr val="172033"/>
-                </a:solidFill>
-              </a:rPr>
-              <a:t>DOCUMENT</a:t>
-            </a:r>
-            <a:endParaRPr lang="en-US" sz="1400" dirty="0"/>
-          </a:p>
-        </p:txBody>
-      </p:sp>
-      <p:sp>
-        <p:nvSpPr>
-          <p:cNvPr id="7" name="Shape 5"/>
-          <p:cNvSpPr/>
-          <p:nvPr/>
-        </p:nvSpPr>
-        <p:spPr>
-          <a:xfrm>
-            <a:off x="3337560" y="2404872"/>
-            <a:ext cx="822960" cy="0"/>
-          </a:xfrm>
-          <a:prstGeom prst="line">
-            <a:avLst/>
-          </a:prstGeom>
-          <a:noFill/>
-          <a:ln w="29210">
-            <a:solidFill>
-              <a:srgbClr val="687385"/>
-            </a:solidFill>
-            <a:prstDash val="solid"/>
-            <a:headEnd type="none"/>
-            <a:tailEnd type="triangle"/>
-          </a:ln>
-        </p:spPr>
-        <p:txBody>
-          <a:bodyPr/>
-          <a:p/>
-        </p:txBody>
-      </p:sp>
-      <p:sp>
-        <p:nvSpPr>
-          <p:cNvPr id="8" name="Shape 6"/>
-          <p:cNvSpPr/>
-          <p:nvPr/>
-        </p:nvSpPr>
-        <p:spPr>
-          <a:xfrm>
-            <a:off x="4297680" y="1828800"/>
-            <a:ext cx="2788920" cy="1143000"/>
-          </a:xfrm>
-          <a:prstGeom prst="roundRect">
-            <a:avLst>
-              <a:gd name="adj" fmla="val 6400"/>
-            </a:avLst>
-          </a:prstGeom>
-          <a:solidFill>
-            <a:srgbClr val="FFF7E8"/>
-          </a:solidFill>
-          <a:ln w="12700">
-            <a:solidFill>
-              <a:srgbClr val="F2D29A"/>
-            </a:solidFill>
-            <a:prstDash val="solid"/>
-          </a:ln>
-          <a:effectLst>
-            <a:outerShdw sx="100000" sy="100000" kx="0" ky="0" algn="bl" rotWithShape="0" blurRad="1.1346610423744191e+193" dist="7.564406949162794e+192" dir="1.6839193280515925e+226">
-              <a:srgbClr val="000000">
-                <a:alpha val="1.2999999999999997e+234"/>
-              </a:srgbClr>
-            </a:outerShdw>
-          </a:effectLst>
-        </p:spPr>
-        <p:txBody>
-          <a:bodyPr/>
-          <a:p/>
-        </p:txBody>
-      </p:sp>
-      <p:sp>
-        <p:nvSpPr>
-          <p:cNvPr id="9" name="Text 7"/>
-          <p:cNvSpPr/>
-          <p:nvPr/>
-        </p:nvSpPr>
-        <p:spPr>
-          <a:xfrm>
-            <a:off x="4572000" y="2084832"/>
-            <a:ext cx="2240280" cy="502920"/>
-          </a:xfrm>
-          <a:prstGeom prst="rect">
-            <a:avLst/>
-          </a:prstGeom>
-          <a:noFill/>
-          <a:ln/>
-        </p:spPr>
-        <p:txBody>
-          <a:bodyPr wrap="square" lIns="0" tIns="0" rIns="0" bIns="0" rtlCol="0" anchor="ctr">
-            <a:normAutofit/>
-          </a:bodyPr>
-          <a:lstStyle/>
-          <a:p>
-            <a:pPr algn="ctr" indent="0" marL="0">
-              <a:buNone/>
-            </a:pPr>
-            <a:r>
-              <a:rPr lang="en-US" sz="1200" b="1" dirty="0">
-                <a:solidFill>
-                  <a:srgbClr val="F59E0B"/>
-                </a:solidFill>
-              </a:rPr>
-              <a:t>Any flags?</a:t>
-            </a:r>
-            <a:endParaRPr lang="en-US" sz="1200" dirty="0"/>
-          </a:p>
-          <a:p>
-            <a:pPr algn="ctr" indent="0" marL="0">
-              <a:buNone/>
-            </a:pPr>
-            <a:r>
-              <a:rPr lang="en-US" sz="1200" b="1" dirty="0">
-                <a:solidFill>
-                  <a:srgbClr val="F59E0B"/>
-                </a:solidFill>
-              </a:rPr>
-              <a:t>low confidence / dropped / malformed</a:t>
-            </a:r>
-            <a:endParaRPr lang="en-US" sz="1200" dirty="0"/>
-          </a:p>
-        </p:txBody>
-      </p:sp>
-      <p:sp>
-        <p:nvSpPr>
-          <p:cNvPr id="10" name="Shape 8"/>
-          <p:cNvSpPr/>
-          <p:nvPr/>
-        </p:nvSpPr>
-        <p:spPr>
-          <a:xfrm>
-            <a:off x="5669280" y="3063240"/>
-            <a:ext cx="0" cy="640080"/>
-          </a:xfrm>
-          <a:prstGeom prst="line">
-            <a:avLst/>
-          </a:prstGeom>
-          <a:noFill/>
-          <a:ln w="29210">
-            <a:solidFill>
-              <a:srgbClr val="E45757"/>
-            </a:solidFill>
-            <a:prstDash val="solid"/>
-            <a:headEnd type="none"/>
-            <a:tailEnd type="triangle"/>
-          </a:ln>
-        </p:spPr>
-        <p:txBody>
-          <a:bodyPr/>
-          <a:p/>
-        </p:txBody>
-      </p:sp>
-      <p:sp>
-        <p:nvSpPr>
-          <p:cNvPr id="11" name="Text 9"/>
-          <p:cNvSpPr/>
-          <p:nvPr/>
-        </p:nvSpPr>
-        <p:spPr>
-          <a:xfrm>
-            <a:off x="5806440" y="3246120"/>
-            <a:ext cx="502920" cy="164592"/>
-          </a:xfrm>
-          <a:prstGeom prst="rect">
-            <a:avLst/>
-          </a:prstGeom>
-          <a:noFill/>
-          <a:ln/>
-        </p:spPr>
-        <p:txBody>
-          <a:bodyPr wrap="square" lIns="0" tIns="0" rIns="0" bIns="0" rtlCol="0" anchor="ctr"/>
-          <a:lstStyle/>
-          <a:p>
-            <a:pPr indent="0" marL="0">
-              <a:buNone/>
-            </a:pPr>
-            <a:r>
-              <a:rPr lang="en-US" sz="800" b="1" dirty="0">
-                <a:solidFill>
-                  <a:srgbClr val="E45757"/>
-                </a:solidFill>
-              </a:rPr>
-              <a:t>YES</a:t>
-            </a:r>
-            <a:endParaRPr lang="en-US" sz="800" dirty="0"/>
-          </a:p>
-        </p:txBody>
-      </p:sp>
-      <p:sp>
-        <p:nvSpPr>
-          <p:cNvPr id="12" name="Shape 10"/>
-          <p:cNvSpPr/>
-          <p:nvPr/>
-        </p:nvSpPr>
-        <p:spPr>
-          <a:xfrm>
-            <a:off x="4434840" y="3822192"/>
-            <a:ext cx="2514600" cy="1097280"/>
-          </a:xfrm>
-          <a:prstGeom prst="roundRect">
-            <a:avLst>
-              <a:gd name="adj" fmla="val 6667"/>
-            </a:avLst>
-          </a:prstGeom>
-          <a:solidFill>
-            <a:srgbClr val="FFF1F1"/>
-          </a:solidFill>
-          <a:ln w="12700">
-            <a:solidFill>
-              <a:srgbClr val="F1B1B1"/>
-            </a:solidFill>
-            <a:prstDash val="solid"/>
-          </a:ln>
-          <a:effectLst>
-            <a:outerShdw sx="100000" sy="100000" kx="0" ky="0" algn="bl" rotWithShape="0" blurRad="1.4410195238155123e+197" dist="9.606796825436748e+196" dir="1.0103515968309554e+231">
-              <a:srgbClr val="000000">
-                <a:alpha val="1.2999999999999996e+239"/>
-              </a:srgbClr>
-            </a:outerShdw>
-          </a:effectLst>
-        </p:spPr>
-        <p:txBody>
-          <a:bodyPr/>
-          <a:p/>
-        </p:txBody>
-      </p:sp>
-      <p:sp>
-        <p:nvSpPr>
-          <p:cNvPr id="13" name="Text 11"/>
-          <p:cNvSpPr/>
-          <p:nvPr/>
-        </p:nvSpPr>
-        <p:spPr>
-          <a:xfrm>
-            <a:off x="4754880" y="4224528"/>
-            <a:ext cx="1874520" cy="228600"/>
-          </a:xfrm>
-          <a:prstGeom prst="rect">
-            <a:avLst/>
-          </a:prstGeom>
-          <a:noFill/>
-          <a:ln/>
-        </p:spPr>
-        <p:txBody>
-          <a:bodyPr wrap="square" lIns="0" tIns="0" rIns="0" bIns="0" rtlCol="0" anchor="ctr"/>
-          <a:lstStyle/>
-          <a:p>
-            <a:pPr algn="ctr" indent="0" marL="0">
-              <a:buNone/>
-            </a:pPr>
-            <a:r>
-              <a:rPr lang="en-US" sz="1600" b="1" dirty="0">
-                <a:solidFill>
-                  <a:srgbClr val="E45757"/>
-                </a:solidFill>
-              </a:rPr>
-              <a:t>REVIEW 100%</a:t>
-            </a:r>
-            <a:endParaRPr lang="en-US" sz="1600" dirty="0"/>
-          </a:p>
-        </p:txBody>
-      </p:sp>
-      <p:sp>
-        <p:nvSpPr>
-          <p:cNvPr id="14" name="Shape 12"/>
-          <p:cNvSpPr/>
-          <p:nvPr/>
-        </p:nvSpPr>
-        <p:spPr>
-          <a:xfrm>
-            <a:off x="7223760" y="2404872"/>
-            <a:ext cx="822960" cy="0"/>
-          </a:xfrm>
-          <a:prstGeom prst="line">
-            <a:avLst/>
-          </a:prstGeom>
-          <a:noFill/>
-          <a:ln w="29210">
-            <a:solidFill>
-              <a:srgbClr val="2FA36B"/>
-            </a:solidFill>
-            <a:prstDash val="solid"/>
-            <a:headEnd type="none"/>
-            <a:tailEnd type="triangle"/>
-          </a:ln>
-        </p:spPr>
-        <p:txBody>
-          <a:bodyPr/>
-          <a:p/>
-        </p:txBody>
-      </p:sp>
-      <p:sp>
-        <p:nvSpPr>
-          <p:cNvPr id="15" name="Text 13"/>
-          <p:cNvSpPr/>
-          <p:nvPr/>
-        </p:nvSpPr>
-        <p:spPr>
-          <a:xfrm>
-            <a:off x="7388352" y="2084832"/>
-            <a:ext cx="411480" cy="164592"/>
-          </a:xfrm>
-          <a:prstGeom prst="rect">
-            <a:avLst/>
-          </a:prstGeom>
-          <a:noFill/>
-          <a:ln/>
-        </p:spPr>
-        <p:txBody>
-          <a:bodyPr wrap="square" lIns="0" tIns="0" rIns="0" bIns="0" rtlCol="0" anchor="ctr"/>
-          <a:lstStyle/>
-          <a:p>
-            <a:pPr algn="ctr" indent="0" marL="0">
-              <a:buNone/>
-            </a:pPr>
-            <a:r>
-              <a:rPr lang="en-US" sz="800" b="1" dirty="0">
-                <a:solidFill>
-                  <a:srgbClr val="2FA36B"/>
-                </a:solidFill>
-              </a:rPr>
-              <a:t>NO</a:t>
-            </a:r>
-            <a:endParaRPr lang="en-US" sz="800" dirty="0"/>
-          </a:p>
-        </p:txBody>
-      </p:sp>
-      <p:sp>
-        <p:nvSpPr>
-          <p:cNvPr id="16" name="Shape 14"/>
-          <p:cNvSpPr/>
-          <p:nvPr/>
-        </p:nvSpPr>
-        <p:spPr>
-          <a:xfrm>
-            <a:off x="8183880" y="1828800"/>
-            <a:ext cx="2971800" cy="1143000"/>
-          </a:xfrm>
-          <a:prstGeom prst="roundRect">
-            <a:avLst>
-              <a:gd name="adj" fmla="val 6400"/>
-            </a:avLst>
-          </a:prstGeom>
-          <a:solidFill>
-            <a:srgbClr val="F2FBF6"/>
-          </a:solidFill>
-          <a:ln w="12700">
-            <a:solidFill>
-              <a:srgbClr val="9AD7B5"/>
-            </a:solidFill>
-            <a:prstDash val="solid"/>
-          </a:ln>
-          <a:effectLst>
-            <a:outerShdw sx="100000" sy="100000" kx="0" ky="0" algn="bl" rotWithShape="0" blurRad="1.8300947952457007e+201" dist="1.220063196830467e+201" dir="6.062109580985733e+235">
-              <a:srgbClr val="000000">
-                <a:alpha val="1.2999999999999996e+244"/>
-              </a:srgbClr>
-            </a:outerShdw>
-          </a:effectLst>
-        </p:spPr>
-        <p:txBody>
-          <a:bodyPr/>
-          <a:p/>
-        </p:txBody>
-      </p:sp>
-      <p:sp>
-        <p:nvSpPr>
-          <p:cNvPr id="17" name="Text 15"/>
-          <p:cNvSpPr/>
-          <p:nvPr/>
-        </p:nvSpPr>
-        <p:spPr>
-          <a:xfrm>
-            <a:off x="8458200" y="2240280"/>
-            <a:ext cx="2423160" cy="274320"/>
-          </a:xfrm>
-          <a:prstGeom prst="rect">
-            <a:avLst/>
-          </a:prstGeom>
-          <a:noFill/>
-          <a:ln/>
-        </p:spPr>
-        <p:txBody>
-          <a:bodyPr wrap="square" lIns="0" tIns="0" rIns="0" bIns="0" rtlCol="0" anchor="ctr"/>
-          <a:lstStyle/>
-          <a:p>
-            <a:pPr algn="ctr" indent="0" marL="0">
-              <a:buNone/>
-            </a:pPr>
-            <a:r>
-              <a:rPr lang="en-US" sz="1300" b="1" dirty="0">
-                <a:solidFill>
-                  <a:srgbClr val="2FA36B"/>
-                </a:solidFill>
-              </a:rPr>
-              <a:t>Tokens/page outlier?</a:t>
-            </a:r>
-            <a:endParaRPr lang="en-US" sz="1300" dirty="0"/>
-          </a:p>
-        </p:txBody>
-      </p:sp>
-      <p:sp>
-        <p:nvSpPr>
-          <p:cNvPr id="18" name="Shape 16"/>
-          <p:cNvSpPr/>
-          <p:nvPr/>
-        </p:nvSpPr>
-        <p:spPr>
-          <a:xfrm>
-            <a:off x="9674352" y="3063240"/>
-            <a:ext cx="0" cy="640080"/>
-          </a:xfrm>
-          <a:prstGeom prst="line">
-            <a:avLst/>
-          </a:prstGeom>
-          <a:noFill/>
-          <a:ln w="29210">
-            <a:solidFill>
-              <a:srgbClr val="F59E0B"/>
-            </a:solidFill>
-            <a:prstDash val="solid"/>
-            <a:headEnd type="none"/>
-            <a:tailEnd type="triangle"/>
-          </a:ln>
-        </p:spPr>
-        <p:txBody>
-          <a:bodyPr/>
-          <a:p/>
-        </p:txBody>
-      </p:sp>
-      <p:sp>
-        <p:nvSpPr>
-          <p:cNvPr id="19" name="Text 17"/>
-          <p:cNvSpPr/>
-          <p:nvPr/>
-        </p:nvSpPr>
-        <p:spPr>
-          <a:xfrm>
-            <a:off x="9829800" y="3246120"/>
-            <a:ext cx="502920" cy="164592"/>
-          </a:xfrm>
-          <a:prstGeom prst="rect">
-            <a:avLst/>
-          </a:prstGeom>
-          <a:noFill/>
-          <a:ln/>
-        </p:spPr>
-        <p:txBody>
-          <a:bodyPr wrap="square" lIns="0" tIns="0" rIns="0" bIns="0" rtlCol="0" anchor="ctr"/>
-          <a:lstStyle/>
-          <a:p>
-            <a:pPr indent="0" marL="0">
-              <a:buNone/>
-            </a:pPr>
-            <a:r>
-              <a:rPr lang="en-US" sz="800" b="1" dirty="0">
-                <a:solidFill>
-                  <a:srgbClr val="F59E0B"/>
-                </a:solidFill>
-              </a:rPr>
-              <a:t>YES</a:t>
-            </a:r>
-            <a:endParaRPr lang="en-US" sz="800" dirty="0"/>
-          </a:p>
-        </p:txBody>
-      </p:sp>
-      <p:sp>
-        <p:nvSpPr>
-          <p:cNvPr id="20" name="Shape 18"/>
-          <p:cNvSpPr/>
-          <p:nvPr/>
-        </p:nvSpPr>
-        <p:spPr>
-          <a:xfrm>
-            <a:off x="8458200" y="3822192"/>
-            <a:ext cx="2423160" cy="1097280"/>
-          </a:xfrm>
-          <a:prstGeom prst="roundRect">
-            <a:avLst>
-              <a:gd name="adj" fmla="val 6667"/>
-            </a:avLst>
-          </a:prstGeom>
-          <a:solidFill>
-            <a:srgbClr val="FFF7E8"/>
-          </a:solidFill>
-          <a:ln w="12700">
-            <a:solidFill>
-              <a:srgbClr val="F2D29A"/>
-            </a:solidFill>
-            <a:prstDash val="solid"/>
-          </a:ln>
-          <a:effectLst>
-            <a:outerShdw sx="100000" sy="100000" kx="0" ky="0" algn="bl" rotWithShape="0" blurRad="2.3242203899620397e+205" dist="1.5494802599746932e+205" dir="3.63726574859144e+240">
-              <a:srgbClr val="000000">
-                <a:alpha val="1.2999999999999995e+249"/>
-              </a:srgbClr>
-            </a:outerShdw>
-          </a:effectLst>
-        </p:spPr>
-        <p:txBody>
-          <a:bodyPr/>
-          <a:p/>
-        </p:txBody>
-      </p:sp>
-      <p:sp>
-        <p:nvSpPr>
-          <p:cNvPr id="21" name="Text 19"/>
-          <p:cNvSpPr/>
-          <p:nvPr/>
-        </p:nvSpPr>
-        <p:spPr>
-          <a:xfrm>
-            <a:off x="8823960" y="4224528"/>
-            <a:ext cx="1691640" cy="228600"/>
-          </a:xfrm>
-          <a:prstGeom prst="rect">
-            <a:avLst/>
-          </a:prstGeom>
-          <a:noFill/>
-          <a:ln/>
-        </p:spPr>
-        <p:txBody>
-          <a:bodyPr wrap="square" lIns="0" tIns="0" rIns="0" bIns="0" rtlCol="0" anchor="ctr"/>
-          <a:lstStyle/>
-          <a:p>
-            <a:pPr algn="ctr" indent="0" marL="0">
-              <a:buNone/>
-            </a:pPr>
-            <a:r>
-              <a:rPr lang="en-US" sz="1600" b="1" dirty="0">
-                <a:solidFill>
-                  <a:srgbClr val="F59E0B"/>
-                </a:solidFill>
-              </a:rPr>
-              <a:t>REVIEW</a:t>
-            </a:r>
-            <a:endParaRPr lang="en-US" sz="1600" dirty="0"/>
-          </a:p>
-        </p:txBody>
-      </p:sp>
-      <p:sp>
-        <p:nvSpPr>
-          <p:cNvPr id="22" name="Shape 20"/>
-          <p:cNvSpPr/>
-          <p:nvPr/>
-        </p:nvSpPr>
-        <p:spPr>
-          <a:xfrm>
-            <a:off x="11219688" y="2404872"/>
-            <a:ext cx="438912" cy="0"/>
-          </a:xfrm>
-          <a:prstGeom prst="line">
-            <a:avLst/>
-          </a:prstGeom>
-          <a:noFill/>
-          <a:ln w="29210">
-            <a:solidFill>
-              <a:srgbClr val="2F80ED"/>
-            </a:solidFill>
-            <a:prstDash val="solid"/>
-            <a:headEnd type="none"/>
-            <a:tailEnd type="triangle"/>
-          </a:ln>
-        </p:spPr>
-        <p:txBody>
-          <a:bodyPr/>
-          <a:p/>
-        </p:txBody>
-      </p:sp>
-      <p:sp>
-        <p:nvSpPr>
-          <p:cNvPr id="23" name="Text 21"/>
-          <p:cNvSpPr/>
-          <p:nvPr/>
-        </p:nvSpPr>
-        <p:spPr>
-          <a:xfrm>
-            <a:off x="11201400" y="2084832"/>
-            <a:ext cx="411480" cy="164592"/>
-          </a:xfrm>
-          <a:prstGeom prst="rect">
-            <a:avLst/>
-          </a:prstGeom>
-          <a:noFill/>
-          <a:ln/>
-        </p:spPr>
-        <p:txBody>
-          <a:bodyPr wrap="square" lIns="0" tIns="0" rIns="0" bIns="0" rtlCol="0" anchor="ctr"/>
-          <a:lstStyle/>
-          <a:p>
-            <a:pPr algn="ctr" indent="0" marL="0">
-              <a:buNone/>
-            </a:pPr>
-            <a:r>
-              <a:rPr lang="en-US" sz="800" b="1" dirty="0">
-                <a:solidFill>
-                  <a:srgbClr val="2F80ED"/>
-                </a:solidFill>
-              </a:rPr>
-              <a:t>NO</a:t>
-            </a:r>
-            <a:endParaRPr lang="en-US" sz="800" dirty="0"/>
-          </a:p>
-        </p:txBody>
-      </p:sp>
-      <p:sp>
-        <p:nvSpPr>
-          <p:cNvPr id="24" name="Shape 22"/>
-          <p:cNvSpPr/>
-          <p:nvPr/>
-        </p:nvSpPr>
-        <p:spPr>
-          <a:xfrm>
-            <a:off x="10991088" y="3822192"/>
-            <a:ext cx="969264" cy="1097280"/>
-          </a:xfrm>
-          <a:prstGeom prst="roundRect">
-            <a:avLst>
-              <a:gd name="adj" fmla="val 7547"/>
-            </a:avLst>
-          </a:prstGeom>
-          <a:solidFill>
-            <a:srgbClr val="EAF3FF"/>
-          </a:solidFill>
-          <a:ln w="12700">
-            <a:solidFill>
-              <a:srgbClr val="B7D8FF"/>
-            </a:solidFill>
-            <a:prstDash val="solid"/>
-          </a:ln>
-        </p:spPr>
-        <p:txBody>
-          <a:bodyPr/>
-          <a:p/>
-        </p:txBody>
-      </p:sp>
-      <p:sp>
-        <p:nvSpPr>
-          <p:cNvPr id="25" name="Text 23"/>
-          <p:cNvSpPr/>
-          <p:nvPr/>
-        </p:nvSpPr>
-        <p:spPr>
-          <a:xfrm>
-            <a:off x="11027664" y="4123944"/>
-            <a:ext cx="896112" cy="438912"/>
-          </a:xfrm>
-          <a:prstGeom prst="rect">
-            <a:avLst/>
-          </a:prstGeom>
-          <a:noFill/>
-          <a:ln/>
-        </p:spPr>
-        <p:txBody>
-          <a:bodyPr wrap="square" lIns="0" tIns="0" rIns="0" bIns="0" rtlCol="0" anchor="ctr"/>
-          <a:lstStyle/>
-          <a:p>
-            <a:pPr algn="ctr" indent="0" marL="0">
-              <a:buNone/>
-            </a:pPr>
-            <a:r>
-              <a:rPr lang="en-US" sz="1200" b="1" dirty="0">
-                <a:solidFill>
-                  <a:srgbClr val="2F80ED"/>
-                </a:solidFill>
-              </a:rPr>
-              <a:t>AUDIT</a:t>
-            </a:r>
-            <a:endParaRPr lang="en-US" sz="1200" dirty="0"/>
-          </a:p>
-          <a:p>
-            <a:pPr algn="ctr" indent="0" marL="0">
-              <a:buNone/>
-            </a:pPr>
-            <a:r>
-              <a:rPr lang="en-US" sz="1200" b="1" dirty="0">
-                <a:solidFill>
-                  <a:srgbClr val="2F80ED"/>
-                </a:solidFill>
-              </a:rPr>
-              <a:t>5–10%</a:t>
-            </a:r>
-            <a:endParaRPr lang="en-US" sz="1200" dirty="0"/>
-          </a:p>
-        </p:txBody>
-      </p:sp>
-      <p:sp>
-        <p:nvSpPr>
-          <p:cNvPr id="26" name="Shape 24"/>
-          <p:cNvSpPr/>
-          <p:nvPr/>
-        </p:nvSpPr>
-        <p:spPr>
-          <a:xfrm>
-            <a:off x="1965960" y="5577840"/>
-            <a:ext cx="8321040" cy="502920"/>
-          </a:xfrm>
-          <a:prstGeom prst="roundRect">
-            <a:avLst>
-              <a:gd name="adj" fmla="val 7273"/>
-            </a:avLst>
-          </a:prstGeom>
-          <a:solidFill>
-            <a:srgbClr val="EAF3FF"/>
-          </a:solidFill>
-          <a:ln w="12700">
-            <a:solidFill>
-              <a:srgbClr val="B7D8FF"/>
-            </a:solidFill>
-            <a:prstDash val="solid"/>
-          </a:ln>
-        </p:spPr>
-        <p:txBody>
-          <a:bodyPr/>
-          <a:p/>
-        </p:txBody>
-      </p:sp>
-      <p:sp>
-        <p:nvSpPr>
-          <p:cNvPr id="27" name="Text 25"/>
-          <p:cNvSpPr/>
-          <p:nvPr/>
-        </p:nvSpPr>
-        <p:spPr>
-          <a:xfrm>
-            <a:off x="2240280" y="5742432"/>
-            <a:ext cx="7772400" cy="182880"/>
-          </a:xfrm>
-          <a:prstGeom prst="rect">
-            <a:avLst/>
-          </a:prstGeom>
-          <a:noFill/>
-          <a:ln/>
-        </p:spPr>
-        <p:txBody>
-          <a:bodyPr wrap="square" lIns="0" tIns="0" rIns="0" bIns="0" rtlCol="0" anchor="ctr"/>
-          <a:lstStyle/>
-          <a:p>
-            <a:pPr algn="ctr" indent="0" marL="0">
-              <a:buNone/>
-            </a:pPr>
-            <a:r>
-              <a:rPr lang="en-US" sz="1150" b="1" dirty="0">
-                <a:solidFill>
-                  <a:srgbClr val="2F80ED"/>
-                </a:solidFill>
-              </a:rPr>
-              <a:t>If audits keep finding real issues → raise the clean-bucket audit rate until the hit rate falls.</a:t>
-            </a:r>
-            <a:endParaRPr lang="en-US" sz="1150" dirty="0"/>
-          </a:p>
-        </p:txBody>
-      </p:sp>
-      <p:sp>
-        <p:nvSpPr>
-          <p:cNvPr id="25" name="Slide Number Placeholder 0"/>
-          <p:cNvSpPr>
-            <a:spLocks noGrp="1"/>
-          </p:cNvSpPr>
-          <p:nvPr>
-            <p:ph type="sldNum" sz="quarter" idx="4294967295"/>
-          </p:nvPr>
-        </p:nvSpPr>
-        <p:spPr>
-          <a:xfrm>
-            <a:off x="11612880" y="6510528"/>
-            <a:ext cx="800000" cy="300000"/>
-          </a:xfrm>
-          <a:prstGeom prst="rect">
-            <a:avLst/>
-          </a:prstGeom>
-          <a:extLst>
-            <a:ext uri="{C572A759-6A51-4108-AA02-DFA0A04FC94B}">
-              <ma14:wrappingTextBoxFlag xmlns:ma14="http://schemas.microsoft.com/office/mac/drawingml/2011/main" val="0"/>
-            </a:ext>
-          </a:extLst>
-        </p:spPr>
-        <p:txBody>
-          <a:bodyPr/>
-          <a:lstStyle>
-            <a:lvl1pPr>
-              <a:defRPr sz="650">
-                <a:solidFill>
-                  <a:srgbClr val="9AA4B2"/>
-                </a:solidFill>
-                <a:latin typeface="Aptos"/>
-                <a:ea typeface="Aptos"/>
-                <a:cs typeface="Aptos"/>
-              </a:defRPr>
-            </a:lvl1pPr>
-          </a:lstStyle>
-          <a:p>
-            <a:pPr algn="l"/>
-            <a:fld id="{F7021451-1387-4CA6-816F-3879F97B5CBC}" type="slidenum">
-              <a:rPr b="0" lang="en-US"/>
-              <a:t>21</a:t>
-            </a:fld>
-            <a:endParaRPr lang="en-US"/>
-          </a:p>
-        </p:txBody>
-      </p:sp>
-    </p:spTree>
-  </p:cSld>
-  <p:clrMapOvr>
-    <a:masterClrMapping/>
-  </p:clrMapOvr>
-  <p:transition spd="fast" advClick="1">
-    <p:fade/>
-  </p:transition>
-</p:sld>
-</file>
-
-<file path=ppt/slides/slide22.xml><?xml version="1.0" encoding="utf-8"?>
-<p:sld xmlns:a="http://schemas.openxmlformats.org/drawingml/2006/main" xmlns:r="http://schemas.openxmlformats.org/officeDocument/2006/relationships" xmlns:p="http://schemas.openxmlformats.org/presentationml/2006/main">
-  <p:cSld name="Slide 22">
-    <p:spTree>
-      <p:nvGrpSpPr>
-        <p:cNvPr id="1" name=""/>
-        <p:cNvGrpSpPr/>
-        <p:nvPr/>
-      </p:nvGrpSpPr>
-      <p:grpSpPr>
-        <a:xfrm>
-          <a:off x="0" y="0"/>
-          <a:ext cx="0" cy="0"/>
-          <a:chOff x="0" y="0"/>
-          <a:chExt cx="0" cy="0"/>
-        </a:xfrm>
-      </p:grpSpPr>
-      <p:sp>
-        <p:nvSpPr>
-          <p:cNvPr id="2" name="Text 0"/>
-          <p:cNvSpPr/>
-          <p:nvPr/>
-        </p:nvSpPr>
-        <p:spPr>
-          <a:xfrm>
-            <a:off x="502920" y="438912"/>
-            <a:ext cx="2743200" cy="201168"/>
-          </a:xfrm>
-          <a:prstGeom prst="rect">
-            <a:avLst/>
-          </a:prstGeom>
-          <a:noFill/>
-          <a:ln/>
-        </p:spPr>
-        <p:txBody>
-          <a:bodyPr wrap="square" lIns="0" tIns="0" rIns="0" bIns="0" rtlCol="0" anchor="ctr"/>
-          <a:lstStyle/>
-          <a:p>
-            <a:pPr indent="0" marL="0">
-              <a:buNone/>
-            </a:pPr>
-            <a:r>
-              <a:rPr lang="en-US" sz="800" b="1" dirty="0">
-                <a:solidFill>
-                  <a:srgbClr val="2F80ED"/>
-                </a:solidFill>
-              </a:rPr>
-              <a:t>A QUIET DETAIL</a:t>
-            </a:r>
-            <a:endParaRPr lang="en-US" sz="800" dirty="0"/>
-          </a:p>
-        </p:txBody>
-      </p:sp>
-      <p:sp>
-        <p:nvSpPr>
-          <p:cNvPr id="3" name="Text 1"/>
-          <p:cNvSpPr/>
-          <p:nvPr/>
-        </p:nvSpPr>
-        <p:spPr>
-          <a:xfrm>
-            <a:off x="502920" y="713232"/>
-            <a:ext cx="10972800" cy="530352"/>
-          </a:xfrm>
-          <a:prstGeom prst="rect">
-            <a:avLst/>
-          </a:prstGeom>
-          <a:noFill/>
-          <a:ln/>
-        </p:spPr>
-        <p:txBody>
-          <a:bodyPr wrap="square" lIns="0" tIns="0" rIns="0" bIns="0" rtlCol="0" anchor="ctr">
-            <a:normAutofit/>
-          </a:bodyPr>
-          <a:lstStyle/>
-          <a:p>
-            <a:pPr indent="0" marL="0">
-              <a:buNone/>
-            </a:pPr>
-            <a:r>
-              <a:rPr lang="en-US" sz="2600" b="1" dirty="0">
-                <a:solidFill>
-                  <a:srgbClr val="172033"/>
-                </a:solidFill>
-              </a:rPr>
-              <a:t>Partial Runs Get Skipped, Not Guessed At</a:t>
-            </a:r>
-            <a:endParaRPr lang="en-US" sz="2600" dirty="0"/>
-          </a:p>
-        </p:txBody>
-      </p:sp>
-      <p:sp>
-        <p:nvSpPr>
-          <p:cNvPr id="4" name="Shape 2"/>
-          <p:cNvSpPr/>
-          <p:nvPr/>
-        </p:nvSpPr>
-        <p:spPr>
-          <a:xfrm>
-            <a:off x="914400" y="2011680"/>
-            <a:ext cx="10058400" cy="804672"/>
-          </a:xfrm>
-          <a:prstGeom prst="roundRect">
-            <a:avLst>
-              <a:gd name="adj" fmla="val 9091"/>
-            </a:avLst>
-          </a:prstGeom>
-          <a:solidFill>
-            <a:srgbClr val="FFFFFF"/>
-          </a:solidFill>
-          <a:ln w="12700">
-            <a:solidFill>
-              <a:srgbClr val="D8DEE9"/>
-            </a:solidFill>
-            <a:prstDash val="solid"/>
-          </a:ln>
-          <a:effectLst>
-            <a:outerShdw sx="100000" sy="100000" kx="0" ky="0" algn="bl" rotWithShape="0" blurRad="2.9517598952517903e+209" dist="1.9678399301678603e+209" dir="2.182359449154864e+245">
-              <a:srgbClr val="000000">
-                <a:alpha val="1.2999999999999995e+254"/>
-              </a:srgbClr>
-            </a:outerShdw>
-          </a:effectLst>
-        </p:spPr>
-        <p:txBody>
-          <a:bodyPr/>
-          <a:p/>
-        </p:txBody>
-      </p:sp>
-      <p:sp>
-        <p:nvSpPr>
-          <p:cNvPr id="5" name="Shape 3"/>
-          <p:cNvSpPr/>
-          <p:nvPr/>
-        </p:nvSpPr>
-        <p:spPr>
-          <a:xfrm>
-            <a:off x="1143000" y="2157984"/>
-            <a:ext cx="438912" cy="438912"/>
-          </a:xfrm>
-          <a:prstGeom prst="ellipse">
-            <a:avLst/>
-          </a:prstGeom>
-          <a:solidFill>
-            <a:srgbClr val="2FA36B"/>
-          </a:solidFill>
-          <a:ln w="12700">
-            <a:solidFill>
-              <a:srgbClr val="2FA36B"/>
-            </a:solidFill>
-            <a:prstDash val="solid"/>
-          </a:ln>
-        </p:spPr>
-        <p:txBody>
-          <a:bodyPr/>
-          <a:p/>
-        </p:txBody>
-      </p:sp>
-      <p:sp>
-        <p:nvSpPr>
-          <p:cNvPr id="6" name="Text 4"/>
-          <p:cNvSpPr/>
-          <p:nvPr/>
-        </p:nvSpPr>
-        <p:spPr>
-          <a:xfrm>
-            <a:off x="1143000" y="2240280"/>
-            <a:ext cx="438912" cy="210312"/>
-          </a:xfrm>
-          <a:prstGeom prst="rect">
-            <a:avLst/>
-          </a:prstGeom>
-          <a:noFill/>
-          <a:ln/>
-        </p:spPr>
-        <p:txBody>
-          <a:bodyPr wrap="square" lIns="0" tIns="0" rIns="0" bIns="0" rtlCol="0" anchor="ctr"/>
-          <a:lstStyle/>
-          <a:p>
-            <a:pPr algn="ctr" indent="0" marL="0">
-              <a:buNone/>
-            </a:pPr>
-            <a:r>
-              <a:rPr lang="en-US" sz="1400" b="1" dirty="0">
-                <a:solidFill>
-                  <a:srgbClr val="FFFFFF"/>
-                </a:solidFill>
-              </a:rPr>
-              <a:t>✓</a:t>
-            </a:r>
-            <a:endParaRPr lang="en-US" sz="1400" dirty="0"/>
-          </a:p>
-        </p:txBody>
-      </p:sp>
-      <p:sp>
-        <p:nvSpPr>
-          <p:cNvPr id="7" name="Text 5"/>
-          <p:cNvSpPr/>
-          <p:nvPr/>
-        </p:nvSpPr>
-        <p:spPr>
-          <a:xfrm>
-            <a:off x="1764792" y="2221992"/>
-            <a:ext cx="1508760" cy="219456"/>
-          </a:xfrm>
-          <a:prstGeom prst="rect">
-            <a:avLst/>
-          </a:prstGeom>
-          <a:noFill/>
-          <a:ln/>
-        </p:spPr>
-        <p:txBody>
-          <a:bodyPr wrap="square" lIns="0" tIns="0" rIns="0" bIns="0" rtlCol="0" anchor="ctr"/>
-          <a:lstStyle/>
-          <a:p>
-            <a:pPr indent="0" marL="0">
-              <a:buNone/>
-            </a:pPr>
-            <a:r>
-              <a:rPr lang="en-US" sz="1300" b="1" dirty="0">
-                <a:solidFill>
-                  <a:srgbClr val="2FA36B"/>
-                </a:solidFill>
-              </a:rPr>
-              <a:t>FINISHED</a:t>
-            </a:r>
-            <a:endParaRPr lang="en-US" sz="1300" dirty="0"/>
-          </a:p>
-        </p:txBody>
-      </p:sp>
-      <p:sp>
-        <p:nvSpPr>
-          <p:cNvPr id="8" name="Text 6"/>
-          <p:cNvSpPr/>
-          <p:nvPr/>
-        </p:nvSpPr>
-        <p:spPr>
-          <a:xfrm>
-            <a:off x="3520440" y="2221992"/>
-            <a:ext cx="6172200" cy="219456"/>
-          </a:xfrm>
-          <a:prstGeom prst="rect">
-            <a:avLst/>
-          </a:prstGeom>
-          <a:noFill/>
-          <a:ln/>
-        </p:spPr>
-        <p:txBody>
-          <a:bodyPr wrap="square" lIns="0" tIns="0" rIns="0" bIns="0" rtlCol="0" anchor="ctr"/>
-          <a:lstStyle/>
-          <a:p>
-            <a:pPr indent="0" marL="0">
-              <a:buNone/>
-            </a:pPr>
-            <a:r>
-              <a:rPr lang="en-US" sz="1200" dirty="0">
-                <a:solidFill>
-                  <a:srgbClr val="687385"/>
-                </a:solidFill>
-              </a:rPr>
-              <a:t>complete extraction → analyze</a:t>
-            </a:r>
-            <a:endParaRPr lang="en-US" sz="1200" dirty="0"/>
-          </a:p>
-        </p:txBody>
-      </p:sp>
-      <p:sp>
-        <p:nvSpPr>
-          <p:cNvPr id="9" name="Shape 7"/>
-          <p:cNvSpPr/>
-          <p:nvPr/>
-        </p:nvSpPr>
-        <p:spPr>
-          <a:xfrm>
-            <a:off x="914400" y="3246120"/>
-            <a:ext cx="10058400" cy="804672"/>
-          </a:xfrm>
-          <a:prstGeom prst="roundRect">
-            <a:avLst>
-              <a:gd name="adj" fmla="val 9091"/>
-            </a:avLst>
-          </a:prstGeom>
-          <a:solidFill>
-            <a:srgbClr val="FFFFFF"/>
-          </a:solidFill>
-          <a:ln w="12700">
-            <a:solidFill>
-              <a:srgbClr val="D8DEE9"/>
-            </a:solidFill>
-            <a:prstDash val="solid"/>
-          </a:ln>
-          <a:effectLst>
-            <a:outerShdw sx="100000" sy="100000" kx="0" ky="0" algn="bl" rotWithShape="0" blurRad="3.7487350669697734e+213" dist="2.4991567113131827e+213" dir="1.3094156694929184e+250">
-              <a:srgbClr val="000000">
-                <a:alpha val="1.2999999999999995e+259"/>
-              </a:srgbClr>
-            </a:outerShdw>
-          </a:effectLst>
-        </p:spPr>
-        <p:txBody>
-          <a:bodyPr/>
-          <a:p/>
-        </p:txBody>
-      </p:sp>
-      <p:sp>
-        <p:nvSpPr>
-          <p:cNvPr id="10" name="Shape 8"/>
-          <p:cNvSpPr/>
-          <p:nvPr/>
-        </p:nvSpPr>
-        <p:spPr>
-          <a:xfrm>
-            <a:off x="1143000" y="3392424"/>
-            <a:ext cx="438912" cy="438912"/>
-          </a:xfrm>
-          <a:prstGeom prst="ellipse">
-            <a:avLst/>
-          </a:prstGeom>
-          <a:solidFill>
-            <a:srgbClr val="F59E0B"/>
-          </a:solidFill>
-          <a:ln w="12700">
-            <a:solidFill>
-              <a:srgbClr val="F59E0B"/>
-            </a:solidFill>
-            <a:prstDash val="solid"/>
-          </a:ln>
-        </p:spPr>
-        <p:txBody>
-          <a:bodyPr/>
-          <a:p/>
-        </p:txBody>
-      </p:sp>
-      <p:sp>
-        <p:nvSpPr>
-          <p:cNvPr id="11" name="Text 9"/>
-          <p:cNvSpPr/>
-          <p:nvPr/>
-        </p:nvSpPr>
-        <p:spPr>
-          <a:xfrm>
-            <a:off x="1143000" y="3474720"/>
-            <a:ext cx="438912" cy="210312"/>
-          </a:xfrm>
-          <a:prstGeom prst="rect">
-            <a:avLst/>
-          </a:prstGeom>
-          <a:noFill/>
-          <a:ln/>
-        </p:spPr>
-        <p:txBody>
-          <a:bodyPr wrap="square" lIns="0" tIns="0" rIns="0" bIns="0" rtlCol="0" anchor="ctr"/>
-          <a:lstStyle/>
-          <a:p>
-            <a:pPr algn="ctr" indent="0" marL="0">
-              <a:buNone/>
-            </a:pPr>
-            <a:r>
-              <a:rPr lang="en-US" sz="1400" b="1" dirty="0">
-                <a:solidFill>
-                  <a:srgbClr val="FFFFFF"/>
-                </a:solidFill>
-              </a:rPr>
-              <a:t>…</a:t>
-            </a:r>
-            <a:endParaRPr lang="en-US" sz="1400" dirty="0"/>
-          </a:p>
-        </p:txBody>
-      </p:sp>
-      <p:sp>
-        <p:nvSpPr>
-          <p:cNvPr id="12" name="Text 10"/>
-          <p:cNvSpPr/>
-          <p:nvPr/>
-        </p:nvSpPr>
-        <p:spPr>
-          <a:xfrm>
-            <a:off x="1764792" y="3456432"/>
-            <a:ext cx="1508760" cy="219456"/>
-          </a:xfrm>
-          <a:prstGeom prst="rect">
-            <a:avLst/>
-          </a:prstGeom>
-          <a:noFill/>
-          <a:ln/>
-        </p:spPr>
-        <p:txBody>
-          <a:bodyPr wrap="square" lIns="0" tIns="0" rIns="0" bIns="0" rtlCol="0" anchor="ctr"/>
-          <a:lstStyle/>
-          <a:p>
-            <a:pPr indent="0" marL="0">
-              <a:buNone/>
-            </a:pPr>
-            <a:r>
-              <a:rPr lang="en-US" sz="1300" b="1" dirty="0">
-                <a:solidFill>
-                  <a:srgbClr val="F59E0B"/>
-                </a:solidFill>
-              </a:rPr>
-              <a:t>IN PROGRESS</a:t>
-            </a:r>
-            <a:endParaRPr lang="en-US" sz="1300" dirty="0"/>
-          </a:p>
-        </p:txBody>
-      </p:sp>
-      <p:sp>
-        <p:nvSpPr>
-          <p:cNvPr id="13" name="Text 11"/>
-          <p:cNvSpPr/>
-          <p:nvPr/>
-        </p:nvSpPr>
-        <p:spPr>
-          <a:xfrm>
-            <a:off x="3520440" y="3456432"/>
-            <a:ext cx="6172200" cy="219456"/>
-          </a:xfrm>
-          <a:prstGeom prst="rect">
-            <a:avLst/>
-          </a:prstGeom>
-          <a:noFill/>
-          <a:ln/>
-        </p:spPr>
-        <p:txBody>
-          <a:bodyPr wrap="square" lIns="0" tIns="0" rIns="0" bIns="0" rtlCol="0" anchor="ctr"/>
-          <a:lstStyle/>
-          <a:p>
-            <a:pPr indent="0" marL="0">
-              <a:buNone/>
-            </a:pPr>
-            <a:r>
-              <a:rPr lang="en-US" sz="1200" dirty="0">
-                <a:solidFill>
-                  <a:srgbClr val="687385"/>
-                </a:solidFill>
-              </a:rPr>
-              <a:t>output incomplete → wait</a:t>
-            </a:r>
-            <a:endParaRPr lang="en-US" sz="1200" dirty="0"/>
-          </a:p>
-        </p:txBody>
-      </p:sp>
-      <p:sp>
-        <p:nvSpPr>
-          <p:cNvPr id="14" name="Shape 12"/>
-          <p:cNvSpPr/>
-          <p:nvPr/>
-        </p:nvSpPr>
-        <p:spPr>
-          <a:xfrm>
-            <a:off x="914400" y="4480560"/>
-            <a:ext cx="10058400" cy="804672"/>
-          </a:xfrm>
-          <a:prstGeom prst="roundRect">
-            <a:avLst>
-              <a:gd name="adj" fmla="val 9091"/>
-            </a:avLst>
-          </a:prstGeom>
-          <a:solidFill>
-            <a:srgbClr val="FFFFFF"/>
-          </a:solidFill>
-          <a:ln w="12700">
-            <a:solidFill>
-              <a:srgbClr val="D8DEE9"/>
-            </a:solidFill>
-            <a:prstDash val="solid"/>
-          </a:ln>
-          <a:effectLst>
-            <a:outerShdw sx="100000" sy="100000" kx="0" ky="0" algn="bl" rotWithShape="0" blurRad="4.760893535051613e+217" dist="3.173929023367742e+217" dir="7.85649401695751e+254">
-              <a:srgbClr val="000000">
-                <a:alpha val="1.2999999999999995e+264"/>
-              </a:srgbClr>
-            </a:outerShdw>
-          </a:effectLst>
-        </p:spPr>
-        <p:txBody>
-          <a:bodyPr/>
-          <a:p/>
-        </p:txBody>
-      </p:sp>
-      <p:sp>
-        <p:nvSpPr>
-          <p:cNvPr id="15" name="Shape 13"/>
-          <p:cNvSpPr/>
-          <p:nvPr/>
-        </p:nvSpPr>
-        <p:spPr>
-          <a:xfrm>
-            <a:off x="1143000" y="4626864"/>
-            <a:ext cx="438912" cy="438912"/>
-          </a:xfrm>
-          <a:prstGeom prst="ellipse">
-            <a:avLst/>
-          </a:prstGeom>
-          <a:solidFill>
-            <a:srgbClr val="687385"/>
-          </a:solidFill>
-          <a:ln w="12700">
-            <a:solidFill>
-              <a:srgbClr val="687385"/>
-            </a:solidFill>
-            <a:prstDash val="solid"/>
-          </a:ln>
-        </p:spPr>
-        <p:txBody>
-          <a:bodyPr/>
-          <a:p/>
-        </p:txBody>
-      </p:sp>
-      <p:sp>
-        <p:nvSpPr>
-          <p:cNvPr id="16" name="Text 14"/>
-          <p:cNvSpPr/>
-          <p:nvPr/>
-        </p:nvSpPr>
-        <p:spPr>
-          <a:xfrm>
-            <a:off x="1143000" y="4709160"/>
-            <a:ext cx="438912" cy="210312"/>
-          </a:xfrm>
-          <a:prstGeom prst="rect">
-            <a:avLst/>
-          </a:prstGeom>
-          <a:noFill/>
-          <a:ln/>
-        </p:spPr>
-        <p:txBody>
-          <a:bodyPr wrap="square" lIns="0" tIns="0" rIns="0" bIns="0" rtlCol="0" anchor="ctr"/>
-          <a:lstStyle/>
-          <a:p>
-            <a:pPr algn="ctr" indent="0" marL="0">
-              <a:buNone/>
-            </a:pPr>
-            <a:r>
-              <a:rPr lang="en-US" sz="1400" b="1" dirty="0">
-                <a:solidFill>
-                  <a:srgbClr val="FFFFFF"/>
-                </a:solidFill>
-              </a:rPr>
-              <a:t>×</a:t>
-            </a:r>
-            <a:endParaRPr lang="en-US" sz="1400" dirty="0"/>
-          </a:p>
-        </p:txBody>
-      </p:sp>
-      <p:sp>
-        <p:nvSpPr>
-          <p:cNvPr id="17" name="Text 15"/>
-          <p:cNvSpPr/>
-          <p:nvPr/>
-        </p:nvSpPr>
-        <p:spPr>
-          <a:xfrm>
-            <a:off x="1764792" y="4690872"/>
-            <a:ext cx="1508760" cy="219456"/>
-          </a:xfrm>
-          <a:prstGeom prst="rect">
-            <a:avLst/>
-          </a:prstGeom>
-          <a:noFill/>
-          <a:ln/>
-        </p:spPr>
-        <p:txBody>
-          <a:bodyPr wrap="square" lIns="0" tIns="0" rIns="0" bIns="0" rtlCol="0" anchor="ctr"/>
-          <a:lstStyle/>
-          <a:p>
-            <a:pPr indent="0" marL="0">
-              <a:buNone/>
-            </a:pPr>
-            <a:r>
-              <a:rPr lang="en-US" sz="1300" b="1" dirty="0">
-                <a:solidFill>
-                  <a:srgbClr val="687385"/>
-                </a:solidFill>
-              </a:rPr>
-              <a:t>INTERRUPTED</a:t>
-            </a:r>
-            <a:endParaRPr lang="en-US" sz="1300" dirty="0"/>
-          </a:p>
-        </p:txBody>
-      </p:sp>
-      <p:sp>
-        <p:nvSpPr>
-          <p:cNvPr id="18" name="Text 16"/>
-          <p:cNvSpPr/>
-          <p:nvPr/>
-        </p:nvSpPr>
-        <p:spPr>
-          <a:xfrm>
-            <a:off x="3520440" y="4690872"/>
-            <a:ext cx="6172200" cy="219456"/>
-          </a:xfrm>
-          <a:prstGeom prst="rect">
-            <a:avLst/>
-          </a:prstGeom>
-          <a:noFill/>
-          <a:ln/>
-        </p:spPr>
-        <p:txBody>
-          <a:bodyPr wrap="square" lIns="0" tIns="0" rIns="0" bIns="0" rtlCol="0" anchor="ctr"/>
-          <a:lstStyle/>
-          <a:p>
-            <a:pPr indent="0" marL="0">
-              <a:buNone/>
-            </a:pPr>
-            <a:r>
-              <a:rPr lang="en-US" sz="1200" dirty="0">
-                <a:solidFill>
-                  <a:srgbClr val="687385"/>
-                </a:solidFill>
-              </a:rPr>
-              <a:t>output incomplete → skip</a:t>
-            </a:r>
-            <a:endParaRPr lang="en-US" sz="1200" dirty="0"/>
-          </a:p>
-        </p:txBody>
-      </p:sp>
-      <p:sp>
-        <p:nvSpPr>
-          <p:cNvPr id="19" name="Text 17"/>
-          <p:cNvSpPr/>
-          <p:nvPr/>
-        </p:nvSpPr>
-        <p:spPr>
-          <a:xfrm>
-            <a:off x="1874520" y="5715000"/>
-            <a:ext cx="8366760" cy="310896"/>
-          </a:xfrm>
-          <a:prstGeom prst="rect">
-            <a:avLst/>
-          </a:prstGeom>
-          <a:noFill/>
-          <a:ln/>
-        </p:spPr>
-        <p:txBody>
-          <a:bodyPr wrap="square" lIns="0" tIns="0" rIns="0" bIns="0" rtlCol="0" anchor="ctr"/>
-          <a:lstStyle/>
-          <a:p>
-            <a:pPr algn="ctr" indent="0" marL="0">
-              <a:buNone/>
-            </a:pPr>
-            <a:r>
-              <a:rPr lang="en-US" sz="1500" b="1" dirty="0">
-                <a:solidFill>
-                  <a:srgbClr val="172033"/>
-                </a:solidFill>
-              </a:rPr>
-              <a:t>Validation should never invent certainty from incomplete evidence.</a:t>
-            </a:r>
-            <a:endParaRPr lang="en-US" sz="1500" dirty="0"/>
-          </a:p>
-        </p:txBody>
-      </p:sp>
-      <p:sp>
-        <p:nvSpPr>
-          <p:cNvPr id="25" name="Slide Number Placeholder 0"/>
-          <p:cNvSpPr>
-            <a:spLocks noGrp="1"/>
-          </p:cNvSpPr>
-          <p:nvPr>
-            <p:ph type="sldNum" sz="quarter" idx="4294967295"/>
-          </p:nvPr>
-        </p:nvSpPr>
-        <p:spPr>
-          <a:xfrm>
-            <a:off x="11612880" y="6510528"/>
-            <a:ext cx="800000" cy="300000"/>
-          </a:xfrm>
-          <a:prstGeom prst="rect">
-            <a:avLst/>
-          </a:prstGeom>
-          <a:extLst>
-            <a:ext uri="{C572A759-6A51-4108-AA02-DFA0A04FC94B}">
-              <ma14:wrappingTextBoxFlag xmlns:ma14="http://schemas.microsoft.com/office/mac/drawingml/2011/main" val="0"/>
-            </a:ext>
-          </a:extLst>
-        </p:spPr>
-        <p:txBody>
-          <a:bodyPr/>
-          <a:lstStyle>
-            <a:lvl1pPr>
-              <a:defRPr sz="650">
-                <a:solidFill>
-                  <a:srgbClr val="9AA4B2"/>
-                </a:solidFill>
-                <a:latin typeface="Aptos"/>
-                <a:ea typeface="Aptos"/>
-                <a:cs typeface="Aptos"/>
-              </a:defRPr>
-            </a:lvl1pPr>
-          </a:lstStyle>
-          <a:p>
-            <a:pPr algn="l"/>
-            <a:fld id="{F7021451-1387-4CA6-816F-3879F97B5CBC}" type="slidenum">
-              <a:rPr b="0" lang="en-US"/>
-              <a:t>22</a:t>
-            </a:fld>
-            <a:endParaRPr lang="en-US"/>
-          </a:p>
-        </p:txBody>
-      </p:sp>
-    </p:spTree>
-  </p:cSld>
-  <p:clrMapOvr>
-    <a:masterClrMapping/>
-  </p:clrMapOvr>
-  <p:transition spd="fast" advClick="1">
-    <p:fade/>
-  </p:transition>
-</p:sld>
-</file>
-
-<file path=ppt/slides/slide23.xml><?xml version="1.0" encoding="utf-8"?>
-<p:sld xmlns:a="http://schemas.openxmlformats.org/drawingml/2006/main" xmlns:r="http://schemas.openxmlformats.org/officeDocument/2006/relationships" xmlns:p="http://schemas.openxmlformats.org/presentationml/2006/main">
   <p:cSld name="Slide 23">
     <p:spTree>
       <p:nvGrpSpPr>
@@ -16761,7 +16383,7 @@
 </p:sld>
 </file>
 
-<file path=ppt/slides/slide24.xml><?xml version="1.0" encoding="utf-8"?>
+<file path=ppt/slides/slide21.xml><?xml version="1.0" encoding="utf-8"?>
 <p:sld xmlns:a="http://schemas.openxmlformats.org/drawingml/2006/main" xmlns:r="http://schemas.openxmlformats.org/officeDocument/2006/relationships" xmlns:p="http://schemas.openxmlformats.org/presentationml/2006/main">
   <p:cSld name="Slide 24">
     <p:spTree>
@@ -17524,7 +17146,7 @@
 </p:sld>
 </file>
 
-<file path=ppt/slides/slide25.xml><?xml version="1.0" encoding="utf-8"?>
+<file path=ppt/slides/slide22.xml><?xml version="1.0" encoding="utf-8"?>
 <p:sld xmlns:a="http://schemas.openxmlformats.org/drawingml/2006/main" xmlns:r="http://schemas.openxmlformats.org/officeDocument/2006/relationships" xmlns:p="http://schemas.openxmlformats.org/presentationml/2006/main">
   <p:cSld name="Slide 25">
     <p:spTree>
@@ -17681,840 +17303,6 @@
       </p:grpSpPr>
       <p:sp>
         <p:nvSpPr>
-          <p:cNvPr id="2" name="Text 0"/>
-          <p:cNvSpPr/>
-          <p:nvPr/>
-        </p:nvSpPr>
-        <p:spPr>
-          <a:xfrm>
-            <a:off x="502920" y="438912"/>
-            <a:ext cx="2743200" cy="201168"/>
-          </a:xfrm>
-          <a:prstGeom prst="rect">
-            <a:avLst/>
-          </a:prstGeom>
-          <a:noFill/>
-          <a:ln/>
-        </p:spPr>
-        <p:txBody>
-          <a:bodyPr wrap="square" lIns="0" tIns="0" rIns="0" bIns="0" rtlCol="0" anchor="ctr"/>
-          <a:lstStyle/>
-          <a:p>
-            <a:pPr indent="0" marL="0">
-              <a:buNone/>
-            </a:pPr>
-            <a:r>
-              <a:rPr lang="en-US" sz="800" b="1" dirty="0">
-                <a:solidFill>
-                  <a:srgbClr val="2F80ED"/>
-                </a:solidFill>
-              </a:rPr>
-              <a:t>WHY THIS EXISTS</a:t>
-            </a:r>
-            <a:endParaRPr lang="en-US" sz="800" dirty="0"/>
-          </a:p>
-        </p:txBody>
-      </p:sp>
-      <p:sp>
-        <p:nvSpPr>
-          <p:cNvPr id="3" name="Text 1"/>
-          <p:cNvSpPr/>
-          <p:nvPr/>
-        </p:nvSpPr>
-        <p:spPr>
-          <a:xfrm>
-            <a:off x="502920" y="713232"/>
-            <a:ext cx="10972800" cy="530352"/>
-          </a:xfrm>
-          <a:prstGeom prst="rect">
-            <a:avLst/>
-          </a:prstGeom>
-          <a:noFill/>
-          <a:ln/>
-        </p:spPr>
-        <p:txBody>
-          <a:bodyPr wrap="square" lIns="0" tIns="0" rIns="0" bIns="0" rtlCol="0" anchor="ctr">
-            <a:normAutofit/>
-          </a:bodyPr>
-          <a:lstStyle/>
-          <a:p>
-            <a:pPr indent="0" marL="0">
-              <a:buNone/>
-            </a:pPr>
-            <a:r>
-              <a:rPr lang="en-US" sz="2600" b="1" dirty="0">
-                <a:solidFill>
-                  <a:srgbClr val="172033"/>
-                </a:solidFill>
-              </a:rPr>
-              <a:t>“Done” Is Not the Same as “Correct”</a:t>
-            </a:r>
-            <a:endParaRPr lang="en-US" sz="2600" dirty="0"/>
-          </a:p>
-        </p:txBody>
-      </p:sp>
-      <p:sp>
-        <p:nvSpPr>
-          <p:cNvPr id="4" name="Shape 2"/>
-          <p:cNvSpPr/>
-          <p:nvPr/>
-        </p:nvSpPr>
-        <p:spPr>
-          <a:xfrm>
-            <a:off x="640080" y="1691640"/>
-            <a:ext cx="3154680" cy="3246120"/>
-          </a:xfrm>
-          <a:prstGeom prst="roundRect">
-            <a:avLst>
-              <a:gd name="adj" fmla="val 2319"/>
-            </a:avLst>
-          </a:prstGeom>
-          <a:solidFill>
-            <a:srgbClr val="F7F9FC"/>
-          </a:solidFill>
-          <a:ln w="12700">
-            <a:solidFill>
-              <a:srgbClr val="D8DEE9"/>
-            </a:solidFill>
-            <a:prstDash val="solid"/>
-          </a:ln>
-          <a:effectLst>
-            <a:outerShdw sx="100000" sy="100000" kx="0" ky="0" algn="bl" rotWithShape="0" blurRad="241935000" dist="161290000" dir="162000000000">
-              <a:srgbClr val="000000">
-                <a:alpha val="1300000000"/>
-              </a:srgbClr>
-            </a:outerShdw>
-          </a:effectLst>
-        </p:spPr>
-        <p:txBody>
-          <a:bodyPr/>
-          <a:p/>
-        </p:txBody>
-      </p:sp>
-      <p:sp>
-        <p:nvSpPr>
-          <p:cNvPr id="5" name="Text 3"/>
-          <p:cNvSpPr/>
-          <p:nvPr/>
-        </p:nvSpPr>
-        <p:spPr>
-          <a:xfrm>
-            <a:off x="868680" y="1920240"/>
-            <a:ext cx="2651760" cy="201168"/>
-          </a:xfrm>
-          <a:prstGeom prst="rect">
-            <a:avLst/>
-          </a:prstGeom>
-          <a:noFill/>
-          <a:ln/>
-        </p:spPr>
-        <p:txBody>
-          <a:bodyPr wrap="square" lIns="0" tIns="0" rIns="0" bIns="0" rtlCol="0" anchor="ctr"/>
-          <a:lstStyle/>
-          <a:p>
-            <a:pPr indent="0" marL="0">
-              <a:buNone/>
-            </a:pPr>
-            <a:r>
-              <a:rPr lang="en-US" sz="900" b="1" dirty="0">
-                <a:solidFill>
-                  <a:srgbClr val="687385"/>
-                </a:solidFill>
-              </a:rPr>
-              <a:t>PIPELINE STATUS</a:t>
-            </a:r>
-            <a:endParaRPr lang="en-US" sz="900" dirty="0"/>
-          </a:p>
-        </p:txBody>
-      </p:sp>
-      <p:sp>
-        <p:nvSpPr>
-          <p:cNvPr id="6" name="Shape 4"/>
-          <p:cNvSpPr/>
-          <p:nvPr/>
-        </p:nvSpPr>
-        <p:spPr>
-          <a:xfrm>
-            <a:off x="932688" y="2395728"/>
-            <a:ext cx="2331720" cy="841248"/>
-          </a:xfrm>
-          <a:prstGeom prst="roundRect">
-            <a:avLst>
-              <a:gd name="adj" fmla="val 6522"/>
-            </a:avLst>
-          </a:prstGeom>
-          <a:solidFill>
-            <a:srgbClr val="EAF8F0"/>
-          </a:solidFill>
-          <a:ln w="12700">
-            <a:solidFill>
-              <a:srgbClr val="A7D8BE"/>
-            </a:solidFill>
-            <a:prstDash val="solid"/>
-          </a:ln>
-        </p:spPr>
-        <p:txBody>
-          <a:bodyPr/>
-          <a:p/>
-        </p:txBody>
-      </p:sp>
-      <p:sp>
-        <p:nvSpPr>
-          <p:cNvPr id="7" name="Text 5"/>
-          <p:cNvSpPr/>
-          <p:nvPr/>
-        </p:nvSpPr>
-        <p:spPr>
-          <a:xfrm>
-            <a:off x="1115568" y="2651760"/>
-            <a:ext cx="1920240" cy="219456"/>
-          </a:xfrm>
-          <a:prstGeom prst="rect">
-            <a:avLst/>
-          </a:prstGeom>
-          <a:noFill/>
-          <a:ln/>
-        </p:spPr>
-        <p:txBody>
-          <a:bodyPr wrap="square" lIns="0" tIns="0" rIns="0" bIns="0" rtlCol="0" anchor="ctr"/>
-          <a:lstStyle/>
-          <a:p>
-            <a:pPr indent="0" marL="0">
-              <a:buNone/>
-            </a:pPr>
-            <a:r>
-              <a:rPr lang="en-US" sz="1400" b="1" dirty="0">
-                <a:solidFill>
-                  <a:srgbClr val="2FA36B"/>
-                </a:solidFill>
-              </a:rPr>
-              <a:t>✓  extraction completed</a:t>
-            </a:r>
-            <a:endParaRPr lang="en-US" sz="1400" dirty="0"/>
-          </a:p>
-        </p:txBody>
-      </p:sp>
-      <p:sp>
-        <p:nvSpPr>
-          <p:cNvPr id="8" name="Text 6"/>
-          <p:cNvSpPr/>
-          <p:nvPr/>
-        </p:nvSpPr>
-        <p:spPr>
-          <a:xfrm>
-            <a:off x="1115568" y="3337560"/>
-            <a:ext cx="1920240" cy="256032"/>
-          </a:xfrm>
-          <a:prstGeom prst="rect">
-            <a:avLst/>
-          </a:prstGeom>
-          <a:noFill/>
-          <a:ln/>
-        </p:spPr>
-        <p:txBody>
-          <a:bodyPr wrap="square" lIns="0" tIns="0" rIns="0" bIns="0" rtlCol="0" anchor="ctr"/>
-          <a:lstStyle/>
-          <a:p>
-            <a:pPr indent="0" marL="0">
-              <a:buNone/>
-            </a:pPr>
-            <a:r>
-              <a:rPr lang="en-US" sz="1100" dirty="0">
-                <a:solidFill>
-                  <a:srgbClr val="687385"/>
-                </a:solidFill>
-              </a:rPr>
-              <a:t>No crash. Files written.</a:t>
-            </a:r>
-            <a:endParaRPr lang="en-US" sz="1100" dirty="0"/>
-          </a:p>
-        </p:txBody>
-      </p:sp>
-      <p:sp>
-        <p:nvSpPr>
-          <p:cNvPr id="9" name="Text 7"/>
-          <p:cNvSpPr/>
-          <p:nvPr/>
-        </p:nvSpPr>
-        <p:spPr>
-          <a:xfrm>
-            <a:off x="1115568" y="3813048"/>
-            <a:ext cx="2011680" cy="310896"/>
-          </a:xfrm>
-          <a:prstGeom prst="rect">
-            <a:avLst/>
-          </a:prstGeom>
-          <a:noFill/>
-          <a:ln/>
-        </p:spPr>
-        <p:txBody>
-          <a:bodyPr wrap="square" lIns="0" tIns="0" rIns="0" bIns="0" rtlCol="0" anchor="ctr"/>
-          <a:lstStyle/>
-          <a:p>
-            <a:pPr indent="0" marL="0">
-              <a:buNone/>
-            </a:pPr>
-            <a:r>
-              <a:rPr lang="en-US" sz="1500" b="1" dirty="0">
-                <a:solidFill>
-                  <a:srgbClr val="E45757"/>
-                </a:solidFill>
-              </a:rPr>
-              <a:t>But is the content usable?</a:t>
-            </a:r>
-            <a:endParaRPr lang="en-US" sz="1500" dirty="0"/>
-          </a:p>
-        </p:txBody>
-      </p:sp>
-      <p:sp>
-        <p:nvSpPr>
-          <p:cNvPr id="10" name="Shape 8"/>
-          <p:cNvSpPr/>
-          <p:nvPr/>
-        </p:nvSpPr>
-        <p:spPr>
-          <a:xfrm>
-            <a:off x="3931920" y="3273552"/>
-            <a:ext cx="822960" cy="0"/>
-          </a:xfrm>
-          <a:prstGeom prst="line">
-            <a:avLst/>
-          </a:prstGeom>
-          <a:noFill/>
-          <a:ln w="31750">
-            <a:solidFill>
-              <a:srgbClr val="2F80ED"/>
-            </a:solidFill>
-            <a:prstDash val="solid"/>
-            <a:headEnd type="none"/>
-            <a:tailEnd type="triangle"/>
-          </a:ln>
-        </p:spPr>
-        <p:txBody>
-          <a:bodyPr/>
-          <a:p/>
-        </p:txBody>
-      </p:sp>
-      <p:sp>
-        <p:nvSpPr>
-          <p:cNvPr id="11" name="Shape 9"/>
-          <p:cNvSpPr/>
-          <p:nvPr/>
-        </p:nvSpPr>
-        <p:spPr>
-          <a:xfrm>
-            <a:off x="4892040" y="1691640"/>
-            <a:ext cx="6355080" cy="3246120"/>
-          </a:xfrm>
-          <a:prstGeom prst="roundRect">
-            <a:avLst>
-              <a:gd name="adj" fmla="val 2254"/>
-            </a:avLst>
-          </a:prstGeom>
-          <a:solidFill>
-            <a:srgbClr val="FFFFFF"/>
-          </a:solidFill>
-          <a:ln w="12700">
-            <a:solidFill>
-              <a:srgbClr val="D8DEE9"/>
-            </a:solidFill>
-            <a:prstDash val="solid"/>
-          </a:ln>
-          <a:effectLst>
-            <a:outerShdw sx="100000" sy="100000" kx="0" ky="0" algn="bl" rotWithShape="0" blurRad="3072574500000" dist="2048383000000" dir="9720000000000000">
-              <a:srgbClr val="000000">
-                <a:alpha val="130000000000000"/>
-              </a:srgbClr>
-            </a:outerShdw>
-          </a:effectLst>
-        </p:spPr>
-        <p:txBody>
-          <a:bodyPr/>
-          <a:p/>
-        </p:txBody>
-      </p:sp>
-      <p:sp>
-        <p:nvSpPr>
-          <p:cNvPr id="12" name="Shape 10"/>
-          <p:cNvSpPr/>
-          <p:nvPr/>
-        </p:nvSpPr>
-        <p:spPr>
-          <a:xfrm>
-            <a:off x="5230368" y="2039112"/>
-            <a:ext cx="402336" cy="402336"/>
-          </a:xfrm>
-          <a:prstGeom prst="ellipse">
-            <a:avLst/>
-          </a:prstGeom>
-          <a:solidFill>
-            <a:srgbClr val="2F80ED"/>
-          </a:solidFill>
-          <a:ln w="12700">
-            <a:solidFill>
-              <a:srgbClr val="2F80ED"/>
-            </a:solidFill>
-            <a:prstDash val="solid"/>
-          </a:ln>
-        </p:spPr>
-        <p:txBody>
-          <a:bodyPr/>
-          <a:p/>
-        </p:txBody>
-      </p:sp>
-      <p:sp>
-        <p:nvSpPr>
-          <p:cNvPr id="13" name="Text 11"/>
-          <p:cNvSpPr/>
-          <p:nvPr/>
-        </p:nvSpPr>
-        <p:spPr>
-          <a:xfrm>
-            <a:off x="5230368" y="2121408"/>
-            <a:ext cx="402336" cy="210312"/>
-          </a:xfrm>
-          <a:prstGeom prst="rect">
-            <a:avLst/>
-          </a:prstGeom>
-          <a:noFill/>
-          <a:ln/>
-        </p:spPr>
-        <p:txBody>
-          <a:bodyPr wrap="square" lIns="0" tIns="0" rIns="0" bIns="0" rtlCol="0" anchor="ctr"/>
-          <a:lstStyle/>
-          <a:p>
-            <a:pPr algn="ctr" indent="0" marL="0">
-              <a:buNone/>
-            </a:pPr>
-            <a:r>
-              <a:rPr lang="en-US" sz="1400" b="1" dirty="0">
-                <a:solidFill>
-                  <a:srgbClr val="FFFFFF"/>
-                </a:solidFill>
-              </a:rPr>
-              <a:t>1</a:t>
-            </a:r>
-            <a:endParaRPr lang="en-US" sz="1400" dirty="0"/>
-          </a:p>
-        </p:txBody>
-      </p:sp>
-      <p:sp>
-        <p:nvSpPr>
-          <p:cNvPr id="14" name="Text 12"/>
-          <p:cNvSpPr/>
-          <p:nvPr/>
-        </p:nvSpPr>
-        <p:spPr>
-          <a:xfrm>
-            <a:off x="5742432" y="2112264"/>
-            <a:ext cx="2286000" cy="201168"/>
-          </a:xfrm>
-          <a:prstGeom prst="rect">
-            <a:avLst/>
-          </a:prstGeom>
-          <a:noFill/>
-          <a:ln/>
-        </p:spPr>
-        <p:txBody>
-          <a:bodyPr wrap="square" lIns="0" tIns="0" rIns="0" bIns="0" rtlCol="0" anchor="ctr"/>
-          <a:lstStyle/>
-          <a:p>
-            <a:pPr indent="0" marL="0">
-              <a:buNone/>
-            </a:pPr>
-            <a:r>
-              <a:rPr lang="en-US" sz="1100" b="1" dirty="0">
-                <a:solidFill>
-                  <a:srgbClr val="172033"/>
-                </a:solidFill>
-              </a:rPr>
-              <a:t>Measure</a:t>
-            </a:r>
-            <a:endParaRPr lang="en-US" sz="1100" dirty="0"/>
-          </a:p>
-        </p:txBody>
-      </p:sp>
-      <p:sp>
-        <p:nvSpPr>
-          <p:cNvPr id="15" name="Text 13"/>
-          <p:cNvSpPr/>
-          <p:nvPr/>
-        </p:nvSpPr>
-        <p:spPr>
-          <a:xfrm>
-            <a:off x="5760720" y="2350008"/>
-            <a:ext cx="4846320" cy="274320"/>
-          </a:xfrm>
-          <a:prstGeom prst="rect">
-            <a:avLst/>
-          </a:prstGeom>
-          <a:noFill/>
-          <a:ln/>
-        </p:spPr>
-        <p:txBody>
-          <a:bodyPr wrap="square" lIns="0" tIns="0" rIns="0" bIns="0" rtlCol="0" anchor="ctr"/>
-          <a:lstStyle/>
-          <a:p>
-            <a:pPr indent="0" marL="0">
-              <a:buNone/>
-            </a:pPr>
-            <a:r>
-              <a:rPr lang="en-US" sz="1200" dirty="0">
-                <a:solidFill>
-                  <a:srgbClr val="687385"/>
-                </a:solidFill>
-              </a:rPr>
-              <a:t>pages · tokens/page · artifacts · confidence · dropped regions</a:t>
-            </a:r>
-            <a:endParaRPr lang="en-US" sz="1200" dirty="0"/>
-          </a:p>
-        </p:txBody>
-      </p:sp>
-      <p:sp>
-        <p:nvSpPr>
-          <p:cNvPr id="16" name="Shape 14"/>
-          <p:cNvSpPr/>
-          <p:nvPr/>
-        </p:nvSpPr>
-        <p:spPr>
-          <a:xfrm>
-            <a:off x="5230368" y="2862072"/>
-            <a:ext cx="402336" cy="402336"/>
-          </a:xfrm>
-          <a:prstGeom prst="ellipse">
-            <a:avLst/>
-          </a:prstGeom>
-          <a:solidFill>
-            <a:srgbClr val="F59E0B"/>
-          </a:solidFill>
-          <a:ln w="12700">
-            <a:solidFill>
-              <a:srgbClr val="F59E0B"/>
-            </a:solidFill>
-            <a:prstDash val="solid"/>
-          </a:ln>
-        </p:spPr>
-        <p:txBody>
-          <a:bodyPr/>
-          <a:p/>
-        </p:txBody>
-      </p:sp>
-      <p:sp>
-        <p:nvSpPr>
-          <p:cNvPr id="17" name="Text 15"/>
-          <p:cNvSpPr/>
-          <p:nvPr/>
-        </p:nvSpPr>
-        <p:spPr>
-          <a:xfrm>
-            <a:off x="5230368" y="2944368"/>
-            <a:ext cx="402336" cy="210312"/>
-          </a:xfrm>
-          <a:prstGeom prst="rect">
-            <a:avLst/>
-          </a:prstGeom>
-          <a:noFill/>
-          <a:ln/>
-        </p:spPr>
-        <p:txBody>
-          <a:bodyPr wrap="square" lIns="0" tIns="0" rIns="0" bIns="0" rtlCol="0" anchor="ctr"/>
-          <a:lstStyle/>
-          <a:p>
-            <a:pPr algn="ctr" indent="0" marL="0">
-              <a:buNone/>
-            </a:pPr>
-            <a:r>
-              <a:rPr lang="en-US" sz="1400" b="1" dirty="0">
-                <a:solidFill>
-                  <a:srgbClr val="FFFFFF"/>
-                </a:solidFill>
-              </a:rPr>
-              <a:t>2</a:t>
-            </a:r>
-            <a:endParaRPr lang="en-US" sz="1400" dirty="0"/>
-          </a:p>
-        </p:txBody>
-      </p:sp>
-      <p:sp>
-        <p:nvSpPr>
-          <p:cNvPr id="18" name="Text 16"/>
-          <p:cNvSpPr/>
-          <p:nvPr/>
-        </p:nvSpPr>
-        <p:spPr>
-          <a:xfrm>
-            <a:off x="5742432" y="2935224"/>
-            <a:ext cx="2286000" cy="201168"/>
-          </a:xfrm>
-          <a:prstGeom prst="rect">
-            <a:avLst/>
-          </a:prstGeom>
-          <a:noFill/>
-          <a:ln/>
-        </p:spPr>
-        <p:txBody>
-          <a:bodyPr wrap="square" lIns="0" tIns="0" rIns="0" bIns="0" rtlCol="0" anchor="ctr"/>
-          <a:lstStyle/>
-          <a:p>
-            <a:pPr indent="0" marL="0">
-              <a:buNone/>
-            </a:pPr>
-            <a:r>
-              <a:rPr lang="en-US" sz="1100" b="1" dirty="0">
-                <a:solidFill>
-                  <a:srgbClr val="172033"/>
-                </a:solidFill>
-              </a:rPr>
-              <a:t>Question</a:t>
-            </a:r>
-            <a:endParaRPr lang="en-US" sz="1100" dirty="0"/>
-          </a:p>
-        </p:txBody>
-      </p:sp>
-      <p:sp>
-        <p:nvSpPr>
-          <p:cNvPr id="19" name="Text 17"/>
-          <p:cNvSpPr/>
-          <p:nvPr/>
-        </p:nvSpPr>
-        <p:spPr>
-          <a:xfrm>
-            <a:off x="5760720" y="3172968"/>
-            <a:ext cx="4846320" cy="274320"/>
-          </a:xfrm>
-          <a:prstGeom prst="rect">
-            <a:avLst/>
-          </a:prstGeom>
-          <a:noFill/>
-          <a:ln/>
-        </p:spPr>
-        <p:txBody>
-          <a:bodyPr wrap="square" lIns="0" tIns="0" rIns="0" bIns="0" rtlCol="0" anchor="ctr"/>
-          <a:lstStyle/>
-          <a:p>
-            <a:pPr indent="0" marL="0">
-              <a:buNone/>
-            </a:pPr>
-            <a:r>
-              <a:rPr lang="en-US" sz="1200" dirty="0">
-                <a:solidFill>
-                  <a:srgbClr val="687385"/>
-                </a:solidFill>
-              </a:rPr>
-              <a:t>Which documents look suspicious before a human opens them?</a:t>
-            </a:r>
-            <a:endParaRPr lang="en-US" sz="1200" dirty="0"/>
-          </a:p>
-        </p:txBody>
-      </p:sp>
-      <p:sp>
-        <p:nvSpPr>
-          <p:cNvPr id="20" name="Shape 18"/>
-          <p:cNvSpPr/>
-          <p:nvPr/>
-        </p:nvSpPr>
-        <p:spPr>
-          <a:xfrm>
-            <a:off x="5230368" y="3685032"/>
-            <a:ext cx="402336" cy="402336"/>
-          </a:xfrm>
-          <a:prstGeom prst="ellipse">
-            <a:avLst/>
-          </a:prstGeom>
-          <a:solidFill>
-            <a:srgbClr val="E45757"/>
-          </a:solidFill>
-          <a:ln w="12700">
-            <a:solidFill>
-              <a:srgbClr val="E45757"/>
-            </a:solidFill>
-            <a:prstDash val="solid"/>
-          </a:ln>
-        </p:spPr>
-        <p:txBody>
-          <a:bodyPr/>
-          <a:p/>
-        </p:txBody>
-      </p:sp>
-      <p:sp>
-        <p:nvSpPr>
-          <p:cNvPr id="21" name="Text 19"/>
-          <p:cNvSpPr/>
-          <p:nvPr/>
-        </p:nvSpPr>
-        <p:spPr>
-          <a:xfrm>
-            <a:off x="5230368" y="3767328"/>
-            <a:ext cx="402336" cy="210312"/>
-          </a:xfrm>
-          <a:prstGeom prst="rect">
-            <a:avLst/>
-          </a:prstGeom>
-          <a:noFill/>
-          <a:ln/>
-        </p:spPr>
-        <p:txBody>
-          <a:bodyPr wrap="square" lIns="0" tIns="0" rIns="0" bIns="0" rtlCol="0" anchor="ctr"/>
-          <a:lstStyle/>
-          <a:p>
-            <a:pPr algn="ctr" indent="0" marL="0">
-              <a:buNone/>
-            </a:pPr>
-            <a:r>
-              <a:rPr lang="en-US" sz="1400" b="1" dirty="0">
-                <a:solidFill>
-                  <a:srgbClr val="FFFFFF"/>
-                </a:solidFill>
-              </a:rPr>
-              <a:t>3</a:t>
-            </a:r>
-            <a:endParaRPr lang="en-US" sz="1400" dirty="0"/>
-          </a:p>
-        </p:txBody>
-      </p:sp>
-      <p:sp>
-        <p:nvSpPr>
-          <p:cNvPr id="22" name="Text 20"/>
-          <p:cNvSpPr/>
-          <p:nvPr/>
-        </p:nvSpPr>
-        <p:spPr>
-          <a:xfrm>
-            <a:off x="5742432" y="3758184"/>
-            <a:ext cx="2286000" cy="201168"/>
-          </a:xfrm>
-          <a:prstGeom prst="rect">
-            <a:avLst/>
-          </a:prstGeom>
-          <a:noFill/>
-          <a:ln/>
-        </p:spPr>
-        <p:txBody>
-          <a:bodyPr wrap="square" lIns="0" tIns="0" rIns="0" bIns="0" rtlCol="0" anchor="ctr"/>
-          <a:lstStyle/>
-          <a:p>
-            <a:pPr indent="0" marL="0">
-              <a:buNone/>
-            </a:pPr>
-            <a:r>
-              <a:rPr lang="en-US" sz="1100" b="1" dirty="0">
-                <a:solidFill>
-                  <a:srgbClr val="172033"/>
-                </a:solidFill>
-              </a:rPr>
-              <a:t>Trace</a:t>
-            </a:r>
-            <a:endParaRPr lang="en-US" sz="1100" dirty="0"/>
-          </a:p>
-        </p:txBody>
-      </p:sp>
-      <p:sp>
-        <p:nvSpPr>
-          <p:cNvPr id="23" name="Text 21"/>
-          <p:cNvSpPr/>
-          <p:nvPr/>
-        </p:nvSpPr>
-        <p:spPr>
-          <a:xfrm>
-            <a:off x="5760720" y="3995928"/>
-            <a:ext cx="4846320" cy="274320"/>
-          </a:xfrm>
-          <a:prstGeom prst="rect">
-            <a:avLst/>
-          </a:prstGeom>
-          <a:noFill/>
-          <a:ln/>
-        </p:spPr>
-        <p:txBody>
-          <a:bodyPr wrap="square" lIns="0" tIns="0" rIns="0" bIns="0" rtlCol="0" anchor="ctr"/>
-          <a:lstStyle/>
-          <a:p>
-            <a:pPr indent="0" marL="0">
-              <a:buNone/>
-            </a:pPr>
-            <a:r>
-              <a:rPr lang="en-US" sz="1200" dirty="0">
-                <a:solidFill>
-                  <a:srgbClr val="687385"/>
-                </a:solidFill>
-              </a:rPr>
-              <a:t>When something is wrong, jump to the exact page + region.</a:t>
-            </a:r>
-            <a:endParaRPr lang="en-US" sz="1200" dirty="0"/>
-          </a:p>
-        </p:txBody>
-      </p:sp>
-      <p:sp>
-        <p:nvSpPr>
-          <p:cNvPr id="24" name="Shape 22"/>
-          <p:cNvSpPr/>
-          <p:nvPr/>
-        </p:nvSpPr>
-        <p:spPr>
-          <a:xfrm>
-            <a:off x="5212080" y="4617720"/>
-            <a:ext cx="5440680" cy="475488"/>
-          </a:xfrm>
-          <a:prstGeom prst="roundRect">
-            <a:avLst>
-              <a:gd name="adj" fmla="val 7692"/>
-            </a:avLst>
-          </a:prstGeom>
-          <a:solidFill>
-            <a:srgbClr val="FFF6D6"/>
-          </a:solidFill>
-          <a:ln w="12700">
-            <a:solidFill>
-              <a:srgbClr val="F2D675"/>
-            </a:solidFill>
-            <a:prstDash val="solid"/>
-          </a:ln>
-        </p:spPr>
-        <p:txBody>
-          <a:bodyPr/>
-          <a:p/>
-        </p:txBody>
-      </p:sp>
-      <p:sp>
-        <p:nvSpPr>
-          <p:cNvPr id="25" name="Text 23"/>
-          <p:cNvSpPr/>
-          <p:nvPr/>
-        </p:nvSpPr>
-        <p:spPr>
-          <a:xfrm>
-            <a:off x="5440680" y="4754880"/>
-            <a:ext cx="4983480" cy="182880"/>
-          </a:xfrm>
-          <a:prstGeom prst="rect">
-            <a:avLst/>
-          </a:prstGeom>
-          <a:noFill/>
-          <a:ln/>
-        </p:spPr>
-        <p:txBody>
-          <a:bodyPr wrap="square" lIns="0" tIns="0" rIns="0" bIns="0" rtlCol="0" anchor="ctr">
-            <a:normAutofit/>
-          </a:bodyPr>
-          <a:lstStyle/>
-          <a:p>
-            <a:pPr algn="ctr" indent="0" marL="0">
-              <a:buNone/>
-            </a:pPr>
-            <a:r>
-              <a:rPr lang="en-US" sz="1100" b="1" dirty="0">
-                <a:solidFill>
-                  <a:srgbClr val="7A5A00"/>
-                </a:solidFill>
-              </a:rPr>
-              <a:t>A successful run proves execution. Validation provides evidence of correctness.</a:t>
-            </a:r>
-            <a:endParaRPr lang="en-US" sz="1100" dirty="0"/>
-          </a:p>
-        </p:txBody>
-      </p:sp>
-      <p:sp>
-        <p:nvSpPr>
           <p:cNvPr id="25" name="Slide Number Placeholder 0"/>
           <p:cNvSpPr>
             <a:spLocks noGrp="1"/>
@@ -18558,6 +17346,1658 @@
               <a:t>3</a:t>
             </a:fld>
             <a:endParaRPr lang="en-US"/>
+          </a:p>
+        </p:txBody>
+      </p:sp>
+      <p:sp>
+        <p:nvSpPr>
+          <p:cNvPr id="26" name="TextBox 25"/>
+          <p:cNvSpPr txBox="1"/>
+          <p:nvPr/>
+        </p:nvSpPr>
+        <p:spPr>
+          <a:xfrm>
+            <a:off x="502920" y="438912"/>
+            <a:ext cx="3657600" cy="201168"/>
+          </a:xfrm>
+          <a:prstGeom prst="rect">
+            <a:avLst/>
+          </a:prstGeom>
+          <a:noFill/>
+        </p:spPr>
+        <p:txBody>
+          <a:bodyPr wrap="none" lIns="0" rIns="0" tIns="0" bIns="0">
+            <a:spAutoFit/>
+          </a:bodyPr>
+          <a:lstStyle/>
+          <a:p>
+            <a:pPr algn="l"/>
+            <a:r>
+              <a:rPr sz="1100" b="1">
+                <a:solidFill>
+                  <a:srgbClr val="2F80ED"/>
+                </a:solidFill>
+                <a:latin typeface="Aptos"/>
+              </a:rPr>
+              <a:t>VALIDATION METHODOLOGY</a:t>
+            </a:r>
+          </a:p>
+        </p:txBody>
+      </p:sp>
+      <p:sp>
+        <p:nvSpPr>
+          <p:cNvPr id="27" name="TextBox 26"/>
+          <p:cNvSpPr txBox="1"/>
+          <p:nvPr/>
+        </p:nvSpPr>
+        <p:spPr>
+          <a:xfrm>
+            <a:off x="502920" y="713232"/>
+            <a:ext cx="10972800" cy="530352"/>
+          </a:xfrm>
+          <a:prstGeom prst="rect">
+            <a:avLst/>
+          </a:prstGeom>
+          <a:noFill/>
+        </p:spPr>
+        <p:txBody>
+          <a:bodyPr wrap="none" lIns="0" rIns="0" tIns="0" bIns="0">
+            <a:spAutoFit/>
+          </a:bodyPr>
+          <a:lstStyle/>
+          <a:p>
+            <a:pPr algn="l"/>
+            <a:r>
+              <a:rPr sz="2800" b="1">
+                <a:solidFill>
+                  <a:srgbClr val="19233A"/>
+                </a:solidFill>
+                <a:latin typeface="Aptos"/>
+              </a:rPr>
+              <a:t>How We Validate OCR Quality</a:t>
+            </a:r>
+          </a:p>
+        </p:txBody>
+      </p:sp>
+      <p:sp>
+        <p:nvSpPr>
+          <p:cNvPr id="28" name="TextBox 27"/>
+          <p:cNvSpPr txBox="1"/>
+          <p:nvPr/>
+        </p:nvSpPr>
+        <p:spPr>
+          <a:xfrm>
+            <a:off x="502920" y="1261872"/>
+            <a:ext cx="10972800" cy="320040"/>
+          </a:xfrm>
+          <a:prstGeom prst="rect">
+            <a:avLst/>
+          </a:prstGeom>
+          <a:noFill/>
+        </p:spPr>
+        <p:txBody>
+          <a:bodyPr wrap="none" lIns="0" rIns="0" tIns="0" bIns="0">
+            <a:spAutoFit/>
+          </a:bodyPr>
+          <a:lstStyle/>
+          <a:p>
+            <a:pPr algn="l"/>
+            <a:r>
+              <a:rPr sz="1500" b="0">
+                <a:solidFill>
+                  <a:srgbClr val="66748C"/>
+                </a:solidFill>
+                <a:latin typeface="Aptos"/>
+              </a:rPr>
+              <a:t>Sample across document structures → measure extraction signals → analyze statistically → inspect what looks wrong.</a:t>
+            </a:r>
+          </a:p>
+        </p:txBody>
+      </p:sp>
+      <p:sp>
+        <p:nvSpPr>
+          <p:cNvPr id="29" name="Rounded Rectangle 28"/>
+          <p:cNvSpPr/>
+          <p:nvPr/>
+        </p:nvSpPr>
+        <p:spPr>
+          <a:xfrm>
+            <a:off x="640080" y="1828800"/>
+            <a:ext cx="3246120" cy="3520440"/>
+          </a:xfrm>
+          <a:prstGeom prst="roundRect">
+            <a:avLst/>
+          </a:prstGeom>
+          <a:solidFill>
+            <a:srgbClr val="F7F9FC"/>
+          </a:solidFill>
+          <a:ln w="12700">
+            <a:solidFill>
+              <a:srgbClr val="D6DEE9"/>
+            </a:solidFill>
+          </a:ln>
+        </p:spPr>
+        <p:style>
+          <a:lnRef idx="1">
+            <a:schemeClr val="accent1"/>
+          </a:lnRef>
+          <a:fillRef idx="3">
+            <a:schemeClr val="accent1"/>
+          </a:fillRef>
+          <a:effectRef idx="2">
+            <a:schemeClr val="accent1"/>
+          </a:effectRef>
+          <a:fontRef idx="minor">
+            <a:schemeClr val="lt1"/>
+          </a:fontRef>
+        </p:style>
+        <p:txBody>
+          <a:bodyPr rtlCol="0" anchor="ctr"/>
+          <a:lstStyle/>
+          <a:p>
+            <a:pPr algn="ctr"/>
+          </a:p>
+        </p:txBody>
+      </p:sp>
+      <p:sp>
+        <p:nvSpPr>
+          <p:cNvPr id="30" name="TextBox 29"/>
+          <p:cNvSpPr txBox="1"/>
+          <p:nvPr/>
+        </p:nvSpPr>
+        <p:spPr>
+          <a:xfrm>
+            <a:off x="868680" y="2057400"/>
+            <a:ext cx="2743200" cy="411480"/>
+          </a:xfrm>
+          <a:prstGeom prst="rect">
+            <a:avLst/>
+          </a:prstGeom>
+          <a:noFill/>
+        </p:spPr>
+        <p:txBody>
+          <a:bodyPr wrap="none" lIns="0" rIns="0" tIns="0" bIns="0">
+            <a:spAutoFit/>
+          </a:bodyPr>
+          <a:lstStyle/>
+          <a:p>
+            <a:pPr algn="l"/>
+            <a:r>
+              <a:rPr sz="1400" b="1">
+                <a:solidFill>
+                  <a:srgbClr val="19233A"/>
+                </a:solidFill>
+                <a:latin typeface="Aptos"/>
+              </a:rPr>
+              <a:t>1  BUILD A REPRESENTATIVE SAMPLE</a:t>
+            </a:r>
+          </a:p>
+        </p:txBody>
+      </p:sp>
+      <p:sp>
+        <p:nvSpPr>
+          <p:cNvPr id="31" name="TextBox 30"/>
+          <p:cNvSpPr txBox="1"/>
+          <p:nvPr/>
+        </p:nvSpPr>
+        <p:spPr>
+          <a:xfrm>
+            <a:off x="868680" y="2487168"/>
+            <a:ext cx="2697480" cy="566928"/>
+          </a:xfrm>
+          <a:prstGeom prst="rect">
+            <a:avLst/>
+          </a:prstGeom>
+          <a:noFill/>
+        </p:spPr>
+        <p:txBody>
+          <a:bodyPr wrap="none" lIns="0" rIns="0" tIns="0" bIns="0">
+            <a:spAutoFit/>
+          </a:bodyPr>
+          <a:lstStyle/>
+          <a:p>
+            <a:pPr algn="l"/>
+            <a:r>
+              <a:rPr sz="1250" b="0">
+                <a:solidFill>
+                  <a:srgbClr val="66748C"/>
+                </a:solidFill>
+                <a:latin typeface="Aptos"/>
+              </a:rPr>
+              <a:t>Do not validate only the easiest PDFs. Sample documents across the structures present in the corpus.</a:t>
+            </a:r>
+          </a:p>
+        </p:txBody>
+      </p:sp>
+      <p:sp>
+        <p:nvSpPr>
+          <p:cNvPr id="32" name="Rounded Rectangle 31"/>
+          <p:cNvSpPr/>
+          <p:nvPr/>
+        </p:nvSpPr>
+        <p:spPr>
+          <a:xfrm>
+            <a:off x="868680" y="3182112"/>
+            <a:ext cx="2514600" cy="292608"/>
+          </a:xfrm>
+          <a:prstGeom prst="roundRect">
+            <a:avLst/>
+          </a:prstGeom>
+          <a:solidFill>
+            <a:srgbClr val="EFF6FF"/>
+          </a:solidFill>
+          <a:ln w="12700">
+            <a:solidFill>
+              <a:srgbClr val="EFF6FF"/>
+            </a:solidFill>
+          </a:ln>
+        </p:spPr>
+        <p:style>
+          <a:lnRef idx="1">
+            <a:schemeClr val="accent1"/>
+          </a:lnRef>
+          <a:fillRef idx="3">
+            <a:schemeClr val="accent1"/>
+          </a:fillRef>
+          <a:effectRef idx="2">
+            <a:schemeClr val="accent1"/>
+          </a:effectRef>
+          <a:fontRef idx="minor">
+            <a:schemeClr val="lt1"/>
+          </a:fontRef>
+        </p:style>
+        <p:txBody>
+          <a:bodyPr rtlCol="0" anchor="ctr"/>
+          <a:lstStyle/>
+          <a:p>
+            <a:pPr algn="ctr"/>
+          </a:p>
+        </p:txBody>
+      </p:sp>
+      <p:sp>
+        <p:nvSpPr>
+          <p:cNvPr id="33" name="TextBox 32"/>
+          <p:cNvSpPr txBox="1"/>
+          <p:nvPr/>
+        </p:nvSpPr>
+        <p:spPr>
+          <a:xfrm>
+            <a:off x="1005840" y="3360420"/>
+            <a:ext cx="2240280" cy="155448"/>
+          </a:xfrm>
+          <a:prstGeom prst="rect">
+            <a:avLst/>
+          </a:prstGeom>
+          <a:noFill/>
+        </p:spPr>
+        <p:txBody>
+          <a:bodyPr wrap="none" lIns="0" rIns="0" tIns="0" bIns="0">
+            <a:spAutoFit/>
+          </a:bodyPr>
+          <a:lstStyle/>
+          <a:p>
+            <a:pPr algn="l"/>
+            <a:r>
+              <a:rPr sz="919" b="1">
+                <a:solidFill>
+                  <a:srgbClr val="2F80ED"/>
+                </a:solidFill>
+                <a:latin typeface="Aptos"/>
+              </a:rPr>
+              <a:t>TEXT-HEAVY</a:t>
+            </a:r>
+          </a:p>
+        </p:txBody>
+      </p:sp>
+      <p:sp>
+        <p:nvSpPr>
+          <p:cNvPr id="34" name="Rounded Rectangle 33"/>
+          <p:cNvSpPr/>
+          <p:nvPr/>
+        </p:nvSpPr>
+        <p:spPr>
+          <a:xfrm>
+            <a:off x="868680" y="3639312"/>
+            <a:ext cx="2514600" cy="256032"/>
+          </a:xfrm>
+          <a:prstGeom prst="roundRect">
+            <a:avLst/>
+          </a:prstGeom>
+          <a:solidFill>
+            <a:srgbClr val="FFF8EB"/>
+          </a:solidFill>
+          <a:ln w="12700">
+            <a:solidFill>
+              <a:srgbClr val="FFF8EB"/>
+            </a:solidFill>
+          </a:ln>
+        </p:spPr>
+        <p:style>
+          <a:lnRef idx="1">
+            <a:schemeClr val="accent1"/>
+          </a:lnRef>
+          <a:fillRef idx="3">
+            <a:schemeClr val="accent1"/>
+          </a:fillRef>
+          <a:effectRef idx="2">
+            <a:schemeClr val="accent1"/>
+          </a:effectRef>
+          <a:fontRef idx="minor">
+            <a:schemeClr val="lt1"/>
+          </a:fontRef>
+        </p:style>
+        <p:txBody>
+          <a:bodyPr rtlCol="0" anchor="ctr"/>
+          <a:lstStyle/>
+          <a:p>
+            <a:pPr algn="ctr"/>
+          </a:p>
+        </p:txBody>
+      </p:sp>
+      <p:sp>
+        <p:nvSpPr>
+          <p:cNvPr id="35" name="TextBox 34"/>
+          <p:cNvSpPr txBox="1"/>
+          <p:nvPr/>
+        </p:nvSpPr>
+        <p:spPr>
+          <a:xfrm>
+            <a:off x="1005840" y="3689604"/>
+            <a:ext cx="2240280" cy="155448"/>
+          </a:xfrm>
+          <a:prstGeom prst="rect">
+            <a:avLst/>
+          </a:prstGeom>
+          <a:noFill/>
+        </p:spPr>
+        <p:txBody>
+          <a:bodyPr wrap="none" lIns="0" rIns="0" tIns="0" bIns="0">
+            <a:spAutoFit/>
+          </a:bodyPr>
+          <a:lstStyle/>
+          <a:p>
+            <a:pPr algn="l"/>
+            <a:r>
+              <a:rPr sz="919" b="1">
+                <a:solidFill>
+                  <a:srgbClr val="F59E0B"/>
+                </a:solidFill>
+                <a:latin typeface="Aptos"/>
+              </a:rPr>
+              <a:t>TABLES</a:t>
+            </a:r>
+          </a:p>
+        </p:txBody>
+      </p:sp>
+      <p:sp>
+        <p:nvSpPr>
+          <p:cNvPr id="36" name="Rounded Rectangle 35"/>
+          <p:cNvSpPr/>
+          <p:nvPr/>
+        </p:nvSpPr>
+        <p:spPr>
+          <a:xfrm>
+            <a:off x="868680" y="3968496"/>
+            <a:ext cx="2514600" cy="256032"/>
+          </a:xfrm>
+          <a:prstGeom prst="roundRect">
+            <a:avLst/>
+          </a:prstGeom>
+          <a:solidFill>
+            <a:srgbClr val="F0FAF5"/>
+          </a:solidFill>
+          <a:ln w="12700">
+            <a:solidFill>
+              <a:srgbClr val="F0FAF5"/>
+            </a:solidFill>
+          </a:ln>
+        </p:spPr>
+        <p:style>
+          <a:lnRef idx="1">
+            <a:schemeClr val="accent1"/>
+          </a:lnRef>
+          <a:fillRef idx="3">
+            <a:schemeClr val="accent1"/>
+          </a:fillRef>
+          <a:effectRef idx="2">
+            <a:schemeClr val="accent1"/>
+          </a:effectRef>
+          <a:fontRef idx="minor">
+            <a:schemeClr val="lt1"/>
+          </a:fontRef>
+        </p:style>
+        <p:txBody>
+          <a:bodyPr rtlCol="0" anchor="ctr"/>
+          <a:lstStyle/>
+          <a:p>
+            <a:pPr algn="ctr"/>
+          </a:p>
+        </p:txBody>
+      </p:sp>
+      <p:sp>
+        <p:nvSpPr>
+          <p:cNvPr id="37" name="TextBox 36"/>
+          <p:cNvSpPr txBox="1"/>
+          <p:nvPr/>
+        </p:nvSpPr>
+        <p:spPr>
+          <a:xfrm>
+            <a:off x="1005840" y="4018787"/>
+            <a:ext cx="2240280" cy="155448"/>
+          </a:xfrm>
+          <a:prstGeom prst="rect">
+            <a:avLst/>
+          </a:prstGeom>
+          <a:noFill/>
+        </p:spPr>
+        <p:txBody>
+          <a:bodyPr wrap="none" lIns="0" rIns="0" tIns="0" bIns="0">
+            <a:spAutoFit/>
+          </a:bodyPr>
+          <a:lstStyle/>
+          <a:p>
+            <a:pPr algn="l"/>
+            <a:r>
+              <a:rPr sz="919" b="1">
+                <a:solidFill>
+                  <a:srgbClr val="27AE60"/>
+                </a:solidFill>
+                <a:latin typeface="Aptos"/>
+              </a:rPr>
+              <a:t>FORMS</a:t>
+            </a:r>
+          </a:p>
+        </p:txBody>
+      </p:sp>
+      <p:sp>
+        <p:nvSpPr>
+          <p:cNvPr id="38" name="Rounded Rectangle 37"/>
+          <p:cNvSpPr/>
+          <p:nvPr/>
+        </p:nvSpPr>
+        <p:spPr>
+          <a:xfrm>
+            <a:off x="868680" y="4297680"/>
+            <a:ext cx="2514600" cy="256032"/>
+          </a:xfrm>
+          <a:prstGeom prst="roundRect">
+            <a:avLst/>
+          </a:prstGeom>
+          <a:solidFill>
+            <a:srgbClr val="EFF6FF"/>
+          </a:solidFill>
+          <a:ln w="12700">
+            <a:solidFill>
+              <a:srgbClr val="EFF6FF"/>
+            </a:solidFill>
+          </a:ln>
+        </p:spPr>
+        <p:style>
+          <a:lnRef idx="1">
+            <a:schemeClr val="accent1"/>
+          </a:lnRef>
+          <a:fillRef idx="3">
+            <a:schemeClr val="accent1"/>
+          </a:fillRef>
+          <a:effectRef idx="2">
+            <a:schemeClr val="accent1"/>
+          </a:effectRef>
+          <a:fontRef idx="minor">
+            <a:schemeClr val="lt1"/>
+          </a:fontRef>
+        </p:style>
+        <p:txBody>
+          <a:bodyPr rtlCol="0" anchor="ctr"/>
+          <a:lstStyle/>
+          <a:p>
+            <a:pPr algn="ctr"/>
+          </a:p>
+        </p:txBody>
+      </p:sp>
+      <p:sp>
+        <p:nvSpPr>
+          <p:cNvPr id="39" name="TextBox 38"/>
+          <p:cNvSpPr txBox="1"/>
+          <p:nvPr/>
+        </p:nvSpPr>
+        <p:spPr>
+          <a:xfrm>
+            <a:off x="1005840" y="4347972"/>
+            <a:ext cx="2240280" cy="155448"/>
+          </a:xfrm>
+          <a:prstGeom prst="rect">
+            <a:avLst/>
+          </a:prstGeom>
+          <a:noFill/>
+        </p:spPr>
+        <p:txBody>
+          <a:bodyPr wrap="none" lIns="0" rIns="0" tIns="0" bIns="0">
+            <a:spAutoFit/>
+          </a:bodyPr>
+          <a:lstStyle/>
+          <a:p>
+            <a:pPr algn="l"/>
+            <a:r>
+              <a:rPr sz="919" b="1">
+                <a:solidFill>
+                  <a:srgbClr val="2F80ED"/>
+                </a:solidFill>
+                <a:latin typeface="Aptos"/>
+              </a:rPr>
+              <a:t>MULTI-COLUMN</a:t>
+            </a:r>
+          </a:p>
+        </p:txBody>
+      </p:sp>
+      <p:sp>
+        <p:nvSpPr>
+          <p:cNvPr id="40" name="Rounded Rectangle 39"/>
+          <p:cNvSpPr/>
+          <p:nvPr/>
+        </p:nvSpPr>
+        <p:spPr>
+          <a:xfrm>
+            <a:off x="868680" y="4626864"/>
+            <a:ext cx="2514600" cy="256032"/>
+          </a:xfrm>
+          <a:prstGeom prst="roundRect">
+            <a:avLst/>
+          </a:prstGeom>
+          <a:solidFill>
+            <a:srgbClr val="FFF8EB"/>
+          </a:solidFill>
+          <a:ln w="12700">
+            <a:solidFill>
+              <a:srgbClr val="FFF8EB"/>
+            </a:solidFill>
+          </a:ln>
+        </p:spPr>
+        <p:style>
+          <a:lnRef idx="1">
+            <a:schemeClr val="accent1"/>
+          </a:lnRef>
+          <a:fillRef idx="3">
+            <a:schemeClr val="accent1"/>
+          </a:fillRef>
+          <a:effectRef idx="2">
+            <a:schemeClr val="accent1"/>
+          </a:effectRef>
+          <a:fontRef idx="minor">
+            <a:schemeClr val="lt1"/>
+          </a:fontRef>
+        </p:style>
+        <p:txBody>
+          <a:bodyPr rtlCol="0" anchor="ctr"/>
+          <a:lstStyle/>
+          <a:p>
+            <a:pPr algn="ctr"/>
+          </a:p>
+        </p:txBody>
+      </p:sp>
+      <p:sp>
+        <p:nvSpPr>
+          <p:cNvPr id="41" name="TextBox 40"/>
+          <p:cNvSpPr txBox="1"/>
+          <p:nvPr/>
+        </p:nvSpPr>
+        <p:spPr>
+          <a:xfrm>
+            <a:off x="1005840" y="4677155"/>
+            <a:ext cx="2240280" cy="155448"/>
+          </a:xfrm>
+          <a:prstGeom prst="rect">
+            <a:avLst/>
+          </a:prstGeom>
+          <a:noFill/>
+        </p:spPr>
+        <p:txBody>
+          <a:bodyPr wrap="none" lIns="0" rIns="0" tIns="0" bIns="0">
+            <a:spAutoFit/>
+          </a:bodyPr>
+          <a:lstStyle/>
+          <a:p>
+            <a:pPr algn="l"/>
+            <a:r>
+              <a:rPr sz="919" b="1">
+                <a:solidFill>
+                  <a:srgbClr val="F59E0B"/>
+                </a:solidFill>
+                <a:latin typeface="Aptos"/>
+              </a:rPr>
+              <a:t>SCANNED / MIXED</a:t>
+            </a:r>
+          </a:p>
+        </p:txBody>
+      </p:sp>
+      <p:sp>
+        <p:nvSpPr>
+          <p:cNvPr id="42" name="TextBox 41"/>
+          <p:cNvSpPr txBox="1"/>
+          <p:nvPr/>
+        </p:nvSpPr>
+        <p:spPr>
+          <a:xfrm>
+            <a:off x="868680" y="5029200"/>
+            <a:ext cx="2651760" cy="256032"/>
+          </a:xfrm>
+          <a:prstGeom prst="rect">
+            <a:avLst/>
+          </a:prstGeom>
+          <a:noFill/>
+        </p:spPr>
+        <p:txBody>
+          <a:bodyPr wrap="none" lIns="0" rIns="0" tIns="0" bIns="0">
+            <a:spAutoFit/>
+          </a:bodyPr>
+          <a:lstStyle/>
+          <a:p>
+            <a:pPr algn="l"/>
+            <a:r>
+              <a:rPr sz="1050" b="0">
+                <a:solidFill>
+                  <a:srgbClr val="66748C"/>
+                </a:solidFill>
+                <a:latin typeface="Aptos"/>
+              </a:rPr>
+              <a:t>This makes the validation set reflect the actual variety of the corpus.</a:t>
+            </a:r>
+          </a:p>
+        </p:txBody>
+      </p:sp>
+      <p:sp>
+        <p:nvSpPr>
+          <p:cNvPr id="43" name="Rounded Rectangle 42"/>
+          <p:cNvSpPr/>
+          <p:nvPr/>
+        </p:nvSpPr>
+        <p:spPr>
+          <a:xfrm>
+            <a:off x="4160520" y="1828800"/>
+            <a:ext cx="7360920" cy="3520440"/>
+          </a:xfrm>
+          <a:prstGeom prst="roundRect">
+            <a:avLst/>
+          </a:prstGeom>
+          <a:solidFill>
+            <a:srgbClr val="FFFFFF"/>
+          </a:solidFill>
+          <a:ln w="12700">
+            <a:solidFill>
+              <a:srgbClr val="D6DEE9"/>
+            </a:solidFill>
+          </a:ln>
+        </p:spPr>
+        <p:style>
+          <a:lnRef idx="1">
+            <a:schemeClr val="accent1"/>
+          </a:lnRef>
+          <a:fillRef idx="3">
+            <a:schemeClr val="accent1"/>
+          </a:fillRef>
+          <a:effectRef idx="2">
+            <a:schemeClr val="accent1"/>
+          </a:effectRef>
+          <a:fontRef idx="minor">
+            <a:schemeClr val="lt1"/>
+          </a:fontRef>
+        </p:style>
+        <p:txBody>
+          <a:bodyPr rtlCol="0" anchor="ctr"/>
+          <a:lstStyle/>
+          <a:p>
+            <a:pPr algn="ctr"/>
+          </a:p>
+        </p:txBody>
+      </p:sp>
+      <p:sp>
+        <p:nvSpPr>
+          <p:cNvPr id="44" name="TextBox 43"/>
+          <p:cNvSpPr txBox="1"/>
+          <p:nvPr/>
+        </p:nvSpPr>
+        <p:spPr>
+          <a:xfrm>
+            <a:off x="4434840" y="2057400"/>
+            <a:ext cx="3474720" cy="274320"/>
+          </a:xfrm>
+          <a:prstGeom prst="rect">
+            <a:avLst/>
+          </a:prstGeom>
+          <a:noFill/>
+        </p:spPr>
+        <p:txBody>
+          <a:bodyPr wrap="none" lIns="0" rIns="0" tIns="0" bIns="0">
+            <a:spAutoFit/>
+          </a:bodyPr>
+          <a:lstStyle/>
+          <a:p>
+            <a:pPr algn="l"/>
+            <a:r>
+              <a:rPr sz="1400" b="1">
+                <a:solidFill>
+                  <a:srgbClr val="19233A"/>
+                </a:solidFill>
+                <a:latin typeface="Aptos"/>
+              </a:rPr>
+              <a:t>2  TURN THE SAMPLE INTO EVIDENCE</a:t>
+            </a:r>
+          </a:p>
+        </p:txBody>
+      </p:sp>
+      <p:sp>
+        <p:nvSpPr>
+          <p:cNvPr id="45" name="Oval 44"/>
+          <p:cNvSpPr/>
+          <p:nvPr/>
+        </p:nvSpPr>
+        <p:spPr>
+          <a:xfrm>
+            <a:off x="4462272" y="2542032"/>
+            <a:ext cx="347472" cy="347472"/>
+          </a:xfrm>
+          <a:prstGeom prst="ellipse">
+            <a:avLst/>
+          </a:prstGeom>
+          <a:solidFill>
+            <a:srgbClr val="2F80ED"/>
+          </a:solidFill>
+          <a:ln>
+            <a:noFill/>
+          </a:ln>
+        </p:spPr>
+        <p:style>
+          <a:lnRef idx="1">
+            <a:schemeClr val="accent1"/>
+          </a:lnRef>
+          <a:fillRef idx="3">
+            <a:schemeClr val="accent1"/>
+          </a:fillRef>
+          <a:effectRef idx="2">
+            <a:schemeClr val="accent1"/>
+          </a:effectRef>
+          <a:fontRef idx="minor">
+            <a:schemeClr val="lt1"/>
+          </a:fontRef>
+        </p:style>
+        <p:txBody>
+          <a:bodyPr rtlCol="0" anchor="ctr"/>
+          <a:lstStyle/>
+          <a:p>
+            <a:pPr algn="ctr"/>
+            <a:r>
+              <a:rPr sz="1200" b="1">
+                <a:solidFill>
+                  <a:srgbClr val="FFFFFF"/>
+                </a:solidFill>
+                <a:latin typeface="Aptos"/>
+              </a:rPr>
+              <a:t>1</a:t>
+            </a:r>
+          </a:p>
+        </p:txBody>
+      </p:sp>
+      <p:sp>
+        <p:nvSpPr>
+          <p:cNvPr id="46" name="TextBox 45"/>
+          <p:cNvSpPr txBox="1"/>
+          <p:nvPr/>
+        </p:nvSpPr>
+        <p:spPr>
+          <a:xfrm>
+            <a:off x="4919472" y="2532888"/>
+            <a:ext cx="1828800" cy="201168"/>
+          </a:xfrm>
+          <a:prstGeom prst="rect">
+            <a:avLst/>
+          </a:prstGeom>
+          <a:noFill/>
+        </p:spPr>
+        <p:txBody>
+          <a:bodyPr wrap="none" lIns="0" rIns="0" tIns="0" bIns="0">
+            <a:spAutoFit/>
+          </a:bodyPr>
+          <a:lstStyle/>
+          <a:p>
+            <a:pPr algn="l"/>
+            <a:r>
+              <a:rPr sz="1200" b="1">
+                <a:solidFill>
+                  <a:srgbClr val="19233A"/>
+                </a:solidFill>
+                <a:latin typeface="Aptos"/>
+              </a:rPr>
+              <a:t>MEASURE</a:t>
+            </a:r>
+          </a:p>
+        </p:txBody>
+      </p:sp>
+      <p:sp>
+        <p:nvSpPr>
+          <p:cNvPr id="47" name="TextBox 46"/>
+          <p:cNvSpPr txBox="1"/>
+          <p:nvPr/>
+        </p:nvSpPr>
+        <p:spPr>
+          <a:xfrm>
+            <a:off x="6400800" y="2523744"/>
+            <a:ext cx="4709160" cy="384048"/>
+          </a:xfrm>
+          <a:prstGeom prst="rect">
+            <a:avLst/>
+          </a:prstGeom>
+          <a:noFill/>
+        </p:spPr>
+        <p:txBody>
+          <a:bodyPr wrap="none" lIns="0" rIns="0" tIns="0" bIns="0">
+            <a:spAutoFit/>
+          </a:bodyPr>
+          <a:lstStyle/>
+          <a:p>
+            <a:pPr algn="l"/>
+            <a:r>
+              <a:rPr sz="1150" b="0">
+                <a:solidFill>
+                  <a:srgbClr val="66748C"/>
+                </a:solidFill>
+                <a:latin typeface="Aptos"/>
+              </a:rPr>
+              <a:t>tokens/page · confidence · dropped regions · artifacts</a:t>
+            </a:r>
+          </a:p>
+        </p:txBody>
+      </p:sp>
+      <p:sp>
+        <p:nvSpPr>
+          <p:cNvPr id="48" name="Oval 47"/>
+          <p:cNvSpPr/>
+          <p:nvPr/>
+        </p:nvSpPr>
+        <p:spPr>
+          <a:xfrm>
+            <a:off x="4462272" y="3154680"/>
+            <a:ext cx="347472" cy="347472"/>
+          </a:xfrm>
+          <a:prstGeom prst="ellipse">
+            <a:avLst/>
+          </a:prstGeom>
+          <a:solidFill>
+            <a:srgbClr val="F59E0B"/>
+          </a:solidFill>
+          <a:ln>
+            <a:noFill/>
+          </a:ln>
+        </p:spPr>
+        <p:style>
+          <a:lnRef idx="1">
+            <a:schemeClr val="accent1"/>
+          </a:lnRef>
+          <a:fillRef idx="3">
+            <a:schemeClr val="accent1"/>
+          </a:fillRef>
+          <a:effectRef idx="2">
+            <a:schemeClr val="accent1"/>
+          </a:effectRef>
+          <a:fontRef idx="minor">
+            <a:schemeClr val="lt1"/>
+          </a:fontRef>
+        </p:style>
+        <p:txBody>
+          <a:bodyPr rtlCol="0" anchor="ctr"/>
+          <a:lstStyle/>
+          <a:p>
+            <a:pPr algn="ctr"/>
+            <a:r>
+              <a:rPr sz="1200" b="1">
+                <a:solidFill>
+                  <a:srgbClr val="FFFFFF"/>
+                </a:solidFill>
+                <a:latin typeface="Aptos"/>
+              </a:rPr>
+              <a:t>2</a:t>
+            </a:r>
+          </a:p>
+        </p:txBody>
+      </p:sp>
+      <p:sp>
+        <p:nvSpPr>
+          <p:cNvPr id="49" name="TextBox 48"/>
+          <p:cNvSpPr txBox="1"/>
+          <p:nvPr/>
+        </p:nvSpPr>
+        <p:spPr>
+          <a:xfrm>
+            <a:off x="4919472" y="3145536"/>
+            <a:ext cx="1828800" cy="201168"/>
+          </a:xfrm>
+          <a:prstGeom prst="rect">
+            <a:avLst/>
+          </a:prstGeom>
+          <a:noFill/>
+        </p:spPr>
+        <p:txBody>
+          <a:bodyPr wrap="none" lIns="0" rIns="0" tIns="0" bIns="0">
+            <a:spAutoFit/>
+          </a:bodyPr>
+          <a:lstStyle/>
+          <a:p>
+            <a:pPr algn="l"/>
+            <a:r>
+              <a:rPr sz="1200" b="1">
+                <a:solidFill>
+                  <a:srgbClr val="19233A"/>
+                </a:solidFill>
+                <a:latin typeface="Aptos"/>
+              </a:rPr>
+              <a:t>ANALYZE</a:t>
+            </a:r>
+          </a:p>
+        </p:txBody>
+      </p:sp>
+      <p:sp>
+        <p:nvSpPr>
+          <p:cNvPr id="50" name="TextBox 49"/>
+          <p:cNvSpPr txBox="1"/>
+          <p:nvPr/>
+        </p:nvSpPr>
+        <p:spPr>
+          <a:xfrm>
+            <a:off x="6400800" y="3136392"/>
+            <a:ext cx="4709160" cy="384048"/>
+          </a:xfrm>
+          <a:prstGeom prst="rect">
+            <a:avLst/>
+          </a:prstGeom>
+          <a:noFill/>
+        </p:spPr>
+        <p:txBody>
+          <a:bodyPr wrap="none" lIns="0" rIns="0" tIns="0" bIns="0">
+            <a:spAutoFit/>
+          </a:bodyPr>
+          <a:lstStyle/>
+          <a:p>
+            <a:pPr algn="l"/>
+            <a:r>
+              <a:rPr sz="1150" b="0">
+                <a:solidFill>
+                  <a:srgbClr val="66748C"/>
+                </a:solidFill>
+                <a:latin typeface="Aptos"/>
+              </a:rPr>
+              <a:t>mean / median · spread · distributions · structure-wise rates</a:t>
+            </a:r>
+          </a:p>
+        </p:txBody>
+      </p:sp>
+      <p:sp>
+        <p:nvSpPr>
+          <p:cNvPr id="51" name="Oval 50"/>
+          <p:cNvSpPr/>
+          <p:nvPr/>
+        </p:nvSpPr>
+        <p:spPr>
+          <a:xfrm>
+            <a:off x="4462272" y="3767328"/>
+            <a:ext cx="347472" cy="347472"/>
+          </a:xfrm>
+          <a:prstGeom prst="ellipse">
+            <a:avLst/>
+          </a:prstGeom>
+          <a:solidFill>
+            <a:srgbClr val="EB5757"/>
+          </a:solidFill>
+          <a:ln>
+            <a:noFill/>
+          </a:ln>
+        </p:spPr>
+        <p:style>
+          <a:lnRef idx="1">
+            <a:schemeClr val="accent1"/>
+          </a:lnRef>
+          <a:fillRef idx="3">
+            <a:schemeClr val="accent1"/>
+          </a:fillRef>
+          <a:effectRef idx="2">
+            <a:schemeClr val="accent1"/>
+          </a:effectRef>
+          <a:fontRef idx="minor">
+            <a:schemeClr val="lt1"/>
+          </a:fontRef>
+        </p:style>
+        <p:txBody>
+          <a:bodyPr rtlCol="0" anchor="ctr"/>
+          <a:lstStyle/>
+          <a:p>
+            <a:pPr algn="ctr"/>
+            <a:r>
+              <a:rPr sz="1200" b="1">
+                <a:solidFill>
+                  <a:srgbClr val="FFFFFF"/>
+                </a:solidFill>
+                <a:latin typeface="Aptos"/>
+              </a:rPr>
+              <a:t>3</a:t>
+            </a:r>
+          </a:p>
+        </p:txBody>
+      </p:sp>
+      <p:sp>
+        <p:nvSpPr>
+          <p:cNvPr id="52" name="TextBox 51"/>
+          <p:cNvSpPr txBox="1"/>
+          <p:nvPr/>
+        </p:nvSpPr>
+        <p:spPr>
+          <a:xfrm>
+            <a:off x="4919472" y="3758184"/>
+            <a:ext cx="1828800" cy="201168"/>
+          </a:xfrm>
+          <a:prstGeom prst="rect">
+            <a:avLst/>
+          </a:prstGeom>
+          <a:noFill/>
+        </p:spPr>
+        <p:txBody>
+          <a:bodyPr wrap="none" lIns="0" rIns="0" tIns="0" bIns="0">
+            <a:spAutoFit/>
+          </a:bodyPr>
+          <a:lstStyle/>
+          <a:p>
+            <a:pPr algn="l"/>
+            <a:r>
+              <a:rPr sz="1200" b="1">
+                <a:solidFill>
+                  <a:srgbClr val="19233A"/>
+                </a:solidFill>
+                <a:latin typeface="Aptos"/>
+              </a:rPr>
+              <a:t>FIND OUTLIERS</a:t>
+            </a:r>
+          </a:p>
+        </p:txBody>
+      </p:sp>
+      <p:sp>
+        <p:nvSpPr>
+          <p:cNvPr id="53" name="TextBox 52"/>
+          <p:cNvSpPr txBox="1"/>
+          <p:nvPr/>
+        </p:nvSpPr>
+        <p:spPr>
+          <a:xfrm>
+            <a:off x="6400800" y="3749040"/>
+            <a:ext cx="4709160" cy="384048"/>
+          </a:xfrm>
+          <a:prstGeom prst="rect">
+            <a:avLst/>
+          </a:prstGeom>
+          <a:noFill/>
+        </p:spPr>
+        <p:txBody>
+          <a:bodyPr wrap="none" lIns="0" rIns="0" tIns="0" bIns="0">
+            <a:spAutoFit/>
+          </a:bodyPr>
+          <a:lstStyle/>
+          <a:p>
+            <a:pPr algn="l"/>
+            <a:r>
+              <a:rPr sz="1150" b="0">
+                <a:solidFill>
+                  <a:srgbClr val="66748C"/>
+                </a:solidFill>
+                <a:latin typeface="Aptos"/>
+              </a:rPr>
+              <a:t>unusually low/high density · missing content · malformed regions</a:t>
+            </a:r>
+          </a:p>
+        </p:txBody>
+      </p:sp>
+      <p:sp>
+        <p:nvSpPr>
+          <p:cNvPr id="54" name="Oval 53"/>
+          <p:cNvSpPr/>
+          <p:nvPr/>
+        </p:nvSpPr>
+        <p:spPr>
+          <a:xfrm>
+            <a:off x="4462272" y="4379976"/>
+            <a:ext cx="347472" cy="347472"/>
+          </a:xfrm>
+          <a:prstGeom prst="ellipse">
+            <a:avLst/>
+          </a:prstGeom>
+          <a:solidFill>
+            <a:srgbClr val="27AE60"/>
+          </a:solidFill>
+          <a:ln>
+            <a:noFill/>
+          </a:ln>
+        </p:spPr>
+        <p:style>
+          <a:lnRef idx="1">
+            <a:schemeClr val="accent1"/>
+          </a:lnRef>
+          <a:fillRef idx="3">
+            <a:schemeClr val="accent1"/>
+          </a:fillRef>
+          <a:effectRef idx="2">
+            <a:schemeClr val="accent1"/>
+          </a:effectRef>
+          <a:fontRef idx="minor">
+            <a:schemeClr val="lt1"/>
+          </a:fontRef>
+        </p:style>
+        <p:txBody>
+          <a:bodyPr rtlCol="0" anchor="ctr"/>
+          <a:lstStyle/>
+          <a:p>
+            <a:pPr algn="ctr"/>
+            <a:r>
+              <a:rPr sz="1200" b="1">
+                <a:solidFill>
+                  <a:srgbClr val="FFFFFF"/>
+                </a:solidFill>
+                <a:latin typeface="Aptos"/>
+              </a:rPr>
+              <a:t>4</a:t>
+            </a:r>
+          </a:p>
+        </p:txBody>
+      </p:sp>
+      <p:sp>
+        <p:nvSpPr>
+          <p:cNvPr id="55" name="TextBox 54"/>
+          <p:cNvSpPr txBox="1"/>
+          <p:nvPr/>
+        </p:nvSpPr>
+        <p:spPr>
+          <a:xfrm>
+            <a:off x="4919472" y="4370832"/>
+            <a:ext cx="1828800" cy="201168"/>
+          </a:xfrm>
+          <a:prstGeom prst="rect">
+            <a:avLst/>
+          </a:prstGeom>
+          <a:noFill/>
+        </p:spPr>
+        <p:txBody>
+          <a:bodyPr wrap="none" lIns="0" rIns="0" tIns="0" bIns="0">
+            <a:spAutoFit/>
+          </a:bodyPr>
+          <a:lstStyle/>
+          <a:p>
+            <a:pPr algn="l"/>
+            <a:r>
+              <a:rPr sz="1200" b="1">
+                <a:solidFill>
+                  <a:srgbClr val="19233A"/>
+                </a:solidFill>
+                <a:latin typeface="Aptos"/>
+              </a:rPr>
+              <a:t>VALIDATE</a:t>
+            </a:r>
+          </a:p>
+        </p:txBody>
+      </p:sp>
+      <p:sp>
+        <p:nvSpPr>
+          <p:cNvPr id="56" name="TextBox 55"/>
+          <p:cNvSpPr txBox="1"/>
+          <p:nvPr/>
+        </p:nvSpPr>
+        <p:spPr>
+          <a:xfrm>
+            <a:off x="6400800" y="4361688"/>
+            <a:ext cx="4709160" cy="384048"/>
+          </a:xfrm>
+          <a:prstGeom prst="rect">
+            <a:avLst/>
+          </a:prstGeom>
+          <a:noFill/>
+        </p:spPr>
+        <p:txBody>
+          <a:bodyPr wrap="none" lIns="0" rIns="0" tIns="0" bIns="0">
+            <a:spAutoFit/>
+          </a:bodyPr>
+          <a:lstStyle/>
+          <a:p>
+            <a:pPr algn="l"/>
+            <a:r>
+              <a:rPr sz="1150" b="0">
+                <a:solidFill>
+                  <a:srgbClr val="66748C"/>
+                </a:solidFill>
+                <a:latin typeface="Aptos"/>
+              </a:rPr>
+              <a:t>inspect a sample + flagged cases and decide if output is trustworthy</a:t>
+            </a:r>
+          </a:p>
+        </p:txBody>
+      </p:sp>
+      <p:sp>
+        <p:nvSpPr>
+          <p:cNvPr id="57" name="Rounded Rectangle 56"/>
+          <p:cNvSpPr/>
+          <p:nvPr/>
+        </p:nvSpPr>
+        <p:spPr>
+          <a:xfrm>
+            <a:off x="4434840" y="4983480"/>
+            <a:ext cx="6720840" cy="201168"/>
+          </a:xfrm>
+          <a:prstGeom prst="roundRect">
+            <a:avLst/>
+          </a:prstGeom>
+          <a:solidFill>
+            <a:srgbClr val="F7F9FC"/>
+          </a:solidFill>
+          <a:ln w="12700">
+            <a:solidFill>
+              <a:srgbClr val="F7F9FC"/>
+            </a:solidFill>
+          </a:ln>
+        </p:spPr>
+        <p:style>
+          <a:lnRef idx="1">
+            <a:schemeClr val="accent1"/>
+          </a:lnRef>
+          <a:fillRef idx="3">
+            <a:schemeClr val="accent1"/>
+          </a:fillRef>
+          <a:effectRef idx="2">
+            <a:schemeClr val="accent1"/>
+          </a:effectRef>
+          <a:fontRef idx="minor">
+            <a:schemeClr val="lt1"/>
+          </a:fontRef>
+        </p:style>
+        <p:txBody>
+          <a:bodyPr rtlCol="0" anchor="ctr"/>
+          <a:lstStyle/>
+          <a:p>
+            <a:pPr algn="ctr"/>
+          </a:p>
+        </p:txBody>
+      </p:sp>
+      <p:sp>
+        <p:nvSpPr>
+          <p:cNvPr id="58" name="TextBox 57"/>
+          <p:cNvSpPr txBox="1"/>
+          <p:nvPr/>
+        </p:nvSpPr>
+        <p:spPr>
+          <a:xfrm>
+            <a:off x="4572000" y="4992624"/>
+            <a:ext cx="1097280" cy="146304"/>
+          </a:xfrm>
+          <a:prstGeom prst="rect">
+            <a:avLst/>
+          </a:prstGeom>
+          <a:noFill/>
+        </p:spPr>
+        <p:txBody>
+          <a:bodyPr wrap="none" lIns="0" rIns="0" tIns="0" bIns="0">
+            <a:spAutoFit/>
+          </a:bodyPr>
+          <a:lstStyle/>
+          <a:p>
+            <a:pPr algn="l"/>
+            <a:r>
+              <a:rPr sz="850" b="1">
+                <a:solidFill>
+                  <a:srgbClr val="66748C"/>
+                </a:solidFill>
+                <a:latin typeface="Aptos"/>
+              </a:rPr>
+              <a:t>EXPECTED RANGE</a:t>
+            </a:r>
+          </a:p>
+        </p:txBody>
+      </p:sp>
+      <p:sp>
+        <p:nvSpPr>
+          <p:cNvPr id="59" name="Rounded Rectangle 58"/>
+          <p:cNvSpPr/>
+          <p:nvPr/>
+        </p:nvSpPr>
+        <p:spPr>
+          <a:xfrm>
+            <a:off x="6537960" y="4983480"/>
+            <a:ext cx="2926080" cy="201168"/>
+          </a:xfrm>
+          <a:prstGeom prst="roundRect">
+            <a:avLst/>
+          </a:prstGeom>
+          <a:solidFill>
+            <a:srgbClr val="F0FAF5"/>
+          </a:solidFill>
+          <a:ln>
+            <a:noFill/>
+          </a:ln>
+        </p:spPr>
+        <p:style>
+          <a:lnRef idx="1">
+            <a:schemeClr val="accent1"/>
+          </a:lnRef>
+          <a:fillRef idx="3">
+            <a:schemeClr val="accent1"/>
+          </a:fillRef>
+          <a:effectRef idx="2">
+            <a:schemeClr val="accent1"/>
+          </a:effectRef>
+          <a:fontRef idx="minor">
+            <a:schemeClr val="lt1"/>
+          </a:fontRef>
+        </p:style>
+        <p:txBody>
+          <a:bodyPr rtlCol="0" anchor="ctr"/>
+          <a:lstStyle/>
+          <a:p>
+            <a:pPr algn="ctr"/>
+          </a:p>
+        </p:txBody>
+      </p:sp>
+      <p:sp>
+        <p:nvSpPr>
+          <p:cNvPr id="60" name="TextBox 59"/>
+          <p:cNvSpPr txBox="1"/>
+          <p:nvPr/>
+        </p:nvSpPr>
+        <p:spPr>
+          <a:xfrm>
+            <a:off x="7178040" y="4992624"/>
+            <a:ext cx="1463040" cy="146304"/>
+          </a:xfrm>
+          <a:prstGeom prst="rect">
+            <a:avLst/>
+          </a:prstGeom>
+          <a:noFill/>
+        </p:spPr>
+        <p:txBody>
+          <a:bodyPr wrap="none" lIns="0" rIns="0" tIns="0" bIns="0">
+            <a:spAutoFit/>
+          </a:bodyPr>
+          <a:lstStyle/>
+          <a:p>
+            <a:pPr algn="ctr"/>
+            <a:r>
+              <a:rPr sz="850" b="1">
+                <a:solidFill>
+                  <a:srgbClr val="27AE60"/>
+                </a:solidFill>
+                <a:latin typeface="Aptos"/>
+              </a:rPr>
+              <a:t>NORMAL VARIATION</a:t>
+            </a:r>
+          </a:p>
+        </p:txBody>
+      </p:sp>
+      <p:sp>
+        <p:nvSpPr>
+          <p:cNvPr id="61" name="Oval 60"/>
+          <p:cNvSpPr/>
+          <p:nvPr/>
+        </p:nvSpPr>
+        <p:spPr>
+          <a:xfrm>
+            <a:off x="6080760" y="4937760"/>
+            <a:ext cx="274320" cy="274320"/>
+          </a:xfrm>
+          <a:prstGeom prst="ellipse">
+            <a:avLst/>
+          </a:prstGeom>
+          <a:solidFill>
+            <a:srgbClr val="EB5757"/>
+          </a:solidFill>
+          <a:ln>
+            <a:noFill/>
+          </a:ln>
+        </p:spPr>
+        <p:style>
+          <a:lnRef idx="1">
+            <a:schemeClr val="accent1"/>
+          </a:lnRef>
+          <a:fillRef idx="3">
+            <a:schemeClr val="accent1"/>
+          </a:fillRef>
+          <a:effectRef idx="2">
+            <a:schemeClr val="accent1"/>
+          </a:effectRef>
+          <a:fontRef idx="minor">
+            <a:schemeClr val="lt1"/>
+          </a:fontRef>
+        </p:style>
+        <p:txBody>
+          <a:bodyPr rtlCol="0" anchor="ctr"/>
+          <a:lstStyle/>
+          <a:p>
+            <a:pPr algn="ctr"/>
+          </a:p>
+        </p:txBody>
+      </p:sp>
+      <p:sp>
+        <p:nvSpPr>
+          <p:cNvPr id="62" name="TextBox 61"/>
+          <p:cNvSpPr txBox="1"/>
+          <p:nvPr/>
+        </p:nvSpPr>
+        <p:spPr>
+          <a:xfrm>
+            <a:off x="6035040" y="5212080"/>
+            <a:ext cx="502920" cy="164592"/>
+          </a:xfrm>
+          <a:prstGeom prst="rect">
+            <a:avLst/>
+          </a:prstGeom>
+          <a:noFill/>
+        </p:spPr>
+        <p:txBody>
+          <a:bodyPr wrap="none" lIns="0" rIns="0" tIns="0" bIns="0">
+            <a:spAutoFit/>
+          </a:bodyPr>
+          <a:lstStyle/>
+          <a:p>
+            <a:pPr algn="ctr"/>
+            <a:r>
+              <a:rPr sz="800" b="1">
+                <a:solidFill>
+                  <a:srgbClr val="EB5757"/>
+                </a:solidFill>
+                <a:latin typeface="Aptos"/>
+              </a:rPr>
+              <a:t>LOW</a:t>
+            </a:r>
+          </a:p>
+        </p:txBody>
+      </p:sp>
+      <p:sp>
+        <p:nvSpPr>
+          <p:cNvPr id="63" name="Oval 62"/>
+          <p:cNvSpPr/>
+          <p:nvPr/>
+        </p:nvSpPr>
+        <p:spPr>
+          <a:xfrm>
+            <a:off x="9738360" y="4937760"/>
+            <a:ext cx="274320" cy="274320"/>
+          </a:xfrm>
+          <a:prstGeom prst="ellipse">
+            <a:avLst/>
+          </a:prstGeom>
+          <a:solidFill>
+            <a:srgbClr val="EB5757"/>
+          </a:solidFill>
+          <a:ln>
+            <a:noFill/>
+          </a:ln>
+        </p:spPr>
+        <p:style>
+          <a:lnRef idx="1">
+            <a:schemeClr val="accent1"/>
+          </a:lnRef>
+          <a:fillRef idx="3">
+            <a:schemeClr val="accent1"/>
+          </a:fillRef>
+          <a:effectRef idx="2">
+            <a:schemeClr val="accent1"/>
+          </a:effectRef>
+          <a:fontRef idx="minor">
+            <a:schemeClr val="lt1"/>
+          </a:fontRef>
+        </p:style>
+        <p:txBody>
+          <a:bodyPr rtlCol="0" anchor="ctr"/>
+          <a:lstStyle/>
+          <a:p>
+            <a:pPr algn="ctr"/>
+          </a:p>
+        </p:txBody>
+      </p:sp>
+      <p:sp>
+        <p:nvSpPr>
+          <p:cNvPr id="64" name="TextBox 63"/>
+          <p:cNvSpPr txBox="1"/>
+          <p:nvPr/>
+        </p:nvSpPr>
+        <p:spPr>
+          <a:xfrm>
+            <a:off x="9692640" y="5212080"/>
+            <a:ext cx="502920" cy="164592"/>
+          </a:xfrm>
+          <a:prstGeom prst="rect">
+            <a:avLst/>
+          </a:prstGeom>
+          <a:noFill/>
+        </p:spPr>
+        <p:txBody>
+          <a:bodyPr wrap="none" lIns="0" rIns="0" tIns="0" bIns="0">
+            <a:spAutoFit/>
+          </a:bodyPr>
+          <a:lstStyle/>
+          <a:p>
+            <a:pPr algn="ctr"/>
+            <a:r>
+              <a:rPr sz="800" b="1">
+                <a:solidFill>
+                  <a:srgbClr val="EB5757"/>
+                </a:solidFill>
+                <a:latin typeface="Aptos"/>
+              </a:rPr>
+              <a:t>HIGH</a:t>
+            </a:r>
+          </a:p>
+        </p:txBody>
+      </p:sp>
+      <p:sp>
+        <p:nvSpPr>
+          <p:cNvPr id="65" name="Rounded Rectangle 64"/>
+          <p:cNvSpPr/>
+          <p:nvPr/>
+        </p:nvSpPr>
+        <p:spPr>
+          <a:xfrm>
+            <a:off x="868680" y="5650992"/>
+            <a:ext cx="10561320" cy="502920"/>
+          </a:xfrm>
+          <a:prstGeom prst="roundRect">
+            <a:avLst/>
+          </a:prstGeom>
+          <a:solidFill>
+            <a:srgbClr val="EFF6FF"/>
+          </a:solidFill>
+          <a:ln w="12700">
+            <a:solidFill>
+              <a:srgbClr val="EFF6FF"/>
+            </a:solidFill>
+          </a:ln>
+        </p:spPr>
+        <p:style>
+          <a:lnRef idx="1">
+            <a:schemeClr val="accent1"/>
+          </a:lnRef>
+          <a:fillRef idx="3">
+            <a:schemeClr val="accent1"/>
+          </a:fillRef>
+          <a:effectRef idx="2">
+            <a:schemeClr val="accent1"/>
+          </a:effectRef>
+          <a:fontRef idx="minor">
+            <a:schemeClr val="lt1"/>
+          </a:fontRef>
+        </p:style>
+        <p:txBody>
+          <a:bodyPr rtlCol="0" anchor="ctr"/>
+          <a:lstStyle/>
+          <a:p>
+            <a:pPr algn="ctr"/>
+          </a:p>
+        </p:txBody>
+      </p:sp>
+      <p:sp>
+        <p:nvSpPr>
+          <p:cNvPr id="66" name="TextBox 65"/>
+          <p:cNvSpPr txBox="1"/>
+          <p:nvPr/>
+        </p:nvSpPr>
+        <p:spPr>
+          <a:xfrm>
+            <a:off x="1097280" y="5797296"/>
+            <a:ext cx="10104120" cy="182880"/>
+          </a:xfrm>
+          <a:prstGeom prst="rect">
+            <a:avLst/>
+          </a:prstGeom>
+          <a:noFill/>
+        </p:spPr>
+        <p:txBody>
+          <a:bodyPr wrap="none" lIns="0" rIns="0" tIns="0" bIns="0">
+            <a:spAutoFit/>
+          </a:bodyPr>
+          <a:lstStyle/>
+          <a:p>
+            <a:pPr algn="ctr"/>
+            <a:r>
+              <a:rPr sz="1200" b="1">
+                <a:solidFill>
+                  <a:srgbClr val="2F80ED"/>
+                </a:solidFill>
+                <a:latin typeface="Aptos"/>
+              </a:rPr>
+              <a:t>The goal is not one “correct” number — it is evidence that the OCR behaves consistently across the document population.</a:t>
+            </a:r>
+          </a:p>
+        </p:txBody>
+      </p:sp>
+      <p:sp>
+        <p:nvSpPr>
+          <p:cNvPr id="67" name="TextBox 66"/>
+          <p:cNvSpPr txBox="1"/>
+          <p:nvPr/>
+        </p:nvSpPr>
+        <p:spPr>
+          <a:xfrm>
+            <a:off x="502920" y="438912"/>
+            <a:ext cx="3657600" cy="201168"/>
+          </a:xfrm>
+          <a:prstGeom prst="rect">
+            <a:avLst/>
+          </a:prstGeom>
+          <a:noFill/>
+        </p:spPr>
+        <p:txBody>
+          <a:bodyPr wrap="none" lIns="0" rIns="0" tIns="0" bIns="0">
+            <a:spAutoFit/>
+          </a:bodyPr>
+          <a:lstStyle/>
+          <a:p>
+            <a:pPr algn="l"/>
+            <a:r>
+              <a:rPr sz="1100" b="1">
+                <a:solidFill>
+                  <a:srgbClr val="2F80ED"/>
+                </a:solidFill>
+                <a:latin typeface="Aptos"/>
+              </a:rPr>
+              <a:t>VALIDATION METHODOLOGY</a:t>
+            </a:r>
           </a:p>
         </p:txBody>
       </p:sp>
@@ -24358,6 +24798,384 @@
             <a:fld id="{F7021451-1387-4CA6-816F-3879F97B5CBC}" type="slidenum">
               <a:rPr b="0" lang="en-US"/>
               <a:t>8</a:t>
+            </a:fld>
+            <a:endParaRPr lang="en-US"/>
+          </a:p>
+        </p:txBody>
+      </p:sp>
+    </p:spTree>
+  </p:cSld>
+  <p:clrMapOvr>
+    <a:masterClrMapping/>
+  </p:clrMapOvr>
+  <p:transition spd="fast" advClick="1">
+    <p:fade/>
+  </p:transition>
+</p:sld>
+</file>
+
+<file path=ppt/slides/slide9.xml><?xml version="1.0" encoding="utf-8"?>
+<p:sld xmlns:a="http://schemas.openxmlformats.org/drawingml/2006/main" xmlns:r="http://schemas.openxmlformats.org/officeDocument/2006/relationships" xmlns:p="http://schemas.openxmlformats.org/presentationml/2006/main">
+  <p:cSld name="Slide 12">
+    <p:spTree>
+      <p:nvGrpSpPr>
+        <p:cNvPr id="1" name=""/>
+        <p:cNvGrpSpPr/>
+        <p:nvPr/>
+      </p:nvGrpSpPr>
+      <p:grpSpPr>
+        <a:xfrm>
+          <a:off x="0" y="0"/>
+          <a:ext cx="0" cy="0"/>
+          <a:chOff x="0" y="0"/>
+          <a:chExt cx="0" cy="0"/>
+        </a:xfrm>
+      </p:grpSpPr>
+      <p:sp>
+        <p:nvSpPr>
+          <p:cNvPr id="2" name="Text 0"/>
+          <p:cNvSpPr/>
+          <p:nvPr/>
+        </p:nvSpPr>
+        <p:spPr>
+          <a:xfrm>
+            <a:off x="502920" y="438912"/>
+            <a:ext cx="2743200" cy="201168"/>
+          </a:xfrm>
+          <a:prstGeom prst="rect">
+            <a:avLst/>
+          </a:prstGeom>
+          <a:noFill/>
+          <a:ln/>
+        </p:spPr>
+        <p:txBody>
+          <a:bodyPr wrap="square" lIns="0" tIns="0" rIns="0" bIns="0" rtlCol="0" anchor="ctr"/>
+          <a:lstStyle/>
+          <a:p>
+            <a:pPr indent="0" marL="0">
+              <a:buNone/>
+            </a:pPr>
+            <a:r>
+              <a:rPr lang="en-US" sz="800" b="1" dirty="0">
+                <a:solidFill>
+                  <a:srgbClr val="2F80ED"/>
+                </a:solidFill>
+              </a:rPr>
+              <a:t>REAL NUMBERS</a:t>
+            </a:r>
+            <a:endParaRPr lang="en-US" sz="800" dirty="0"/>
+          </a:p>
+        </p:txBody>
+      </p:sp>
+      <p:sp>
+        <p:nvSpPr>
+          <p:cNvPr id="3" name="Text 1"/>
+          <p:cNvSpPr/>
+          <p:nvPr/>
+        </p:nvSpPr>
+        <p:spPr>
+          <a:xfrm>
+            <a:off x="502920" y="713232"/>
+            <a:ext cx="10972800" cy="530352"/>
+          </a:xfrm>
+          <a:prstGeom prst="rect">
+            <a:avLst/>
+          </a:prstGeom>
+          <a:noFill/>
+          <a:ln/>
+        </p:spPr>
+        <p:txBody>
+          <a:bodyPr wrap="square" lIns="0" tIns="0" rIns="0" bIns="0" rtlCol="0" anchor="ctr">
+            <a:normAutofit/>
+          </a:bodyPr>
+          <a:lstStyle/>
+          <a:p>
+            <a:pPr indent="0" marL="0">
+              <a:buNone/>
+            </a:pPr>
+            <a:r>
+              <a:rPr lang="en-US" sz="2600" b="1" dirty="0">
+                <a:solidFill>
+                  <a:srgbClr val="172033"/>
+                </a:solidFill>
+              </a:rPr>
+              <a:t>Tokens Per Page, Three Real Documents</a:t>
+            </a:r>
+            <a:endParaRPr lang="en-US" sz="2600" dirty="0"/>
+          </a:p>
+        </p:txBody>
+      </p:sp>
+      <p:sp>
+        <p:nvSpPr>
+          <p:cNvPr id="4" name="Text 2"/>
+          <p:cNvSpPr/>
+          <p:nvPr/>
+        </p:nvSpPr>
+        <p:spPr>
+          <a:xfrm>
+            <a:off x="502920" y="1261872"/>
+            <a:ext cx="10789920" cy="329184"/>
+          </a:xfrm>
+          <a:prstGeom prst="rect">
+            <a:avLst/>
+          </a:prstGeom>
+          <a:noFill/>
+          <a:ln/>
+        </p:spPr>
+        <p:txBody>
+          <a:bodyPr wrap="square" lIns="0" tIns="0" rIns="0" bIns="0" rtlCol="0" anchor="ctr">
+            <a:normAutofit/>
+          </a:bodyPr>
+          <a:lstStyle/>
+          <a:p>
+            <a:pPr indent="0" marL="0">
+              <a:buNone/>
+            </a:pPr>
+            <a:r>
+              <a:rPr lang="en-US" sz="1250" dirty="0">
+                <a:solidFill>
+                  <a:srgbClr val="687385"/>
+                </a:solidFill>
+              </a:rPr>
+              <a:t>Content density tells you more than raw document length.</a:t>
+            </a:r>
+            <a:endParaRPr lang="en-US" sz="1250" dirty="0"/>
+          </a:p>
+        </p:txBody>
+      </p:sp>
+      <p:graphicFrame>
+        <p:nvGraphicFramePr>
+          <p:cNvPr id="5" name="Chart 0" descr=""/>
+          <p:cNvGraphicFramePr/>
+          <p:nvPr/>
+        </p:nvGraphicFramePr>
+        <p:xfrm>
+          <a:off x="685800" y="1828800"/>
+          <a:ext cx="6446520" cy="3611880"/>
+        </p:xfrm>
+        <a:graphic xmlns:a="http://schemas.openxmlformats.org/drawingml/2006/main">
+          <a:graphicData uri="http://schemas.openxmlformats.org/drawingml/2006/chart">
+            <c:chart xmlns:c="http://schemas.openxmlformats.org/drawingml/2006/chart" r:id="rId1"/>
+          </a:graphicData>
+        </a:graphic>
+      </p:graphicFrame>
+      <p:sp>
+        <p:nvSpPr>
+          <p:cNvPr id="6" name="Shape 3"/>
+          <p:cNvSpPr/>
+          <p:nvPr/>
+        </p:nvSpPr>
+        <p:spPr>
+          <a:xfrm>
+            <a:off x="7452360" y="1828800"/>
+            <a:ext cx="4069080" cy="3611880"/>
+          </a:xfrm>
+          <a:prstGeom prst="roundRect">
+            <a:avLst>
+              <a:gd name="adj" fmla="val 2025"/>
+            </a:avLst>
+          </a:prstGeom>
+          <a:solidFill>
+            <a:srgbClr val="FFFFFF"/>
+          </a:solidFill>
+          <a:ln w="12700">
+            <a:solidFill>
+              <a:srgbClr val="D8DEE9"/>
+            </a:solidFill>
+            <a:prstDash val="solid"/>
+          </a:ln>
+          <a:effectLst>
+            <a:outerShdw sx="100000" sy="100000" kx="0" ky="0" algn="bl" rotWithShape="0" blurRad="1.209470961743788e+115" dist="8.063139744958588e+114" dir="2.763423996509167e+135">
+              <a:srgbClr val="000000">
+                <a:alpha val="1.3e+139"/>
+              </a:srgbClr>
+            </a:outerShdw>
+          </a:effectLst>
+        </p:spPr>
+        <p:txBody>
+          <a:bodyPr/>
+          <a:p/>
+        </p:txBody>
+      </p:sp>
+      <p:pic>
+        <p:nvPicPr>
+          <p:cNvPr id="7" name="Image 0" descr="/mnt/data/nasa_iss_chart.png">    </p:cNvPr>
+          <p:cNvPicPr>
+            <a:picLocks noChangeAspect="1"/>
+          </p:cNvPicPr>
+          <p:nvPr/>
+        </p:nvPicPr>
+        <p:blipFill>
+          <a:blip r:embed="rId2"/>
+          <a:stretch>
+            <a:fillRect/>
+          </a:stretch>
+        </p:blipFill>
+        <p:spPr>
+          <a:xfrm>
+            <a:off x="7662672" y="2181416"/>
+            <a:ext cx="3639312" cy="2047113"/>
+          </a:xfrm>
+          <a:prstGeom prst="rect">
+            <a:avLst/>
+          </a:prstGeom>
+        </p:spPr>
+      </p:pic>
+      <p:sp>
+        <p:nvSpPr>
+          <p:cNvPr id="8" name="Text 4"/>
+          <p:cNvSpPr/>
+          <p:nvPr/>
+        </p:nvSpPr>
+        <p:spPr>
+          <a:xfrm>
+            <a:off x="7754112" y="4553712"/>
+            <a:ext cx="3474720" cy="182880"/>
+          </a:xfrm>
+          <a:prstGeom prst="rect">
+            <a:avLst/>
+          </a:prstGeom>
+          <a:noFill/>
+          <a:ln/>
+        </p:spPr>
+        <p:txBody>
+          <a:bodyPr wrap="square" lIns="0" tIns="0" rIns="0" bIns="0" rtlCol="0" anchor="ctr"/>
+          <a:lstStyle/>
+          <a:p>
+            <a:pPr algn="ctr" indent="0" marL="0">
+              <a:buNone/>
+            </a:pPr>
+            <a:r>
+              <a:rPr lang="en-US" sz="1050" b="1" dirty="0">
+                <a:solidFill>
+                  <a:srgbClr val="172033"/>
+                </a:solidFill>
+              </a:rPr>
+              <a:t>NASA ISS factsheet visual context</a:t>
+            </a:r>
+            <a:endParaRPr lang="en-US" sz="1050" dirty="0"/>
+          </a:p>
+        </p:txBody>
+      </p:sp>
+      <p:sp>
+        <p:nvSpPr>
+          <p:cNvPr id="9" name="Text 5"/>
+          <p:cNvSpPr/>
+          <p:nvPr/>
+        </p:nvSpPr>
+        <p:spPr>
+          <a:xfrm>
+            <a:off x="7754112" y="4846320"/>
+            <a:ext cx="3474720" cy="438912"/>
+          </a:xfrm>
+          <a:prstGeom prst="rect">
+            <a:avLst/>
+          </a:prstGeom>
+          <a:noFill/>
+          <a:ln/>
+        </p:spPr>
+        <p:txBody>
+          <a:bodyPr wrap="square" lIns="0" tIns="0" rIns="0" bIns="0" rtlCol="0" anchor="ctr">
+            <a:normAutofit/>
+          </a:bodyPr>
+          <a:lstStyle/>
+          <a:p>
+            <a:pPr algn="ctr" indent="0" marL="0">
+              <a:buNone/>
+            </a:pPr>
+            <a:r>
+              <a:rPr lang="en-US" sz="1050" dirty="0">
+                <a:solidFill>
+                  <a:srgbClr val="687385"/>
+                </a:solidFill>
+              </a:rPr>
+              <a:t>Despite 2 pages, this document averaged only 247.5 tokens/page in the measured corpus.</a:t>
+            </a:r>
+            <a:endParaRPr lang="en-US" sz="1050" dirty="0"/>
+          </a:p>
+        </p:txBody>
+      </p:sp>
+      <p:sp>
+        <p:nvSpPr>
+          <p:cNvPr id="10" name="Text 6"/>
+          <p:cNvSpPr/>
+          <p:nvPr/>
+        </p:nvSpPr>
+        <p:spPr>
+          <a:xfrm>
+            <a:off x="502920" y="6473952"/>
+            <a:ext cx="10789920" cy="164592"/>
+          </a:xfrm>
+          <a:prstGeom prst="rect">
+            <a:avLst/>
+          </a:prstGeom>
+          <a:noFill/>
+          <a:ln/>
+        </p:spPr>
+        <p:txBody>
+          <a:bodyPr wrap="square" lIns="0" tIns="0" rIns="0" bIns="0" rtlCol="0" anchor="ctr">
+            <a:normAutofit/>
+          </a:bodyPr>
+          <a:lstStyle/>
+          <a:p>
+            <a:pPr indent="0" marL="0">
+              <a:buNone/>
+            </a:pPr>
+            <a:r>
+              <a:rPr lang="en-US" sz="650" dirty="0">
+                <a:solidFill>
+                  <a:srgbClr val="7A8493"/>
+                </a:solidFill>
+              </a:rPr>
+              <a:t>Data: provided Module 2 deck. Image: NASA Headquarters, “NASA Science Facilities on the International Space Station,” https://svs.gsfc.nasa.gov/30280</a:t>
+            </a:r>
+            <a:endParaRPr lang="en-US" sz="650" dirty="0"/>
+          </a:p>
+        </p:txBody>
+      </p:sp>
+      <p:sp>
+        <p:nvSpPr>
+          <p:cNvPr id="25" name="Slide Number Placeholder 0"/>
+          <p:cNvSpPr>
+            <a:spLocks noGrp="1"/>
+          </p:cNvSpPr>
+          <p:nvPr>
+            <p:ph type="sldNum" sz="quarter" idx="4294967295"/>
+          </p:nvPr>
+        </p:nvSpPr>
+        <p:spPr>
+          <a:xfrm>
+            <a:off x="11612880" y="6510528"/>
+            <a:ext cx="800000" cy="300000"/>
+          </a:xfrm>
+          <a:prstGeom prst="rect">
+            <a:avLst/>
+          </a:prstGeom>
+          <a:extLst>
+            <a:ext uri="{C572A759-6A51-4108-AA02-DFA0A04FC94B}">
+              <ma14:wrappingTextBoxFlag xmlns:ma14="http://schemas.microsoft.com/office/mac/drawingml/2011/main" val="0"/>
+            </a:ext>
+          </a:extLst>
+        </p:spPr>
+        <p:txBody>
+          <a:bodyPr/>
+          <a:lstStyle>
+            <a:lvl1pPr>
+              <a:defRPr sz="650">
+                <a:solidFill>
+                  <a:srgbClr val="9AA4B2"/>
+                </a:solidFill>
+                <a:latin typeface="Aptos"/>
+                <a:ea typeface="Aptos"/>
+                <a:cs typeface="Aptos"/>
+              </a:defRPr>
+            </a:lvl1pPr>
+          </a:lstStyle>
+          <a:p>
+            <a:pPr algn="l"/>
+            <a:fld id="{F7021451-1387-4CA6-816F-3879F97B5CBC}" type="slidenum">
+              <a:rPr b="0" lang="en-US"/>
+              <a:t>12</a:t>
             </a:fld>
             <a:endParaRPr lang="en-US"/>
           </a:p>
